--- a/docs/apresentacoes/04-servicos-odata.pptx
+++ b/docs/apresentacoes/04-servicos-odata.pptx
@@ -116,32 +116,32 @@
   <p:extLst>
     <p:ext uri="{521415D9-36F7-43E2-AB2F-B90AF26B5E84}">
       <p14:sectionLst xmlns:p14="http://schemas.microsoft.com/office/powerpoint/2010/main">
-        <p14:section name="Abertura" id="{351195a5-6648-5092-ee41-0455675ff3f2}">
+        <p14:section name="Abertura" id="{74a3875a-eba9-69d4-bee6-c6ca2a328196}">
           <p14:sldIdLst>
             <p14:sldId id="256"/>
             <p14:sldId id="257"/>
           </p14:sldIdLst>
         </p14:section>
-        <p14:section name="Definição e binding" id="{97475a1d-9326-31dd-4650-f809e0f50e91}">
+        <p14:section name="Definição e binding" id="{547c68f2-4313-d371-e908-a9c58b415765}">
           <p14:sldIdLst>
             <p14:sldId id="258"/>
             <p14:sldId id="259"/>
             <p14:sldId id="260"/>
           </p14:sldIdLst>
         </p14:section>
-        <p14:section name="Segurança" id="{bc9b3f6f-e996-90c7-40de-8994ae02ed78}">
+        <p14:section name="Segurança" id="{e2af5156-622c-b0e0-45f8-57bf68bcb763}">
           <p14:sldIdLst>
             <p14:sldId id="261"/>
             <p14:sldId id="262"/>
           </p14:sldIdLst>
         </p14:section>
-        <p14:section name="Dados e testes" id="{82e29beb-6d08-6e2a-09cd-1c3285fd040b}">
+        <p14:section name="Dados e testes" id="{641f5005-2548-51cd-079d-88229635f8d6}">
           <p14:sldIdLst>
             <p14:sldId id="263"/>
             <p14:sldId id="264"/>
           </p14:sldIdLst>
         </p14:section>
-        <p14:section name="Encerramento" id="{8e9a5595-bfc9-3f68-65a7-dae756eb5cd6}">
+        <p14:section name="Encerramento" id="{c61d9d9b-2932-a14f-bff1-60afc3b021ea}">
           <p14:sldIdLst>
             <p14:sldId id="265"/>
           </p14:sldIdLst>
@@ -5219,7 +5219,7 @@
       </p:sp>
       <p:sp>
         <p:nvSpPr>
-          <p:cNvPr id="5" name="Código"/>
+          <p:cNvPr id="5" name="Editor"/>
           <p:cNvSpPr/>
           <p:nvPr/>
         </p:nvSpPr>
@@ -5234,9 +5234,14 @@
             </a:avLst>
           </a:prstGeom>
           <a:solidFill>
-            <a:srgbClr val="12171C"/>
+            <a:srgbClr val="181818"/>
           </a:solidFill>
-          <a:ln/>
+          <a:ln w="9525">
+            <a:solidFill>
+              <a:srgbClr val="2B2B2B"/>
+            </a:solidFill>
+            <a:prstDash val="solid"/>
+          </a:ln>
           <a:effectLst>
             <a:outerShdw sx="100000" sy="100000" kx="0" ky="0" algn="bl" rotWithShape="0" blurRad="101600" dist="25400" dir="5400000">
               <a:srgbClr val="223548">
@@ -5248,36 +5253,100 @@
       </p:sp>
       <p:sp>
         <p:nvSpPr>
-          <p:cNvPr id="6" name="Text 3"/>
-          <p:cNvSpPr txBox="1"/>
-          <p:nvPr/>
-        </p:nvSpPr>
-        <p:spPr>
-          <a:xfrm>
-            <a:off x="777240" y="1755648"/>
-            <a:ext cx="5394960" cy="256032"/>
+          <p:cNvPr id="6" name="Área do editor"/>
+          <p:cNvSpPr/>
+          <p:nvPr/>
+        </p:nvSpPr>
+        <p:spPr>
+          <a:xfrm>
+            <a:off x="548640" y="1993392"/>
+            <a:ext cx="5852160" cy="4178808"/>
+          </a:xfrm>
+          <a:prstGeom prst="roundRect">
+            <a:avLst>
+              <a:gd name="adj" fmla="val 2188"/>
+            </a:avLst>
+          </a:prstGeom>
+          <a:solidFill>
+            <a:srgbClr val="1F1F1F"/>
+          </a:solidFill>
+          <a:ln/>
+        </p:spPr>
+      </p:sp>
+      <p:sp>
+        <p:nvSpPr>
+          <p:cNvPr id="7" name="Shape 4"/>
+          <p:cNvSpPr/>
+          <p:nvPr/>
+        </p:nvSpPr>
+        <p:spPr>
+          <a:xfrm>
+            <a:off x="557784" y="1993392"/>
+            <a:ext cx="5833872" cy="137160"/>
           </a:xfrm>
           <a:prstGeom prst="rect">
             <a:avLst/>
           </a:prstGeom>
+          <a:solidFill>
+            <a:srgbClr val="1F1F1F"/>
+          </a:solidFill>
+          <a:ln/>
+        </p:spPr>
+      </p:sp>
+      <p:sp>
+        <p:nvSpPr>
+          <p:cNvPr id="8" name="Shape 5"/>
+          <p:cNvSpPr/>
+          <p:nvPr/>
+        </p:nvSpPr>
+        <p:spPr>
+          <a:xfrm>
+            <a:off x="557784" y="1993392"/>
+            <a:ext cx="5833872" cy="0"/>
+          </a:xfrm>
+          <a:prstGeom prst="line">
+            <a:avLst/>
+          </a:prstGeom>
           <a:noFill/>
+          <a:ln w="9525">
+            <a:solidFill>
+              <a:srgbClr val="2B2B2B"/>
+            </a:solidFill>
+            <a:prstDash val="solid"/>
+          </a:ln>
+        </p:spPr>
+      </p:sp>
+      <p:sp>
+        <p:nvSpPr>
+          <p:cNvPr id="9" name="Aba ZUI_PC_PEDIDOS_COMPRAS.srvd.srvdsrv"/>
+          <p:cNvSpPr/>
+          <p:nvPr/>
+        </p:nvSpPr>
+        <p:spPr>
+          <a:xfrm>
+            <a:off x="640080" y="1719072"/>
+            <a:ext cx="2903220" cy="274320"/>
+          </a:xfrm>
+          <a:prstGeom prst="rect">
+            <a:avLst/>
+          </a:prstGeom>
+          <a:solidFill>
+            <a:srgbClr val="1F1F1F"/>
+          </a:solidFill>
           <a:ln/>
         </p:spPr>
         <p:txBody>
           <a:bodyPr wrap="square" lIns="0" tIns="0" rIns="0" bIns="0" rtlCol="0" anchor="ctr"/>
           <a:lstStyle/>
           <a:p>
-            <a:pPr indent="0" marL="0">
+            <a:pPr algn="ctr" indent="0" marL="0">
               <a:buNone/>
             </a:pPr>
             <a:r>
               <a:rPr lang="en-US" sz="1000" dirty="0">
                 <a:solidFill>
-                  <a:srgbClr val="A9B4BE"/>
-                </a:solidFill>
-                <a:latin typeface="Courier New" pitchFamily="34" charset="0"/>
-                <a:ea typeface="Courier New" pitchFamily="34" charset="-122"/>
-                <a:cs typeface="Courier New" pitchFamily="34" charset="-120"/>
+                  <a:srgbClr val="FFFFFF"/>
+                </a:solidFill>
               </a:rPr>
               <a:t>ZUI_PC_PEDIDOS_COMPRAS.srvd.srvdsrv</a:t>
             </a:r>
@@ -5287,22 +5356,22 @@
       </p:sp>
       <p:sp>
         <p:nvSpPr>
-          <p:cNvPr id="7" name="Shape 4"/>
+          <p:cNvPr id="10" name="Shape 7"/>
           <p:cNvSpPr/>
           <p:nvPr/>
         </p:nvSpPr>
         <p:spPr>
           <a:xfrm>
-            <a:off x="777240" y="2066544"/>
-            <a:ext cx="5394960" cy="0"/>
+            <a:off x="640080" y="1719072"/>
+            <a:ext cx="2903220" cy="0"/>
           </a:xfrm>
           <a:prstGeom prst="line">
             <a:avLst/>
           </a:prstGeom>
           <a:noFill/>
-          <a:ln w="12700">
+          <a:ln w="19050">
             <a:solidFill>
-              <a:srgbClr val="2E3A46"/>
+              <a:srgbClr val="0078D4"/>
             </a:solidFill>
             <a:prstDash val="solid"/>
           </a:ln>
@@ -5310,14 +5379,14 @@
       </p:sp>
       <p:sp>
         <p:nvSpPr>
-          <p:cNvPr id="8" name="Trecho de código"/>
+          <p:cNvPr id="11" name="Trecho de código"/>
           <p:cNvSpPr txBox="1"/>
           <p:nvPr/>
         </p:nvSpPr>
         <p:spPr>
           <a:xfrm>
-            <a:off x="777240" y="2157984"/>
-            <a:ext cx="5394960" cy="3904488"/>
+            <a:off x="731520" y="2103120"/>
+            <a:ext cx="5532120" cy="3977640"/>
           </a:xfrm>
           <a:prstGeom prst="rect">
             <a:avLst/>
@@ -5338,7 +5407,24 @@
             <a:r>
               <a:rPr lang="en-US" sz="1100" dirty="0">
                 <a:solidFill>
-                  <a:srgbClr val="F0AB00"/>
+                  <a:srgbClr val="6E7681"/>
+                </a:solidFill>
+                <a:latin typeface="Courier New" pitchFamily="34" charset="0"/>
+                <a:ea typeface="Courier New" pitchFamily="34" charset="-122"/>
+                <a:cs typeface="Courier New" pitchFamily="34" charset="-120"/>
+              </a:rPr>
+              <a:t> 1  </a:t>
+            </a:r>
+            <a:pPr indent="0" marL="0">
+              <a:lnSpc>
+                <a:spcPct val="105000"/>
+              </a:lnSpc>
+              <a:buNone/>
+            </a:pPr>
+            <a:r>
+              <a:rPr lang="en-US" sz="1100" dirty="0">
+                <a:solidFill>
+                  <a:srgbClr val="DCDCAA"/>
                 </a:solidFill>
                 <a:latin typeface="Courier New" pitchFamily="34" charset="0"/>
                 <a:ea typeface="Courier New" pitchFamily="34" charset="-122"/>
@@ -5355,13 +5441,13 @@
             <a:r>
               <a:rPr lang="en-US" sz="1100" dirty="0">
                 <a:solidFill>
-                  <a:srgbClr val="E8ECEF"/>
-                </a:solidFill>
-                <a:latin typeface="Courier New" pitchFamily="34" charset="0"/>
-                <a:ea typeface="Courier New" pitchFamily="34" charset="-122"/>
-                <a:cs typeface="Courier New" pitchFamily="34" charset="-120"/>
-              </a:rPr>
-              <a:t>: </a:t>
+                  <a:srgbClr val="CCCCCC"/>
+                </a:solidFill>
+                <a:latin typeface="Courier New" pitchFamily="34" charset="0"/>
+                <a:ea typeface="Courier New" pitchFamily="34" charset="-122"/>
+                <a:cs typeface="Courier New" pitchFamily="34" charset="-120"/>
+              </a:rPr>
+              <a:t>:</a:t>
             </a:r>
             <a:pPr indent="0" marL="0">
               <a:lnSpc>
@@ -5372,7 +5458,24 @@
             <a:r>
               <a:rPr lang="en-US" sz="1100" dirty="0">
                 <a:solidFill>
-                  <a:srgbClr val="8FD694"/>
+                  <a:srgbClr val="CCCCCC"/>
+                </a:solidFill>
+                <a:latin typeface="Courier New" pitchFamily="34" charset="0"/>
+                <a:ea typeface="Courier New" pitchFamily="34" charset="-122"/>
+                <a:cs typeface="Courier New" pitchFamily="34" charset="-120"/>
+              </a:rPr>
+              <a:t> </a:t>
+            </a:r>
+            <a:pPr indent="0" marL="0">
+              <a:lnSpc>
+                <a:spcPct val="105000"/>
+              </a:lnSpc>
+              <a:buNone/>
+            </a:pPr>
+            <a:r>
+              <a:rPr lang="en-US" sz="1100" dirty="0">
+                <a:solidFill>
+                  <a:srgbClr val="CE9178"/>
                 </a:solidFill>
                 <a:latin typeface="Courier New" pitchFamily="34" charset="0"/>
                 <a:ea typeface="Courier New" pitchFamily="34" charset="-122"/>
@@ -5392,7 +5495,24 @@
             <a:r>
               <a:rPr lang="en-US" sz="1100" dirty="0">
                 <a:solidFill>
-                  <a:srgbClr val="4DB1FF"/>
+                  <a:srgbClr val="6E7681"/>
+                </a:solidFill>
+                <a:latin typeface="Courier New" pitchFamily="34" charset="0"/>
+                <a:ea typeface="Courier New" pitchFamily="34" charset="-122"/>
+                <a:cs typeface="Courier New" pitchFamily="34" charset="-120"/>
+              </a:rPr>
+              <a:t> 2  </a:t>
+            </a:r>
+            <a:pPr indent="0" marL="0">
+              <a:lnSpc>
+                <a:spcPct val="105000"/>
+              </a:lnSpc>
+              <a:buNone/>
+            </a:pPr>
+            <a:r>
+              <a:rPr lang="en-US" sz="1100" dirty="0">
+                <a:solidFill>
+                  <a:srgbClr val="569CD6"/>
                 </a:solidFill>
                 <a:latin typeface="Courier New" pitchFamily="34" charset="0"/>
                 <a:ea typeface="Courier New" pitchFamily="34" charset="-122"/>
@@ -5409,7 +5529,7 @@
             <a:r>
               <a:rPr lang="en-US" sz="1100" dirty="0">
                 <a:solidFill>
-                  <a:srgbClr val="E8ECEF"/>
+                  <a:srgbClr val="CCCCCC"/>
                 </a:solidFill>
                 <a:latin typeface="Courier New" pitchFamily="34" charset="0"/>
                 <a:ea typeface="Courier New" pitchFamily="34" charset="-122"/>
@@ -5426,7 +5546,7 @@
             <a:r>
               <a:rPr lang="en-US" sz="1100" dirty="0">
                 <a:solidFill>
-                  <a:srgbClr val="4DB1FF"/>
+                  <a:srgbClr val="569CD6"/>
                 </a:solidFill>
                 <a:latin typeface="Courier New" pitchFamily="34" charset="0"/>
                 <a:ea typeface="Courier New" pitchFamily="34" charset="-122"/>
@@ -5443,7 +5563,7 @@
             <a:r>
               <a:rPr lang="en-US" sz="1100" dirty="0">
                 <a:solidFill>
-                  <a:srgbClr val="E8ECEF"/>
+                  <a:srgbClr val="CCCCCC"/>
                 </a:solidFill>
                 <a:latin typeface="Courier New" pitchFamily="34" charset="0"/>
                 <a:ea typeface="Courier New" pitchFamily="34" charset="-122"/>
@@ -5460,7 +5580,7 @@
             <a:r>
               <a:rPr lang="en-US" sz="1100" dirty="0">
                 <a:solidFill>
-                  <a:srgbClr val="E8ECEF"/>
+                  <a:srgbClr val="4EC9B0"/>
                 </a:solidFill>
                 <a:latin typeface="Courier New" pitchFamily="34" charset="0"/>
                 <a:ea typeface="Courier New" pitchFamily="34" charset="-122"/>
@@ -5477,13 +5597,30 @@
             <a:r>
               <a:rPr lang="en-US" sz="1100" dirty="0">
                 <a:solidFill>
-                  <a:srgbClr val="E8ECEF"/>
-                </a:solidFill>
-                <a:latin typeface="Courier New" pitchFamily="34" charset="0"/>
-                <a:ea typeface="Courier New" pitchFamily="34" charset="-122"/>
-                <a:cs typeface="Courier New" pitchFamily="34" charset="-120"/>
-              </a:rPr>
-              <a:t> {</a:t>
+                  <a:srgbClr val="CCCCCC"/>
+                </a:solidFill>
+                <a:latin typeface="Courier New" pitchFamily="34" charset="0"/>
+                <a:ea typeface="Courier New" pitchFamily="34" charset="-122"/>
+                <a:cs typeface="Courier New" pitchFamily="34" charset="-120"/>
+              </a:rPr>
+              <a:t> </a:t>
+            </a:r>
+            <a:pPr indent="0" marL="0">
+              <a:lnSpc>
+                <a:spcPct val="105000"/>
+              </a:lnSpc>
+              <a:buNone/>
+            </a:pPr>
+            <a:r>
+              <a:rPr lang="en-US" sz="1100" dirty="0">
+                <a:solidFill>
+                  <a:srgbClr val="CCCCCC"/>
+                </a:solidFill>
+                <a:latin typeface="Courier New" pitchFamily="34" charset="0"/>
+                <a:ea typeface="Courier New" pitchFamily="34" charset="-122"/>
+                <a:cs typeface="Courier New" pitchFamily="34" charset="-120"/>
+              </a:rPr>
+              <a:t>{</a:t>
             </a:r>
             <a:endParaRPr lang="en-US" sz="1100" dirty="0"/>
           </a:p>
@@ -5497,7 +5634,24 @@
             <a:r>
               <a:rPr lang="en-US" sz="1100" dirty="0">
                 <a:solidFill>
-                  <a:srgbClr val="E8ECEF"/>
+                  <a:srgbClr val="6E7681"/>
+                </a:solidFill>
+                <a:latin typeface="Courier New" pitchFamily="34" charset="0"/>
+                <a:ea typeface="Courier New" pitchFamily="34" charset="-122"/>
+                <a:cs typeface="Courier New" pitchFamily="34" charset="-120"/>
+              </a:rPr>
+              <a:t> 3  </a:t>
+            </a:r>
+            <a:pPr indent="0" marL="0">
+              <a:lnSpc>
+                <a:spcPct val="105000"/>
+              </a:lnSpc>
+              <a:buNone/>
+            </a:pPr>
+            <a:r>
+              <a:rPr lang="en-US" sz="1100" dirty="0">
+                <a:solidFill>
+                  <a:srgbClr val="CCCCCC"/>
                 </a:solidFill>
                 <a:latin typeface="Courier New" pitchFamily="34" charset="0"/>
                 <a:ea typeface="Courier New" pitchFamily="34" charset="-122"/>
@@ -5514,7 +5668,7 @@
             <a:r>
               <a:rPr lang="en-US" sz="1100" dirty="0">
                 <a:solidFill>
-                  <a:srgbClr val="4DB1FF"/>
+                  <a:srgbClr val="569CD6"/>
                 </a:solidFill>
                 <a:latin typeface="Courier New" pitchFamily="34" charset="0"/>
                 <a:ea typeface="Courier New" pitchFamily="34" charset="-122"/>
@@ -5531,7 +5685,7 @@
             <a:r>
               <a:rPr lang="en-US" sz="1100" dirty="0">
                 <a:solidFill>
-                  <a:srgbClr val="E8ECEF"/>
+                  <a:srgbClr val="CCCCCC"/>
                 </a:solidFill>
                 <a:latin typeface="Courier New" pitchFamily="34" charset="0"/>
                 <a:ea typeface="Courier New" pitchFamily="34" charset="-122"/>
@@ -5548,7 +5702,7 @@
             <a:r>
               <a:rPr lang="en-US" sz="1100" dirty="0">
                 <a:solidFill>
-                  <a:srgbClr val="E8ECEF"/>
+                  <a:srgbClr val="4EC9B0"/>
                 </a:solidFill>
                 <a:latin typeface="Courier New" pitchFamily="34" charset="0"/>
                 <a:ea typeface="Courier New" pitchFamily="34" charset="-122"/>
@@ -5565,7 +5719,7 @@
             <a:r>
               <a:rPr lang="en-US" sz="1100" dirty="0">
                 <a:solidFill>
-                  <a:srgbClr val="E8ECEF"/>
+                  <a:srgbClr val="CCCCCC"/>
                 </a:solidFill>
                 <a:latin typeface="Courier New" pitchFamily="34" charset="0"/>
                 <a:ea typeface="Courier New" pitchFamily="34" charset="-122"/>
@@ -5582,7 +5736,7 @@
             <a:r>
               <a:rPr lang="en-US" sz="1100" dirty="0">
                 <a:solidFill>
-                  <a:srgbClr val="4DB1FF"/>
+                  <a:srgbClr val="569CD6"/>
                 </a:solidFill>
                 <a:latin typeface="Courier New" pitchFamily="34" charset="0"/>
                 <a:ea typeface="Courier New" pitchFamily="34" charset="-122"/>
@@ -5599,7 +5753,7 @@
             <a:r>
               <a:rPr lang="en-US" sz="1100" dirty="0">
                 <a:solidFill>
-                  <a:srgbClr val="E8ECEF"/>
+                  <a:srgbClr val="CCCCCC"/>
                 </a:solidFill>
                 <a:latin typeface="Courier New" pitchFamily="34" charset="0"/>
                 <a:ea typeface="Courier New" pitchFamily="34" charset="-122"/>
@@ -5616,7 +5770,7 @@
             <a:r>
               <a:rPr lang="en-US" sz="1100" dirty="0">
                 <a:solidFill>
-                  <a:srgbClr val="E8ECEF"/>
+                  <a:srgbClr val="CCCCCC"/>
                 </a:solidFill>
                 <a:latin typeface="Courier New" pitchFamily="34" charset="0"/>
                 <a:ea typeface="Courier New" pitchFamily="34" charset="-122"/>
@@ -5633,7 +5787,7 @@
             <a:r>
               <a:rPr lang="en-US" sz="1100" dirty="0">
                 <a:solidFill>
-                  <a:srgbClr val="E8ECEF"/>
+                  <a:srgbClr val="CCCCCC"/>
                 </a:solidFill>
                 <a:latin typeface="Courier New" pitchFamily="34" charset="0"/>
                 <a:ea typeface="Courier New" pitchFamily="34" charset="-122"/>
@@ -5653,7 +5807,24 @@
             <a:r>
               <a:rPr lang="en-US" sz="1100" dirty="0">
                 <a:solidFill>
-                  <a:srgbClr val="E8ECEF"/>
+                  <a:srgbClr val="6E7681"/>
+                </a:solidFill>
+                <a:latin typeface="Courier New" pitchFamily="34" charset="0"/>
+                <a:ea typeface="Courier New" pitchFamily="34" charset="-122"/>
+                <a:cs typeface="Courier New" pitchFamily="34" charset="-120"/>
+              </a:rPr>
+              <a:t> 4  </a:t>
+            </a:r>
+            <a:pPr indent="0" marL="0">
+              <a:lnSpc>
+                <a:spcPct val="105000"/>
+              </a:lnSpc>
+              <a:buNone/>
+            </a:pPr>
+            <a:r>
+              <a:rPr lang="en-US" sz="1100" dirty="0">
+                <a:solidFill>
+                  <a:srgbClr val="CCCCCC"/>
                 </a:solidFill>
                 <a:latin typeface="Courier New" pitchFamily="34" charset="0"/>
                 <a:ea typeface="Courier New" pitchFamily="34" charset="-122"/>
@@ -5670,7 +5841,7 @@
             <a:r>
               <a:rPr lang="en-US" sz="1100" dirty="0">
                 <a:solidFill>
-                  <a:srgbClr val="4DB1FF"/>
+                  <a:srgbClr val="569CD6"/>
                 </a:solidFill>
                 <a:latin typeface="Courier New" pitchFamily="34" charset="0"/>
                 <a:ea typeface="Courier New" pitchFamily="34" charset="-122"/>
@@ -5687,7 +5858,7 @@
             <a:r>
               <a:rPr lang="en-US" sz="1100" dirty="0">
                 <a:solidFill>
-                  <a:srgbClr val="E8ECEF"/>
+                  <a:srgbClr val="CCCCCC"/>
                 </a:solidFill>
                 <a:latin typeface="Courier New" pitchFamily="34" charset="0"/>
                 <a:ea typeface="Courier New" pitchFamily="34" charset="-122"/>
@@ -5704,7 +5875,7 @@
             <a:r>
               <a:rPr lang="en-US" sz="1100" dirty="0">
                 <a:solidFill>
-                  <a:srgbClr val="E8ECEF"/>
+                  <a:srgbClr val="4EC9B0"/>
                 </a:solidFill>
                 <a:latin typeface="Courier New" pitchFamily="34" charset="0"/>
                 <a:ea typeface="Courier New" pitchFamily="34" charset="-122"/>
@@ -5721,7 +5892,7 @@
             <a:r>
               <a:rPr lang="en-US" sz="1100" dirty="0">
                 <a:solidFill>
-                  <a:srgbClr val="E8ECEF"/>
+                  <a:srgbClr val="CCCCCC"/>
                 </a:solidFill>
                 <a:latin typeface="Courier New" pitchFamily="34" charset="0"/>
                 <a:ea typeface="Courier New" pitchFamily="34" charset="-122"/>
@@ -5738,7 +5909,7 @@
             <a:r>
               <a:rPr lang="en-US" sz="1100" dirty="0">
                 <a:solidFill>
-                  <a:srgbClr val="4DB1FF"/>
+                  <a:srgbClr val="569CD6"/>
                 </a:solidFill>
                 <a:latin typeface="Courier New" pitchFamily="34" charset="0"/>
                 <a:ea typeface="Courier New" pitchFamily="34" charset="-122"/>
@@ -5755,7 +5926,7 @@
             <a:r>
               <a:rPr lang="en-US" sz="1100" dirty="0">
                 <a:solidFill>
-                  <a:srgbClr val="E8ECEF"/>
+                  <a:srgbClr val="CCCCCC"/>
                 </a:solidFill>
                 <a:latin typeface="Courier New" pitchFamily="34" charset="0"/>
                 <a:ea typeface="Courier New" pitchFamily="34" charset="-122"/>
@@ -5772,7 +5943,7 @@
             <a:r>
               <a:rPr lang="en-US" sz="1100" dirty="0">
                 <a:solidFill>
-                  <a:srgbClr val="E8ECEF"/>
+                  <a:srgbClr val="CCCCCC"/>
                 </a:solidFill>
                 <a:latin typeface="Courier New" pitchFamily="34" charset="0"/>
                 <a:ea typeface="Courier New" pitchFamily="34" charset="-122"/>
@@ -5789,7 +5960,7 @@
             <a:r>
               <a:rPr lang="en-US" sz="1100" dirty="0">
                 <a:solidFill>
-                  <a:srgbClr val="E8ECEF"/>
+                  <a:srgbClr val="CCCCCC"/>
                 </a:solidFill>
                 <a:latin typeface="Courier New" pitchFamily="34" charset="0"/>
                 <a:ea typeface="Courier New" pitchFamily="34" charset="-122"/>
@@ -5809,7 +5980,24 @@
             <a:r>
               <a:rPr lang="en-US" sz="1100" dirty="0">
                 <a:solidFill>
-                  <a:srgbClr val="E8ECEF"/>
+                  <a:srgbClr val="6E7681"/>
+                </a:solidFill>
+                <a:latin typeface="Courier New" pitchFamily="34" charset="0"/>
+                <a:ea typeface="Courier New" pitchFamily="34" charset="-122"/>
+                <a:cs typeface="Courier New" pitchFamily="34" charset="-120"/>
+              </a:rPr>
+              <a:t> 5  </a:t>
+            </a:r>
+            <a:pPr indent="0" marL="0">
+              <a:lnSpc>
+                <a:spcPct val="105000"/>
+              </a:lnSpc>
+              <a:buNone/>
+            </a:pPr>
+            <a:r>
+              <a:rPr lang="en-US" sz="1100" dirty="0">
+                <a:solidFill>
+                  <a:srgbClr val="CCCCCC"/>
                 </a:solidFill>
                 <a:latin typeface="Courier New" pitchFamily="34" charset="0"/>
                 <a:ea typeface="Courier New" pitchFamily="34" charset="-122"/>
@@ -5826,7 +6014,7 @@
             <a:r>
               <a:rPr lang="en-US" sz="1100" dirty="0">
                 <a:solidFill>
-                  <a:srgbClr val="4DB1FF"/>
+                  <a:srgbClr val="569CD6"/>
                 </a:solidFill>
                 <a:latin typeface="Courier New" pitchFamily="34" charset="0"/>
                 <a:ea typeface="Courier New" pitchFamily="34" charset="-122"/>
@@ -5843,7 +6031,7 @@
             <a:r>
               <a:rPr lang="en-US" sz="1100" dirty="0">
                 <a:solidFill>
-                  <a:srgbClr val="E8ECEF"/>
+                  <a:srgbClr val="CCCCCC"/>
                 </a:solidFill>
                 <a:latin typeface="Courier New" pitchFamily="34" charset="0"/>
                 <a:ea typeface="Courier New" pitchFamily="34" charset="-122"/>
@@ -5860,7 +6048,7 @@
             <a:r>
               <a:rPr lang="en-US" sz="1100" dirty="0">
                 <a:solidFill>
-                  <a:srgbClr val="E8ECEF"/>
+                  <a:srgbClr val="4EC9B0"/>
                 </a:solidFill>
                 <a:latin typeface="Courier New" pitchFamily="34" charset="0"/>
                 <a:ea typeface="Courier New" pitchFamily="34" charset="-122"/>
@@ -5877,7 +6065,7 @@
             <a:r>
               <a:rPr lang="en-US" sz="1100" dirty="0">
                 <a:solidFill>
-                  <a:srgbClr val="E8ECEF"/>
+                  <a:srgbClr val="CCCCCC"/>
                 </a:solidFill>
                 <a:latin typeface="Courier New" pitchFamily="34" charset="0"/>
                 <a:ea typeface="Courier New" pitchFamily="34" charset="-122"/>
@@ -5894,7 +6082,7 @@
             <a:r>
               <a:rPr lang="en-US" sz="1100" dirty="0">
                 <a:solidFill>
-                  <a:srgbClr val="4DB1FF"/>
+                  <a:srgbClr val="569CD6"/>
                 </a:solidFill>
                 <a:latin typeface="Courier New" pitchFamily="34" charset="0"/>
                 <a:ea typeface="Courier New" pitchFamily="34" charset="-122"/>
@@ -5911,7 +6099,7 @@
             <a:r>
               <a:rPr lang="en-US" sz="1100" dirty="0">
                 <a:solidFill>
-                  <a:srgbClr val="E8ECEF"/>
+                  <a:srgbClr val="CCCCCC"/>
                 </a:solidFill>
                 <a:latin typeface="Courier New" pitchFamily="34" charset="0"/>
                 <a:ea typeface="Courier New" pitchFamily="34" charset="-122"/>
@@ -5928,7 +6116,7 @@
             <a:r>
               <a:rPr lang="en-US" sz="1100" dirty="0">
                 <a:solidFill>
-                  <a:srgbClr val="E8ECEF"/>
+                  <a:srgbClr val="CCCCCC"/>
                 </a:solidFill>
                 <a:latin typeface="Courier New" pitchFamily="34" charset="0"/>
                 <a:ea typeface="Courier New" pitchFamily="34" charset="-122"/>
@@ -5945,7 +6133,7 @@
             <a:r>
               <a:rPr lang="en-US" sz="1100" dirty="0">
                 <a:solidFill>
-                  <a:srgbClr val="E8ECEF"/>
+                  <a:srgbClr val="CCCCCC"/>
                 </a:solidFill>
                 <a:latin typeface="Courier New" pitchFamily="34" charset="0"/>
                 <a:ea typeface="Courier New" pitchFamily="34" charset="-122"/>
@@ -5965,7 +6153,24 @@
             <a:r>
               <a:rPr lang="en-US" sz="1100" dirty="0">
                 <a:solidFill>
-                  <a:srgbClr val="E8ECEF"/>
+                  <a:srgbClr val="6E7681"/>
+                </a:solidFill>
+                <a:latin typeface="Courier New" pitchFamily="34" charset="0"/>
+                <a:ea typeface="Courier New" pitchFamily="34" charset="-122"/>
+                <a:cs typeface="Courier New" pitchFamily="34" charset="-120"/>
+              </a:rPr>
+              <a:t> 6  </a:t>
+            </a:r>
+            <a:pPr indent="0" marL="0">
+              <a:lnSpc>
+                <a:spcPct val="105000"/>
+              </a:lnSpc>
+              <a:buNone/>
+            </a:pPr>
+            <a:r>
+              <a:rPr lang="en-US" sz="1100" dirty="0">
+                <a:solidFill>
+                  <a:srgbClr val="CCCCCC"/>
                 </a:solidFill>
                 <a:latin typeface="Courier New" pitchFamily="34" charset="0"/>
                 <a:ea typeface="Courier New" pitchFamily="34" charset="-122"/>
@@ -5982,7 +6187,7 @@
             <a:r>
               <a:rPr lang="en-US" sz="1100" dirty="0">
                 <a:solidFill>
-                  <a:srgbClr val="4DB1FF"/>
+                  <a:srgbClr val="569CD6"/>
                 </a:solidFill>
                 <a:latin typeface="Courier New" pitchFamily="34" charset="0"/>
                 <a:ea typeface="Courier New" pitchFamily="34" charset="-122"/>
@@ -5999,7 +6204,7 @@
             <a:r>
               <a:rPr lang="en-US" sz="1100" dirty="0">
                 <a:solidFill>
-                  <a:srgbClr val="E8ECEF"/>
+                  <a:srgbClr val="CCCCCC"/>
                 </a:solidFill>
                 <a:latin typeface="Courier New" pitchFamily="34" charset="0"/>
                 <a:ea typeface="Courier New" pitchFamily="34" charset="-122"/>
@@ -6016,7 +6221,7 @@
             <a:r>
               <a:rPr lang="en-US" sz="1100" dirty="0">
                 <a:solidFill>
-                  <a:srgbClr val="E8ECEF"/>
+                  <a:srgbClr val="4EC9B0"/>
                 </a:solidFill>
                 <a:latin typeface="Courier New" pitchFamily="34" charset="0"/>
                 <a:ea typeface="Courier New" pitchFamily="34" charset="-122"/>
@@ -6033,7 +6238,7 @@
             <a:r>
               <a:rPr lang="en-US" sz="1100" dirty="0">
                 <a:solidFill>
-                  <a:srgbClr val="E8ECEF"/>
+                  <a:srgbClr val="CCCCCC"/>
                 </a:solidFill>
                 <a:latin typeface="Courier New" pitchFamily="34" charset="0"/>
                 <a:ea typeface="Courier New" pitchFamily="34" charset="-122"/>
@@ -6050,7 +6255,7 @@
             <a:r>
               <a:rPr lang="en-US" sz="1100" dirty="0">
                 <a:solidFill>
-                  <a:srgbClr val="4DB1FF"/>
+                  <a:srgbClr val="569CD6"/>
                 </a:solidFill>
                 <a:latin typeface="Courier New" pitchFamily="34" charset="0"/>
                 <a:ea typeface="Courier New" pitchFamily="34" charset="-122"/>
@@ -6067,7 +6272,7 @@
             <a:r>
               <a:rPr lang="en-US" sz="1100" dirty="0">
                 <a:solidFill>
-                  <a:srgbClr val="E8ECEF"/>
+                  <a:srgbClr val="CCCCCC"/>
                 </a:solidFill>
                 <a:latin typeface="Courier New" pitchFamily="34" charset="0"/>
                 <a:ea typeface="Courier New" pitchFamily="34" charset="-122"/>
@@ -6084,7 +6289,7 @@
             <a:r>
               <a:rPr lang="en-US" sz="1100" dirty="0">
                 <a:solidFill>
-                  <a:srgbClr val="E8ECEF"/>
+                  <a:srgbClr val="CCCCCC"/>
                 </a:solidFill>
                 <a:latin typeface="Courier New" pitchFamily="34" charset="0"/>
                 <a:ea typeface="Courier New" pitchFamily="34" charset="-122"/>
@@ -6101,7 +6306,7 @@
             <a:r>
               <a:rPr lang="en-US" sz="1100" dirty="0">
                 <a:solidFill>
-                  <a:srgbClr val="E8ECEF"/>
+                  <a:srgbClr val="CCCCCC"/>
                 </a:solidFill>
                 <a:latin typeface="Courier New" pitchFamily="34" charset="0"/>
                 <a:ea typeface="Courier New" pitchFamily="34" charset="-122"/>
@@ -6121,7 +6326,24 @@
             <a:r>
               <a:rPr lang="en-US" sz="1100" dirty="0">
                 <a:solidFill>
-                  <a:srgbClr val="E8ECEF"/>
+                  <a:srgbClr val="6E7681"/>
+                </a:solidFill>
+                <a:latin typeface="Courier New" pitchFamily="34" charset="0"/>
+                <a:ea typeface="Courier New" pitchFamily="34" charset="-122"/>
+                <a:cs typeface="Courier New" pitchFamily="34" charset="-120"/>
+              </a:rPr>
+              <a:t> 7  </a:t>
+            </a:r>
+            <a:pPr indent="0" marL="0">
+              <a:lnSpc>
+                <a:spcPct val="105000"/>
+              </a:lnSpc>
+              <a:buNone/>
+            </a:pPr>
+            <a:r>
+              <a:rPr lang="en-US" sz="1100" dirty="0">
+                <a:solidFill>
+                  <a:srgbClr val="CCCCCC"/>
                 </a:solidFill>
                 <a:latin typeface="Courier New" pitchFamily="34" charset="0"/>
                 <a:ea typeface="Courier New" pitchFamily="34" charset="-122"/>
@@ -6138,7 +6360,7 @@
             <a:r>
               <a:rPr lang="en-US" sz="1100" dirty="0">
                 <a:solidFill>
-                  <a:srgbClr val="4DB1FF"/>
+                  <a:srgbClr val="569CD6"/>
                 </a:solidFill>
                 <a:latin typeface="Courier New" pitchFamily="34" charset="0"/>
                 <a:ea typeface="Courier New" pitchFamily="34" charset="-122"/>
@@ -6155,7 +6377,7 @@
             <a:r>
               <a:rPr lang="en-US" sz="1100" dirty="0">
                 <a:solidFill>
-                  <a:srgbClr val="E8ECEF"/>
+                  <a:srgbClr val="CCCCCC"/>
                 </a:solidFill>
                 <a:latin typeface="Courier New" pitchFamily="34" charset="0"/>
                 <a:ea typeface="Courier New" pitchFamily="34" charset="-122"/>
@@ -6172,7 +6394,7 @@
             <a:r>
               <a:rPr lang="en-US" sz="1100" dirty="0">
                 <a:solidFill>
-                  <a:srgbClr val="E8ECEF"/>
+                  <a:srgbClr val="4EC9B0"/>
                 </a:solidFill>
                 <a:latin typeface="Courier New" pitchFamily="34" charset="0"/>
                 <a:ea typeface="Courier New" pitchFamily="34" charset="-122"/>
@@ -6189,7 +6411,7 @@
             <a:r>
               <a:rPr lang="en-US" sz="1100" dirty="0">
                 <a:solidFill>
-                  <a:srgbClr val="E8ECEF"/>
+                  <a:srgbClr val="CCCCCC"/>
                 </a:solidFill>
                 <a:latin typeface="Courier New" pitchFamily="34" charset="0"/>
                 <a:ea typeface="Courier New" pitchFamily="34" charset="-122"/>
@@ -6206,7 +6428,7 @@
             <a:r>
               <a:rPr lang="en-US" sz="1100" dirty="0">
                 <a:solidFill>
-                  <a:srgbClr val="4DB1FF"/>
+                  <a:srgbClr val="569CD6"/>
                 </a:solidFill>
                 <a:latin typeface="Courier New" pitchFamily="34" charset="0"/>
                 <a:ea typeface="Courier New" pitchFamily="34" charset="-122"/>
@@ -6223,7 +6445,7 @@
             <a:r>
               <a:rPr lang="en-US" sz="1100" dirty="0">
                 <a:solidFill>
-                  <a:srgbClr val="E8ECEF"/>
+                  <a:srgbClr val="CCCCCC"/>
                 </a:solidFill>
                 <a:latin typeface="Courier New" pitchFamily="34" charset="0"/>
                 <a:ea typeface="Courier New" pitchFamily="34" charset="-122"/>
@@ -6240,7 +6462,7 @@
             <a:r>
               <a:rPr lang="en-US" sz="1100" dirty="0">
                 <a:solidFill>
-                  <a:srgbClr val="E8ECEF"/>
+                  <a:srgbClr val="CCCCCC"/>
                 </a:solidFill>
                 <a:latin typeface="Courier New" pitchFamily="34" charset="0"/>
                 <a:ea typeface="Courier New" pitchFamily="34" charset="-122"/>
@@ -6257,7 +6479,7 @@
             <a:r>
               <a:rPr lang="en-US" sz="1100" dirty="0">
                 <a:solidFill>
-                  <a:srgbClr val="E8ECEF"/>
+                  <a:srgbClr val="CCCCCC"/>
                 </a:solidFill>
                 <a:latin typeface="Courier New" pitchFamily="34" charset="0"/>
                 <a:ea typeface="Courier New" pitchFamily="34" charset="-122"/>
@@ -6277,7 +6499,78 @@
             <a:r>
               <a:rPr lang="en-US" sz="1100" dirty="0">
                 <a:solidFill>
-                  <a:srgbClr val="E8ECEF"/>
+                  <a:srgbClr val="6E7681"/>
+                </a:solidFill>
+                <a:latin typeface="Courier New" pitchFamily="34" charset="0"/>
+                <a:ea typeface="Courier New" pitchFamily="34" charset="-122"/>
+                <a:cs typeface="Courier New" pitchFamily="34" charset="-120"/>
+              </a:rPr>
+              <a:t> 8  </a:t>
+            </a:r>
+            <a:endParaRPr lang="en-US" sz="1100" dirty="0"/>
+          </a:p>
+          <a:p>
+            <a:pPr indent="0" marL="0">
+              <a:lnSpc>
+                <a:spcPct val="105000"/>
+              </a:lnSpc>
+              <a:buNone/>
+            </a:pPr>
+            <a:r>
+              <a:rPr lang="en-US" sz="1100" dirty="0">
+                <a:solidFill>
+                  <a:srgbClr val="6E7681"/>
+                </a:solidFill>
+                <a:latin typeface="Courier New" pitchFamily="34" charset="0"/>
+                <a:ea typeface="Courier New" pitchFamily="34" charset="-122"/>
+                <a:cs typeface="Courier New" pitchFamily="34" charset="-120"/>
+              </a:rPr>
+              <a:t> 9  </a:t>
+            </a:r>
+            <a:pPr indent="0" marL="0">
+              <a:lnSpc>
+                <a:spcPct val="105000"/>
+              </a:lnSpc>
+              <a:buNone/>
+            </a:pPr>
+            <a:r>
+              <a:rPr lang="en-US" sz="1100" dirty="0">
+                <a:solidFill>
+                  <a:srgbClr val="CCCCCC"/>
+                </a:solidFill>
+                <a:latin typeface="Courier New" pitchFamily="34" charset="0"/>
+                <a:ea typeface="Courier New" pitchFamily="34" charset="-122"/>
+                <a:cs typeface="Courier New" pitchFamily="34" charset="-120"/>
+              </a:rPr>
+              <a:t>  </a:t>
+            </a:r>
+            <a:pPr indent="0" marL="0">
+              <a:lnSpc>
+                <a:spcPct val="105000"/>
+              </a:lnSpc>
+              <a:buNone/>
+            </a:pPr>
+            <a:r>
+              <a:rPr lang="en-US" sz="1100" dirty="0">
+                <a:solidFill>
+                  <a:srgbClr val="569CD6"/>
+                </a:solidFill>
+                <a:latin typeface="Courier New" pitchFamily="34" charset="0"/>
+                <a:ea typeface="Courier New" pitchFamily="34" charset="-122"/>
+                <a:cs typeface="Courier New" pitchFamily="34" charset="-120"/>
+              </a:rPr>
+              <a:t>expose</a:t>
+            </a:r>
+            <a:pPr indent="0" marL="0">
+              <a:lnSpc>
+                <a:spcPct val="105000"/>
+              </a:lnSpc>
+              <a:buNone/>
+            </a:pPr>
+            <a:r>
+              <a:rPr lang="en-US" sz="1100" dirty="0">
+                <a:solidFill>
+                  <a:srgbClr val="CCCCCC"/>
                 </a:solidFill>
                 <a:latin typeface="Courier New" pitchFamily="34" charset="0"/>
                 <a:ea typeface="Courier New" pitchFamily="34" charset="-122"/>
@@ -6285,6 +6578,108 @@
               </a:rPr>
               <a:t> </a:t>
             </a:r>
+            <a:pPr indent="0" marL="0">
+              <a:lnSpc>
+                <a:spcPct val="105000"/>
+              </a:lnSpc>
+              <a:buNone/>
+            </a:pPr>
+            <a:r>
+              <a:rPr lang="en-US" sz="1100" dirty="0">
+                <a:solidFill>
+                  <a:srgbClr val="4EC9B0"/>
+                </a:solidFill>
+                <a:latin typeface="Courier New" pitchFamily="34" charset="0"/>
+                <a:ea typeface="Courier New" pitchFamily="34" charset="-122"/>
+                <a:cs typeface="Courier New" pitchFamily="34" charset="-120"/>
+              </a:rPr>
+              <a:t>ZC_PC_CLIENTE_VH</a:t>
+            </a:r>
+            <a:pPr indent="0" marL="0">
+              <a:lnSpc>
+                <a:spcPct val="105000"/>
+              </a:lnSpc>
+              <a:buNone/>
+            </a:pPr>
+            <a:r>
+              <a:rPr lang="en-US" sz="1100" dirty="0">
+                <a:solidFill>
+                  <a:srgbClr val="CCCCCC"/>
+                </a:solidFill>
+                <a:latin typeface="Courier New" pitchFamily="34" charset="0"/>
+                <a:ea typeface="Courier New" pitchFamily="34" charset="-122"/>
+                <a:cs typeface="Courier New" pitchFamily="34" charset="-120"/>
+              </a:rPr>
+              <a:t>   </a:t>
+            </a:r>
+            <a:pPr indent="0" marL="0">
+              <a:lnSpc>
+                <a:spcPct val="105000"/>
+              </a:lnSpc>
+              <a:buNone/>
+            </a:pPr>
+            <a:r>
+              <a:rPr lang="en-US" sz="1100" dirty="0">
+                <a:solidFill>
+                  <a:srgbClr val="569CD6"/>
+                </a:solidFill>
+                <a:latin typeface="Courier New" pitchFamily="34" charset="0"/>
+                <a:ea typeface="Courier New" pitchFamily="34" charset="-122"/>
+                <a:cs typeface="Courier New" pitchFamily="34" charset="-120"/>
+              </a:rPr>
+              <a:t>as</a:t>
+            </a:r>
+            <a:pPr indent="0" marL="0">
+              <a:lnSpc>
+                <a:spcPct val="105000"/>
+              </a:lnSpc>
+              <a:buNone/>
+            </a:pPr>
+            <a:r>
+              <a:rPr lang="en-US" sz="1100" dirty="0">
+                <a:solidFill>
+                  <a:srgbClr val="CCCCCC"/>
+                </a:solidFill>
+                <a:latin typeface="Courier New" pitchFamily="34" charset="0"/>
+                <a:ea typeface="Courier New" pitchFamily="34" charset="-122"/>
+                <a:cs typeface="Courier New" pitchFamily="34" charset="-120"/>
+              </a:rPr>
+              <a:t> </a:t>
+            </a:r>
+            <a:pPr indent="0" marL="0">
+              <a:lnSpc>
+                <a:spcPct val="105000"/>
+              </a:lnSpc>
+              <a:buNone/>
+            </a:pPr>
+            <a:r>
+              <a:rPr lang="en-US" sz="1100" dirty="0">
+                <a:solidFill>
+                  <a:srgbClr val="CCCCCC"/>
+                </a:solidFill>
+                <a:latin typeface="Courier New" pitchFamily="34" charset="0"/>
+                <a:ea typeface="Courier New" pitchFamily="34" charset="-122"/>
+                <a:cs typeface="Courier New" pitchFamily="34" charset="-120"/>
+              </a:rPr>
+              <a:t>ClienteVH</a:t>
+            </a:r>
+            <a:pPr indent="0" marL="0">
+              <a:lnSpc>
+                <a:spcPct val="105000"/>
+              </a:lnSpc>
+              <a:buNone/>
+            </a:pPr>
+            <a:r>
+              <a:rPr lang="en-US" sz="1100" dirty="0">
+                <a:solidFill>
+                  <a:srgbClr val="CCCCCC"/>
+                </a:solidFill>
+                <a:latin typeface="Courier New" pitchFamily="34" charset="0"/>
+                <a:ea typeface="Courier New" pitchFamily="34" charset="-122"/>
+                <a:cs typeface="Courier New" pitchFamily="34" charset="-120"/>
+              </a:rPr>
+              <a:t>;</a:t>
+            </a:r>
             <a:endParaRPr lang="en-US" sz="1100" dirty="0"/>
           </a:p>
           <a:p>
@@ -6297,7 +6692,24 @@
             <a:r>
               <a:rPr lang="en-US" sz="1100" dirty="0">
                 <a:solidFill>
-                  <a:srgbClr val="E8ECEF"/>
+                  <a:srgbClr val="6E7681"/>
+                </a:solidFill>
+                <a:latin typeface="Courier New" pitchFamily="34" charset="0"/>
+                <a:ea typeface="Courier New" pitchFamily="34" charset="-122"/>
+                <a:cs typeface="Courier New" pitchFamily="34" charset="-120"/>
+              </a:rPr>
+              <a:t>10  </a:t>
+            </a:r>
+            <a:pPr indent="0" marL="0">
+              <a:lnSpc>
+                <a:spcPct val="105000"/>
+              </a:lnSpc>
+              <a:buNone/>
+            </a:pPr>
+            <a:r>
+              <a:rPr lang="en-US" sz="1100" dirty="0">
+                <a:solidFill>
+                  <a:srgbClr val="CCCCCC"/>
                 </a:solidFill>
                 <a:latin typeface="Courier New" pitchFamily="34" charset="0"/>
                 <a:ea typeface="Courier New" pitchFamily="34" charset="-122"/>
@@ -6314,7 +6726,7 @@
             <a:r>
               <a:rPr lang="en-US" sz="1100" dirty="0">
                 <a:solidFill>
-                  <a:srgbClr val="4DB1FF"/>
+                  <a:srgbClr val="569CD6"/>
                 </a:solidFill>
                 <a:latin typeface="Courier New" pitchFamily="34" charset="0"/>
                 <a:ea typeface="Courier New" pitchFamily="34" charset="-122"/>
@@ -6331,7 +6743,7 @@
             <a:r>
               <a:rPr lang="en-US" sz="1100" dirty="0">
                 <a:solidFill>
-                  <a:srgbClr val="E8ECEF"/>
+                  <a:srgbClr val="CCCCCC"/>
                 </a:solidFill>
                 <a:latin typeface="Courier New" pitchFamily="34" charset="0"/>
                 <a:ea typeface="Courier New" pitchFamily="34" charset="-122"/>
@@ -6348,13 +6760,13 @@
             <a:r>
               <a:rPr lang="en-US" sz="1100" dirty="0">
                 <a:solidFill>
-                  <a:srgbClr val="E8ECEF"/>
-                </a:solidFill>
-                <a:latin typeface="Courier New" pitchFamily="34" charset="0"/>
-                <a:ea typeface="Courier New" pitchFamily="34" charset="-122"/>
-                <a:cs typeface="Courier New" pitchFamily="34" charset="-120"/>
-              </a:rPr>
-              <a:t>ZC_PC_CLIENTE_VH</a:t>
+                  <a:srgbClr val="4EC9B0"/>
+                </a:solidFill>
+                <a:latin typeface="Courier New" pitchFamily="34" charset="0"/>
+                <a:ea typeface="Courier New" pitchFamily="34" charset="-122"/>
+                <a:cs typeface="Courier New" pitchFamily="34" charset="-120"/>
+              </a:rPr>
+              <a:t>ZC_PC_ENDERECO_VH</a:t>
             </a:r>
             <a:pPr indent="0" marL="0">
               <a:lnSpc>
@@ -6365,13 +6777,13 @@
             <a:r>
               <a:rPr lang="en-US" sz="1100" dirty="0">
                 <a:solidFill>
-                  <a:srgbClr val="E8ECEF"/>
-                </a:solidFill>
-                <a:latin typeface="Courier New" pitchFamily="34" charset="0"/>
-                <a:ea typeface="Courier New" pitchFamily="34" charset="-122"/>
-                <a:cs typeface="Courier New" pitchFamily="34" charset="-120"/>
-              </a:rPr>
-              <a:t>   </a:t>
+                  <a:srgbClr val="CCCCCC"/>
+                </a:solidFill>
+                <a:latin typeface="Courier New" pitchFamily="34" charset="0"/>
+                <a:ea typeface="Courier New" pitchFamily="34" charset="-122"/>
+                <a:cs typeface="Courier New" pitchFamily="34" charset="-120"/>
+              </a:rPr>
+              <a:t>  </a:t>
             </a:r>
             <a:pPr indent="0" marL="0">
               <a:lnSpc>
@@ -6382,7 +6794,7 @@
             <a:r>
               <a:rPr lang="en-US" sz="1100" dirty="0">
                 <a:solidFill>
-                  <a:srgbClr val="4DB1FF"/>
+                  <a:srgbClr val="569CD6"/>
                 </a:solidFill>
                 <a:latin typeface="Courier New" pitchFamily="34" charset="0"/>
                 <a:ea typeface="Courier New" pitchFamily="34" charset="-122"/>
@@ -6399,7 +6811,7 @@
             <a:r>
               <a:rPr lang="en-US" sz="1100" dirty="0">
                 <a:solidFill>
-                  <a:srgbClr val="E8ECEF"/>
+                  <a:srgbClr val="CCCCCC"/>
                 </a:solidFill>
                 <a:latin typeface="Courier New" pitchFamily="34" charset="0"/>
                 <a:ea typeface="Courier New" pitchFamily="34" charset="-122"/>
@@ -6416,13 +6828,13 @@
             <a:r>
               <a:rPr lang="en-US" sz="1100" dirty="0">
                 <a:solidFill>
-                  <a:srgbClr val="E8ECEF"/>
-                </a:solidFill>
-                <a:latin typeface="Courier New" pitchFamily="34" charset="0"/>
-                <a:ea typeface="Courier New" pitchFamily="34" charset="-122"/>
-                <a:cs typeface="Courier New" pitchFamily="34" charset="-120"/>
-              </a:rPr>
-              <a:t>ClienteVH</a:t>
+                  <a:srgbClr val="CCCCCC"/>
+                </a:solidFill>
+                <a:latin typeface="Courier New" pitchFamily="34" charset="0"/>
+                <a:ea typeface="Courier New" pitchFamily="34" charset="-122"/>
+                <a:cs typeface="Courier New" pitchFamily="34" charset="-120"/>
+              </a:rPr>
+              <a:t>EnderecoVH</a:t>
             </a:r>
             <a:pPr indent="0" marL="0">
               <a:lnSpc>
@@ -6433,7 +6845,7 @@
             <a:r>
               <a:rPr lang="en-US" sz="1100" dirty="0">
                 <a:solidFill>
-                  <a:srgbClr val="E8ECEF"/>
+                  <a:srgbClr val="CCCCCC"/>
                 </a:solidFill>
                 <a:latin typeface="Courier New" pitchFamily="34" charset="0"/>
                 <a:ea typeface="Courier New" pitchFamily="34" charset="-122"/>
@@ -6453,7 +6865,24 @@
             <a:r>
               <a:rPr lang="en-US" sz="1100" dirty="0">
                 <a:solidFill>
-                  <a:srgbClr val="E8ECEF"/>
+                  <a:srgbClr val="6E7681"/>
+                </a:solidFill>
+                <a:latin typeface="Courier New" pitchFamily="34" charset="0"/>
+                <a:ea typeface="Courier New" pitchFamily="34" charset="-122"/>
+                <a:cs typeface="Courier New" pitchFamily="34" charset="-120"/>
+              </a:rPr>
+              <a:t>11  </a:t>
+            </a:r>
+            <a:pPr indent="0" marL="0">
+              <a:lnSpc>
+                <a:spcPct val="105000"/>
+              </a:lnSpc>
+              <a:buNone/>
+            </a:pPr>
+            <a:r>
+              <a:rPr lang="en-US" sz="1100" dirty="0">
+                <a:solidFill>
+                  <a:srgbClr val="CCCCCC"/>
                 </a:solidFill>
                 <a:latin typeface="Courier New" pitchFamily="34" charset="0"/>
                 <a:ea typeface="Courier New" pitchFamily="34" charset="-122"/>
@@ -6470,7 +6899,7 @@
             <a:r>
               <a:rPr lang="en-US" sz="1100" dirty="0">
                 <a:solidFill>
-                  <a:srgbClr val="4DB1FF"/>
+                  <a:srgbClr val="569CD6"/>
                 </a:solidFill>
                 <a:latin typeface="Courier New" pitchFamily="34" charset="0"/>
                 <a:ea typeface="Courier New" pitchFamily="34" charset="-122"/>
@@ -6487,7 +6916,7 @@
             <a:r>
               <a:rPr lang="en-US" sz="1100" dirty="0">
                 <a:solidFill>
-                  <a:srgbClr val="E8ECEF"/>
+                  <a:srgbClr val="CCCCCC"/>
                 </a:solidFill>
                 <a:latin typeface="Courier New" pitchFamily="34" charset="0"/>
                 <a:ea typeface="Courier New" pitchFamily="34" charset="-122"/>
@@ -6504,13 +6933,13 @@
             <a:r>
               <a:rPr lang="en-US" sz="1100" dirty="0">
                 <a:solidFill>
-                  <a:srgbClr val="E8ECEF"/>
-                </a:solidFill>
-                <a:latin typeface="Courier New" pitchFamily="34" charset="0"/>
-                <a:ea typeface="Courier New" pitchFamily="34" charset="-122"/>
-                <a:cs typeface="Courier New" pitchFamily="34" charset="-120"/>
-              </a:rPr>
-              <a:t>ZC_PC_ENDERECO_VH</a:t>
+                  <a:srgbClr val="4EC9B0"/>
+                </a:solidFill>
+                <a:latin typeface="Courier New" pitchFamily="34" charset="0"/>
+                <a:ea typeface="Courier New" pitchFamily="34" charset="-122"/>
+                <a:cs typeface="Courier New" pitchFamily="34" charset="-120"/>
+              </a:rPr>
+              <a:t>ZC_PC_ITEM_VH</a:t>
             </a:r>
             <a:pPr indent="0" marL="0">
               <a:lnSpc>
@@ -6521,7 +6950,132 @@
             <a:r>
               <a:rPr lang="en-US" sz="1100" dirty="0">
                 <a:solidFill>
-                  <a:srgbClr val="E8ECEF"/>
+                  <a:srgbClr val="CCCCCC"/>
+                </a:solidFill>
+                <a:latin typeface="Courier New" pitchFamily="34" charset="0"/>
+                <a:ea typeface="Courier New" pitchFamily="34" charset="-122"/>
+                <a:cs typeface="Courier New" pitchFamily="34" charset="-120"/>
+              </a:rPr>
+              <a:t>      </a:t>
+            </a:r>
+            <a:pPr indent="0" marL="0">
+              <a:lnSpc>
+                <a:spcPct val="105000"/>
+              </a:lnSpc>
+              <a:buNone/>
+            </a:pPr>
+            <a:r>
+              <a:rPr lang="en-US" sz="1100" dirty="0">
+                <a:solidFill>
+                  <a:srgbClr val="569CD6"/>
+                </a:solidFill>
+                <a:latin typeface="Courier New" pitchFamily="34" charset="0"/>
+                <a:ea typeface="Courier New" pitchFamily="34" charset="-122"/>
+                <a:cs typeface="Courier New" pitchFamily="34" charset="-120"/>
+              </a:rPr>
+              <a:t>as</a:t>
+            </a:r>
+            <a:pPr indent="0" marL="0">
+              <a:lnSpc>
+                <a:spcPct val="105000"/>
+              </a:lnSpc>
+              <a:buNone/>
+            </a:pPr>
+            <a:r>
+              <a:rPr lang="en-US" sz="1100" dirty="0">
+                <a:solidFill>
+                  <a:srgbClr val="CCCCCC"/>
+                </a:solidFill>
+                <a:latin typeface="Courier New" pitchFamily="34" charset="0"/>
+                <a:ea typeface="Courier New" pitchFamily="34" charset="-122"/>
+                <a:cs typeface="Courier New" pitchFamily="34" charset="-120"/>
+              </a:rPr>
+              <a:t> </a:t>
+            </a:r>
+            <a:pPr indent="0" marL="0">
+              <a:lnSpc>
+                <a:spcPct val="105000"/>
+              </a:lnSpc>
+              <a:buNone/>
+            </a:pPr>
+            <a:r>
+              <a:rPr lang="en-US" sz="1100" dirty="0">
+                <a:solidFill>
+                  <a:srgbClr val="CCCCCC"/>
+                </a:solidFill>
+                <a:latin typeface="Courier New" pitchFamily="34" charset="0"/>
+                <a:ea typeface="Courier New" pitchFamily="34" charset="-122"/>
+                <a:cs typeface="Courier New" pitchFamily="34" charset="-120"/>
+              </a:rPr>
+              <a:t>ItemVH</a:t>
+            </a:r>
+            <a:pPr indent="0" marL="0">
+              <a:lnSpc>
+                <a:spcPct val="105000"/>
+              </a:lnSpc>
+              <a:buNone/>
+            </a:pPr>
+            <a:r>
+              <a:rPr lang="en-US" sz="1100" dirty="0">
+                <a:solidFill>
+                  <a:srgbClr val="CCCCCC"/>
+                </a:solidFill>
+                <a:latin typeface="Courier New" pitchFamily="34" charset="0"/>
+                <a:ea typeface="Courier New" pitchFamily="34" charset="-122"/>
+                <a:cs typeface="Courier New" pitchFamily="34" charset="-120"/>
+              </a:rPr>
+              <a:t>;</a:t>
+            </a:r>
+            <a:endParaRPr lang="en-US" sz="1100" dirty="0"/>
+          </a:p>
+          <a:p>
+            <a:pPr indent="0" marL="0">
+              <a:lnSpc>
+                <a:spcPct val="105000"/>
+              </a:lnSpc>
+              <a:buNone/>
+            </a:pPr>
+            <a:r>
+              <a:rPr lang="en-US" sz="1100" dirty="0">
+                <a:solidFill>
+                  <a:srgbClr val="6E7681"/>
+                </a:solidFill>
+                <a:latin typeface="Courier New" pitchFamily="34" charset="0"/>
+                <a:ea typeface="Courier New" pitchFamily="34" charset="-122"/>
+                <a:cs typeface="Courier New" pitchFamily="34" charset="-120"/>
+              </a:rPr>
+              <a:t>12  </a:t>
+            </a:r>
+            <a:endParaRPr lang="en-US" sz="1100" dirty="0"/>
+          </a:p>
+          <a:p>
+            <a:pPr indent="0" marL="0">
+              <a:lnSpc>
+                <a:spcPct val="105000"/>
+              </a:lnSpc>
+              <a:buNone/>
+            </a:pPr>
+            <a:r>
+              <a:rPr lang="en-US" sz="1100" dirty="0">
+                <a:solidFill>
+                  <a:srgbClr val="6E7681"/>
+                </a:solidFill>
+                <a:latin typeface="Courier New" pitchFamily="34" charset="0"/>
+                <a:ea typeface="Courier New" pitchFamily="34" charset="-122"/>
+                <a:cs typeface="Courier New" pitchFamily="34" charset="-120"/>
+              </a:rPr>
+              <a:t>13  </a:t>
+            </a:r>
+            <a:pPr indent="0" marL="0">
+              <a:lnSpc>
+                <a:spcPct val="105000"/>
+              </a:lnSpc>
+              <a:buNone/>
+            </a:pPr>
+            <a:r>
+              <a:rPr lang="en-US" sz="1100" dirty="0">
+                <a:solidFill>
+                  <a:srgbClr val="CCCCCC"/>
                 </a:solidFill>
                 <a:latin typeface="Courier New" pitchFamily="34" charset="0"/>
                 <a:ea typeface="Courier New" pitchFamily="34" charset="-122"/>
@@ -6538,7 +7092,75 @@
             <a:r>
               <a:rPr lang="en-US" sz="1100" dirty="0">
                 <a:solidFill>
-                  <a:srgbClr val="4DB1FF"/>
+                  <a:srgbClr val="569CD6"/>
+                </a:solidFill>
+                <a:latin typeface="Courier New" pitchFamily="34" charset="0"/>
+                <a:ea typeface="Courier New" pitchFamily="34" charset="-122"/>
+                <a:cs typeface="Courier New" pitchFamily="34" charset="-120"/>
+              </a:rPr>
+              <a:t>expose</a:t>
+            </a:r>
+            <a:pPr indent="0" marL="0">
+              <a:lnSpc>
+                <a:spcPct val="105000"/>
+              </a:lnSpc>
+              <a:buNone/>
+            </a:pPr>
+            <a:r>
+              <a:rPr lang="en-US" sz="1100" dirty="0">
+                <a:solidFill>
+                  <a:srgbClr val="CCCCCC"/>
+                </a:solidFill>
+                <a:latin typeface="Courier New" pitchFamily="34" charset="0"/>
+                <a:ea typeface="Courier New" pitchFamily="34" charset="-122"/>
+                <a:cs typeface="Courier New" pitchFamily="34" charset="-120"/>
+              </a:rPr>
+              <a:t> </a:t>
+            </a:r>
+            <a:pPr indent="0" marL="0">
+              <a:lnSpc>
+                <a:spcPct val="105000"/>
+              </a:lnSpc>
+              <a:buNone/>
+            </a:pPr>
+            <a:r>
+              <a:rPr lang="en-US" sz="1100" dirty="0">
+                <a:solidFill>
+                  <a:srgbClr val="4EC9B0"/>
+                </a:solidFill>
+                <a:latin typeface="Courier New" pitchFamily="34" charset="0"/>
+                <a:ea typeface="Courier New" pitchFamily="34" charset="-122"/>
+                <a:cs typeface="Courier New" pitchFamily="34" charset="-120"/>
+              </a:rPr>
+              <a:t>ZC_PC_STATUSPED_VH</a:t>
+            </a:r>
+            <a:pPr indent="0" marL="0">
+              <a:lnSpc>
+                <a:spcPct val="105000"/>
+              </a:lnSpc>
+              <a:buNone/>
+            </a:pPr>
+            <a:r>
+              <a:rPr lang="en-US" sz="1100" dirty="0">
+                <a:solidFill>
+                  <a:srgbClr val="CCCCCC"/>
+                </a:solidFill>
+                <a:latin typeface="Courier New" pitchFamily="34" charset="0"/>
+                <a:ea typeface="Courier New" pitchFamily="34" charset="-122"/>
+                <a:cs typeface="Courier New" pitchFamily="34" charset="-120"/>
+              </a:rPr>
+              <a:t> </a:t>
+            </a:r>
+            <a:pPr indent="0" marL="0">
+              <a:lnSpc>
+                <a:spcPct val="105000"/>
+              </a:lnSpc>
+              <a:buNone/>
+            </a:pPr>
+            <a:r>
+              <a:rPr lang="en-US" sz="1100" dirty="0">
+                <a:solidFill>
+                  <a:srgbClr val="569CD6"/>
                 </a:solidFill>
                 <a:latin typeface="Courier New" pitchFamily="34" charset="0"/>
                 <a:ea typeface="Courier New" pitchFamily="34" charset="-122"/>
@@ -6555,7 +7177,7 @@
             <a:r>
               <a:rPr lang="en-US" sz="1100" dirty="0">
                 <a:solidFill>
-                  <a:srgbClr val="E8ECEF"/>
+                  <a:srgbClr val="CCCCCC"/>
                 </a:solidFill>
                 <a:latin typeface="Courier New" pitchFamily="34" charset="0"/>
                 <a:ea typeface="Courier New" pitchFamily="34" charset="-122"/>
@@ -6572,13 +7194,13 @@
             <a:r>
               <a:rPr lang="en-US" sz="1100" dirty="0">
                 <a:solidFill>
-                  <a:srgbClr val="E8ECEF"/>
-                </a:solidFill>
-                <a:latin typeface="Courier New" pitchFamily="34" charset="0"/>
-                <a:ea typeface="Courier New" pitchFamily="34" charset="-122"/>
-                <a:cs typeface="Courier New" pitchFamily="34" charset="-120"/>
-              </a:rPr>
-              <a:t>EnderecoVH</a:t>
+                  <a:srgbClr val="CCCCCC"/>
+                </a:solidFill>
+                <a:latin typeface="Courier New" pitchFamily="34" charset="0"/>
+                <a:ea typeface="Courier New" pitchFamily="34" charset="-122"/>
+                <a:cs typeface="Courier New" pitchFamily="34" charset="-120"/>
+              </a:rPr>
+              <a:t>StatusPedidoVH</a:t>
             </a:r>
             <a:pPr indent="0" marL="0">
               <a:lnSpc>
@@ -6589,7 +7211,7 @@
             <a:r>
               <a:rPr lang="en-US" sz="1100" dirty="0">
                 <a:solidFill>
-                  <a:srgbClr val="E8ECEF"/>
+                  <a:srgbClr val="CCCCCC"/>
                 </a:solidFill>
                 <a:latin typeface="Courier New" pitchFamily="34" charset="0"/>
                 <a:ea typeface="Courier New" pitchFamily="34" charset="-122"/>
@@ -6609,7 +7231,24 @@
             <a:r>
               <a:rPr lang="en-US" sz="1100" dirty="0">
                 <a:solidFill>
-                  <a:srgbClr val="E8ECEF"/>
+                  <a:srgbClr val="6E7681"/>
+                </a:solidFill>
+                <a:latin typeface="Courier New" pitchFamily="34" charset="0"/>
+                <a:ea typeface="Courier New" pitchFamily="34" charset="-122"/>
+                <a:cs typeface="Courier New" pitchFamily="34" charset="-120"/>
+              </a:rPr>
+              <a:t>14  </a:t>
+            </a:r>
+            <a:pPr indent="0" marL="0">
+              <a:lnSpc>
+                <a:spcPct val="105000"/>
+              </a:lnSpc>
+              <a:buNone/>
+            </a:pPr>
+            <a:r>
+              <a:rPr lang="en-US" sz="1100" dirty="0">
+                <a:solidFill>
+                  <a:srgbClr val="CCCCCC"/>
                 </a:solidFill>
                 <a:latin typeface="Courier New" pitchFamily="34" charset="0"/>
                 <a:ea typeface="Courier New" pitchFamily="34" charset="-122"/>
@@ -6626,7 +7265,7 @@
             <a:r>
               <a:rPr lang="en-US" sz="1100" dirty="0">
                 <a:solidFill>
-                  <a:srgbClr val="4DB1FF"/>
+                  <a:srgbClr val="569CD6"/>
                 </a:solidFill>
                 <a:latin typeface="Courier New" pitchFamily="34" charset="0"/>
                 <a:ea typeface="Courier New" pitchFamily="34" charset="-122"/>
@@ -6643,7 +7282,7 @@
             <a:r>
               <a:rPr lang="en-US" sz="1100" dirty="0">
                 <a:solidFill>
-                  <a:srgbClr val="E8ECEF"/>
+                  <a:srgbClr val="CCCCCC"/>
                 </a:solidFill>
                 <a:latin typeface="Courier New" pitchFamily="34" charset="0"/>
                 <a:ea typeface="Courier New" pitchFamily="34" charset="-122"/>
@@ -6660,13 +7299,13 @@
             <a:r>
               <a:rPr lang="en-US" sz="1100" dirty="0">
                 <a:solidFill>
-                  <a:srgbClr val="E8ECEF"/>
-                </a:solidFill>
-                <a:latin typeface="Courier New" pitchFamily="34" charset="0"/>
-                <a:ea typeface="Courier New" pitchFamily="34" charset="-122"/>
-                <a:cs typeface="Courier New" pitchFamily="34" charset="-120"/>
-              </a:rPr>
-              <a:t>ZC_PC_ITEM_VH</a:t>
+                  <a:srgbClr val="4EC9B0"/>
+                </a:solidFill>
+                <a:latin typeface="Courier New" pitchFamily="34" charset="0"/>
+                <a:ea typeface="Courier New" pitchFamily="34" charset="-122"/>
+                <a:cs typeface="Courier New" pitchFamily="34" charset="-120"/>
+              </a:rPr>
+              <a:t>ZC_PC_STATUSPAG_VH</a:t>
             </a:r>
             <a:pPr indent="0" marL="0">
               <a:lnSpc>
@@ -6677,13 +7316,13 @@
             <a:r>
               <a:rPr lang="en-US" sz="1100" dirty="0">
                 <a:solidFill>
-                  <a:srgbClr val="E8ECEF"/>
-                </a:solidFill>
-                <a:latin typeface="Courier New" pitchFamily="34" charset="0"/>
-                <a:ea typeface="Courier New" pitchFamily="34" charset="-122"/>
-                <a:cs typeface="Courier New" pitchFamily="34" charset="-120"/>
-              </a:rPr>
-              <a:t>      </a:t>
+                  <a:srgbClr val="CCCCCC"/>
+                </a:solidFill>
+                <a:latin typeface="Courier New" pitchFamily="34" charset="0"/>
+                <a:ea typeface="Courier New" pitchFamily="34" charset="-122"/>
+                <a:cs typeface="Courier New" pitchFamily="34" charset="-120"/>
+              </a:rPr>
+              <a:t> </a:t>
             </a:r>
             <a:pPr indent="0" marL="0">
               <a:lnSpc>
@@ -6694,7 +7333,7 @@
             <a:r>
               <a:rPr lang="en-US" sz="1100" dirty="0">
                 <a:solidFill>
-                  <a:srgbClr val="4DB1FF"/>
+                  <a:srgbClr val="569CD6"/>
                 </a:solidFill>
                 <a:latin typeface="Courier New" pitchFamily="34" charset="0"/>
                 <a:ea typeface="Courier New" pitchFamily="34" charset="-122"/>
@@ -6711,7 +7350,7 @@
             <a:r>
               <a:rPr lang="en-US" sz="1100" dirty="0">
                 <a:solidFill>
-                  <a:srgbClr val="E8ECEF"/>
+                  <a:srgbClr val="CCCCCC"/>
                 </a:solidFill>
                 <a:latin typeface="Courier New" pitchFamily="34" charset="0"/>
                 <a:ea typeface="Courier New" pitchFamily="34" charset="-122"/>
@@ -6728,13 +7367,13 @@
             <a:r>
               <a:rPr lang="en-US" sz="1100" dirty="0">
                 <a:solidFill>
-                  <a:srgbClr val="E8ECEF"/>
-                </a:solidFill>
-                <a:latin typeface="Courier New" pitchFamily="34" charset="0"/>
-                <a:ea typeface="Courier New" pitchFamily="34" charset="-122"/>
-                <a:cs typeface="Courier New" pitchFamily="34" charset="-120"/>
-              </a:rPr>
-              <a:t>ItemVH</a:t>
+                  <a:srgbClr val="CCCCCC"/>
+                </a:solidFill>
+                <a:latin typeface="Courier New" pitchFamily="34" charset="0"/>
+                <a:ea typeface="Courier New" pitchFamily="34" charset="-122"/>
+                <a:cs typeface="Courier New" pitchFamily="34" charset="-120"/>
+              </a:rPr>
+              <a:t>StatusPagamentoVH</a:t>
             </a:r>
             <a:pPr indent="0" marL="0">
               <a:lnSpc>
@@ -6745,7 +7384,7 @@
             <a:r>
               <a:rPr lang="en-US" sz="1100" dirty="0">
                 <a:solidFill>
-                  <a:srgbClr val="E8ECEF"/>
+                  <a:srgbClr val="CCCCCC"/>
                 </a:solidFill>
                 <a:latin typeface="Courier New" pitchFamily="34" charset="0"/>
                 <a:ea typeface="Courier New" pitchFamily="34" charset="-122"/>
@@ -6765,7 +7404,58 @@
             <a:r>
               <a:rPr lang="en-US" sz="1100" dirty="0">
                 <a:solidFill>
-                  <a:srgbClr val="E8ECEF"/>
+                  <a:srgbClr val="6E7681"/>
+                </a:solidFill>
+                <a:latin typeface="Courier New" pitchFamily="34" charset="0"/>
+                <a:ea typeface="Courier New" pitchFamily="34" charset="-122"/>
+                <a:cs typeface="Courier New" pitchFamily="34" charset="-120"/>
+              </a:rPr>
+              <a:t>15  </a:t>
+            </a:r>
+            <a:pPr indent="0" marL="0">
+              <a:lnSpc>
+                <a:spcPct val="105000"/>
+              </a:lnSpc>
+              <a:buNone/>
+            </a:pPr>
+            <a:r>
+              <a:rPr lang="en-US" sz="1100" dirty="0">
+                <a:solidFill>
+                  <a:srgbClr val="CCCCCC"/>
+                </a:solidFill>
+                <a:latin typeface="Courier New" pitchFamily="34" charset="0"/>
+                <a:ea typeface="Courier New" pitchFamily="34" charset="-122"/>
+                <a:cs typeface="Courier New" pitchFamily="34" charset="-120"/>
+              </a:rPr>
+              <a:t>  </a:t>
+            </a:r>
+            <a:pPr indent="0" marL="0">
+              <a:lnSpc>
+                <a:spcPct val="105000"/>
+              </a:lnSpc>
+              <a:buNone/>
+            </a:pPr>
+            <a:r>
+              <a:rPr lang="en-US" sz="1100" dirty="0">
+                <a:solidFill>
+                  <a:srgbClr val="569CD6"/>
+                </a:solidFill>
+                <a:latin typeface="Courier New" pitchFamily="34" charset="0"/>
+                <a:ea typeface="Courier New" pitchFamily="34" charset="-122"/>
+                <a:cs typeface="Courier New" pitchFamily="34" charset="-120"/>
+              </a:rPr>
+              <a:t>expose</a:t>
+            </a:r>
+            <a:pPr indent="0" marL="0">
+              <a:lnSpc>
+                <a:spcPct val="105000"/>
+              </a:lnSpc>
+              <a:buNone/>
+            </a:pPr>
+            <a:r>
+              <a:rPr lang="en-US" sz="1100" dirty="0">
+                <a:solidFill>
+                  <a:srgbClr val="CCCCCC"/>
                 </a:solidFill>
                 <a:latin typeface="Courier New" pitchFamily="34" charset="0"/>
                 <a:ea typeface="Courier New" pitchFamily="34" charset="-122"/>
@@ -6773,6 +7463,108 @@
               </a:rPr>
               <a:t> </a:t>
             </a:r>
+            <a:pPr indent="0" marL="0">
+              <a:lnSpc>
+                <a:spcPct val="105000"/>
+              </a:lnSpc>
+              <a:buNone/>
+            </a:pPr>
+            <a:r>
+              <a:rPr lang="en-US" sz="1100" dirty="0">
+                <a:solidFill>
+                  <a:srgbClr val="4EC9B0"/>
+                </a:solidFill>
+                <a:latin typeface="Courier New" pitchFamily="34" charset="0"/>
+                <a:ea typeface="Courier New" pitchFamily="34" charset="-122"/>
+                <a:cs typeface="Courier New" pitchFamily="34" charset="-120"/>
+              </a:rPr>
+              <a:t>ZC_PC_METODOPAG_VH</a:t>
+            </a:r>
+            <a:pPr indent="0" marL="0">
+              <a:lnSpc>
+                <a:spcPct val="105000"/>
+              </a:lnSpc>
+              <a:buNone/>
+            </a:pPr>
+            <a:r>
+              <a:rPr lang="en-US" sz="1100" dirty="0">
+                <a:solidFill>
+                  <a:srgbClr val="CCCCCC"/>
+                </a:solidFill>
+                <a:latin typeface="Courier New" pitchFamily="34" charset="0"/>
+                <a:ea typeface="Courier New" pitchFamily="34" charset="-122"/>
+                <a:cs typeface="Courier New" pitchFamily="34" charset="-120"/>
+              </a:rPr>
+              <a:t> </a:t>
+            </a:r>
+            <a:pPr indent="0" marL="0">
+              <a:lnSpc>
+                <a:spcPct val="105000"/>
+              </a:lnSpc>
+              <a:buNone/>
+            </a:pPr>
+            <a:r>
+              <a:rPr lang="en-US" sz="1100" dirty="0">
+                <a:solidFill>
+                  <a:srgbClr val="569CD6"/>
+                </a:solidFill>
+                <a:latin typeface="Courier New" pitchFamily="34" charset="0"/>
+                <a:ea typeface="Courier New" pitchFamily="34" charset="-122"/>
+                <a:cs typeface="Courier New" pitchFamily="34" charset="-120"/>
+              </a:rPr>
+              <a:t>as</a:t>
+            </a:r>
+            <a:pPr indent="0" marL="0">
+              <a:lnSpc>
+                <a:spcPct val="105000"/>
+              </a:lnSpc>
+              <a:buNone/>
+            </a:pPr>
+            <a:r>
+              <a:rPr lang="en-US" sz="1100" dirty="0">
+                <a:solidFill>
+                  <a:srgbClr val="CCCCCC"/>
+                </a:solidFill>
+                <a:latin typeface="Courier New" pitchFamily="34" charset="0"/>
+                <a:ea typeface="Courier New" pitchFamily="34" charset="-122"/>
+                <a:cs typeface="Courier New" pitchFamily="34" charset="-120"/>
+              </a:rPr>
+              <a:t> </a:t>
+            </a:r>
+            <a:pPr indent="0" marL="0">
+              <a:lnSpc>
+                <a:spcPct val="105000"/>
+              </a:lnSpc>
+              <a:buNone/>
+            </a:pPr>
+            <a:r>
+              <a:rPr lang="en-US" sz="1100" dirty="0">
+                <a:solidFill>
+                  <a:srgbClr val="CCCCCC"/>
+                </a:solidFill>
+                <a:latin typeface="Courier New" pitchFamily="34" charset="0"/>
+                <a:ea typeface="Courier New" pitchFamily="34" charset="-122"/>
+                <a:cs typeface="Courier New" pitchFamily="34" charset="-120"/>
+              </a:rPr>
+              <a:t>MetodoPagamentoVH</a:t>
+            </a:r>
+            <a:pPr indent="0" marL="0">
+              <a:lnSpc>
+                <a:spcPct val="105000"/>
+              </a:lnSpc>
+              <a:buNone/>
+            </a:pPr>
+            <a:r>
+              <a:rPr lang="en-US" sz="1100" dirty="0">
+                <a:solidFill>
+                  <a:srgbClr val="CCCCCC"/>
+                </a:solidFill>
+                <a:latin typeface="Courier New" pitchFamily="34" charset="0"/>
+                <a:ea typeface="Courier New" pitchFamily="34" charset="-122"/>
+                <a:cs typeface="Courier New" pitchFamily="34" charset="-120"/>
+              </a:rPr>
+              <a:t>;</a:t>
+            </a:r>
             <a:endParaRPr lang="en-US" sz="1100" dirty="0"/>
           </a:p>
           <a:p>
@@ -6785,13 +7577,13 @@
             <a:r>
               <a:rPr lang="en-US" sz="1100" dirty="0">
                 <a:solidFill>
-                  <a:srgbClr val="E8ECEF"/>
-                </a:solidFill>
-                <a:latin typeface="Courier New" pitchFamily="34" charset="0"/>
-                <a:ea typeface="Courier New" pitchFamily="34" charset="-122"/>
-                <a:cs typeface="Courier New" pitchFamily="34" charset="-120"/>
-              </a:rPr>
-              <a:t>  </a:t>
+                  <a:srgbClr val="6E7681"/>
+                </a:solidFill>
+                <a:latin typeface="Courier New" pitchFamily="34" charset="0"/>
+                <a:ea typeface="Courier New" pitchFamily="34" charset="-122"/>
+                <a:cs typeface="Courier New" pitchFamily="34" charset="-120"/>
+              </a:rPr>
+              <a:t>16  </a:t>
             </a:r>
             <a:pPr indent="0" marL="0">
               <a:lnSpc>
@@ -6802,472 +7594,21 @@
             <a:r>
               <a:rPr lang="en-US" sz="1100" dirty="0">
                 <a:solidFill>
-                  <a:srgbClr val="4DB1FF"/>
-                </a:solidFill>
-                <a:latin typeface="Courier New" pitchFamily="34" charset="0"/>
-                <a:ea typeface="Courier New" pitchFamily="34" charset="-122"/>
-                <a:cs typeface="Courier New" pitchFamily="34" charset="-120"/>
-              </a:rPr>
-              <a:t>expose</a:t>
-            </a:r>
-            <a:pPr indent="0" marL="0">
-              <a:lnSpc>
-                <a:spcPct val="105000"/>
-              </a:lnSpc>
-              <a:buNone/>
-            </a:pPr>
-            <a:r>
-              <a:rPr lang="en-US" sz="1100" dirty="0">
-                <a:solidFill>
-                  <a:srgbClr val="E8ECEF"/>
-                </a:solidFill>
-                <a:latin typeface="Courier New" pitchFamily="34" charset="0"/>
-                <a:ea typeface="Courier New" pitchFamily="34" charset="-122"/>
-                <a:cs typeface="Courier New" pitchFamily="34" charset="-120"/>
-              </a:rPr>
-              <a:t> </a:t>
-            </a:r>
-            <a:pPr indent="0" marL="0">
-              <a:lnSpc>
-                <a:spcPct val="105000"/>
-              </a:lnSpc>
-              <a:buNone/>
-            </a:pPr>
-            <a:r>
-              <a:rPr lang="en-US" sz="1100" dirty="0">
-                <a:solidFill>
-                  <a:srgbClr val="E8ECEF"/>
-                </a:solidFill>
-                <a:latin typeface="Courier New" pitchFamily="34" charset="0"/>
-                <a:ea typeface="Courier New" pitchFamily="34" charset="-122"/>
-                <a:cs typeface="Courier New" pitchFamily="34" charset="-120"/>
-              </a:rPr>
-              <a:t>ZC_PC_STATUSPED_VH</a:t>
-            </a:r>
-            <a:pPr indent="0" marL="0">
-              <a:lnSpc>
-                <a:spcPct val="105000"/>
-              </a:lnSpc>
-              <a:buNone/>
-            </a:pPr>
-            <a:r>
-              <a:rPr lang="en-US" sz="1100" dirty="0">
-                <a:solidFill>
-                  <a:srgbClr val="E8ECEF"/>
-                </a:solidFill>
-                <a:latin typeface="Courier New" pitchFamily="34" charset="0"/>
-                <a:ea typeface="Courier New" pitchFamily="34" charset="-122"/>
-                <a:cs typeface="Courier New" pitchFamily="34" charset="-120"/>
-              </a:rPr>
-              <a:t> </a:t>
-            </a:r>
-            <a:pPr indent="0" marL="0">
-              <a:lnSpc>
-                <a:spcPct val="105000"/>
-              </a:lnSpc>
-              <a:buNone/>
-            </a:pPr>
-            <a:r>
-              <a:rPr lang="en-US" sz="1100" dirty="0">
-                <a:solidFill>
-                  <a:srgbClr val="4DB1FF"/>
-                </a:solidFill>
-                <a:latin typeface="Courier New" pitchFamily="34" charset="0"/>
-                <a:ea typeface="Courier New" pitchFamily="34" charset="-122"/>
-                <a:cs typeface="Courier New" pitchFamily="34" charset="-120"/>
-              </a:rPr>
-              <a:t>as</a:t>
-            </a:r>
-            <a:pPr indent="0" marL="0">
-              <a:lnSpc>
-                <a:spcPct val="105000"/>
-              </a:lnSpc>
-              <a:buNone/>
-            </a:pPr>
-            <a:r>
-              <a:rPr lang="en-US" sz="1100" dirty="0">
-                <a:solidFill>
-                  <a:srgbClr val="E8ECEF"/>
-                </a:solidFill>
-                <a:latin typeface="Courier New" pitchFamily="34" charset="0"/>
-                <a:ea typeface="Courier New" pitchFamily="34" charset="-122"/>
-                <a:cs typeface="Courier New" pitchFamily="34" charset="-120"/>
-              </a:rPr>
-              <a:t> </a:t>
-            </a:r>
-            <a:pPr indent="0" marL="0">
-              <a:lnSpc>
-                <a:spcPct val="105000"/>
-              </a:lnSpc>
-              <a:buNone/>
-            </a:pPr>
-            <a:r>
-              <a:rPr lang="en-US" sz="1100" dirty="0">
-                <a:solidFill>
-                  <a:srgbClr val="E8ECEF"/>
-                </a:solidFill>
-                <a:latin typeface="Courier New" pitchFamily="34" charset="0"/>
-                <a:ea typeface="Courier New" pitchFamily="34" charset="-122"/>
-                <a:cs typeface="Courier New" pitchFamily="34" charset="-120"/>
-              </a:rPr>
-              <a:t>StatusPedidoVH</a:t>
-            </a:r>
-            <a:pPr indent="0" marL="0">
-              <a:lnSpc>
-                <a:spcPct val="105000"/>
-              </a:lnSpc>
-              <a:buNone/>
-            </a:pPr>
-            <a:r>
-              <a:rPr lang="en-US" sz="1100" dirty="0">
-                <a:solidFill>
-                  <a:srgbClr val="E8ECEF"/>
-                </a:solidFill>
-                <a:latin typeface="Courier New" pitchFamily="34" charset="0"/>
-                <a:ea typeface="Courier New" pitchFamily="34" charset="-122"/>
-                <a:cs typeface="Courier New" pitchFamily="34" charset="-120"/>
-              </a:rPr>
-              <a:t>;</a:t>
+                  <a:srgbClr val="CCCCCC"/>
+                </a:solidFill>
+                <a:latin typeface="Courier New" pitchFamily="34" charset="0"/>
+                <a:ea typeface="Courier New" pitchFamily="34" charset="-122"/>
+                <a:cs typeface="Courier New" pitchFamily="34" charset="-120"/>
+              </a:rPr>
+              <a:t>}</a:t>
             </a:r>
             <a:endParaRPr lang="en-US" sz="1100" dirty="0"/>
           </a:p>
-          <a:p>
-            <a:pPr indent="0" marL="0">
-              <a:lnSpc>
-                <a:spcPct val="105000"/>
-              </a:lnSpc>
-              <a:buNone/>
-            </a:pPr>
-            <a:r>
-              <a:rPr lang="en-US" sz="1100" dirty="0">
-                <a:solidFill>
-                  <a:srgbClr val="E8ECEF"/>
-                </a:solidFill>
-                <a:latin typeface="Courier New" pitchFamily="34" charset="0"/>
-                <a:ea typeface="Courier New" pitchFamily="34" charset="-122"/>
-                <a:cs typeface="Courier New" pitchFamily="34" charset="-120"/>
-              </a:rPr>
-              <a:t>  </a:t>
-            </a:r>
-            <a:pPr indent="0" marL="0">
-              <a:lnSpc>
-                <a:spcPct val="105000"/>
-              </a:lnSpc>
-              <a:buNone/>
-            </a:pPr>
-            <a:r>
-              <a:rPr lang="en-US" sz="1100" dirty="0">
-                <a:solidFill>
-                  <a:srgbClr val="4DB1FF"/>
-                </a:solidFill>
-                <a:latin typeface="Courier New" pitchFamily="34" charset="0"/>
-                <a:ea typeface="Courier New" pitchFamily="34" charset="-122"/>
-                <a:cs typeface="Courier New" pitchFamily="34" charset="-120"/>
-              </a:rPr>
-              <a:t>expose</a:t>
-            </a:r>
-            <a:pPr indent="0" marL="0">
-              <a:lnSpc>
-                <a:spcPct val="105000"/>
-              </a:lnSpc>
-              <a:buNone/>
-            </a:pPr>
-            <a:r>
-              <a:rPr lang="en-US" sz="1100" dirty="0">
-                <a:solidFill>
-                  <a:srgbClr val="E8ECEF"/>
-                </a:solidFill>
-                <a:latin typeface="Courier New" pitchFamily="34" charset="0"/>
-                <a:ea typeface="Courier New" pitchFamily="34" charset="-122"/>
-                <a:cs typeface="Courier New" pitchFamily="34" charset="-120"/>
-              </a:rPr>
-              <a:t> </a:t>
-            </a:r>
-            <a:pPr indent="0" marL="0">
-              <a:lnSpc>
-                <a:spcPct val="105000"/>
-              </a:lnSpc>
-              <a:buNone/>
-            </a:pPr>
-            <a:r>
-              <a:rPr lang="en-US" sz="1100" dirty="0">
-                <a:solidFill>
-                  <a:srgbClr val="E8ECEF"/>
-                </a:solidFill>
-                <a:latin typeface="Courier New" pitchFamily="34" charset="0"/>
-                <a:ea typeface="Courier New" pitchFamily="34" charset="-122"/>
-                <a:cs typeface="Courier New" pitchFamily="34" charset="-120"/>
-              </a:rPr>
-              <a:t>ZC_PC_STATUSPAG_VH</a:t>
-            </a:r>
-            <a:pPr indent="0" marL="0">
-              <a:lnSpc>
-                <a:spcPct val="105000"/>
-              </a:lnSpc>
-              <a:buNone/>
-            </a:pPr>
-            <a:r>
-              <a:rPr lang="en-US" sz="1100" dirty="0">
-                <a:solidFill>
-                  <a:srgbClr val="E8ECEF"/>
-                </a:solidFill>
-                <a:latin typeface="Courier New" pitchFamily="34" charset="0"/>
-                <a:ea typeface="Courier New" pitchFamily="34" charset="-122"/>
-                <a:cs typeface="Courier New" pitchFamily="34" charset="-120"/>
-              </a:rPr>
-              <a:t> </a:t>
-            </a:r>
-            <a:pPr indent="0" marL="0">
-              <a:lnSpc>
-                <a:spcPct val="105000"/>
-              </a:lnSpc>
-              <a:buNone/>
-            </a:pPr>
-            <a:r>
-              <a:rPr lang="en-US" sz="1100" dirty="0">
-                <a:solidFill>
-                  <a:srgbClr val="4DB1FF"/>
-                </a:solidFill>
-                <a:latin typeface="Courier New" pitchFamily="34" charset="0"/>
-                <a:ea typeface="Courier New" pitchFamily="34" charset="-122"/>
-                <a:cs typeface="Courier New" pitchFamily="34" charset="-120"/>
-              </a:rPr>
-              <a:t>as</a:t>
-            </a:r>
-            <a:pPr indent="0" marL="0">
-              <a:lnSpc>
-                <a:spcPct val="105000"/>
-              </a:lnSpc>
-              <a:buNone/>
-            </a:pPr>
-            <a:r>
-              <a:rPr lang="en-US" sz="1100" dirty="0">
-                <a:solidFill>
-                  <a:srgbClr val="E8ECEF"/>
-                </a:solidFill>
-                <a:latin typeface="Courier New" pitchFamily="34" charset="0"/>
-                <a:ea typeface="Courier New" pitchFamily="34" charset="-122"/>
-                <a:cs typeface="Courier New" pitchFamily="34" charset="-120"/>
-              </a:rPr>
-              <a:t> </a:t>
-            </a:r>
-            <a:pPr indent="0" marL="0">
-              <a:lnSpc>
-                <a:spcPct val="105000"/>
-              </a:lnSpc>
-              <a:buNone/>
-            </a:pPr>
-            <a:r>
-              <a:rPr lang="en-US" sz="1100" dirty="0">
-                <a:solidFill>
-                  <a:srgbClr val="E8ECEF"/>
-                </a:solidFill>
-                <a:latin typeface="Courier New" pitchFamily="34" charset="0"/>
-                <a:ea typeface="Courier New" pitchFamily="34" charset="-122"/>
-                <a:cs typeface="Courier New" pitchFamily="34" charset="-120"/>
-              </a:rPr>
-              <a:t>StatusPagamentoVH</a:t>
-            </a:r>
-            <a:pPr indent="0" marL="0">
-              <a:lnSpc>
-                <a:spcPct val="105000"/>
-              </a:lnSpc>
-              <a:buNone/>
-            </a:pPr>
-            <a:r>
-              <a:rPr lang="en-US" sz="1100" dirty="0">
-                <a:solidFill>
-                  <a:srgbClr val="E8ECEF"/>
-                </a:solidFill>
-                <a:latin typeface="Courier New" pitchFamily="34" charset="0"/>
-                <a:ea typeface="Courier New" pitchFamily="34" charset="-122"/>
-                <a:cs typeface="Courier New" pitchFamily="34" charset="-120"/>
-              </a:rPr>
-              <a:t>;</a:t>
-            </a:r>
-            <a:endParaRPr lang="en-US" sz="1100" dirty="0"/>
-          </a:p>
-          <a:p>
-            <a:pPr indent="0" marL="0">
-              <a:lnSpc>
-                <a:spcPct val="105000"/>
-              </a:lnSpc>
-              <a:buNone/>
-            </a:pPr>
-            <a:r>
-              <a:rPr lang="en-US" sz="1100" dirty="0">
-                <a:solidFill>
-                  <a:srgbClr val="E8ECEF"/>
-                </a:solidFill>
-                <a:latin typeface="Courier New" pitchFamily="34" charset="0"/>
-                <a:ea typeface="Courier New" pitchFamily="34" charset="-122"/>
-                <a:cs typeface="Courier New" pitchFamily="34" charset="-120"/>
-              </a:rPr>
-              <a:t>  </a:t>
-            </a:r>
-            <a:pPr indent="0" marL="0">
-              <a:lnSpc>
-                <a:spcPct val="105000"/>
-              </a:lnSpc>
-              <a:buNone/>
-            </a:pPr>
-            <a:r>
-              <a:rPr lang="en-US" sz="1100" dirty="0">
-                <a:solidFill>
-                  <a:srgbClr val="4DB1FF"/>
-                </a:solidFill>
-                <a:latin typeface="Courier New" pitchFamily="34" charset="0"/>
-                <a:ea typeface="Courier New" pitchFamily="34" charset="-122"/>
-                <a:cs typeface="Courier New" pitchFamily="34" charset="-120"/>
-              </a:rPr>
-              <a:t>expose</a:t>
-            </a:r>
-            <a:pPr indent="0" marL="0">
-              <a:lnSpc>
-                <a:spcPct val="105000"/>
-              </a:lnSpc>
-              <a:buNone/>
-            </a:pPr>
-            <a:r>
-              <a:rPr lang="en-US" sz="1100" dirty="0">
-                <a:solidFill>
-                  <a:srgbClr val="E8ECEF"/>
-                </a:solidFill>
-                <a:latin typeface="Courier New" pitchFamily="34" charset="0"/>
-                <a:ea typeface="Courier New" pitchFamily="34" charset="-122"/>
-                <a:cs typeface="Courier New" pitchFamily="34" charset="-120"/>
-              </a:rPr>
-              <a:t> </a:t>
-            </a:r>
-            <a:pPr indent="0" marL="0">
-              <a:lnSpc>
-                <a:spcPct val="105000"/>
-              </a:lnSpc>
-              <a:buNone/>
-            </a:pPr>
-            <a:r>
-              <a:rPr lang="en-US" sz="1100" dirty="0">
-                <a:solidFill>
-                  <a:srgbClr val="E8ECEF"/>
-                </a:solidFill>
-                <a:latin typeface="Courier New" pitchFamily="34" charset="0"/>
-                <a:ea typeface="Courier New" pitchFamily="34" charset="-122"/>
-                <a:cs typeface="Courier New" pitchFamily="34" charset="-120"/>
-              </a:rPr>
-              <a:t>ZC_PC_METODOPAG_VH</a:t>
-            </a:r>
-            <a:pPr indent="0" marL="0">
-              <a:lnSpc>
-                <a:spcPct val="105000"/>
-              </a:lnSpc>
-              <a:buNone/>
-            </a:pPr>
-            <a:r>
-              <a:rPr lang="en-US" sz="1100" dirty="0">
-                <a:solidFill>
-                  <a:srgbClr val="E8ECEF"/>
-                </a:solidFill>
-                <a:latin typeface="Courier New" pitchFamily="34" charset="0"/>
-                <a:ea typeface="Courier New" pitchFamily="34" charset="-122"/>
-                <a:cs typeface="Courier New" pitchFamily="34" charset="-120"/>
-              </a:rPr>
-              <a:t> </a:t>
-            </a:r>
-            <a:pPr indent="0" marL="0">
-              <a:lnSpc>
-                <a:spcPct val="105000"/>
-              </a:lnSpc>
-              <a:buNone/>
-            </a:pPr>
-            <a:r>
-              <a:rPr lang="en-US" sz="1100" dirty="0">
-                <a:solidFill>
-                  <a:srgbClr val="4DB1FF"/>
-                </a:solidFill>
-                <a:latin typeface="Courier New" pitchFamily="34" charset="0"/>
-                <a:ea typeface="Courier New" pitchFamily="34" charset="-122"/>
-                <a:cs typeface="Courier New" pitchFamily="34" charset="-120"/>
-              </a:rPr>
-              <a:t>as</a:t>
-            </a:r>
-            <a:pPr indent="0" marL="0">
-              <a:lnSpc>
-                <a:spcPct val="105000"/>
-              </a:lnSpc>
-              <a:buNone/>
-            </a:pPr>
-            <a:r>
-              <a:rPr lang="en-US" sz="1100" dirty="0">
-                <a:solidFill>
-                  <a:srgbClr val="E8ECEF"/>
-                </a:solidFill>
-                <a:latin typeface="Courier New" pitchFamily="34" charset="0"/>
-                <a:ea typeface="Courier New" pitchFamily="34" charset="-122"/>
-                <a:cs typeface="Courier New" pitchFamily="34" charset="-120"/>
-              </a:rPr>
-              <a:t> </a:t>
-            </a:r>
-            <a:pPr indent="0" marL="0">
-              <a:lnSpc>
-                <a:spcPct val="105000"/>
-              </a:lnSpc>
-              <a:buNone/>
-            </a:pPr>
-            <a:r>
-              <a:rPr lang="en-US" sz="1100" dirty="0">
-                <a:solidFill>
-                  <a:srgbClr val="E8ECEF"/>
-                </a:solidFill>
-                <a:latin typeface="Courier New" pitchFamily="34" charset="0"/>
-                <a:ea typeface="Courier New" pitchFamily="34" charset="-122"/>
-                <a:cs typeface="Courier New" pitchFamily="34" charset="-120"/>
-              </a:rPr>
-              <a:t>MetodoPagamentoVH</a:t>
-            </a:r>
-            <a:pPr indent="0" marL="0">
-              <a:lnSpc>
-                <a:spcPct val="105000"/>
-              </a:lnSpc>
-              <a:buNone/>
-            </a:pPr>
-            <a:r>
-              <a:rPr lang="en-US" sz="1100" dirty="0">
-                <a:solidFill>
-                  <a:srgbClr val="E8ECEF"/>
-                </a:solidFill>
-                <a:latin typeface="Courier New" pitchFamily="34" charset="0"/>
-                <a:ea typeface="Courier New" pitchFamily="34" charset="-122"/>
-                <a:cs typeface="Courier New" pitchFamily="34" charset="-120"/>
-              </a:rPr>
-              <a:t>;</a:t>
-            </a:r>
-            <a:endParaRPr lang="en-US" sz="1100" dirty="0"/>
-          </a:p>
-          <a:p>
-            <a:pPr indent="0" marL="0">
-              <a:lnSpc>
-                <a:spcPct val="105000"/>
-              </a:lnSpc>
-              <a:buNone/>
-            </a:pPr>
-            <a:r>
-              <a:rPr lang="en-US" sz="1100" dirty="0">
-                <a:solidFill>
-                  <a:srgbClr val="E8ECEF"/>
-                </a:solidFill>
-                <a:latin typeface="Courier New" pitchFamily="34" charset="0"/>
-                <a:ea typeface="Courier New" pitchFamily="34" charset="-122"/>
-                <a:cs typeface="Courier New" pitchFamily="34" charset="-120"/>
-              </a:rPr>
-              <a:t>}</a:t>
-            </a:r>
-            <a:endParaRPr lang="en-US" sz="1100" dirty="0"/>
-          </a:p>
         </p:txBody>
       </p:sp>
       <p:sp>
         <p:nvSpPr>
-          <p:cNvPr id="9" name="Fundo da tabela"/>
+          <p:cNvPr id="12" name="Fundo da tabela"/>
           <p:cNvSpPr/>
           <p:nvPr/>
         </p:nvSpPr>
@@ -8183,7 +8524,7 @@
       </p:graphicFrame>
       <p:sp>
         <p:nvSpPr>
-          <p:cNvPr id="11" name="Cartão"/>
+          <p:cNvPr id="14" name="Cartão"/>
           <p:cNvSpPr/>
           <p:nvPr/>
         </p:nvSpPr>
@@ -8205,7 +8546,7 @@
       </p:sp>
       <p:pic>
         <p:nvPicPr>
-          <p:cNvPr id="12" name="Image 0" descr="hint">    </p:cNvPr>
+          <p:cNvPr id="15" name="Image 0" descr="hint">    </p:cNvPr>
           <p:cNvPicPr>
             <a:picLocks noChangeAspect="1"/>
           </p:cNvPicPr>
@@ -8229,7 +8570,7 @@
       </p:pic>
       <p:sp>
         <p:nvSpPr>
-          <p:cNvPr id="13" name="Text 8"/>
+          <p:cNvPr id="16" name="Text 11"/>
           <p:cNvSpPr txBox="1"/>
           <p:nvPr/>
         </p:nvSpPr>
@@ -8411,7 +8752,7 @@
       </p:sp>
       <p:sp>
         <p:nvSpPr>
-          <p:cNvPr id="5" name="Código"/>
+          <p:cNvPr id="5" name="Editor"/>
           <p:cNvSpPr/>
           <p:nvPr/>
         </p:nvSpPr>
@@ -8426,9 +8767,14 @@
             </a:avLst>
           </a:prstGeom>
           <a:solidFill>
-            <a:srgbClr val="12171C"/>
+            <a:srgbClr val="181818"/>
           </a:solidFill>
-          <a:ln/>
+          <a:ln w="9525">
+            <a:solidFill>
+              <a:srgbClr val="2B2B2B"/>
+            </a:solidFill>
+            <a:prstDash val="solid"/>
+          </a:ln>
           <a:effectLst>
             <a:outerShdw sx="100000" sy="100000" kx="0" ky="0" algn="bl" rotWithShape="0" blurRad="101600" dist="25400" dir="5400000">
               <a:srgbClr val="223548">
@@ -8440,36 +8786,100 @@
       </p:sp>
       <p:sp>
         <p:nvSpPr>
-          <p:cNvPr id="6" name="Text 3"/>
-          <p:cNvSpPr txBox="1"/>
-          <p:nvPr/>
-        </p:nvSpPr>
-        <p:spPr>
-          <a:xfrm>
-            <a:off x="777240" y="1755648"/>
-            <a:ext cx="4663440" cy="256032"/>
+          <p:cNvPr id="6" name="Área do editor"/>
+          <p:cNvSpPr/>
+          <p:nvPr/>
+        </p:nvSpPr>
+        <p:spPr>
+          <a:xfrm>
+            <a:off x="548640" y="1993392"/>
+            <a:ext cx="5120640" cy="4178808"/>
+          </a:xfrm>
+          <a:prstGeom prst="roundRect">
+            <a:avLst>
+              <a:gd name="adj" fmla="val 2188"/>
+            </a:avLst>
+          </a:prstGeom>
+          <a:solidFill>
+            <a:srgbClr val="1F1F1F"/>
+          </a:solidFill>
+          <a:ln/>
+        </p:spPr>
+      </p:sp>
+      <p:sp>
+        <p:nvSpPr>
+          <p:cNvPr id="7" name="Shape 4"/>
+          <p:cNvSpPr/>
+          <p:nvPr/>
+        </p:nvSpPr>
+        <p:spPr>
+          <a:xfrm>
+            <a:off x="557784" y="1993392"/>
+            <a:ext cx="5102352" cy="137160"/>
           </a:xfrm>
           <a:prstGeom prst="rect">
             <a:avLst/>
           </a:prstGeom>
+          <a:solidFill>
+            <a:srgbClr val="1F1F1F"/>
+          </a:solidFill>
+          <a:ln/>
+        </p:spPr>
+      </p:sp>
+      <p:sp>
+        <p:nvSpPr>
+          <p:cNvPr id="8" name="Shape 5"/>
+          <p:cNvSpPr/>
+          <p:nvPr/>
+        </p:nvSpPr>
+        <p:spPr>
+          <a:xfrm>
+            <a:off x="557784" y="1993392"/>
+            <a:ext cx="5102352" cy="0"/>
+          </a:xfrm>
+          <a:prstGeom prst="line">
+            <a:avLst/>
+          </a:prstGeom>
           <a:noFill/>
+          <a:ln w="9525">
+            <a:solidFill>
+              <a:srgbClr val="2B2B2B"/>
+            </a:solidFill>
+            <a:prstDash val="solid"/>
+          </a:ln>
+        </p:spPr>
+      </p:sp>
+      <p:sp>
+        <p:nvSpPr>
+          <p:cNvPr id="9" name="Aba ZC_PC_PEDIDO_APP.bdef.asbdef"/>
+          <p:cNvSpPr/>
+          <p:nvPr/>
+        </p:nvSpPr>
+        <p:spPr>
+          <a:xfrm>
+            <a:off x="640080" y="1719072"/>
+            <a:ext cx="2423160" cy="274320"/>
+          </a:xfrm>
+          <a:prstGeom prst="rect">
+            <a:avLst/>
+          </a:prstGeom>
+          <a:solidFill>
+            <a:srgbClr val="1F1F1F"/>
+          </a:solidFill>
           <a:ln/>
         </p:spPr>
         <p:txBody>
           <a:bodyPr wrap="square" lIns="0" tIns="0" rIns="0" bIns="0" rtlCol="0" anchor="ctr"/>
           <a:lstStyle/>
           <a:p>
-            <a:pPr indent="0" marL="0">
+            <a:pPr algn="ctr" indent="0" marL="0">
               <a:buNone/>
             </a:pPr>
             <a:r>
               <a:rPr lang="en-US" sz="1000" dirty="0">
                 <a:solidFill>
-                  <a:srgbClr val="A9B4BE"/>
-                </a:solidFill>
-                <a:latin typeface="Courier New" pitchFamily="34" charset="0"/>
-                <a:ea typeface="Courier New" pitchFamily="34" charset="-122"/>
-                <a:cs typeface="Courier New" pitchFamily="34" charset="-120"/>
+                  <a:srgbClr val="FFFFFF"/>
+                </a:solidFill>
               </a:rPr>
               <a:t>ZC_PC_PEDIDO_APP.bdef.asbdef</a:t>
             </a:r>
@@ -8479,22 +8889,22 @@
       </p:sp>
       <p:sp>
         <p:nvSpPr>
-          <p:cNvPr id="7" name="Shape 4"/>
+          <p:cNvPr id="10" name="Shape 7"/>
           <p:cNvSpPr/>
           <p:nvPr/>
         </p:nvSpPr>
         <p:spPr>
           <a:xfrm>
-            <a:off x="777240" y="2066544"/>
-            <a:ext cx="4663440" cy="0"/>
+            <a:off x="640080" y="1719072"/>
+            <a:ext cx="2423160" cy="0"/>
           </a:xfrm>
           <a:prstGeom prst="line">
             <a:avLst/>
           </a:prstGeom>
           <a:noFill/>
-          <a:ln w="12700">
+          <a:ln w="19050">
             <a:solidFill>
-              <a:srgbClr val="2E3A46"/>
+              <a:srgbClr val="0078D4"/>
             </a:solidFill>
             <a:prstDash val="solid"/>
           </a:ln>
@@ -8502,14 +8912,14 @@
       </p:sp>
       <p:sp>
         <p:nvSpPr>
-          <p:cNvPr id="8" name="Trecho de código"/>
+          <p:cNvPr id="11" name="Trecho de código"/>
           <p:cNvSpPr txBox="1"/>
           <p:nvPr/>
         </p:nvSpPr>
         <p:spPr>
           <a:xfrm>
-            <a:off x="777240" y="2157984"/>
-            <a:ext cx="4663440" cy="3904488"/>
+            <a:off x="731520" y="2103120"/>
+            <a:ext cx="4800600" cy="3977640"/>
           </a:xfrm>
           <a:prstGeom prst="rect">
             <a:avLst/>
@@ -8530,7 +8940,24 @@
             <a:r>
               <a:rPr lang="en-US" sz="1000" dirty="0">
                 <a:solidFill>
-                  <a:srgbClr val="4DB1FF"/>
+                  <a:srgbClr val="6E7681"/>
+                </a:solidFill>
+                <a:latin typeface="Courier New" pitchFamily="34" charset="0"/>
+                <a:ea typeface="Courier New" pitchFamily="34" charset="-122"/>
+                <a:cs typeface="Courier New" pitchFamily="34" charset="-120"/>
+              </a:rPr>
+              <a:t> 1  </a:t>
+            </a:r>
+            <a:pPr indent="0" marL="0">
+              <a:lnSpc>
+                <a:spcPct val="105000"/>
+              </a:lnSpc>
+              <a:buNone/>
+            </a:pPr>
+            <a:r>
+              <a:rPr lang="en-US" sz="1000" dirty="0">
+                <a:solidFill>
+                  <a:srgbClr val="569CD6"/>
                 </a:solidFill>
                 <a:latin typeface="Courier New" pitchFamily="34" charset="0"/>
                 <a:ea typeface="Courier New" pitchFamily="34" charset="-122"/>
@@ -8547,7 +8974,7 @@
             <a:r>
               <a:rPr lang="en-US" sz="1000" dirty="0">
                 <a:solidFill>
-                  <a:srgbClr val="E8ECEF"/>
+                  <a:srgbClr val="CCCCCC"/>
                 </a:solidFill>
                 <a:latin typeface="Courier New" pitchFamily="34" charset="0"/>
                 <a:ea typeface="Courier New" pitchFamily="34" charset="-122"/>
@@ -8567,7 +8994,24 @@
             <a:r>
               <a:rPr lang="en-US" sz="1000" dirty="0">
                 <a:solidFill>
-                  <a:srgbClr val="4DB1FF"/>
+                  <a:srgbClr val="6E7681"/>
+                </a:solidFill>
+                <a:latin typeface="Courier New" pitchFamily="34" charset="0"/>
+                <a:ea typeface="Courier New" pitchFamily="34" charset="-122"/>
+                <a:cs typeface="Courier New" pitchFamily="34" charset="-120"/>
+              </a:rPr>
+              <a:t> 2  </a:t>
+            </a:r>
+            <a:pPr indent="0" marL="0">
+              <a:lnSpc>
+                <a:spcPct val="105000"/>
+              </a:lnSpc>
+              <a:buNone/>
+            </a:pPr>
+            <a:r>
+              <a:rPr lang="en-US" sz="1000" dirty="0">
+                <a:solidFill>
+                  <a:srgbClr val="569CD6"/>
                 </a:solidFill>
                 <a:latin typeface="Courier New" pitchFamily="34" charset="0"/>
                 <a:ea typeface="Courier New" pitchFamily="34" charset="-122"/>
@@ -8584,13 +9028,13 @@
             <a:r>
               <a:rPr lang="en-US" sz="1000" dirty="0">
                 <a:solidFill>
-                  <a:srgbClr val="E8ECEF"/>
-                </a:solidFill>
-                <a:latin typeface="Courier New" pitchFamily="34" charset="0"/>
-                <a:ea typeface="Courier New" pitchFamily="34" charset="-122"/>
-                <a:cs typeface="Courier New" pitchFamily="34" charset="-120"/>
-              </a:rPr>
-              <a:t> ( </a:t>
+                  <a:srgbClr val="CCCCCC"/>
+                </a:solidFill>
+                <a:latin typeface="Courier New" pitchFamily="34" charset="0"/>
+                <a:ea typeface="Courier New" pitchFamily="34" charset="-122"/>
+                <a:cs typeface="Courier New" pitchFamily="34" charset="-120"/>
+              </a:rPr>
+              <a:t> </a:t>
             </a:r>
             <a:pPr indent="0" marL="0">
               <a:lnSpc>
@@ -8601,7 +9045,41 @@
             <a:r>
               <a:rPr lang="en-US" sz="1000" dirty="0">
                 <a:solidFill>
-                  <a:srgbClr val="FF9F80"/>
+                  <a:srgbClr val="CCCCCC"/>
+                </a:solidFill>
+                <a:latin typeface="Courier New" pitchFamily="34" charset="0"/>
+                <a:ea typeface="Courier New" pitchFamily="34" charset="-122"/>
+                <a:cs typeface="Courier New" pitchFamily="34" charset="-120"/>
+              </a:rPr>
+              <a:t>(</a:t>
+            </a:r>
+            <a:pPr indent="0" marL="0">
+              <a:lnSpc>
+                <a:spcPct val="105000"/>
+              </a:lnSpc>
+              <a:buNone/>
+            </a:pPr>
+            <a:r>
+              <a:rPr lang="en-US" sz="1000" dirty="0">
+                <a:solidFill>
+                  <a:srgbClr val="CCCCCC"/>
+                </a:solidFill>
+                <a:latin typeface="Courier New" pitchFamily="34" charset="0"/>
+                <a:ea typeface="Courier New" pitchFamily="34" charset="-122"/>
+                <a:cs typeface="Courier New" pitchFamily="34" charset="-120"/>
+              </a:rPr>
+              <a:t> </a:t>
+            </a:r>
+            <a:pPr indent="0" marL="0">
+              <a:lnSpc>
+                <a:spcPct val="105000"/>
+              </a:lnSpc>
+              <a:buNone/>
+            </a:pPr>
+            <a:r>
+              <a:rPr lang="en-US" sz="1000" dirty="0">
+                <a:solidFill>
+                  <a:srgbClr val="B5CEA8"/>
                 </a:solidFill>
                 <a:latin typeface="Courier New" pitchFamily="34" charset="0"/>
                 <a:ea typeface="Courier New" pitchFamily="34" charset="-122"/>
@@ -8618,13 +9096,30 @@
             <a:r>
               <a:rPr lang="en-US" sz="1000" dirty="0">
                 <a:solidFill>
-                  <a:srgbClr val="E8ECEF"/>
-                </a:solidFill>
-                <a:latin typeface="Courier New" pitchFamily="34" charset="0"/>
-                <a:ea typeface="Courier New" pitchFamily="34" charset="-122"/>
-                <a:cs typeface="Courier New" pitchFamily="34" charset="-120"/>
-              </a:rPr>
-              <a:t> );</a:t>
+                  <a:srgbClr val="CCCCCC"/>
+                </a:solidFill>
+                <a:latin typeface="Courier New" pitchFamily="34" charset="0"/>
+                <a:ea typeface="Courier New" pitchFamily="34" charset="-122"/>
+                <a:cs typeface="Courier New" pitchFamily="34" charset="-120"/>
+              </a:rPr>
+              <a:t> </a:t>
+            </a:r>
+            <a:pPr indent="0" marL="0">
+              <a:lnSpc>
+                <a:spcPct val="105000"/>
+              </a:lnSpc>
+              <a:buNone/>
+            </a:pPr>
+            <a:r>
+              <a:rPr lang="en-US" sz="1000" dirty="0">
+                <a:solidFill>
+                  <a:srgbClr val="CCCCCC"/>
+                </a:solidFill>
+                <a:latin typeface="Courier New" pitchFamily="34" charset="0"/>
+                <a:ea typeface="Courier New" pitchFamily="34" charset="-122"/>
+                <a:cs typeface="Courier New" pitchFamily="34" charset="-120"/>
+              </a:rPr>
+              <a:t>);</a:t>
             </a:r>
             <a:endParaRPr lang="en-US" sz="1000" dirty="0"/>
           </a:p>
@@ -8638,7 +9133,24 @@
             <a:r>
               <a:rPr lang="en-US" sz="1000" dirty="0">
                 <a:solidFill>
-                  <a:srgbClr val="4DB1FF"/>
+                  <a:srgbClr val="6E7681"/>
+                </a:solidFill>
+                <a:latin typeface="Courier New" pitchFamily="34" charset="0"/>
+                <a:ea typeface="Courier New" pitchFamily="34" charset="-122"/>
+                <a:cs typeface="Courier New" pitchFamily="34" charset="-120"/>
+              </a:rPr>
+              <a:t> 3  </a:t>
+            </a:r>
+            <a:pPr indent="0" marL="0">
+              <a:lnSpc>
+                <a:spcPct val="105000"/>
+              </a:lnSpc>
+              <a:buNone/>
+            </a:pPr>
+            <a:r>
+              <a:rPr lang="en-US" sz="1000" dirty="0">
+                <a:solidFill>
+                  <a:srgbClr val="569CD6"/>
                 </a:solidFill>
                 <a:latin typeface="Courier New" pitchFamily="34" charset="0"/>
                 <a:ea typeface="Courier New" pitchFamily="34" charset="-122"/>
@@ -8655,7 +9167,7 @@
             <a:r>
               <a:rPr lang="en-US" sz="1000" dirty="0">
                 <a:solidFill>
-                  <a:srgbClr val="E8ECEF"/>
+                  <a:srgbClr val="CCCCCC"/>
                 </a:solidFill>
                 <a:latin typeface="Courier New" pitchFamily="34" charset="0"/>
                 <a:ea typeface="Courier New" pitchFamily="34" charset="-122"/>
@@ -8672,7 +9184,7 @@
             <a:r>
               <a:rPr lang="en-US" sz="1000" dirty="0">
                 <a:solidFill>
-                  <a:srgbClr val="4DB1FF"/>
+                  <a:srgbClr val="569CD6"/>
                 </a:solidFill>
                 <a:latin typeface="Courier New" pitchFamily="34" charset="0"/>
                 <a:ea typeface="Courier New" pitchFamily="34" charset="-122"/>
@@ -8689,7 +9201,7 @@
             <a:r>
               <a:rPr lang="en-US" sz="1000" dirty="0">
                 <a:solidFill>
-                  <a:srgbClr val="E8ECEF"/>
+                  <a:srgbClr val="CCCCCC"/>
                 </a:solidFill>
                 <a:latin typeface="Courier New" pitchFamily="34" charset="0"/>
                 <a:ea typeface="Courier New" pitchFamily="34" charset="-122"/>
@@ -8709,7 +9221,24 @@
             <a:r>
               <a:rPr lang="en-US" sz="1000" dirty="0">
                 <a:solidFill>
-                  <a:srgbClr val="4DB1FF"/>
+                  <a:srgbClr val="6E7681"/>
+                </a:solidFill>
+                <a:latin typeface="Courier New" pitchFamily="34" charset="0"/>
+                <a:ea typeface="Courier New" pitchFamily="34" charset="-122"/>
+                <a:cs typeface="Courier New" pitchFamily="34" charset="-120"/>
+              </a:rPr>
+              <a:t> 4  </a:t>
+            </a:r>
+            <a:pPr indent="0" marL="0">
+              <a:lnSpc>
+                <a:spcPct val="105000"/>
+              </a:lnSpc>
+              <a:buNone/>
+            </a:pPr>
+            <a:r>
+              <a:rPr lang="en-US" sz="1000" dirty="0">
+                <a:solidFill>
+                  <a:srgbClr val="569CD6"/>
                 </a:solidFill>
                 <a:latin typeface="Courier New" pitchFamily="34" charset="0"/>
                 <a:ea typeface="Courier New" pitchFamily="34" charset="-122"/>
@@ -8726,7 +9255,7 @@
             <a:r>
               <a:rPr lang="en-US" sz="1000" dirty="0">
                 <a:solidFill>
-                  <a:srgbClr val="E8ECEF"/>
+                  <a:srgbClr val="CCCCCC"/>
                 </a:solidFill>
                 <a:latin typeface="Courier New" pitchFamily="34" charset="0"/>
                 <a:ea typeface="Courier New" pitchFamily="34" charset="-122"/>
@@ -8743,7 +9272,7 @@
             <a:r>
               <a:rPr lang="en-US" sz="1000" dirty="0">
                 <a:solidFill>
-                  <a:srgbClr val="4DB1FF"/>
+                  <a:srgbClr val="569CD6"/>
                 </a:solidFill>
                 <a:latin typeface="Courier New" pitchFamily="34" charset="0"/>
                 <a:ea typeface="Courier New" pitchFamily="34" charset="-122"/>
@@ -8760,7 +9289,7 @@
             <a:r>
               <a:rPr lang="en-US" sz="1000" dirty="0">
                 <a:solidFill>
-                  <a:srgbClr val="E8ECEF"/>
+                  <a:srgbClr val="CCCCCC"/>
                 </a:solidFill>
                 <a:latin typeface="Courier New" pitchFamily="34" charset="0"/>
                 <a:ea typeface="Courier New" pitchFamily="34" charset="-122"/>
@@ -8777,7 +9306,7 @@
             <a:r>
               <a:rPr lang="en-US" sz="1000" dirty="0">
                 <a:solidFill>
-                  <a:srgbClr val="4DB1FF"/>
+                  <a:srgbClr val="569CD6"/>
                 </a:solidFill>
                 <a:latin typeface="Courier New" pitchFamily="34" charset="0"/>
                 <a:ea typeface="Courier New" pitchFamily="34" charset="-122"/>
@@ -8794,7 +9323,7 @@
             <a:r>
               <a:rPr lang="en-US" sz="1000" dirty="0">
                 <a:solidFill>
-                  <a:srgbClr val="E8ECEF"/>
+                  <a:srgbClr val="CCCCCC"/>
                 </a:solidFill>
                 <a:latin typeface="Courier New" pitchFamily="34" charset="0"/>
                 <a:ea typeface="Courier New" pitchFamily="34" charset="-122"/>
@@ -8814,7 +9343,61 @@
             <a:r>
               <a:rPr lang="en-US" sz="1000" dirty="0">
                 <a:solidFill>
-                  <a:srgbClr val="E8ECEF"/>
+                  <a:srgbClr val="6E7681"/>
+                </a:solidFill>
+                <a:latin typeface="Courier New" pitchFamily="34" charset="0"/>
+                <a:ea typeface="Courier New" pitchFamily="34" charset="-122"/>
+                <a:cs typeface="Courier New" pitchFamily="34" charset="-120"/>
+              </a:rPr>
+              <a:t> 5  </a:t>
+            </a:r>
+            <a:endParaRPr lang="en-US" sz="1000" dirty="0"/>
+          </a:p>
+          <a:p>
+            <a:pPr indent="0" marL="0">
+              <a:lnSpc>
+                <a:spcPct val="105000"/>
+              </a:lnSpc>
+              <a:buNone/>
+            </a:pPr>
+            <a:r>
+              <a:rPr lang="en-US" sz="1000" dirty="0">
+                <a:solidFill>
+                  <a:srgbClr val="6E7681"/>
+                </a:solidFill>
+                <a:latin typeface="Courier New" pitchFamily="34" charset="0"/>
+                <a:ea typeface="Courier New" pitchFamily="34" charset="-122"/>
+                <a:cs typeface="Courier New" pitchFamily="34" charset="-120"/>
+              </a:rPr>
+              <a:t> 6  </a:t>
+            </a:r>
+            <a:pPr indent="0" marL="0">
+              <a:lnSpc>
+                <a:spcPct val="105000"/>
+              </a:lnSpc>
+              <a:buNone/>
+            </a:pPr>
+            <a:r>
+              <a:rPr lang="en-US" sz="1000" dirty="0">
+                <a:solidFill>
+                  <a:srgbClr val="569CD6"/>
+                </a:solidFill>
+                <a:latin typeface="Courier New" pitchFamily="34" charset="0"/>
+                <a:ea typeface="Courier New" pitchFamily="34" charset="-122"/>
+                <a:cs typeface="Courier New" pitchFamily="34" charset="-120"/>
+              </a:rPr>
+              <a:t>define</a:t>
+            </a:r>
+            <a:pPr indent="0" marL="0">
+              <a:lnSpc>
+                <a:spcPct val="105000"/>
+              </a:lnSpc>
+              <a:buNone/>
+            </a:pPr>
+            <a:r>
+              <a:rPr lang="en-US" sz="1000" dirty="0">
+                <a:solidFill>
+                  <a:srgbClr val="CCCCCC"/>
                 </a:solidFill>
                 <a:latin typeface="Courier New" pitchFamily="34" charset="0"/>
                 <a:ea typeface="Courier New" pitchFamily="34" charset="-122"/>
@@ -8822,6 +9405,159 @@
               </a:rPr>
               <a:t> </a:t>
             </a:r>
+            <a:pPr indent="0" marL="0">
+              <a:lnSpc>
+                <a:spcPct val="105000"/>
+              </a:lnSpc>
+              <a:buNone/>
+            </a:pPr>
+            <a:r>
+              <a:rPr lang="en-US" sz="1000" dirty="0">
+                <a:solidFill>
+                  <a:srgbClr val="569CD6"/>
+                </a:solidFill>
+                <a:latin typeface="Courier New" pitchFamily="34" charset="0"/>
+                <a:ea typeface="Courier New" pitchFamily="34" charset="-122"/>
+                <a:cs typeface="Courier New" pitchFamily="34" charset="-120"/>
+              </a:rPr>
+              <a:t>behavior</a:t>
+            </a:r>
+            <a:pPr indent="0" marL="0">
+              <a:lnSpc>
+                <a:spcPct val="105000"/>
+              </a:lnSpc>
+              <a:buNone/>
+            </a:pPr>
+            <a:r>
+              <a:rPr lang="en-US" sz="1000" dirty="0">
+                <a:solidFill>
+                  <a:srgbClr val="CCCCCC"/>
+                </a:solidFill>
+                <a:latin typeface="Courier New" pitchFamily="34" charset="0"/>
+                <a:ea typeface="Courier New" pitchFamily="34" charset="-122"/>
+                <a:cs typeface="Courier New" pitchFamily="34" charset="-120"/>
+              </a:rPr>
+              <a:t> </a:t>
+            </a:r>
+            <a:pPr indent="0" marL="0">
+              <a:lnSpc>
+                <a:spcPct val="105000"/>
+              </a:lnSpc>
+              <a:buNone/>
+            </a:pPr>
+            <a:r>
+              <a:rPr lang="en-US" sz="1000" dirty="0">
+                <a:solidFill>
+                  <a:srgbClr val="569CD6"/>
+                </a:solidFill>
+                <a:latin typeface="Courier New" pitchFamily="34" charset="0"/>
+                <a:ea typeface="Courier New" pitchFamily="34" charset="-122"/>
+                <a:cs typeface="Courier New" pitchFamily="34" charset="-120"/>
+              </a:rPr>
+              <a:t>for</a:t>
+            </a:r>
+            <a:pPr indent="0" marL="0">
+              <a:lnSpc>
+                <a:spcPct val="105000"/>
+              </a:lnSpc>
+              <a:buNone/>
+            </a:pPr>
+            <a:r>
+              <a:rPr lang="en-US" sz="1000" dirty="0">
+                <a:solidFill>
+                  <a:srgbClr val="CCCCCC"/>
+                </a:solidFill>
+                <a:latin typeface="Courier New" pitchFamily="34" charset="0"/>
+                <a:ea typeface="Courier New" pitchFamily="34" charset="-122"/>
+                <a:cs typeface="Courier New" pitchFamily="34" charset="-120"/>
+              </a:rPr>
+              <a:t> </a:t>
+            </a:r>
+            <a:pPr indent="0" marL="0">
+              <a:lnSpc>
+                <a:spcPct val="105000"/>
+              </a:lnSpc>
+              <a:buNone/>
+            </a:pPr>
+            <a:r>
+              <a:rPr lang="en-US" sz="1000" dirty="0">
+                <a:solidFill>
+                  <a:srgbClr val="4EC9B0"/>
+                </a:solidFill>
+                <a:latin typeface="Courier New" pitchFamily="34" charset="0"/>
+                <a:ea typeface="Courier New" pitchFamily="34" charset="-122"/>
+                <a:cs typeface="Courier New" pitchFamily="34" charset="-120"/>
+              </a:rPr>
+              <a:t>ZC_PC_PEDIDO_APP</a:t>
+            </a:r>
+            <a:pPr indent="0" marL="0">
+              <a:lnSpc>
+                <a:spcPct val="105000"/>
+              </a:lnSpc>
+              <a:buNone/>
+            </a:pPr>
+            <a:r>
+              <a:rPr lang="en-US" sz="1000" dirty="0">
+                <a:solidFill>
+                  <a:srgbClr val="CCCCCC"/>
+                </a:solidFill>
+                <a:latin typeface="Courier New" pitchFamily="34" charset="0"/>
+                <a:ea typeface="Courier New" pitchFamily="34" charset="-122"/>
+                <a:cs typeface="Courier New" pitchFamily="34" charset="-120"/>
+              </a:rPr>
+              <a:t> </a:t>
+            </a:r>
+            <a:pPr indent="0" marL="0">
+              <a:lnSpc>
+                <a:spcPct val="105000"/>
+              </a:lnSpc>
+              <a:buNone/>
+            </a:pPr>
+            <a:r>
+              <a:rPr lang="en-US" sz="1000" dirty="0">
+                <a:solidFill>
+                  <a:srgbClr val="CCCCCC"/>
+                </a:solidFill>
+                <a:latin typeface="Courier New" pitchFamily="34" charset="0"/>
+                <a:ea typeface="Courier New" pitchFamily="34" charset="-122"/>
+                <a:cs typeface="Courier New" pitchFamily="34" charset="-120"/>
+              </a:rPr>
+              <a:t>alias</a:t>
+            </a:r>
+            <a:pPr indent="0" marL="0">
+              <a:lnSpc>
+                <a:spcPct val="105000"/>
+              </a:lnSpc>
+              <a:buNone/>
+            </a:pPr>
+            <a:r>
+              <a:rPr lang="en-US" sz="1000" dirty="0">
+                <a:solidFill>
+                  <a:srgbClr val="CCCCCC"/>
+                </a:solidFill>
+                <a:latin typeface="Courier New" pitchFamily="34" charset="0"/>
+                <a:ea typeface="Courier New" pitchFamily="34" charset="-122"/>
+                <a:cs typeface="Courier New" pitchFamily="34" charset="-120"/>
+              </a:rPr>
+              <a:t> </a:t>
+            </a:r>
+            <a:pPr indent="0" marL="0">
+              <a:lnSpc>
+                <a:spcPct val="105000"/>
+              </a:lnSpc>
+              <a:buNone/>
+            </a:pPr>
+            <a:r>
+              <a:rPr lang="en-US" sz="1000" dirty="0">
+                <a:solidFill>
+                  <a:srgbClr val="CCCCCC"/>
+                </a:solidFill>
+                <a:latin typeface="Courier New" pitchFamily="34" charset="0"/>
+                <a:ea typeface="Courier New" pitchFamily="34" charset="-122"/>
+                <a:cs typeface="Courier New" pitchFamily="34" charset="-120"/>
+              </a:rPr>
+              <a:t>Pedido</a:t>
+            </a:r>
             <a:endParaRPr lang="en-US" sz="1000" dirty="0"/>
           </a:p>
           <a:p>
@@ -8834,13 +9570,13 @@
             <a:r>
               <a:rPr lang="en-US" sz="1000" dirty="0">
                 <a:solidFill>
-                  <a:srgbClr val="4DB1FF"/>
-                </a:solidFill>
-                <a:latin typeface="Courier New" pitchFamily="34" charset="0"/>
-                <a:ea typeface="Courier New" pitchFamily="34" charset="-122"/>
-                <a:cs typeface="Courier New" pitchFamily="34" charset="-120"/>
-              </a:rPr>
-              <a:t>define</a:t>
+                  <a:srgbClr val="6E7681"/>
+                </a:solidFill>
+                <a:latin typeface="Courier New" pitchFamily="34" charset="0"/>
+                <a:ea typeface="Courier New" pitchFamily="34" charset="-122"/>
+                <a:cs typeface="Courier New" pitchFamily="34" charset="-120"/>
+              </a:rPr>
+              <a:t> 7  </a:t>
             </a:r>
             <a:pPr indent="0" marL="0">
               <a:lnSpc>
@@ -8851,7 +9587,24 @@
             <a:r>
               <a:rPr lang="en-US" sz="1000" dirty="0">
                 <a:solidFill>
-                  <a:srgbClr val="E8ECEF"/>
+                  <a:srgbClr val="569CD6"/>
+                </a:solidFill>
+                <a:latin typeface="Courier New" pitchFamily="34" charset="0"/>
+                <a:ea typeface="Courier New" pitchFamily="34" charset="-122"/>
+                <a:cs typeface="Courier New" pitchFamily="34" charset="-120"/>
+              </a:rPr>
+              <a:t>use</a:t>
+            </a:r>
+            <a:pPr indent="0" marL="0">
+              <a:lnSpc>
+                <a:spcPct val="105000"/>
+              </a:lnSpc>
+              <a:buNone/>
+            </a:pPr>
+            <a:r>
+              <a:rPr lang="en-US" sz="1000" dirty="0">
+                <a:solidFill>
+                  <a:srgbClr val="CCCCCC"/>
                 </a:solidFill>
                 <a:latin typeface="Courier New" pitchFamily="34" charset="0"/>
                 <a:ea typeface="Courier New" pitchFamily="34" charset="-122"/>
@@ -8868,14 +9621,17 @@
             <a:r>
               <a:rPr lang="en-US" sz="1000" dirty="0">
                 <a:solidFill>
-                  <a:srgbClr val="4DB1FF"/>
-                </a:solidFill>
-                <a:latin typeface="Courier New" pitchFamily="34" charset="0"/>
-                <a:ea typeface="Courier New" pitchFamily="34" charset="-122"/>
-                <a:cs typeface="Courier New" pitchFamily="34" charset="-120"/>
-              </a:rPr>
-              <a:t>behavior</a:t>
-            </a:r>
+                  <a:srgbClr val="569CD6"/>
+                </a:solidFill>
+                <a:latin typeface="Courier New" pitchFamily="34" charset="0"/>
+                <a:ea typeface="Courier New" pitchFamily="34" charset="-122"/>
+                <a:cs typeface="Courier New" pitchFamily="34" charset="-120"/>
+              </a:rPr>
+              <a:t>etag</a:t>
+            </a:r>
+            <a:endParaRPr lang="en-US" sz="1000" dirty="0"/>
+          </a:p>
+          <a:p>
             <a:pPr indent="0" marL="0">
               <a:lnSpc>
                 <a:spcPct val="105000"/>
@@ -8885,7 +9641,95 @@
             <a:r>
               <a:rPr lang="en-US" sz="1000" dirty="0">
                 <a:solidFill>
-                  <a:srgbClr val="E8ECEF"/>
+                  <a:srgbClr val="6E7681"/>
+                </a:solidFill>
+                <a:latin typeface="Courier New" pitchFamily="34" charset="0"/>
+                <a:ea typeface="Courier New" pitchFamily="34" charset="-122"/>
+                <a:cs typeface="Courier New" pitchFamily="34" charset="-120"/>
+              </a:rPr>
+              <a:t> 8  </a:t>
+            </a:r>
+            <a:pPr indent="0" marL="0">
+              <a:lnSpc>
+                <a:spcPct val="105000"/>
+              </a:lnSpc>
+              <a:buNone/>
+            </a:pPr>
+            <a:r>
+              <a:rPr lang="en-US" sz="1000" dirty="0">
+                <a:solidFill>
+                  <a:srgbClr val="CCCCCC"/>
+                </a:solidFill>
+                <a:latin typeface="Courier New" pitchFamily="34" charset="0"/>
+                <a:ea typeface="Courier New" pitchFamily="34" charset="-122"/>
+                <a:cs typeface="Courier New" pitchFamily="34" charset="-120"/>
+              </a:rPr>
+              <a:t>{</a:t>
+            </a:r>
+            <a:endParaRPr lang="en-US" sz="1000" dirty="0"/>
+          </a:p>
+          <a:p>
+            <a:pPr indent="0" marL="0">
+              <a:lnSpc>
+                <a:spcPct val="105000"/>
+              </a:lnSpc>
+              <a:buNone/>
+            </a:pPr>
+            <a:r>
+              <a:rPr lang="en-US" sz="1000" dirty="0">
+                <a:solidFill>
+                  <a:srgbClr val="6E7681"/>
+                </a:solidFill>
+                <a:latin typeface="Courier New" pitchFamily="34" charset="0"/>
+                <a:ea typeface="Courier New" pitchFamily="34" charset="-122"/>
+                <a:cs typeface="Courier New" pitchFamily="34" charset="-120"/>
+              </a:rPr>
+              <a:t> 9  </a:t>
+            </a:r>
+            <a:pPr indent="0" marL="0">
+              <a:lnSpc>
+                <a:spcPct val="105000"/>
+              </a:lnSpc>
+              <a:buNone/>
+            </a:pPr>
+            <a:r>
+              <a:rPr lang="en-US" sz="1000" dirty="0">
+                <a:solidFill>
+                  <a:srgbClr val="CCCCCC"/>
+                </a:solidFill>
+                <a:latin typeface="Courier New" pitchFamily="34" charset="0"/>
+                <a:ea typeface="Courier New" pitchFamily="34" charset="-122"/>
+                <a:cs typeface="Courier New" pitchFamily="34" charset="-120"/>
+              </a:rPr>
+              <a:t>  </a:t>
+            </a:r>
+            <a:pPr indent="0" marL="0">
+              <a:lnSpc>
+                <a:spcPct val="105000"/>
+              </a:lnSpc>
+              <a:buNone/>
+            </a:pPr>
+            <a:r>
+              <a:rPr lang="en-US" sz="1000" dirty="0">
+                <a:solidFill>
+                  <a:srgbClr val="569CD6"/>
+                </a:solidFill>
+                <a:latin typeface="Courier New" pitchFamily="34" charset="0"/>
+                <a:ea typeface="Courier New" pitchFamily="34" charset="-122"/>
+                <a:cs typeface="Courier New" pitchFamily="34" charset="-120"/>
+              </a:rPr>
+              <a:t>use</a:t>
+            </a:r>
+            <a:pPr indent="0" marL="0">
+              <a:lnSpc>
+                <a:spcPct val="105000"/>
+              </a:lnSpc>
+              <a:buNone/>
+            </a:pPr>
+            <a:r>
+              <a:rPr lang="en-US" sz="1000" dirty="0">
+                <a:solidFill>
+                  <a:srgbClr val="CCCCCC"/>
                 </a:solidFill>
                 <a:latin typeface="Courier New" pitchFamily="34" charset="0"/>
                 <a:ea typeface="Courier New" pitchFamily="34" charset="-122"/>
@@ -8902,13 +9746,13 @@
             <a:r>
               <a:rPr lang="en-US" sz="1000" dirty="0">
                 <a:solidFill>
-                  <a:srgbClr val="4DB1FF"/>
-                </a:solidFill>
-                <a:latin typeface="Courier New" pitchFamily="34" charset="0"/>
-                <a:ea typeface="Courier New" pitchFamily="34" charset="-122"/>
-                <a:cs typeface="Courier New" pitchFamily="34" charset="-120"/>
-              </a:rPr>
-              <a:t>for</a:t>
+                  <a:srgbClr val="569CD6"/>
+                </a:solidFill>
+                <a:latin typeface="Courier New" pitchFamily="34" charset="0"/>
+                <a:ea typeface="Courier New" pitchFamily="34" charset="-122"/>
+                <a:cs typeface="Courier New" pitchFamily="34" charset="-120"/>
+              </a:rPr>
+              <a:t>create</a:t>
             </a:r>
             <a:pPr indent="0" marL="0">
               <a:lnSpc>
@@ -8919,7 +9763,78 @@
             <a:r>
               <a:rPr lang="en-US" sz="1000" dirty="0">
                 <a:solidFill>
-                  <a:srgbClr val="E8ECEF"/>
+                  <a:srgbClr val="CCCCCC"/>
+                </a:solidFill>
+                <a:latin typeface="Courier New" pitchFamily="34" charset="0"/>
+                <a:ea typeface="Courier New" pitchFamily="34" charset="-122"/>
+                <a:cs typeface="Courier New" pitchFamily="34" charset="-120"/>
+              </a:rPr>
+              <a:t>;</a:t>
+            </a:r>
+            <a:endParaRPr lang="en-US" sz="1000" dirty="0"/>
+          </a:p>
+          <a:p>
+            <a:pPr indent="0" marL="0">
+              <a:lnSpc>
+                <a:spcPct val="105000"/>
+              </a:lnSpc>
+              <a:buNone/>
+            </a:pPr>
+            <a:r>
+              <a:rPr lang="en-US" sz="1000" dirty="0">
+                <a:solidFill>
+                  <a:srgbClr val="6E7681"/>
+                </a:solidFill>
+                <a:latin typeface="Courier New" pitchFamily="34" charset="0"/>
+                <a:ea typeface="Courier New" pitchFamily="34" charset="-122"/>
+                <a:cs typeface="Courier New" pitchFamily="34" charset="-120"/>
+              </a:rPr>
+              <a:t>10  </a:t>
+            </a:r>
+            <a:pPr indent="0" marL="0">
+              <a:lnSpc>
+                <a:spcPct val="105000"/>
+              </a:lnSpc>
+              <a:buNone/>
+            </a:pPr>
+            <a:r>
+              <a:rPr lang="en-US" sz="1000" dirty="0">
+                <a:solidFill>
+                  <a:srgbClr val="CCCCCC"/>
+                </a:solidFill>
+                <a:latin typeface="Courier New" pitchFamily="34" charset="0"/>
+                <a:ea typeface="Courier New" pitchFamily="34" charset="-122"/>
+                <a:cs typeface="Courier New" pitchFamily="34" charset="-120"/>
+              </a:rPr>
+              <a:t>  </a:t>
+            </a:r>
+            <a:pPr indent="0" marL="0">
+              <a:lnSpc>
+                <a:spcPct val="105000"/>
+              </a:lnSpc>
+              <a:buNone/>
+            </a:pPr>
+            <a:r>
+              <a:rPr lang="en-US" sz="1000" dirty="0">
+                <a:solidFill>
+                  <a:srgbClr val="569CD6"/>
+                </a:solidFill>
+                <a:latin typeface="Courier New" pitchFamily="34" charset="0"/>
+                <a:ea typeface="Courier New" pitchFamily="34" charset="-122"/>
+                <a:cs typeface="Courier New" pitchFamily="34" charset="-120"/>
+              </a:rPr>
+              <a:t>use</a:t>
+            </a:r>
+            <a:pPr indent="0" marL="0">
+              <a:lnSpc>
+                <a:spcPct val="105000"/>
+              </a:lnSpc>
+              <a:buNone/>
+            </a:pPr>
+            <a:r>
+              <a:rPr lang="en-US" sz="1000" dirty="0">
+                <a:solidFill>
+                  <a:srgbClr val="CCCCCC"/>
                 </a:solidFill>
                 <a:latin typeface="Courier New" pitchFamily="34" charset="0"/>
                 <a:ea typeface="Courier New" pitchFamily="34" charset="-122"/>
@@ -8936,13 +9851,13 @@
             <a:r>
               <a:rPr lang="en-US" sz="1000" dirty="0">
                 <a:solidFill>
-                  <a:srgbClr val="E8ECEF"/>
-                </a:solidFill>
-                <a:latin typeface="Courier New" pitchFamily="34" charset="0"/>
-                <a:ea typeface="Courier New" pitchFamily="34" charset="-122"/>
-                <a:cs typeface="Courier New" pitchFamily="34" charset="-120"/>
-              </a:rPr>
-              <a:t>ZC_PC_PEDIDO_APP</a:t>
+                  <a:srgbClr val="569CD6"/>
+                </a:solidFill>
+                <a:latin typeface="Courier New" pitchFamily="34" charset="0"/>
+                <a:ea typeface="Courier New" pitchFamily="34" charset="-122"/>
+                <a:cs typeface="Courier New" pitchFamily="34" charset="-120"/>
+              </a:rPr>
+              <a:t>update</a:t>
             </a:r>
             <a:pPr indent="0" marL="0">
               <a:lnSpc>
@@ -8953,7 +9868,78 @@
             <a:r>
               <a:rPr lang="en-US" sz="1000" dirty="0">
                 <a:solidFill>
-                  <a:srgbClr val="E8ECEF"/>
+                  <a:srgbClr val="CCCCCC"/>
+                </a:solidFill>
+                <a:latin typeface="Courier New" pitchFamily="34" charset="0"/>
+                <a:ea typeface="Courier New" pitchFamily="34" charset="-122"/>
+                <a:cs typeface="Courier New" pitchFamily="34" charset="-120"/>
+              </a:rPr>
+              <a:t>;</a:t>
+            </a:r>
+            <a:endParaRPr lang="en-US" sz="1000" dirty="0"/>
+          </a:p>
+          <a:p>
+            <a:pPr indent="0" marL="0">
+              <a:lnSpc>
+                <a:spcPct val="105000"/>
+              </a:lnSpc>
+              <a:buNone/>
+            </a:pPr>
+            <a:r>
+              <a:rPr lang="en-US" sz="1000" dirty="0">
+                <a:solidFill>
+                  <a:srgbClr val="6E7681"/>
+                </a:solidFill>
+                <a:latin typeface="Courier New" pitchFamily="34" charset="0"/>
+                <a:ea typeface="Courier New" pitchFamily="34" charset="-122"/>
+                <a:cs typeface="Courier New" pitchFamily="34" charset="-120"/>
+              </a:rPr>
+              <a:t>11  </a:t>
+            </a:r>
+            <a:pPr indent="0" marL="0">
+              <a:lnSpc>
+                <a:spcPct val="105000"/>
+              </a:lnSpc>
+              <a:buNone/>
+            </a:pPr>
+            <a:r>
+              <a:rPr lang="en-US" sz="1000" dirty="0">
+                <a:solidFill>
+                  <a:srgbClr val="CCCCCC"/>
+                </a:solidFill>
+                <a:latin typeface="Courier New" pitchFamily="34" charset="0"/>
+                <a:ea typeface="Courier New" pitchFamily="34" charset="-122"/>
+                <a:cs typeface="Courier New" pitchFamily="34" charset="-120"/>
+              </a:rPr>
+              <a:t>  </a:t>
+            </a:r>
+            <a:pPr indent="0" marL="0">
+              <a:lnSpc>
+                <a:spcPct val="105000"/>
+              </a:lnSpc>
+              <a:buNone/>
+            </a:pPr>
+            <a:r>
+              <a:rPr lang="en-US" sz="1000" dirty="0">
+                <a:solidFill>
+                  <a:srgbClr val="569CD6"/>
+                </a:solidFill>
+                <a:latin typeface="Courier New" pitchFamily="34" charset="0"/>
+                <a:ea typeface="Courier New" pitchFamily="34" charset="-122"/>
+                <a:cs typeface="Courier New" pitchFamily="34" charset="-120"/>
+              </a:rPr>
+              <a:t>use</a:t>
+            </a:r>
+            <a:pPr indent="0" marL="0">
+              <a:lnSpc>
+                <a:spcPct val="105000"/>
+              </a:lnSpc>
+              <a:buNone/>
+            </a:pPr>
+            <a:r>
+              <a:rPr lang="en-US" sz="1000" dirty="0">
+                <a:solidFill>
+                  <a:srgbClr val="CCCCCC"/>
                 </a:solidFill>
                 <a:latin typeface="Courier New" pitchFamily="34" charset="0"/>
                 <a:ea typeface="Courier New" pitchFamily="34" charset="-122"/>
@@ -8970,13 +9956,13 @@
             <a:r>
               <a:rPr lang="en-US" sz="1000" dirty="0">
                 <a:solidFill>
-                  <a:srgbClr val="E8ECEF"/>
-                </a:solidFill>
-                <a:latin typeface="Courier New" pitchFamily="34" charset="0"/>
-                <a:ea typeface="Courier New" pitchFamily="34" charset="-122"/>
-                <a:cs typeface="Courier New" pitchFamily="34" charset="-120"/>
-              </a:rPr>
-              <a:t>alias</a:t>
+                  <a:srgbClr val="569CD6"/>
+                </a:solidFill>
+                <a:latin typeface="Courier New" pitchFamily="34" charset="0"/>
+                <a:ea typeface="Courier New" pitchFamily="34" charset="-122"/>
+                <a:cs typeface="Courier New" pitchFamily="34" charset="-120"/>
+              </a:rPr>
+              <a:t>delete</a:t>
             </a:r>
             <a:pPr indent="0" marL="0">
               <a:lnSpc>
@@ -8987,7 +9973,78 @@
             <a:r>
               <a:rPr lang="en-US" sz="1000" dirty="0">
                 <a:solidFill>
-                  <a:srgbClr val="E8ECEF"/>
+                  <a:srgbClr val="CCCCCC"/>
+                </a:solidFill>
+                <a:latin typeface="Courier New" pitchFamily="34" charset="0"/>
+                <a:ea typeface="Courier New" pitchFamily="34" charset="-122"/>
+                <a:cs typeface="Courier New" pitchFamily="34" charset="-120"/>
+              </a:rPr>
+              <a:t>;</a:t>
+            </a:r>
+            <a:endParaRPr lang="en-US" sz="1000" dirty="0"/>
+          </a:p>
+          <a:p>
+            <a:pPr indent="0" marL="0">
+              <a:lnSpc>
+                <a:spcPct val="105000"/>
+              </a:lnSpc>
+              <a:buNone/>
+            </a:pPr>
+            <a:r>
+              <a:rPr lang="en-US" sz="1000" dirty="0">
+                <a:solidFill>
+                  <a:srgbClr val="6E7681"/>
+                </a:solidFill>
+                <a:latin typeface="Courier New" pitchFamily="34" charset="0"/>
+                <a:ea typeface="Courier New" pitchFamily="34" charset="-122"/>
+                <a:cs typeface="Courier New" pitchFamily="34" charset="-120"/>
+              </a:rPr>
+              <a:t>12  </a:t>
+            </a:r>
+            <a:pPr indent="0" marL="0">
+              <a:lnSpc>
+                <a:spcPct val="105000"/>
+              </a:lnSpc>
+              <a:buNone/>
+            </a:pPr>
+            <a:r>
+              <a:rPr lang="en-US" sz="1000" dirty="0">
+                <a:solidFill>
+                  <a:srgbClr val="CCCCCC"/>
+                </a:solidFill>
+                <a:latin typeface="Courier New" pitchFamily="34" charset="0"/>
+                <a:ea typeface="Courier New" pitchFamily="34" charset="-122"/>
+                <a:cs typeface="Courier New" pitchFamily="34" charset="-120"/>
+              </a:rPr>
+              <a:t>  </a:t>
+            </a:r>
+            <a:pPr indent="0" marL="0">
+              <a:lnSpc>
+                <a:spcPct val="105000"/>
+              </a:lnSpc>
+              <a:buNone/>
+            </a:pPr>
+            <a:r>
+              <a:rPr lang="en-US" sz="1000" dirty="0">
+                <a:solidFill>
+                  <a:srgbClr val="569CD6"/>
+                </a:solidFill>
+                <a:latin typeface="Courier New" pitchFamily="34" charset="0"/>
+                <a:ea typeface="Courier New" pitchFamily="34" charset="-122"/>
+                <a:cs typeface="Courier New" pitchFamily="34" charset="-120"/>
+              </a:rPr>
+              <a:t>use</a:t>
+            </a:r>
+            <a:pPr indent="0" marL="0">
+              <a:lnSpc>
+                <a:spcPct val="105000"/>
+              </a:lnSpc>
+              <a:buNone/>
+            </a:pPr>
+            <a:r>
+              <a:rPr lang="en-US" sz="1000" dirty="0">
+                <a:solidFill>
+                  <a:srgbClr val="CCCCCC"/>
                 </a:solidFill>
                 <a:latin typeface="Courier New" pitchFamily="34" charset="0"/>
                 <a:ea typeface="Courier New" pitchFamily="34" charset="-122"/>
@@ -9004,13 +10061,64 @@
             <a:r>
               <a:rPr lang="en-US" sz="1000" dirty="0">
                 <a:solidFill>
-                  <a:srgbClr val="E8ECEF"/>
-                </a:solidFill>
-                <a:latin typeface="Courier New" pitchFamily="34" charset="0"/>
-                <a:ea typeface="Courier New" pitchFamily="34" charset="-122"/>
-                <a:cs typeface="Courier New" pitchFamily="34" charset="-120"/>
-              </a:rPr>
-              <a:t>Pedido</a:t>
+                  <a:srgbClr val="569CD6"/>
+                </a:solidFill>
+                <a:latin typeface="Courier New" pitchFamily="34" charset="0"/>
+                <a:ea typeface="Courier New" pitchFamily="34" charset="-122"/>
+                <a:cs typeface="Courier New" pitchFamily="34" charset="-120"/>
+              </a:rPr>
+              <a:t>action</a:t>
+            </a:r>
+            <a:pPr indent="0" marL="0">
+              <a:lnSpc>
+                <a:spcPct val="105000"/>
+              </a:lnSpc>
+              <a:buNone/>
+            </a:pPr>
+            <a:r>
+              <a:rPr lang="en-US" sz="1000" dirty="0">
+                <a:solidFill>
+                  <a:srgbClr val="CCCCCC"/>
+                </a:solidFill>
+                <a:latin typeface="Courier New" pitchFamily="34" charset="0"/>
+                <a:ea typeface="Courier New" pitchFamily="34" charset="-122"/>
+                <a:cs typeface="Courier New" pitchFamily="34" charset="-120"/>
+              </a:rPr>
+              <a:t> </a:t>
+            </a:r>
+            <a:pPr indent="0" marL="0">
+              <a:lnSpc>
+                <a:spcPct val="105000"/>
+              </a:lnSpc>
+              <a:buNone/>
+            </a:pPr>
+            <a:r>
+              <a:rPr lang="en-US" sz="1000" dirty="0">
+                <a:solidFill>
+                  <a:srgbClr val="CCCCCC"/>
+                </a:solidFill>
+                <a:latin typeface="Courier New" pitchFamily="34" charset="0"/>
+                <a:ea typeface="Courier New" pitchFamily="34" charset="-122"/>
+                <a:cs typeface="Courier New" pitchFamily="34" charset="-120"/>
+              </a:rPr>
+              <a:t>Edit</a:t>
+            </a:r>
+            <a:pPr indent="0" marL="0">
+              <a:lnSpc>
+                <a:spcPct val="105000"/>
+              </a:lnSpc>
+              <a:buNone/>
+            </a:pPr>
+            <a:r>
+              <a:rPr lang="en-US" sz="1000" dirty="0">
+                <a:solidFill>
+                  <a:srgbClr val="CCCCCC"/>
+                </a:solidFill>
+                <a:latin typeface="Courier New" pitchFamily="34" charset="0"/>
+                <a:ea typeface="Courier New" pitchFamily="34" charset="-122"/>
+                <a:cs typeface="Courier New" pitchFamily="34" charset="-120"/>
+              </a:rPr>
+              <a:t>;</a:t>
             </a:r>
             <a:endParaRPr lang="en-US" sz="1000" dirty="0"/>
           </a:p>
@@ -9024,7 +10132,41 @@
             <a:r>
               <a:rPr lang="en-US" sz="1000" dirty="0">
                 <a:solidFill>
-                  <a:srgbClr val="4DB1FF"/>
+                  <a:srgbClr val="6E7681"/>
+                </a:solidFill>
+                <a:latin typeface="Courier New" pitchFamily="34" charset="0"/>
+                <a:ea typeface="Courier New" pitchFamily="34" charset="-122"/>
+                <a:cs typeface="Courier New" pitchFamily="34" charset="-120"/>
+              </a:rPr>
+              <a:t>13  </a:t>
+            </a:r>
+            <a:pPr indent="0" marL="0">
+              <a:lnSpc>
+                <a:spcPct val="105000"/>
+              </a:lnSpc>
+              <a:buNone/>
+            </a:pPr>
+            <a:r>
+              <a:rPr lang="en-US" sz="1000" dirty="0">
+                <a:solidFill>
+                  <a:srgbClr val="CCCCCC"/>
+                </a:solidFill>
+                <a:latin typeface="Courier New" pitchFamily="34" charset="0"/>
+                <a:ea typeface="Courier New" pitchFamily="34" charset="-122"/>
+                <a:cs typeface="Courier New" pitchFamily="34" charset="-120"/>
+              </a:rPr>
+              <a:t>  </a:t>
+            </a:r>
+            <a:pPr indent="0" marL="0">
+              <a:lnSpc>
+                <a:spcPct val="105000"/>
+              </a:lnSpc>
+              <a:buNone/>
+            </a:pPr>
+            <a:r>
+              <a:rPr lang="en-US" sz="1000" dirty="0">
+                <a:solidFill>
+                  <a:srgbClr val="569CD6"/>
                 </a:solidFill>
                 <a:latin typeface="Courier New" pitchFamily="34" charset="0"/>
                 <a:ea typeface="Courier New" pitchFamily="34" charset="-122"/>
@@ -9041,7 +10183,7 @@
             <a:r>
               <a:rPr lang="en-US" sz="1000" dirty="0">
                 <a:solidFill>
-                  <a:srgbClr val="E8ECEF"/>
+                  <a:srgbClr val="CCCCCC"/>
                 </a:solidFill>
                 <a:latin typeface="Courier New" pitchFamily="34" charset="0"/>
                 <a:ea typeface="Courier New" pitchFamily="34" charset="-122"/>
@@ -9058,13 +10200,64 @@
             <a:r>
               <a:rPr lang="en-US" sz="1000" dirty="0">
                 <a:solidFill>
-                  <a:srgbClr val="4DB1FF"/>
-                </a:solidFill>
-                <a:latin typeface="Courier New" pitchFamily="34" charset="0"/>
-                <a:ea typeface="Courier New" pitchFamily="34" charset="-122"/>
-                <a:cs typeface="Courier New" pitchFamily="34" charset="-120"/>
-              </a:rPr>
-              <a:t>etag</a:t>
+                  <a:srgbClr val="569CD6"/>
+                </a:solidFill>
+                <a:latin typeface="Courier New" pitchFamily="34" charset="0"/>
+                <a:ea typeface="Courier New" pitchFamily="34" charset="-122"/>
+                <a:cs typeface="Courier New" pitchFamily="34" charset="-120"/>
+              </a:rPr>
+              <a:t>action</a:t>
+            </a:r>
+            <a:pPr indent="0" marL="0">
+              <a:lnSpc>
+                <a:spcPct val="105000"/>
+              </a:lnSpc>
+              <a:buNone/>
+            </a:pPr>
+            <a:r>
+              <a:rPr lang="en-US" sz="1000" dirty="0">
+                <a:solidFill>
+                  <a:srgbClr val="CCCCCC"/>
+                </a:solidFill>
+                <a:latin typeface="Courier New" pitchFamily="34" charset="0"/>
+                <a:ea typeface="Courier New" pitchFamily="34" charset="-122"/>
+                <a:cs typeface="Courier New" pitchFamily="34" charset="-120"/>
+              </a:rPr>
+              <a:t> </a:t>
+            </a:r>
+            <a:pPr indent="0" marL="0">
+              <a:lnSpc>
+                <a:spcPct val="105000"/>
+              </a:lnSpc>
+              <a:buNone/>
+            </a:pPr>
+            <a:r>
+              <a:rPr lang="en-US" sz="1000" dirty="0">
+                <a:solidFill>
+                  <a:srgbClr val="CCCCCC"/>
+                </a:solidFill>
+                <a:latin typeface="Courier New" pitchFamily="34" charset="0"/>
+                <a:ea typeface="Courier New" pitchFamily="34" charset="-122"/>
+                <a:cs typeface="Courier New" pitchFamily="34" charset="-120"/>
+              </a:rPr>
+              <a:t>Activate</a:t>
+            </a:r>
+            <a:pPr indent="0" marL="0">
+              <a:lnSpc>
+                <a:spcPct val="105000"/>
+              </a:lnSpc>
+              <a:buNone/>
+            </a:pPr>
+            <a:r>
+              <a:rPr lang="en-US" sz="1000" dirty="0">
+                <a:solidFill>
+                  <a:srgbClr val="CCCCCC"/>
+                </a:solidFill>
+                <a:latin typeface="Courier New" pitchFamily="34" charset="0"/>
+                <a:ea typeface="Courier New" pitchFamily="34" charset="-122"/>
+                <a:cs typeface="Courier New" pitchFamily="34" charset="-120"/>
+              </a:rPr>
+              <a:t>;</a:t>
             </a:r>
             <a:endParaRPr lang="en-US" sz="1000" dirty="0"/>
           </a:p>
@@ -9078,7 +10271,1136 @@
             <a:r>
               <a:rPr lang="en-US" sz="1000" dirty="0">
                 <a:solidFill>
-                  <a:srgbClr val="E8ECEF"/>
+                  <a:srgbClr val="6E7681"/>
+                </a:solidFill>
+                <a:latin typeface="Courier New" pitchFamily="34" charset="0"/>
+                <a:ea typeface="Courier New" pitchFamily="34" charset="-122"/>
+                <a:cs typeface="Courier New" pitchFamily="34" charset="-120"/>
+              </a:rPr>
+              <a:t>14  </a:t>
+            </a:r>
+            <a:pPr indent="0" marL="0">
+              <a:lnSpc>
+                <a:spcPct val="105000"/>
+              </a:lnSpc>
+              <a:buNone/>
+            </a:pPr>
+            <a:r>
+              <a:rPr lang="en-US" sz="1000" dirty="0">
+                <a:solidFill>
+                  <a:srgbClr val="CCCCCC"/>
+                </a:solidFill>
+                <a:latin typeface="Courier New" pitchFamily="34" charset="0"/>
+                <a:ea typeface="Courier New" pitchFamily="34" charset="-122"/>
+                <a:cs typeface="Courier New" pitchFamily="34" charset="-120"/>
+              </a:rPr>
+              <a:t>  </a:t>
+            </a:r>
+            <a:pPr indent="0" marL="0">
+              <a:lnSpc>
+                <a:spcPct val="105000"/>
+              </a:lnSpc>
+              <a:buNone/>
+            </a:pPr>
+            <a:r>
+              <a:rPr lang="en-US" sz="1000" dirty="0">
+                <a:solidFill>
+                  <a:srgbClr val="569CD6"/>
+                </a:solidFill>
+                <a:latin typeface="Courier New" pitchFamily="34" charset="0"/>
+                <a:ea typeface="Courier New" pitchFamily="34" charset="-122"/>
+                <a:cs typeface="Courier New" pitchFamily="34" charset="-120"/>
+              </a:rPr>
+              <a:t>use</a:t>
+            </a:r>
+            <a:pPr indent="0" marL="0">
+              <a:lnSpc>
+                <a:spcPct val="105000"/>
+              </a:lnSpc>
+              <a:buNone/>
+            </a:pPr>
+            <a:r>
+              <a:rPr lang="en-US" sz="1000" dirty="0">
+                <a:solidFill>
+                  <a:srgbClr val="CCCCCC"/>
+                </a:solidFill>
+                <a:latin typeface="Courier New" pitchFamily="34" charset="0"/>
+                <a:ea typeface="Courier New" pitchFamily="34" charset="-122"/>
+                <a:cs typeface="Courier New" pitchFamily="34" charset="-120"/>
+              </a:rPr>
+              <a:t> </a:t>
+            </a:r>
+            <a:pPr indent="0" marL="0">
+              <a:lnSpc>
+                <a:spcPct val="105000"/>
+              </a:lnSpc>
+              <a:buNone/>
+            </a:pPr>
+            <a:r>
+              <a:rPr lang="en-US" sz="1000" dirty="0">
+                <a:solidFill>
+                  <a:srgbClr val="569CD6"/>
+                </a:solidFill>
+                <a:latin typeface="Courier New" pitchFamily="34" charset="0"/>
+                <a:ea typeface="Courier New" pitchFamily="34" charset="-122"/>
+                <a:cs typeface="Courier New" pitchFamily="34" charset="-120"/>
+              </a:rPr>
+              <a:t>action</a:t>
+            </a:r>
+            <a:pPr indent="0" marL="0">
+              <a:lnSpc>
+                <a:spcPct val="105000"/>
+              </a:lnSpc>
+              <a:buNone/>
+            </a:pPr>
+            <a:r>
+              <a:rPr lang="en-US" sz="1000" dirty="0">
+                <a:solidFill>
+                  <a:srgbClr val="CCCCCC"/>
+                </a:solidFill>
+                <a:latin typeface="Courier New" pitchFamily="34" charset="0"/>
+                <a:ea typeface="Courier New" pitchFamily="34" charset="-122"/>
+                <a:cs typeface="Courier New" pitchFamily="34" charset="-120"/>
+              </a:rPr>
+              <a:t> </a:t>
+            </a:r>
+            <a:pPr indent="0" marL="0">
+              <a:lnSpc>
+                <a:spcPct val="105000"/>
+              </a:lnSpc>
+              <a:buNone/>
+            </a:pPr>
+            <a:r>
+              <a:rPr lang="en-US" sz="1000" dirty="0">
+                <a:solidFill>
+                  <a:srgbClr val="CCCCCC"/>
+                </a:solidFill>
+                <a:latin typeface="Courier New" pitchFamily="34" charset="0"/>
+                <a:ea typeface="Courier New" pitchFamily="34" charset="-122"/>
+                <a:cs typeface="Courier New" pitchFamily="34" charset="-120"/>
+              </a:rPr>
+              <a:t>Discard</a:t>
+            </a:r>
+            <a:pPr indent="0" marL="0">
+              <a:lnSpc>
+                <a:spcPct val="105000"/>
+              </a:lnSpc>
+              <a:buNone/>
+            </a:pPr>
+            <a:r>
+              <a:rPr lang="en-US" sz="1000" dirty="0">
+                <a:solidFill>
+                  <a:srgbClr val="CCCCCC"/>
+                </a:solidFill>
+                <a:latin typeface="Courier New" pitchFamily="34" charset="0"/>
+                <a:ea typeface="Courier New" pitchFamily="34" charset="-122"/>
+                <a:cs typeface="Courier New" pitchFamily="34" charset="-120"/>
+              </a:rPr>
+              <a:t>;</a:t>
+            </a:r>
+            <a:endParaRPr lang="en-US" sz="1000" dirty="0"/>
+          </a:p>
+          <a:p>
+            <a:pPr indent="0" marL="0">
+              <a:lnSpc>
+                <a:spcPct val="105000"/>
+              </a:lnSpc>
+              <a:buNone/>
+            </a:pPr>
+            <a:r>
+              <a:rPr lang="en-US" sz="1000" dirty="0">
+                <a:solidFill>
+                  <a:srgbClr val="6E7681"/>
+                </a:solidFill>
+                <a:latin typeface="Courier New" pitchFamily="34" charset="0"/>
+                <a:ea typeface="Courier New" pitchFamily="34" charset="-122"/>
+                <a:cs typeface="Courier New" pitchFamily="34" charset="-120"/>
+              </a:rPr>
+              <a:t>15  </a:t>
+            </a:r>
+            <a:pPr indent="0" marL="0">
+              <a:lnSpc>
+                <a:spcPct val="105000"/>
+              </a:lnSpc>
+              <a:buNone/>
+            </a:pPr>
+            <a:r>
+              <a:rPr lang="en-US" sz="1000" dirty="0">
+                <a:solidFill>
+                  <a:srgbClr val="CCCCCC"/>
+                </a:solidFill>
+                <a:latin typeface="Courier New" pitchFamily="34" charset="0"/>
+                <a:ea typeface="Courier New" pitchFamily="34" charset="-122"/>
+                <a:cs typeface="Courier New" pitchFamily="34" charset="-120"/>
+              </a:rPr>
+              <a:t>  </a:t>
+            </a:r>
+            <a:pPr indent="0" marL="0">
+              <a:lnSpc>
+                <a:spcPct val="105000"/>
+              </a:lnSpc>
+              <a:buNone/>
+            </a:pPr>
+            <a:r>
+              <a:rPr lang="en-US" sz="1000" dirty="0">
+                <a:solidFill>
+                  <a:srgbClr val="569CD6"/>
+                </a:solidFill>
+                <a:latin typeface="Courier New" pitchFamily="34" charset="0"/>
+                <a:ea typeface="Courier New" pitchFamily="34" charset="-122"/>
+                <a:cs typeface="Courier New" pitchFamily="34" charset="-120"/>
+              </a:rPr>
+              <a:t>use</a:t>
+            </a:r>
+            <a:pPr indent="0" marL="0">
+              <a:lnSpc>
+                <a:spcPct val="105000"/>
+              </a:lnSpc>
+              <a:buNone/>
+            </a:pPr>
+            <a:r>
+              <a:rPr lang="en-US" sz="1000" dirty="0">
+                <a:solidFill>
+                  <a:srgbClr val="CCCCCC"/>
+                </a:solidFill>
+                <a:latin typeface="Courier New" pitchFamily="34" charset="0"/>
+                <a:ea typeface="Courier New" pitchFamily="34" charset="-122"/>
+                <a:cs typeface="Courier New" pitchFamily="34" charset="-120"/>
+              </a:rPr>
+              <a:t> </a:t>
+            </a:r>
+            <a:pPr indent="0" marL="0">
+              <a:lnSpc>
+                <a:spcPct val="105000"/>
+              </a:lnSpc>
+              <a:buNone/>
+            </a:pPr>
+            <a:r>
+              <a:rPr lang="en-US" sz="1000" dirty="0">
+                <a:solidFill>
+                  <a:srgbClr val="569CD6"/>
+                </a:solidFill>
+                <a:latin typeface="Courier New" pitchFamily="34" charset="0"/>
+                <a:ea typeface="Courier New" pitchFamily="34" charset="-122"/>
+                <a:cs typeface="Courier New" pitchFamily="34" charset="-120"/>
+              </a:rPr>
+              <a:t>action</a:t>
+            </a:r>
+            <a:pPr indent="0" marL="0">
+              <a:lnSpc>
+                <a:spcPct val="105000"/>
+              </a:lnSpc>
+              <a:buNone/>
+            </a:pPr>
+            <a:r>
+              <a:rPr lang="en-US" sz="1000" dirty="0">
+                <a:solidFill>
+                  <a:srgbClr val="CCCCCC"/>
+                </a:solidFill>
+                <a:latin typeface="Courier New" pitchFamily="34" charset="0"/>
+                <a:ea typeface="Courier New" pitchFamily="34" charset="-122"/>
+                <a:cs typeface="Courier New" pitchFamily="34" charset="-120"/>
+              </a:rPr>
+              <a:t> </a:t>
+            </a:r>
+            <a:pPr indent="0" marL="0">
+              <a:lnSpc>
+                <a:spcPct val="105000"/>
+              </a:lnSpc>
+              <a:buNone/>
+            </a:pPr>
+            <a:r>
+              <a:rPr lang="en-US" sz="1000" dirty="0">
+                <a:solidFill>
+                  <a:srgbClr val="CCCCCC"/>
+                </a:solidFill>
+                <a:latin typeface="Courier New" pitchFamily="34" charset="0"/>
+                <a:ea typeface="Courier New" pitchFamily="34" charset="-122"/>
+                <a:cs typeface="Courier New" pitchFamily="34" charset="-120"/>
+              </a:rPr>
+              <a:t>Resume</a:t>
+            </a:r>
+            <a:pPr indent="0" marL="0">
+              <a:lnSpc>
+                <a:spcPct val="105000"/>
+              </a:lnSpc>
+              <a:buNone/>
+            </a:pPr>
+            <a:r>
+              <a:rPr lang="en-US" sz="1000" dirty="0">
+                <a:solidFill>
+                  <a:srgbClr val="CCCCCC"/>
+                </a:solidFill>
+                <a:latin typeface="Courier New" pitchFamily="34" charset="0"/>
+                <a:ea typeface="Courier New" pitchFamily="34" charset="-122"/>
+                <a:cs typeface="Courier New" pitchFamily="34" charset="-120"/>
+              </a:rPr>
+              <a:t>;</a:t>
+            </a:r>
+            <a:endParaRPr lang="en-US" sz="1000" dirty="0"/>
+          </a:p>
+          <a:p>
+            <a:pPr indent="0" marL="0">
+              <a:lnSpc>
+                <a:spcPct val="105000"/>
+              </a:lnSpc>
+              <a:buNone/>
+            </a:pPr>
+            <a:r>
+              <a:rPr lang="en-US" sz="1000" dirty="0">
+                <a:solidFill>
+                  <a:srgbClr val="6E7681"/>
+                </a:solidFill>
+                <a:latin typeface="Courier New" pitchFamily="34" charset="0"/>
+                <a:ea typeface="Courier New" pitchFamily="34" charset="-122"/>
+                <a:cs typeface="Courier New" pitchFamily="34" charset="-120"/>
+              </a:rPr>
+              <a:t>16  </a:t>
+            </a:r>
+            <a:pPr indent="0" marL="0">
+              <a:lnSpc>
+                <a:spcPct val="105000"/>
+              </a:lnSpc>
+              <a:buNone/>
+            </a:pPr>
+            <a:r>
+              <a:rPr lang="en-US" sz="1000" dirty="0">
+                <a:solidFill>
+                  <a:srgbClr val="CCCCCC"/>
+                </a:solidFill>
+                <a:latin typeface="Courier New" pitchFamily="34" charset="0"/>
+                <a:ea typeface="Courier New" pitchFamily="34" charset="-122"/>
+                <a:cs typeface="Courier New" pitchFamily="34" charset="-120"/>
+              </a:rPr>
+              <a:t>  </a:t>
+            </a:r>
+            <a:pPr indent="0" marL="0">
+              <a:lnSpc>
+                <a:spcPct val="105000"/>
+              </a:lnSpc>
+              <a:buNone/>
+            </a:pPr>
+            <a:r>
+              <a:rPr lang="en-US" sz="1000" dirty="0">
+                <a:solidFill>
+                  <a:srgbClr val="569CD6"/>
+                </a:solidFill>
+                <a:latin typeface="Courier New" pitchFamily="34" charset="0"/>
+                <a:ea typeface="Courier New" pitchFamily="34" charset="-122"/>
+                <a:cs typeface="Courier New" pitchFamily="34" charset="-120"/>
+              </a:rPr>
+              <a:t>use</a:t>
+            </a:r>
+            <a:pPr indent="0" marL="0">
+              <a:lnSpc>
+                <a:spcPct val="105000"/>
+              </a:lnSpc>
+              <a:buNone/>
+            </a:pPr>
+            <a:r>
+              <a:rPr lang="en-US" sz="1000" dirty="0">
+                <a:solidFill>
+                  <a:srgbClr val="CCCCCC"/>
+                </a:solidFill>
+                <a:latin typeface="Courier New" pitchFamily="34" charset="0"/>
+                <a:ea typeface="Courier New" pitchFamily="34" charset="-122"/>
+                <a:cs typeface="Courier New" pitchFamily="34" charset="-120"/>
+              </a:rPr>
+              <a:t> </a:t>
+            </a:r>
+            <a:pPr indent="0" marL="0">
+              <a:lnSpc>
+                <a:spcPct val="105000"/>
+              </a:lnSpc>
+              <a:buNone/>
+            </a:pPr>
+            <a:r>
+              <a:rPr lang="en-US" sz="1000" dirty="0">
+                <a:solidFill>
+                  <a:srgbClr val="569CD6"/>
+                </a:solidFill>
+                <a:latin typeface="Courier New" pitchFamily="34" charset="0"/>
+                <a:ea typeface="Courier New" pitchFamily="34" charset="-122"/>
+                <a:cs typeface="Courier New" pitchFamily="34" charset="-120"/>
+              </a:rPr>
+              <a:t>action</a:t>
+            </a:r>
+            <a:pPr indent="0" marL="0">
+              <a:lnSpc>
+                <a:spcPct val="105000"/>
+              </a:lnSpc>
+              <a:buNone/>
+            </a:pPr>
+            <a:r>
+              <a:rPr lang="en-US" sz="1000" dirty="0">
+                <a:solidFill>
+                  <a:srgbClr val="CCCCCC"/>
+                </a:solidFill>
+                <a:latin typeface="Courier New" pitchFamily="34" charset="0"/>
+                <a:ea typeface="Courier New" pitchFamily="34" charset="-122"/>
+                <a:cs typeface="Courier New" pitchFamily="34" charset="-120"/>
+              </a:rPr>
+              <a:t> </a:t>
+            </a:r>
+            <a:pPr indent="0" marL="0">
+              <a:lnSpc>
+                <a:spcPct val="105000"/>
+              </a:lnSpc>
+              <a:buNone/>
+            </a:pPr>
+            <a:r>
+              <a:rPr lang="en-US" sz="1000" dirty="0">
+                <a:solidFill>
+                  <a:srgbClr val="CCCCCC"/>
+                </a:solidFill>
+                <a:latin typeface="Courier New" pitchFamily="34" charset="0"/>
+                <a:ea typeface="Courier New" pitchFamily="34" charset="-122"/>
+                <a:cs typeface="Courier New" pitchFamily="34" charset="-120"/>
+              </a:rPr>
+              <a:t>Prepare</a:t>
+            </a:r>
+            <a:pPr indent="0" marL="0">
+              <a:lnSpc>
+                <a:spcPct val="105000"/>
+              </a:lnSpc>
+              <a:buNone/>
+            </a:pPr>
+            <a:r>
+              <a:rPr lang="en-US" sz="1000" dirty="0">
+                <a:solidFill>
+                  <a:srgbClr val="CCCCCC"/>
+                </a:solidFill>
+                <a:latin typeface="Courier New" pitchFamily="34" charset="0"/>
+                <a:ea typeface="Courier New" pitchFamily="34" charset="-122"/>
+                <a:cs typeface="Courier New" pitchFamily="34" charset="-120"/>
+              </a:rPr>
+              <a:t>;</a:t>
+            </a:r>
+            <a:endParaRPr lang="en-US" sz="1000" dirty="0"/>
+          </a:p>
+          <a:p>
+            <a:pPr indent="0" marL="0">
+              <a:lnSpc>
+                <a:spcPct val="105000"/>
+              </a:lnSpc>
+              <a:buNone/>
+            </a:pPr>
+            <a:r>
+              <a:rPr lang="en-US" sz="1000" dirty="0">
+                <a:solidFill>
+                  <a:srgbClr val="6E7681"/>
+                </a:solidFill>
+                <a:latin typeface="Courier New" pitchFamily="34" charset="0"/>
+                <a:ea typeface="Courier New" pitchFamily="34" charset="-122"/>
+                <a:cs typeface="Courier New" pitchFamily="34" charset="-120"/>
+              </a:rPr>
+              <a:t>17  </a:t>
+            </a:r>
+            <a:pPr indent="0" marL="0">
+              <a:lnSpc>
+                <a:spcPct val="105000"/>
+              </a:lnSpc>
+              <a:buNone/>
+            </a:pPr>
+            <a:r>
+              <a:rPr lang="en-US" sz="1000" dirty="0">
+                <a:solidFill>
+                  <a:srgbClr val="CCCCCC"/>
+                </a:solidFill>
+                <a:latin typeface="Courier New" pitchFamily="34" charset="0"/>
+                <a:ea typeface="Courier New" pitchFamily="34" charset="-122"/>
+                <a:cs typeface="Courier New" pitchFamily="34" charset="-120"/>
+              </a:rPr>
+              <a:t>  </a:t>
+            </a:r>
+            <a:pPr indent="0" marL="0">
+              <a:lnSpc>
+                <a:spcPct val="105000"/>
+              </a:lnSpc>
+              <a:buNone/>
+            </a:pPr>
+            <a:r>
+              <a:rPr lang="en-US" sz="1000" dirty="0">
+                <a:solidFill>
+                  <a:srgbClr val="569CD6"/>
+                </a:solidFill>
+                <a:latin typeface="Courier New" pitchFamily="34" charset="0"/>
+                <a:ea typeface="Courier New" pitchFamily="34" charset="-122"/>
+                <a:cs typeface="Courier New" pitchFamily="34" charset="-120"/>
+              </a:rPr>
+              <a:t>use</a:t>
+            </a:r>
+            <a:pPr indent="0" marL="0">
+              <a:lnSpc>
+                <a:spcPct val="105000"/>
+              </a:lnSpc>
+              <a:buNone/>
+            </a:pPr>
+            <a:r>
+              <a:rPr lang="en-US" sz="1000" dirty="0">
+                <a:solidFill>
+                  <a:srgbClr val="CCCCCC"/>
+                </a:solidFill>
+                <a:latin typeface="Courier New" pitchFamily="34" charset="0"/>
+                <a:ea typeface="Courier New" pitchFamily="34" charset="-122"/>
+                <a:cs typeface="Courier New" pitchFamily="34" charset="-120"/>
+              </a:rPr>
+              <a:t> </a:t>
+            </a:r>
+            <a:pPr indent="0" marL="0">
+              <a:lnSpc>
+                <a:spcPct val="105000"/>
+              </a:lnSpc>
+              <a:buNone/>
+            </a:pPr>
+            <a:r>
+              <a:rPr lang="en-US" sz="1000" dirty="0">
+                <a:solidFill>
+                  <a:srgbClr val="569CD6"/>
+                </a:solidFill>
+                <a:latin typeface="Courier New" pitchFamily="34" charset="0"/>
+                <a:ea typeface="Courier New" pitchFamily="34" charset="-122"/>
+                <a:cs typeface="Courier New" pitchFamily="34" charset="-120"/>
+              </a:rPr>
+              <a:t>action</a:t>
+            </a:r>
+            <a:pPr indent="0" marL="0">
+              <a:lnSpc>
+                <a:spcPct val="105000"/>
+              </a:lnSpc>
+              <a:buNone/>
+            </a:pPr>
+            <a:r>
+              <a:rPr lang="en-US" sz="1000" dirty="0">
+                <a:solidFill>
+                  <a:srgbClr val="CCCCCC"/>
+                </a:solidFill>
+                <a:latin typeface="Courier New" pitchFamily="34" charset="0"/>
+                <a:ea typeface="Courier New" pitchFamily="34" charset="-122"/>
+                <a:cs typeface="Courier New" pitchFamily="34" charset="-120"/>
+              </a:rPr>
+              <a:t> </a:t>
+            </a:r>
+            <a:pPr indent="0" marL="0">
+              <a:lnSpc>
+                <a:spcPct val="105000"/>
+              </a:lnSpc>
+              <a:buNone/>
+            </a:pPr>
+            <a:r>
+              <a:rPr lang="en-US" sz="1000" dirty="0">
+                <a:solidFill>
+                  <a:srgbClr val="CCCCCC"/>
+                </a:solidFill>
+                <a:latin typeface="Courier New" pitchFamily="34" charset="0"/>
+                <a:ea typeface="Courier New" pitchFamily="34" charset="-122"/>
+                <a:cs typeface="Courier New" pitchFamily="34" charset="-120"/>
+              </a:rPr>
+              <a:t>SimularPagamento</a:t>
+            </a:r>
+            <a:pPr indent="0" marL="0">
+              <a:lnSpc>
+                <a:spcPct val="105000"/>
+              </a:lnSpc>
+              <a:buNone/>
+            </a:pPr>
+            <a:r>
+              <a:rPr lang="en-US" sz="1000" dirty="0">
+                <a:solidFill>
+                  <a:srgbClr val="CCCCCC"/>
+                </a:solidFill>
+                <a:latin typeface="Courier New" pitchFamily="34" charset="0"/>
+                <a:ea typeface="Courier New" pitchFamily="34" charset="-122"/>
+                <a:cs typeface="Courier New" pitchFamily="34" charset="-120"/>
+              </a:rPr>
+              <a:t>;</a:t>
+            </a:r>
+            <a:endParaRPr lang="en-US" sz="1000" dirty="0"/>
+          </a:p>
+          <a:p>
+            <a:pPr indent="0" marL="0">
+              <a:lnSpc>
+                <a:spcPct val="105000"/>
+              </a:lnSpc>
+              <a:buNone/>
+            </a:pPr>
+            <a:r>
+              <a:rPr lang="en-US" sz="1000" dirty="0">
+                <a:solidFill>
+                  <a:srgbClr val="6E7681"/>
+                </a:solidFill>
+                <a:latin typeface="Courier New" pitchFamily="34" charset="0"/>
+                <a:ea typeface="Courier New" pitchFamily="34" charset="-122"/>
+                <a:cs typeface="Courier New" pitchFamily="34" charset="-120"/>
+              </a:rPr>
+              <a:t>18  </a:t>
+            </a:r>
+            <a:pPr indent="0" marL="0">
+              <a:lnSpc>
+                <a:spcPct val="105000"/>
+              </a:lnSpc>
+              <a:buNone/>
+            </a:pPr>
+            <a:r>
+              <a:rPr lang="en-US" sz="1000" dirty="0">
+                <a:solidFill>
+                  <a:srgbClr val="CCCCCC"/>
+                </a:solidFill>
+                <a:latin typeface="Courier New" pitchFamily="34" charset="0"/>
+                <a:ea typeface="Courier New" pitchFamily="34" charset="-122"/>
+                <a:cs typeface="Courier New" pitchFamily="34" charset="-120"/>
+              </a:rPr>
+              <a:t>  </a:t>
+            </a:r>
+            <a:pPr indent="0" marL="0">
+              <a:lnSpc>
+                <a:spcPct val="105000"/>
+              </a:lnSpc>
+              <a:buNone/>
+            </a:pPr>
+            <a:r>
+              <a:rPr lang="en-US" sz="1000" dirty="0">
+                <a:solidFill>
+                  <a:srgbClr val="569CD6"/>
+                </a:solidFill>
+                <a:latin typeface="Courier New" pitchFamily="34" charset="0"/>
+                <a:ea typeface="Courier New" pitchFamily="34" charset="-122"/>
+                <a:cs typeface="Courier New" pitchFamily="34" charset="-120"/>
+              </a:rPr>
+              <a:t>use</a:t>
+            </a:r>
+            <a:pPr indent="0" marL="0">
+              <a:lnSpc>
+                <a:spcPct val="105000"/>
+              </a:lnSpc>
+              <a:buNone/>
+            </a:pPr>
+            <a:r>
+              <a:rPr lang="en-US" sz="1000" dirty="0">
+                <a:solidFill>
+                  <a:srgbClr val="CCCCCC"/>
+                </a:solidFill>
+                <a:latin typeface="Courier New" pitchFamily="34" charset="0"/>
+                <a:ea typeface="Courier New" pitchFamily="34" charset="-122"/>
+                <a:cs typeface="Courier New" pitchFamily="34" charset="-120"/>
+              </a:rPr>
+              <a:t> </a:t>
+            </a:r>
+            <a:pPr indent="0" marL="0">
+              <a:lnSpc>
+                <a:spcPct val="105000"/>
+              </a:lnSpc>
+              <a:buNone/>
+            </a:pPr>
+            <a:r>
+              <a:rPr lang="en-US" sz="1000" dirty="0">
+                <a:solidFill>
+                  <a:srgbClr val="569CD6"/>
+                </a:solidFill>
+                <a:latin typeface="Courier New" pitchFamily="34" charset="0"/>
+                <a:ea typeface="Courier New" pitchFamily="34" charset="-122"/>
+                <a:cs typeface="Courier New" pitchFamily="34" charset="-120"/>
+              </a:rPr>
+              <a:t>action</a:t>
+            </a:r>
+            <a:pPr indent="0" marL="0">
+              <a:lnSpc>
+                <a:spcPct val="105000"/>
+              </a:lnSpc>
+              <a:buNone/>
+            </a:pPr>
+            <a:r>
+              <a:rPr lang="en-US" sz="1000" dirty="0">
+                <a:solidFill>
+                  <a:srgbClr val="CCCCCC"/>
+                </a:solidFill>
+                <a:latin typeface="Courier New" pitchFamily="34" charset="0"/>
+                <a:ea typeface="Courier New" pitchFamily="34" charset="-122"/>
+                <a:cs typeface="Courier New" pitchFamily="34" charset="-120"/>
+              </a:rPr>
+              <a:t> </a:t>
+            </a:r>
+            <a:pPr indent="0" marL="0">
+              <a:lnSpc>
+                <a:spcPct val="105000"/>
+              </a:lnSpc>
+              <a:buNone/>
+            </a:pPr>
+            <a:r>
+              <a:rPr lang="en-US" sz="1000" dirty="0">
+                <a:solidFill>
+                  <a:srgbClr val="CCCCCC"/>
+                </a:solidFill>
+                <a:latin typeface="Courier New" pitchFamily="34" charset="0"/>
+                <a:ea typeface="Courier New" pitchFamily="34" charset="-122"/>
+                <a:cs typeface="Courier New" pitchFamily="34" charset="-120"/>
+              </a:rPr>
+              <a:t>AprovarPedido</a:t>
+            </a:r>
+            <a:pPr indent="0" marL="0">
+              <a:lnSpc>
+                <a:spcPct val="105000"/>
+              </a:lnSpc>
+              <a:buNone/>
+            </a:pPr>
+            <a:r>
+              <a:rPr lang="en-US" sz="1000" dirty="0">
+                <a:solidFill>
+                  <a:srgbClr val="CCCCCC"/>
+                </a:solidFill>
+                <a:latin typeface="Courier New" pitchFamily="34" charset="0"/>
+                <a:ea typeface="Courier New" pitchFamily="34" charset="-122"/>
+                <a:cs typeface="Courier New" pitchFamily="34" charset="-120"/>
+              </a:rPr>
+              <a:t>;</a:t>
+            </a:r>
+            <a:endParaRPr lang="en-US" sz="1000" dirty="0"/>
+          </a:p>
+          <a:p>
+            <a:pPr indent="0" marL="0">
+              <a:lnSpc>
+                <a:spcPct val="105000"/>
+              </a:lnSpc>
+              <a:buNone/>
+            </a:pPr>
+            <a:r>
+              <a:rPr lang="en-US" sz="1000" dirty="0">
+                <a:solidFill>
+                  <a:srgbClr val="6E7681"/>
+                </a:solidFill>
+                <a:latin typeface="Courier New" pitchFamily="34" charset="0"/>
+                <a:ea typeface="Courier New" pitchFamily="34" charset="-122"/>
+                <a:cs typeface="Courier New" pitchFamily="34" charset="-120"/>
+              </a:rPr>
+              <a:t>19  </a:t>
+            </a:r>
+            <a:pPr indent="0" marL="0">
+              <a:lnSpc>
+                <a:spcPct val="105000"/>
+              </a:lnSpc>
+              <a:buNone/>
+            </a:pPr>
+            <a:r>
+              <a:rPr lang="en-US" sz="1000" dirty="0">
+                <a:solidFill>
+                  <a:srgbClr val="CCCCCC"/>
+                </a:solidFill>
+                <a:latin typeface="Courier New" pitchFamily="34" charset="0"/>
+                <a:ea typeface="Courier New" pitchFamily="34" charset="-122"/>
+                <a:cs typeface="Courier New" pitchFamily="34" charset="-120"/>
+              </a:rPr>
+              <a:t>  </a:t>
+            </a:r>
+            <a:pPr indent="0" marL="0">
+              <a:lnSpc>
+                <a:spcPct val="105000"/>
+              </a:lnSpc>
+              <a:buNone/>
+            </a:pPr>
+            <a:r>
+              <a:rPr lang="en-US" sz="1000" dirty="0">
+                <a:solidFill>
+                  <a:srgbClr val="569CD6"/>
+                </a:solidFill>
+                <a:latin typeface="Courier New" pitchFamily="34" charset="0"/>
+                <a:ea typeface="Courier New" pitchFamily="34" charset="-122"/>
+                <a:cs typeface="Courier New" pitchFamily="34" charset="-120"/>
+              </a:rPr>
+              <a:t>use</a:t>
+            </a:r>
+            <a:pPr indent="0" marL="0">
+              <a:lnSpc>
+                <a:spcPct val="105000"/>
+              </a:lnSpc>
+              <a:buNone/>
+            </a:pPr>
+            <a:r>
+              <a:rPr lang="en-US" sz="1000" dirty="0">
+                <a:solidFill>
+                  <a:srgbClr val="CCCCCC"/>
+                </a:solidFill>
+                <a:latin typeface="Courier New" pitchFamily="34" charset="0"/>
+                <a:ea typeface="Courier New" pitchFamily="34" charset="-122"/>
+                <a:cs typeface="Courier New" pitchFamily="34" charset="-120"/>
+              </a:rPr>
+              <a:t> </a:t>
+            </a:r>
+            <a:pPr indent="0" marL="0">
+              <a:lnSpc>
+                <a:spcPct val="105000"/>
+              </a:lnSpc>
+              <a:buNone/>
+            </a:pPr>
+            <a:r>
+              <a:rPr lang="en-US" sz="1000" dirty="0">
+                <a:solidFill>
+                  <a:srgbClr val="569CD6"/>
+                </a:solidFill>
+                <a:latin typeface="Courier New" pitchFamily="34" charset="0"/>
+                <a:ea typeface="Courier New" pitchFamily="34" charset="-122"/>
+                <a:cs typeface="Courier New" pitchFamily="34" charset="-120"/>
+              </a:rPr>
+              <a:t>action</a:t>
+            </a:r>
+            <a:pPr indent="0" marL="0">
+              <a:lnSpc>
+                <a:spcPct val="105000"/>
+              </a:lnSpc>
+              <a:buNone/>
+            </a:pPr>
+            <a:r>
+              <a:rPr lang="en-US" sz="1000" dirty="0">
+                <a:solidFill>
+                  <a:srgbClr val="CCCCCC"/>
+                </a:solidFill>
+                <a:latin typeface="Courier New" pitchFamily="34" charset="0"/>
+                <a:ea typeface="Courier New" pitchFamily="34" charset="-122"/>
+                <a:cs typeface="Courier New" pitchFamily="34" charset="-120"/>
+              </a:rPr>
+              <a:t> </a:t>
+            </a:r>
+            <a:pPr indent="0" marL="0">
+              <a:lnSpc>
+                <a:spcPct val="105000"/>
+              </a:lnSpc>
+              <a:buNone/>
+            </a:pPr>
+            <a:r>
+              <a:rPr lang="en-US" sz="1000" dirty="0">
+                <a:solidFill>
+                  <a:srgbClr val="CCCCCC"/>
+                </a:solidFill>
+                <a:latin typeface="Courier New" pitchFamily="34" charset="0"/>
+                <a:ea typeface="Courier New" pitchFamily="34" charset="-122"/>
+                <a:cs typeface="Courier New" pitchFamily="34" charset="-120"/>
+              </a:rPr>
+              <a:t>CancelarPedido</a:t>
+            </a:r>
+            <a:pPr indent="0" marL="0">
+              <a:lnSpc>
+                <a:spcPct val="105000"/>
+              </a:lnSpc>
+              <a:buNone/>
+            </a:pPr>
+            <a:r>
+              <a:rPr lang="en-US" sz="1000" dirty="0">
+                <a:solidFill>
+                  <a:srgbClr val="CCCCCC"/>
+                </a:solidFill>
+                <a:latin typeface="Courier New" pitchFamily="34" charset="0"/>
+                <a:ea typeface="Courier New" pitchFamily="34" charset="-122"/>
+                <a:cs typeface="Courier New" pitchFamily="34" charset="-120"/>
+              </a:rPr>
+              <a:t>;</a:t>
+            </a:r>
+            <a:endParaRPr lang="en-US" sz="1000" dirty="0"/>
+          </a:p>
+          <a:p>
+            <a:pPr indent="0" marL="0">
+              <a:lnSpc>
+                <a:spcPct val="105000"/>
+              </a:lnSpc>
+              <a:buNone/>
+            </a:pPr>
+            <a:r>
+              <a:rPr lang="en-US" sz="1000" dirty="0">
+                <a:solidFill>
+                  <a:srgbClr val="6E7681"/>
+                </a:solidFill>
+                <a:latin typeface="Courier New" pitchFamily="34" charset="0"/>
+                <a:ea typeface="Courier New" pitchFamily="34" charset="-122"/>
+                <a:cs typeface="Courier New" pitchFamily="34" charset="-120"/>
+              </a:rPr>
+              <a:t>20  </a:t>
+            </a:r>
+            <a:pPr indent="0" marL="0">
+              <a:lnSpc>
+                <a:spcPct val="105000"/>
+              </a:lnSpc>
+              <a:buNone/>
+            </a:pPr>
+            <a:r>
+              <a:rPr lang="en-US" sz="1000" dirty="0">
+                <a:solidFill>
+                  <a:srgbClr val="CCCCCC"/>
+                </a:solidFill>
+                <a:latin typeface="Courier New" pitchFamily="34" charset="0"/>
+                <a:ea typeface="Courier New" pitchFamily="34" charset="-122"/>
+                <a:cs typeface="Courier New" pitchFamily="34" charset="-120"/>
+              </a:rPr>
+              <a:t>  </a:t>
+            </a:r>
+            <a:pPr indent="0" marL="0">
+              <a:lnSpc>
+                <a:spcPct val="105000"/>
+              </a:lnSpc>
+              <a:buNone/>
+            </a:pPr>
+            <a:r>
+              <a:rPr lang="en-US" sz="1000" dirty="0">
+                <a:solidFill>
+                  <a:srgbClr val="569CD6"/>
+                </a:solidFill>
+                <a:latin typeface="Courier New" pitchFamily="34" charset="0"/>
+                <a:ea typeface="Courier New" pitchFamily="34" charset="-122"/>
+                <a:cs typeface="Courier New" pitchFamily="34" charset="-120"/>
+              </a:rPr>
+              <a:t>use</a:t>
+            </a:r>
+            <a:pPr indent="0" marL="0">
+              <a:lnSpc>
+                <a:spcPct val="105000"/>
+              </a:lnSpc>
+              <a:buNone/>
+            </a:pPr>
+            <a:r>
+              <a:rPr lang="en-US" sz="1000" dirty="0">
+                <a:solidFill>
+                  <a:srgbClr val="CCCCCC"/>
+                </a:solidFill>
+                <a:latin typeface="Courier New" pitchFamily="34" charset="0"/>
+                <a:ea typeface="Courier New" pitchFamily="34" charset="-122"/>
+                <a:cs typeface="Courier New" pitchFamily="34" charset="-120"/>
+              </a:rPr>
+              <a:t> </a:t>
+            </a:r>
+            <a:pPr indent="0" marL="0">
+              <a:lnSpc>
+                <a:spcPct val="105000"/>
+              </a:lnSpc>
+              <a:buNone/>
+            </a:pPr>
+            <a:r>
+              <a:rPr lang="en-US" sz="1000" dirty="0">
+                <a:solidFill>
+                  <a:srgbClr val="569CD6"/>
+                </a:solidFill>
+                <a:latin typeface="Courier New" pitchFamily="34" charset="0"/>
+                <a:ea typeface="Courier New" pitchFamily="34" charset="-122"/>
+                <a:cs typeface="Courier New" pitchFamily="34" charset="-120"/>
+              </a:rPr>
+              <a:t>action</a:t>
+            </a:r>
+            <a:pPr indent="0" marL="0">
+              <a:lnSpc>
+                <a:spcPct val="105000"/>
+              </a:lnSpc>
+              <a:buNone/>
+            </a:pPr>
+            <a:r>
+              <a:rPr lang="en-US" sz="1000" dirty="0">
+                <a:solidFill>
+                  <a:srgbClr val="CCCCCC"/>
+                </a:solidFill>
+                <a:latin typeface="Courier New" pitchFamily="34" charset="0"/>
+                <a:ea typeface="Courier New" pitchFamily="34" charset="-122"/>
+                <a:cs typeface="Courier New" pitchFamily="34" charset="-120"/>
+              </a:rPr>
+              <a:t> </a:t>
+            </a:r>
+            <a:pPr indent="0" marL="0">
+              <a:lnSpc>
+                <a:spcPct val="105000"/>
+              </a:lnSpc>
+              <a:buNone/>
+            </a:pPr>
+            <a:r>
+              <a:rPr lang="en-US" sz="1000" dirty="0">
+                <a:solidFill>
+                  <a:srgbClr val="CCCCCC"/>
+                </a:solidFill>
+                <a:latin typeface="Courier New" pitchFamily="34" charset="0"/>
+                <a:ea typeface="Courier New" pitchFamily="34" charset="-122"/>
+                <a:cs typeface="Courier New" pitchFamily="34" charset="-120"/>
+              </a:rPr>
+              <a:t>ImportarPlanilha</a:t>
+            </a:r>
+            <a:pPr indent="0" marL="0">
+              <a:lnSpc>
+                <a:spcPct val="105000"/>
+              </a:lnSpc>
+              <a:buNone/>
+            </a:pPr>
+            <a:r>
+              <a:rPr lang="en-US" sz="1000" dirty="0">
+                <a:solidFill>
+                  <a:srgbClr val="CCCCCC"/>
+                </a:solidFill>
+                <a:latin typeface="Courier New" pitchFamily="34" charset="0"/>
+                <a:ea typeface="Courier New" pitchFamily="34" charset="-122"/>
+                <a:cs typeface="Courier New" pitchFamily="34" charset="-120"/>
+              </a:rPr>
+              <a:t>;</a:t>
+            </a:r>
+            <a:endParaRPr lang="en-US" sz="1000" dirty="0"/>
+          </a:p>
+          <a:p>
+            <a:pPr indent="0" marL="0">
+              <a:lnSpc>
+                <a:spcPct val="105000"/>
+              </a:lnSpc>
+              <a:buNone/>
+            </a:pPr>
+            <a:r>
+              <a:rPr lang="en-US" sz="1000" dirty="0">
+                <a:solidFill>
+                  <a:srgbClr val="6E7681"/>
+                </a:solidFill>
+                <a:latin typeface="Courier New" pitchFamily="34" charset="0"/>
+                <a:ea typeface="Courier New" pitchFamily="34" charset="-122"/>
+                <a:cs typeface="Courier New" pitchFamily="34" charset="-120"/>
+              </a:rPr>
+              <a:t>21  </a:t>
+            </a:r>
+            <a:endParaRPr lang="en-US" sz="1000" dirty="0"/>
+          </a:p>
+          <a:p>
+            <a:pPr indent="0" marL="0">
+              <a:lnSpc>
+                <a:spcPct val="105000"/>
+              </a:lnSpc>
+              <a:buNone/>
+            </a:pPr>
+            <a:r>
+              <a:rPr lang="en-US" sz="1000" dirty="0">
+                <a:solidFill>
+                  <a:srgbClr val="6E7681"/>
+                </a:solidFill>
+                <a:latin typeface="Courier New" pitchFamily="34" charset="0"/>
+                <a:ea typeface="Courier New" pitchFamily="34" charset="-122"/>
+                <a:cs typeface="Courier New" pitchFamily="34" charset="-120"/>
+              </a:rPr>
+              <a:t>22  </a:t>
+            </a:r>
+            <a:pPr indent="0" marL="0">
+              <a:lnSpc>
+                <a:spcPct val="105000"/>
+              </a:lnSpc>
+              <a:buNone/>
+            </a:pPr>
+            <a:r>
+              <a:rPr lang="en-US" sz="1000" dirty="0">
+                <a:solidFill>
+                  <a:srgbClr val="CCCCCC"/>
+                </a:solidFill>
+                <a:latin typeface="Courier New" pitchFamily="34" charset="0"/>
+                <a:ea typeface="Courier New" pitchFamily="34" charset="-122"/>
+                <a:cs typeface="Courier New" pitchFamily="34" charset="-120"/>
+              </a:rPr>
+              <a:t>  </a:t>
+            </a:r>
+            <a:pPr indent="0" marL="0">
+              <a:lnSpc>
+                <a:spcPct val="105000"/>
+              </a:lnSpc>
+              <a:buNone/>
+            </a:pPr>
+            <a:r>
+              <a:rPr lang="en-US" sz="1000" dirty="0">
+                <a:solidFill>
+                  <a:srgbClr val="569CD6"/>
+                </a:solidFill>
+                <a:latin typeface="Courier New" pitchFamily="34" charset="0"/>
+                <a:ea typeface="Courier New" pitchFamily="34" charset="-122"/>
+                <a:cs typeface="Courier New" pitchFamily="34" charset="-120"/>
+              </a:rPr>
+              <a:t>use</a:t>
+            </a:r>
+            <a:pPr indent="0" marL="0">
+              <a:lnSpc>
+                <a:spcPct val="105000"/>
+              </a:lnSpc>
+              <a:buNone/>
+            </a:pPr>
+            <a:r>
+              <a:rPr lang="en-US" sz="1000" dirty="0">
+                <a:solidFill>
+                  <a:srgbClr val="CCCCCC"/>
+                </a:solidFill>
+                <a:latin typeface="Courier New" pitchFamily="34" charset="0"/>
+                <a:ea typeface="Courier New" pitchFamily="34" charset="-122"/>
+                <a:cs typeface="Courier New" pitchFamily="34" charset="-120"/>
+              </a:rPr>
+              <a:t> </a:t>
+            </a:r>
+            <a:pPr indent="0" marL="0">
+              <a:lnSpc>
+                <a:spcPct val="105000"/>
+              </a:lnSpc>
+              <a:buNone/>
+            </a:pPr>
+            <a:r>
+              <a:rPr lang="en-US" sz="1000" dirty="0">
+                <a:solidFill>
+                  <a:srgbClr val="569CD6"/>
+                </a:solidFill>
+                <a:latin typeface="Courier New" pitchFamily="34" charset="0"/>
+                <a:ea typeface="Courier New" pitchFamily="34" charset="-122"/>
+                <a:cs typeface="Courier New" pitchFamily="34" charset="-120"/>
+              </a:rPr>
+              <a:t>association</a:t>
+            </a:r>
+            <a:pPr indent="0" marL="0">
+              <a:lnSpc>
+                <a:spcPct val="105000"/>
+              </a:lnSpc>
+              <a:buNone/>
+            </a:pPr>
+            <a:r>
+              <a:rPr lang="en-US" sz="1000" dirty="0">
+                <a:solidFill>
+                  <a:srgbClr val="CCCCCC"/>
+                </a:solidFill>
+                <a:latin typeface="Courier New" pitchFamily="34" charset="0"/>
+                <a:ea typeface="Courier New" pitchFamily="34" charset="-122"/>
+                <a:cs typeface="Courier New" pitchFamily="34" charset="-120"/>
+              </a:rPr>
+              <a:t> </a:t>
+            </a:r>
+            <a:pPr indent="0" marL="0">
+              <a:lnSpc>
+                <a:spcPct val="105000"/>
+              </a:lnSpc>
+              <a:buNone/>
+            </a:pPr>
+            <a:r>
+              <a:rPr lang="en-US" sz="1000" dirty="0">
+                <a:solidFill>
+                  <a:srgbClr val="CCCCCC"/>
+                </a:solidFill>
+                <a:latin typeface="Courier New" pitchFamily="34" charset="0"/>
+                <a:ea typeface="Courier New" pitchFamily="34" charset="-122"/>
+                <a:cs typeface="Courier New" pitchFamily="34" charset="-120"/>
+              </a:rPr>
+              <a:t>_Itens</a:t>
+            </a:r>
+            <a:pPr indent="0" marL="0">
+              <a:lnSpc>
+                <a:spcPct val="105000"/>
+              </a:lnSpc>
+              <a:buNone/>
+            </a:pPr>
+            <a:r>
+              <a:rPr lang="en-US" sz="1000" dirty="0">
+                <a:solidFill>
+                  <a:srgbClr val="CCCCCC"/>
+                </a:solidFill>
+                <a:latin typeface="Courier New" pitchFamily="34" charset="0"/>
+                <a:ea typeface="Courier New" pitchFamily="34" charset="-122"/>
+                <a:cs typeface="Courier New" pitchFamily="34" charset="-120"/>
+              </a:rPr>
+              <a:t> </a:t>
+            </a:r>
+            <a:pPr indent="0" marL="0">
+              <a:lnSpc>
+                <a:spcPct val="105000"/>
+              </a:lnSpc>
+              <a:buNone/>
+            </a:pPr>
+            <a:r>
+              <a:rPr lang="en-US" sz="1000" dirty="0">
+                <a:solidFill>
+                  <a:srgbClr val="CCCCCC"/>
                 </a:solidFill>
                 <a:latin typeface="Courier New" pitchFamily="34" charset="0"/>
                 <a:ea typeface="Courier New" pitchFamily="34" charset="-122"/>
@@ -9086,6 +11408,176 @@
               </a:rPr>
               <a:t>{</a:t>
             </a:r>
+            <a:pPr indent="0" marL="0">
+              <a:lnSpc>
+                <a:spcPct val="105000"/>
+              </a:lnSpc>
+              <a:buNone/>
+            </a:pPr>
+            <a:r>
+              <a:rPr lang="en-US" sz="1000" dirty="0">
+                <a:solidFill>
+                  <a:srgbClr val="CCCCCC"/>
+                </a:solidFill>
+                <a:latin typeface="Courier New" pitchFamily="34" charset="0"/>
+                <a:ea typeface="Courier New" pitchFamily="34" charset="-122"/>
+                <a:cs typeface="Courier New" pitchFamily="34" charset="-120"/>
+              </a:rPr>
+              <a:t> </a:t>
+            </a:r>
+            <a:pPr indent="0" marL="0">
+              <a:lnSpc>
+                <a:spcPct val="105000"/>
+              </a:lnSpc>
+              <a:buNone/>
+            </a:pPr>
+            <a:r>
+              <a:rPr lang="en-US" sz="1000" dirty="0">
+                <a:solidFill>
+                  <a:srgbClr val="569CD6"/>
+                </a:solidFill>
+                <a:latin typeface="Courier New" pitchFamily="34" charset="0"/>
+                <a:ea typeface="Courier New" pitchFamily="34" charset="-122"/>
+                <a:cs typeface="Courier New" pitchFamily="34" charset="-120"/>
+              </a:rPr>
+              <a:t>create</a:t>
+            </a:r>
+            <a:pPr indent="0" marL="0">
+              <a:lnSpc>
+                <a:spcPct val="105000"/>
+              </a:lnSpc>
+              <a:buNone/>
+            </a:pPr>
+            <a:r>
+              <a:rPr lang="en-US" sz="1000" dirty="0">
+                <a:solidFill>
+                  <a:srgbClr val="CCCCCC"/>
+                </a:solidFill>
+                <a:latin typeface="Courier New" pitchFamily="34" charset="0"/>
+                <a:ea typeface="Courier New" pitchFamily="34" charset="-122"/>
+                <a:cs typeface="Courier New" pitchFamily="34" charset="-120"/>
+              </a:rPr>
+              <a:t>;</a:t>
+            </a:r>
+            <a:pPr indent="0" marL="0">
+              <a:lnSpc>
+                <a:spcPct val="105000"/>
+              </a:lnSpc>
+              <a:buNone/>
+            </a:pPr>
+            <a:r>
+              <a:rPr lang="en-US" sz="1000" dirty="0">
+                <a:solidFill>
+                  <a:srgbClr val="CCCCCC"/>
+                </a:solidFill>
+                <a:latin typeface="Courier New" pitchFamily="34" charset="0"/>
+                <a:ea typeface="Courier New" pitchFamily="34" charset="-122"/>
+                <a:cs typeface="Courier New" pitchFamily="34" charset="-120"/>
+              </a:rPr>
+              <a:t> </a:t>
+            </a:r>
+            <a:pPr indent="0" marL="0">
+              <a:lnSpc>
+                <a:spcPct val="105000"/>
+              </a:lnSpc>
+              <a:buNone/>
+            </a:pPr>
+            <a:r>
+              <a:rPr lang="en-US" sz="1000" dirty="0">
+                <a:solidFill>
+                  <a:srgbClr val="569CD6"/>
+                </a:solidFill>
+                <a:latin typeface="Courier New" pitchFamily="34" charset="0"/>
+                <a:ea typeface="Courier New" pitchFamily="34" charset="-122"/>
+                <a:cs typeface="Courier New" pitchFamily="34" charset="-120"/>
+              </a:rPr>
+              <a:t>with</a:t>
+            </a:r>
+            <a:pPr indent="0" marL="0">
+              <a:lnSpc>
+                <a:spcPct val="105000"/>
+              </a:lnSpc>
+              <a:buNone/>
+            </a:pPr>
+            <a:r>
+              <a:rPr lang="en-US" sz="1000" dirty="0">
+                <a:solidFill>
+                  <a:srgbClr val="CCCCCC"/>
+                </a:solidFill>
+                <a:latin typeface="Courier New" pitchFamily="34" charset="0"/>
+                <a:ea typeface="Courier New" pitchFamily="34" charset="-122"/>
+                <a:cs typeface="Courier New" pitchFamily="34" charset="-120"/>
+              </a:rPr>
+              <a:t> </a:t>
+            </a:r>
+            <a:pPr indent="0" marL="0">
+              <a:lnSpc>
+                <a:spcPct val="105000"/>
+              </a:lnSpc>
+              <a:buNone/>
+            </a:pPr>
+            <a:r>
+              <a:rPr lang="en-US" sz="1000" dirty="0">
+                <a:solidFill>
+                  <a:srgbClr val="569CD6"/>
+                </a:solidFill>
+                <a:latin typeface="Courier New" pitchFamily="34" charset="0"/>
+                <a:ea typeface="Courier New" pitchFamily="34" charset="-122"/>
+                <a:cs typeface="Courier New" pitchFamily="34" charset="-120"/>
+              </a:rPr>
+              <a:t>draft</a:t>
+            </a:r>
+            <a:pPr indent="0" marL="0">
+              <a:lnSpc>
+                <a:spcPct val="105000"/>
+              </a:lnSpc>
+              <a:buNone/>
+            </a:pPr>
+            <a:r>
+              <a:rPr lang="en-US" sz="1000" dirty="0">
+                <a:solidFill>
+                  <a:srgbClr val="CCCCCC"/>
+                </a:solidFill>
+                <a:latin typeface="Courier New" pitchFamily="34" charset="0"/>
+                <a:ea typeface="Courier New" pitchFamily="34" charset="-122"/>
+                <a:cs typeface="Courier New" pitchFamily="34" charset="-120"/>
+              </a:rPr>
+              <a:t>;</a:t>
+            </a:r>
+            <a:pPr indent="0" marL="0">
+              <a:lnSpc>
+                <a:spcPct val="105000"/>
+              </a:lnSpc>
+              <a:buNone/>
+            </a:pPr>
+            <a:r>
+              <a:rPr lang="en-US" sz="1000" dirty="0">
+                <a:solidFill>
+                  <a:srgbClr val="CCCCCC"/>
+                </a:solidFill>
+                <a:latin typeface="Courier New" pitchFamily="34" charset="0"/>
+                <a:ea typeface="Courier New" pitchFamily="34" charset="-122"/>
+                <a:cs typeface="Courier New" pitchFamily="34" charset="-120"/>
+              </a:rPr>
+              <a:t> </a:t>
+            </a:r>
+            <a:pPr indent="0" marL="0">
+              <a:lnSpc>
+                <a:spcPct val="105000"/>
+              </a:lnSpc>
+              <a:buNone/>
+            </a:pPr>
+            <a:r>
+              <a:rPr lang="en-US" sz="1000" dirty="0">
+                <a:solidFill>
+                  <a:srgbClr val="CCCCCC"/>
+                </a:solidFill>
+                <a:latin typeface="Courier New" pitchFamily="34" charset="0"/>
+                <a:ea typeface="Courier New" pitchFamily="34" charset="-122"/>
+                <a:cs typeface="Courier New" pitchFamily="34" charset="-120"/>
+              </a:rPr>
+              <a:t>}</a:t>
+            </a:r>
             <a:endParaRPr lang="en-US" sz="1000" dirty="0"/>
           </a:p>
           <a:p>
@@ -9098,13 +11590,13 @@
             <a:r>
               <a:rPr lang="en-US" sz="1000" dirty="0">
                 <a:solidFill>
-                  <a:srgbClr val="E8ECEF"/>
-                </a:solidFill>
-                <a:latin typeface="Courier New" pitchFamily="34" charset="0"/>
-                <a:ea typeface="Courier New" pitchFamily="34" charset="-122"/>
-                <a:cs typeface="Courier New" pitchFamily="34" charset="-120"/>
-              </a:rPr>
-              <a:t>  </a:t>
+                  <a:srgbClr val="6E7681"/>
+                </a:solidFill>
+                <a:latin typeface="Courier New" pitchFamily="34" charset="0"/>
+                <a:ea typeface="Courier New" pitchFamily="34" charset="-122"/>
+                <a:cs typeface="Courier New" pitchFamily="34" charset="-120"/>
+              </a:rPr>
+              <a:t>23  </a:t>
             </a:r>
             <a:pPr indent="0" marL="0">
               <a:lnSpc>
@@ -9115,1610 +11607,21 @@
             <a:r>
               <a:rPr lang="en-US" sz="1000" dirty="0">
                 <a:solidFill>
-                  <a:srgbClr val="4DB1FF"/>
-                </a:solidFill>
-                <a:latin typeface="Courier New" pitchFamily="34" charset="0"/>
-                <a:ea typeface="Courier New" pitchFamily="34" charset="-122"/>
-                <a:cs typeface="Courier New" pitchFamily="34" charset="-120"/>
-              </a:rPr>
-              <a:t>use</a:t>
-            </a:r>
-            <a:pPr indent="0" marL="0">
-              <a:lnSpc>
-                <a:spcPct val="105000"/>
-              </a:lnSpc>
-              <a:buNone/>
-            </a:pPr>
-            <a:r>
-              <a:rPr lang="en-US" sz="1000" dirty="0">
-                <a:solidFill>
-                  <a:srgbClr val="E8ECEF"/>
-                </a:solidFill>
-                <a:latin typeface="Courier New" pitchFamily="34" charset="0"/>
-                <a:ea typeface="Courier New" pitchFamily="34" charset="-122"/>
-                <a:cs typeface="Courier New" pitchFamily="34" charset="-120"/>
-              </a:rPr>
-              <a:t> </a:t>
-            </a:r>
-            <a:pPr indent="0" marL="0">
-              <a:lnSpc>
-                <a:spcPct val="105000"/>
-              </a:lnSpc>
-              <a:buNone/>
-            </a:pPr>
-            <a:r>
-              <a:rPr lang="en-US" sz="1000" dirty="0">
-                <a:solidFill>
-                  <a:srgbClr val="4DB1FF"/>
-                </a:solidFill>
-                <a:latin typeface="Courier New" pitchFamily="34" charset="0"/>
-                <a:ea typeface="Courier New" pitchFamily="34" charset="-122"/>
-                <a:cs typeface="Courier New" pitchFamily="34" charset="-120"/>
-              </a:rPr>
-              <a:t>create</a:t>
-            </a:r>
-            <a:pPr indent="0" marL="0">
-              <a:lnSpc>
-                <a:spcPct val="105000"/>
-              </a:lnSpc>
-              <a:buNone/>
-            </a:pPr>
-            <a:r>
-              <a:rPr lang="en-US" sz="1000" dirty="0">
-                <a:solidFill>
-                  <a:srgbClr val="E8ECEF"/>
-                </a:solidFill>
-                <a:latin typeface="Courier New" pitchFamily="34" charset="0"/>
-                <a:ea typeface="Courier New" pitchFamily="34" charset="-122"/>
-                <a:cs typeface="Courier New" pitchFamily="34" charset="-120"/>
-              </a:rPr>
-              <a:t>;</a:t>
+                  <a:srgbClr val="CCCCCC"/>
+                </a:solidFill>
+                <a:latin typeface="Courier New" pitchFamily="34" charset="0"/>
+                <a:ea typeface="Courier New" pitchFamily="34" charset="-122"/>
+                <a:cs typeface="Courier New" pitchFamily="34" charset="-120"/>
+              </a:rPr>
+              <a:t>}</a:t>
             </a:r>
             <a:endParaRPr lang="en-US" sz="1000" dirty="0"/>
           </a:p>
-          <a:p>
-            <a:pPr indent="0" marL="0">
-              <a:lnSpc>
-                <a:spcPct val="105000"/>
-              </a:lnSpc>
-              <a:buNone/>
-            </a:pPr>
-            <a:r>
-              <a:rPr lang="en-US" sz="1000" dirty="0">
-                <a:solidFill>
-                  <a:srgbClr val="E8ECEF"/>
-                </a:solidFill>
-                <a:latin typeface="Courier New" pitchFamily="34" charset="0"/>
-                <a:ea typeface="Courier New" pitchFamily="34" charset="-122"/>
-                <a:cs typeface="Courier New" pitchFamily="34" charset="-120"/>
-              </a:rPr>
-              <a:t>  </a:t>
-            </a:r>
-            <a:pPr indent="0" marL="0">
-              <a:lnSpc>
-                <a:spcPct val="105000"/>
-              </a:lnSpc>
-              <a:buNone/>
-            </a:pPr>
-            <a:r>
-              <a:rPr lang="en-US" sz="1000" dirty="0">
-                <a:solidFill>
-                  <a:srgbClr val="4DB1FF"/>
-                </a:solidFill>
-                <a:latin typeface="Courier New" pitchFamily="34" charset="0"/>
-                <a:ea typeface="Courier New" pitchFamily="34" charset="-122"/>
-                <a:cs typeface="Courier New" pitchFamily="34" charset="-120"/>
-              </a:rPr>
-              <a:t>use</a:t>
-            </a:r>
-            <a:pPr indent="0" marL="0">
-              <a:lnSpc>
-                <a:spcPct val="105000"/>
-              </a:lnSpc>
-              <a:buNone/>
-            </a:pPr>
-            <a:r>
-              <a:rPr lang="en-US" sz="1000" dirty="0">
-                <a:solidFill>
-                  <a:srgbClr val="E8ECEF"/>
-                </a:solidFill>
-                <a:latin typeface="Courier New" pitchFamily="34" charset="0"/>
-                <a:ea typeface="Courier New" pitchFamily="34" charset="-122"/>
-                <a:cs typeface="Courier New" pitchFamily="34" charset="-120"/>
-              </a:rPr>
-              <a:t> </a:t>
-            </a:r>
-            <a:pPr indent="0" marL="0">
-              <a:lnSpc>
-                <a:spcPct val="105000"/>
-              </a:lnSpc>
-              <a:buNone/>
-            </a:pPr>
-            <a:r>
-              <a:rPr lang="en-US" sz="1000" dirty="0">
-                <a:solidFill>
-                  <a:srgbClr val="4DB1FF"/>
-                </a:solidFill>
-                <a:latin typeface="Courier New" pitchFamily="34" charset="0"/>
-                <a:ea typeface="Courier New" pitchFamily="34" charset="-122"/>
-                <a:cs typeface="Courier New" pitchFamily="34" charset="-120"/>
-              </a:rPr>
-              <a:t>update</a:t>
-            </a:r>
-            <a:pPr indent="0" marL="0">
-              <a:lnSpc>
-                <a:spcPct val="105000"/>
-              </a:lnSpc>
-              <a:buNone/>
-            </a:pPr>
-            <a:r>
-              <a:rPr lang="en-US" sz="1000" dirty="0">
-                <a:solidFill>
-                  <a:srgbClr val="E8ECEF"/>
-                </a:solidFill>
-                <a:latin typeface="Courier New" pitchFamily="34" charset="0"/>
-                <a:ea typeface="Courier New" pitchFamily="34" charset="-122"/>
-                <a:cs typeface="Courier New" pitchFamily="34" charset="-120"/>
-              </a:rPr>
-              <a:t>;</a:t>
-            </a:r>
-            <a:endParaRPr lang="en-US" sz="1000" dirty="0"/>
-          </a:p>
-          <a:p>
-            <a:pPr indent="0" marL="0">
-              <a:lnSpc>
-                <a:spcPct val="105000"/>
-              </a:lnSpc>
-              <a:buNone/>
-            </a:pPr>
-            <a:r>
-              <a:rPr lang="en-US" sz="1000" dirty="0">
-                <a:solidFill>
-                  <a:srgbClr val="E8ECEF"/>
-                </a:solidFill>
-                <a:latin typeface="Courier New" pitchFamily="34" charset="0"/>
-                <a:ea typeface="Courier New" pitchFamily="34" charset="-122"/>
-                <a:cs typeface="Courier New" pitchFamily="34" charset="-120"/>
-              </a:rPr>
-              <a:t>  </a:t>
-            </a:r>
-            <a:pPr indent="0" marL="0">
-              <a:lnSpc>
-                <a:spcPct val="105000"/>
-              </a:lnSpc>
-              <a:buNone/>
-            </a:pPr>
-            <a:r>
-              <a:rPr lang="en-US" sz="1000" dirty="0">
-                <a:solidFill>
-                  <a:srgbClr val="4DB1FF"/>
-                </a:solidFill>
-                <a:latin typeface="Courier New" pitchFamily="34" charset="0"/>
-                <a:ea typeface="Courier New" pitchFamily="34" charset="-122"/>
-                <a:cs typeface="Courier New" pitchFamily="34" charset="-120"/>
-              </a:rPr>
-              <a:t>use</a:t>
-            </a:r>
-            <a:pPr indent="0" marL="0">
-              <a:lnSpc>
-                <a:spcPct val="105000"/>
-              </a:lnSpc>
-              <a:buNone/>
-            </a:pPr>
-            <a:r>
-              <a:rPr lang="en-US" sz="1000" dirty="0">
-                <a:solidFill>
-                  <a:srgbClr val="E8ECEF"/>
-                </a:solidFill>
-                <a:latin typeface="Courier New" pitchFamily="34" charset="0"/>
-                <a:ea typeface="Courier New" pitchFamily="34" charset="-122"/>
-                <a:cs typeface="Courier New" pitchFamily="34" charset="-120"/>
-              </a:rPr>
-              <a:t> </a:t>
-            </a:r>
-            <a:pPr indent="0" marL="0">
-              <a:lnSpc>
-                <a:spcPct val="105000"/>
-              </a:lnSpc>
-              <a:buNone/>
-            </a:pPr>
-            <a:r>
-              <a:rPr lang="en-US" sz="1000" dirty="0">
-                <a:solidFill>
-                  <a:srgbClr val="4DB1FF"/>
-                </a:solidFill>
-                <a:latin typeface="Courier New" pitchFamily="34" charset="0"/>
-                <a:ea typeface="Courier New" pitchFamily="34" charset="-122"/>
-                <a:cs typeface="Courier New" pitchFamily="34" charset="-120"/>
-              </a:rPr>
-              <a:t>delete</a:t>
-            </a:r>
-            <a:pPr indent="0" marL="0">
-              <a:lnSpc>
-                <a:spcPct val="105000"/>
-              </a:lnSpc>
-              <a:buNone/>
-            </a:pPr>
-            <a:r>
-              <a:rPr lang="en-US" sz="1000" dirty="0">
-                <a:solidFill>
-                  <a:srgbClr val="E8ECEF"/>
-                </a:solidFill>
-                <a:latin typeface="Courier New" pitchFamily="34" charset="0"/>
-                <a:ea typeface="Courier New" pitchFamily="34" charset="-122"/>
-                <a:cs typeface="Courier New" pitchFamily="34" charset="-120"/>
-              </a:rPr>
-              <a:t>;</a:t>
-            </a:r>
-            <a:endParaRPr lang="en-US" sz="1000" dirty="0"/>
-          </a:p>
-          <a:p>
-            <a:pPr indent="0" marL="0">
-              <a:lnSpc>
-                <a:spcPct val="105000"/>
-              </a:lnSpc>
-              <a:buNone/>
-            </a:pPr>
-            <a:r>
-              <a:rPr lang="en-US" sz="1000" dirty="0">
-                <a:solidFill>
-                  <a:srgbClr val="E8ECEF"/>
-                </a:solidFill>
-                <a:latin typeface="Courier New" pitchFamily="34" charset="0"/>
-                <a:ea typeface="Courier New" pitchFamily="34" charset="-122"/>
-                <a:cs typeface="Courier New" pitchFamily="34" charset="-120"/>
-              </a:rPr>
-              <a:t>  </a:t>
-            </a:r>
-            <a:pPr indent="0" marL="0">
-              <a:lnSpc>
-                <a:spcPct val="105000"/>
-              </a:lnSpc>
-              <a:buNone/>
-            </a:pPr>
-            <a:r>
-              <a:rPr lang="en-US" sz="1000" dirty="0">
-                <a:solidFill>
-                  <a:srgbClr val="4DB1FF"/>
-                </a:solidFill>
-                <a:latin typeface="Courier New" pitchFamily="34" charset="0"/>
-                <a:ea typeface="Courier New" pitchFamily="34" charset="-122"/>
-                <a:cs typeface="Courier New" pitchFamily="34" charset="-120"/>
-              </a:rPr>
-              <a:t>use</a:t>
-            </a:r>
-            <a:pPr indent="0" marL="0">
-              <a:lnSpc>
-                <a:spcPct val="105000"/>
-              </a:lnSpc>
-              <a:buNone/>
-            </a:pPr>
-            <a:r>
-              <a:rPr lang="en-US" sz="1000" dirty="0">
-                <a:solidFill>
-                  <a:srgbClr val="E8ECEF"/>
-                </a:solidFill>
-                <a:latin typeface="Courier New" pitchFamily="34" charset="0"/>
-                <a:ea typeface="Courier New" pitchFamily="34" charset="-122"/>
-                <a:cs typeface="Courier New" pitchFamily="34" charset="-120"/>
-              </a:rPr>
-              <a:t> </a:t>
-            </a:r>
-            <a:pPr indent="0" marL="0">
-              <a:lnSpc>
-                <a:spcPct val="105000"/>
-              </a:lnSpc>
-              <a:buNone/>
-            </a:pPr>
-            <a:r>
-              <a:rPr lang="en-US" sz="1000" dirty="0">
-                <a:solidFill>
-                  <a:srgbClr val="4DB1FF"/>
-                </a:solidFill>
-                <a:latin typeface="Courier New" pitchFamily="34" charset="0"/>
-                <a:ea typeface="Courier New" pitchFamily="34" charset="-122"/>
-                <a:cs typeface="Courier New" pitchFamily="34" charset="-120"/>
-              </a:rPr>
-              <a:t>action</a:t>
-            </a:r>
-            <a:pPr indent="0" marL="0">
-              <a:lnSpc>
-                <a:spcPct val="105000"/>
-              </a:lnSpc>
-              <a:buNone/>
-            </a:pPr>
-            <a:r>
-              <a:rPr lang="en-US" sz="1000" dirty="0">
-                <a:solidFill>
-                  <a:srgbClr val="E8ECEF"/>
-                </a:solidFill>
-                <a:latin typeface="Courier New" pitchFamily="34" charset="0"/>
-                <a:ea typeface="Courier New" pitchFamily="34" charset="-122"/>
-                <a:cs typeface="Courier New" pitchFamily="34" charset="-120"/>
-              </a:rPr>
-              <a:t> </a:t>
-            </a:r>
-            <a:pPr indent="0" marL="0">
-              <a:lnSpc>
-                <a:spcPct val="105000"/>
-              </a:lnSpc>
-              <a:buNone/>
-            </a:pPr>
-            <a:r>
-              <a:rPr lang="en-US" sz="1000" dirty="0">
-                <a:solidFill>
-                  <a:srgbClr val="E8ECEF"/>
-                </a:solidFill>
-                <a:latin typeface="Courier New" pitchFamily="34" charset="0"/>
-                <a:ea typeface="Courier New" pitchFamily="34" charset="-122"/>
-                <a:cs typeface="Courier New" pitchFamily="34" charset="-120"/>
-              </a:rPr>
-              <a:t>Edit</a:t>
-            </a:r>
-            <a:pPr indent="0" marL="0">
-              <a:lnSpc>
-                <a:spcPct val="105000"/>
-              </a:lnSpc>
-              <a:buNone/>
-            </a:pPr>
-            <a:r>
-              <a:rPr lang="en-US" sz="1000" dirty="0">
-                <a:solidFill>
-                  <a:srgbClr val="E8ECEF"/>
-                </a:solidFill>
-                <a:latin typeface="Courier New" pitchFamily="34" charset="0"/>
-                <a:ea typeface="Courier New" pitchFamily="34" charset="-122"/>
-                <a:cs typeface="Courier New" pitchFamily="34" charset="-120"/>
-              </a:rPr>
-              <a:t>;</a:t>
-            </a:r>
-            <a:endParaRPr lang="en-US" sz="1000" dirty="0"/>
-          </a:p>
-          <a:p>
-            <a:pPr indent="0" marL="0">
-              <a:lnSpc>
-                <a:spcPct val="105000"/>
-              </a:lnSpc>
-              <a:buNone/>
-            </a:pPr>
-            <a:r>
-              <a:rPr lang="en-US" sz="1000" dirty="0">
-                <a:solidFill>
-                  <a:srgbClr val="E8ECEF"/>
-                </a:solidFill>
-                <a:latin typeface="Courier New" pitchFamily="34" charset="0"/>
-                <a:ea typeface="Courier New" pitchFamily="34" charset="-122"/>
-                <a:cs typeface="Courier New" pitchFamily="34" charset="-120"/>
-              </a:rPr>
-              <a:t>  </a:t>
-            </a:r>
-            <a:pPr indent="0" marL="0">
-              <a:lnSpc>
-                <a:spcPct val="105000"/>
-              </a:lnSpc>
-              <a:buNone/>
-            </a:pPr>
-            <a:r>
-              <a:rPr lang="en-US" sz="1000" dirty="0">
-                <a:solidFill>
-                  <a:srgbClr val="4DB1FF"/>
-                </a:solidFill>
-                <a:latin typeface="Courier New" pitchFamily="34" charset="0"/>
-                <a:ea typeface="Courier New" pitchFamily="34" charset="-122"/>
-                <a:cs typeface="Courier New" pitchFamily="34" charset="-120"/>
-              </a:rPr>
-              <a:t>use</a:t>
-            </a:r>
-            <a:pPr indent="0" marL="0">
-              <a:lnSpc>
-                <a:spcPct val="105000"/>
-              </a:lnSpc>
-              <a:buNone/>
-            </a:pPr>
-            <a:r>
-              <a:rPr lang="en-US" sz="1000" dirty="0">
-                <a:solidFill>
-                  <a:srgbClr val="E8ECEF"/>
-                </a:solidFill>
-                <a:latin typeface="Courier New" pitchFamily="34" charset="0"/>
-                <a:ea typeface="Courier New" pitchFamily="34" charset="-122"/>
-                <a:cs typeface="Courier New" pitchFamily="34" charset="-120"/>
-              </a:rPr>
-              <a:t> </a:t>
-            </a:r>
-            <a:pPr indent="0" marL="0">
-              <a:lnSpc>
-                <a:spcPct val="105000"/>
-              </a:lnSpc>
-              <a:buNone/>
-            </a:pPr>
-            <a:r>
-              <a:rPr lang="en-US" sz="1000" dirty="0">
-                <a:solidFill>
-                  <a:srgbClr val="4DB1FF"/>
-                </a:solidFill>
-                <a:latin typeface="Courier New" pitchFamily="34" charset="0"/>
-                <a:ea typeface="Courier New" pitchFamily="34" charset="-122"/>
-                <a:cs typeface="Courier New" pitchFamily="34" charset="-120"/>
-              </a:rPr>
-              <a:t>action</a:t>
-            </a:r>
-            <a:pPr indent="0" marL="0">
-              <a:lnSpc>
-                <a:spcPct val="105000"/>
-              </a:lnSpc>
-              <a:buNone/>
-            </a:pPr>
-            <a:r>
-              <a:rPr lang="en-US" sz="1000" dirty="0">
-                <a:solidFill>
-                  <a:srgbClr val="E8ECEF"/>
-                </a:solidFill>
-                <a:latin typeface="Courier New" pitchFamily="34" charset="0"/>
-                <a:ea typeface="Courier New" pitchFamily="34" charset="-122"/>
-                <a:cs typeface="Courier New" pitchFamily="34" charset="-120"/>
-              </a:rPr>
-              <a:t> </a:t>
-            </a:r>
-            <a:pPr indent="0" marL="0">
-              <a:lnSpc>
-                <a:spcPct val="105000"/>
-              </a:lnSpc>
-              <a:buNone/>
-            </a:pPr>
-            <a:r>
-              <a:rPr lang="en-US" sz="1000" dirty="0">
-                <a:solidFill>
-                  <a:srgbClr val="E8ECEF"/>
-                </a:solidFill>
-                <a:latin typeface="Courier New" pitchFamily="34" charset="0"/>
-                <a:ea typeface="Courier New" pitchFamily="34" charset="-122"/>
-                <a:cs typeface="Courier New" pitchFamily="34" charset="-120"/>
-              </a:rPr>
-              <a:t>Activate</a:t>
-            </a:r>
-            <a:pPr indent="0" marL="0">
-              <a:lnSpc>
-                <a:spcPct val="105000"/>
-              </a:lnSpc>
-              <a:buNone/>
-            </a:pPr>
-            <a:r>
-              <a:rPr lang="en-US" sz="1000" dirty="0">
-                <a:solidFill>
-                  <a:srgbClr val="E8ECEF"/>
-                </a:solidFill>
-                <a:latin typeface="Courier New" pitchFamily="34" charset="0"/>
-                <a:ea typeface="Courier New" pitchFamily="34" charset="-122"/>
-                <a:cs typeface="Courier New" pitchFamily="34" charset="-120"/>
-              </a:rPr>
-              <a:t>;</a:t>
-            </a:r>
-            <a:endParaRPr lang="en-US" sz="1000" dirty="0"/>
-          </a:p>
-          <a:p>
-            <a:pPr indent="0" marL="0">
-              <a:lnSpc>
-                <a:spcPct val="105000"/>
-              </a:lnSpc>
-              <a:buNone/>
-            </a:pPr>
-            <a:r>
-              <a:rPr lang="en-US" sz="1000" dirty="0">
-                <a:solidFill>
-                  <a:srgbClr val="E8ECEF"/>
-                </a:solidFill>
-                <a:latin typeface="Courier New" pitchFamily="34" charset="0"/>
-                <a:ea typeface="Courier New" pitchFamily="34" charset="-122"/>
-                <a:cs typeface="Courier New" pitchFamily="34" charset="-120"/>
-              </a:rPr>
-              <a:t>  </a:t>
-            </a:r>
-            <a:pPr indent="0" marL="0">
-              <a:lnSpc>
-                <a:spcPct val="105000"/>
-              </a:lnSpc>
-              <a:buNone/>
-            </a:pPr>
-            <a:r>
-              <a:rPr lang="en-US" sz="1000" dirty="0">
-                <a:solidFill>
-                  <a:srgbClr val="4DB1FF"/>
-                </a:solidFill>
-                <a:latin typeface="Courier New" pitchFamily="34" charset="0"/>
-                <a:ea typeface="Courier New" pitchFamily="34" charset="-122"/>
-                <a:cs typeface="Courier New" pitchFamily="34" charset="-120"/>
-              </a:rPr>
-              <a:t>use</a:t>
-            </a:r>
-            <a:pPr indent="0" marL="0">
-              <a:lnSpc>
-                <a:spcPct val="105000"/>
-              </a:lnSpc>
-              <a:buNone/>
-            </a:pPr>
-            <a:r>
-              <a:rPr lang="en-US" sz="1000" dirty="0">
-                <a:solidFill>
-                  <a:srgbClr val="E8ECEF"/>
-                </a:solidFill>
-                <a:latin typeface="Courier New" pitchFamily="34" charset="0"/>
-                <a:ea typeface="Courier New" pitchFamily="34" charset="-122"/>
-                <a:cs typeface="Courier New" pitchFamily="34" charset="-120"/>
-              </a:rPr>
-              <a:t> </a:t>
-            </a:r>
-            <a:pPr indent="0" marL="0">
-              <a:lnSpc>
-                <a:spcPct val="105000"/>
-              </a:lnSpc>
-              <a:buNone/>
-            </a:pPr>
-            <a:r>
-              <a:rPr lang="en-US" sz="1000" dirty="0">
-                <a:solidFill>
-                  <a:srgbClr val="4DB1FF"/>
-                </a:solidFill>
-                <a:latin typeface="Courier New" pitchFamily="34" charset="0"/>
-                <a:ea typeface="Courier New" pitchFamily="34" charset="-122"/>
-                <a:cs typeface="Courier New" pitchFamily="34" charset="-120"/>
-              </a:rPr>
-              <a:t>action</a:t>
-            </a:r>
-            <a:pPr indent="0" marL="0">
-              <a:lnSpc>
-                <a:spcPct val="105000"/>
-              </a:lnSpc>
-              <a:buNone/>
-            </a:pPr>
-            <a:r>
-              <a:rPr lang="en-US" sz="1000" dirty="0">
-                <a:solidFill>
-                  <a:srgbClr val="E8ECEF"/>
-                </a:solidFill>
-                <a:latin typeface="Courier New" pitchFamily="34" charset="0"/>
-                <a:ea typeface="Courier New" pitchFamily="34" charset="-122"/>
-                <a:cs typeface="Courier New" pitchFamily="34" charset="-120"/>
-              </a:rPr>
-              <a:t> </a:t>
-            </a:r>
-            <a:pPr indent="0" marL="0">
-              <a:lnSpc>
-                <a:spcPct val="105000"/>
-              </a:lnSpc>
-              <a:buNone/>
-            </a:pPr>
-            <a:r>
-              <a:rPr lang="en-US" sz="1000" dirty="0">
-                <a:solidFill>
-                  <a:srgbClr val="E8ECEF"/>
-                </a:solidFill>
-                <a:latin typeface="Courier New" pitchFamily="34" charset="0"/>
-                <a:ea typeface="Courier New" pitchFamily="34" charset="-122"/>
-                <a:cs typeface="Courier New" pitchFamily="34" charset="-120"/>
-              </a:rPr>
-              <a:t>Discard</a:t>
-            </a:r>
-            <a:pPr indent="0" marL="0">
-              <a:lnSpc>
-                <a:spcPct val="105000"/>
-              </a:lnSpc>
-              <a:buNone/>
-            </a:pPr>
-            <a:r>
-              <a:rPr lang="en-US" sz="1000" dirty="0">
-                <a:solidFill>
-                  <a:srgbClr val="E8ECEF"/>
-                </a:solidFill>
-                <a:latin typeface="Courier New" pitchFamily="34" charset="0"/>
-                <a:ea typeface="Courier New" pitchFamily="34" charset="-122"/>
-                <a:cs typeface="Courier New" pitchFamily="34" charset="-120"/>
-              </a:rPr>
-              <a:t>;</a:t>
-            </a:r>
-            <a:endParaRPr lang="en-US" sz="1000" dirty="0"/>
-          </a:p>
-          <a:p>
-            <a:pPr indent="0" marL="0">
-              <a:lnSpc>
-                <a:spcPct val="105000"/>
-              </a:lnSpc>
-              <a:buNone/>
-            </a:pPr>
-            <a:r>
-              <a:rPr lang="en-US" sz="1000" dirty="0">
-                <a:solidFill>
-                  <a:srgbClr val="E8ECEF"/>
-                </a:solidFill>
-                <a:latin typeface="Courier New" pitchFamily="34" charset="0"/>
-                <a:ea typeface="Courier New" pitchFamily="34" charset="-122"/>
-                <a:cs typeface="Courier New" pitchFamily="34" charset="-120"/>
-              </a:rPr>
-              <a:t>  </a:t>
-            </a:r>
-            <a:pPr indent="0" marL="0">
-              <a:lnSpc>
-                <a:spcPct val="105000"/>
-              </a:lnSpc>
-              <a:buNone/>
-            </a:pPr>
-            <a:r>
-              <a:rPr lang="en-US" sz="1000" dirty="0">
-                <a:solidFill>
-                  <a:srgbClr val="4DB1FF"/>
-                </a:solidFill>
-                <a:latin typeface="Courier New" pitchFamily="34" charset="0"/>
-                <a:ea typeface="Courier New" pitchFamily="34" charset="-122"/>
-                <a:cs typeface="Courier New" pitchFamily="34" charset="-120"/>
-              </a:rPr>
-              <a:t>use</a:t>
-            </a:r>
-            <a:pPr indent="0" marL="0">
-              <a:lnSpc>
-                <a:spcPct val="105000"/>
-              </a:lnSpc>
-              <a:buNone/>
-            </a:pPr>
-            <a:r>
-              <a:rPr lang="en-US" sz="1000" dirty="0">
-                <a:solidFill>
-                  <a:srgbClr val="E8ECEF"/>
-                </a:solidFill>
-                <a:latin typeface="Courier New" pitchFamily="34" charset="0"/>
-                <a:ea typeface="Courier New" pitchFamily="34" charset="-122"/>
-                <a:cs typeface="Courier New" pitchFamily="34" charset="-120"/>
-              </a:rPr>
-              <a:t> </a:t>
-            </a:r>
-            <a:pPr indent="0" marL="0">
-              <a:lnSpc>
-                <a:spcPct val="105000"/>
-              </a:lnSpc>
-              <a:buNone/>
-            </a:pPr>
-            <a:r>
-              <a:rPr lang="en-US" sz="1000" dirty="0">
-                <a:solidFill>
-                  <a:srgbClr val="4DB1FF"/>
-                </a:solidFill>
-                <a:latin typeface="Courier New" pitchFamily="34" charset="0"/>
-                <a:ea typeface="Courier New" pitchFamily="34" charset="-122"/>
-                <a:cs typeface="Courier New" pitchFamily="34" charset="-120"/>
-              </a:rPr>
-              <a:t>action</a:t>
-            </a:r>
-            <a:pPr indent="0" marL="0">
-              <a:lnSpc>
-                <a:spcPct val="105000"/>
-              </a:lnSpc>
-              <a:buNone/>
-            </a:pPr>
-            <a:r>
-              <a:rPr lang="en-US" sz="1000" dirty="0">
-                <a:solidFill>
-                  <a:srgbClr val="E8ECEF"/>
-                </a:solidFill>
-                <a:latin typeface="Courier New" pitchFamily="34" charset="0"/>
-                <a:ea typeface="Courier New" pitchFamily="34" charset="-122"/>
-                <a:cs typeface="Courier New" pitchFamily="34" charset="-120"/>
-              </a:rPr>
-              <a:t> </a:t>
-            </a:r>
-            <a:pPr indent="0" marL="0">
-              <a:lnSpc>
-                <a:spcPct val="105000"/>
-              </a:lnSpc>
-              <a:buNone/>
-            </a:pPr>
-            <a:r>
-              <a:rPr lang="en-US" sz="1000" dirty="0">
-                <a:solidFill>
-                  <a:srgbClr val="E8ECEF"/>
-                </a:solidFill>
-                <a:latin typeface="Courier New" pitchFamily="34" charset="0"/>
-                <a:ea typeface="Courier New" pitchFamily="34" charset="-122"/>
-                <a:cs typeface="Courier New" pitchFamily="34" charset="-120"/>
-              </a:rPr>
-              <a:t>Resume</a:t>
-            </a:r>
-            <a:pPr indent="0" marL="0">
-              <a:lnSpc>
-                <a:spcPct val="105000"/>
-              </a:lnSpc>
-              <a:buNone/>
-            </a:pPr>
-            <a:r>
-              <a:rPr lang="en-US" sz="1000" dirty="0">
-                <a:solidFill>
-                  <a:srgbClr val="E8ECEF"/>
-                </a:solidFill>
-                <a:latin typeface="Courier New" pitchFamily="34" charset="0"/>
-                <a:ea typeface="Courier New" pitchFamily="34" charset="-122"/>
-                <a:cs typeface="Courier New" pitchFamily="34" charset="-120"/>
-              </a:rPr>
-              <a:t>;</a:t>
-            </a:r>
-            <a:endParaRPr lang="en-US" sz="1000" dirty="0"/>
-          </a:p>
-          <a:p>
-            <a:pPr indent="0" marL="0">
-              <a:lnSpc>
-                <a:spcPct val="105000"/>
-              </a:lnSpc>
-              <a:buNone/>
-            </a:pPr>
-            <a:r>
-              <a:rPr lang="en-US" sz="1000" dirty="0">
-                <a:solidFill>
-                  <a:srgbClr val="E8ECEF"/>
-                </a:solidFill>
-                <a:latin typeface="Courier New" pitchFamily="34" charset="0"/>
-                <a:ea typeface="Courier New" pitchFamily="34" charset="-122"/>
-                <a:cs typeface="Courier New" pitchFamily="34" charset="-120"/>
-              </a:rPr>
-              <a:t>  </a:t>
-            </a:r>
-            <a:pPr indent="0" marL="0">
-              <a:lnSpc>
-                <a:spcPct val="105000"/>
-              </a:lnSpc>
-              <a:buNone/>
-            </a:pPr>
-            <a:r>
-              <a:rPr lang="en-US" sz="1000" dirty="0">
-                <a:solidFill>
-                  <a:srgbClr val="4DB1FF"/>
-                </a:solidFill>
-                <a:latin typeface="Courier New" pitchFamily="34" charset="0"/>
-                <a:ea typeface="Courier New" pitchFamily="34" charset="-122"/>
-                <a:cs typeface="Courier New" pitchFamily="34" charset="-120"/>
-              </a:rPr>
-              <a:t>use</a:t>
-            </a:r>
-            <a:pPr indent="0" marL="0">
-              <a:lnSpc>
-                <a:spcPct val="105000"/>
-              </a:lnSpc>
-              <a:buNone/>
-            </a:pPr>
-            <a:r>
-              <a:rPr lang="en-US" sz="1000" dirty="0">
-                <a:solidFill>
-                  <a:srgbClr val="E8ECEF"/>
-                </a:solidFill>
-                <a:latin typeface="Courier New" pitchFamily="34" charset="0"/>
-                <a:ea typeface="Courier New" pitchFamily="34" charset="-122"/>
-                <a:cs typeface="Courier New" pitchFamily="34" charset="-120"/>
-              </a:rPr>
-              <a:t> </a:t>
-            </a:r>
-            <a:pPr indent="0" marL="0">
-              <a:lnSpc>
-                <a:spcPct val="105000"/>
-              </a:lnSpc>
-              <a:buNone/>
-            </a:pPr>
-            <a:r>
-              <a:rPr lang="en-US" sz="1000" dirty="0">
-                <a:solidFill>
-                  <a:srgbClr val="4DB1FF"/>
-                </a:solidFill>
-                <a:latin typeface="Courier New" pitchFamily="34" charset="0"/>
-                <a:ea typeface="Courier New" pitchFamily="34" charset="-122"/>
-                <a:cs typeface="Courier New" pitchFamily="34" charset="-120"/>
-              </a:rPr>
-              <a:t>action</a:t>
-            </a:r>
-            <a:pPr indent="0" marL="0">
-              <a:lnSpc>
-                <a:spcPct val="105000"/>
-              </a:lnSpc>
-              <a:buNone/>
-            </a:pPr>
-            <a:r>
-              <a:rPr lang="en-US" sz="1000" dirty="0">
-                <a:solidFill>
-                  <a:srgbClr val="E8ECEF"/>
-                </a:solidFill>
-                <a:latin typeface="Courier New" pitchFamily="34" charset="0"/>
-                <a:ea typeface="Courier New" pitchFamily="34" charset="-122"/>
-                <a:cs typeface="Courier New" pitchFamily="34" charset="-120"/>
-              </a:rPr>
-              <a:t> </a:t>
-            </a:r>
-            <a:pPr indent="0" marL="0">
-              <a:lnSpc>
-                <a:spcPct val="105000"/>
-              </a:lnSpc>
-              <a:buNone/>
-            </a:pPr>
-            <a:r>
-              <a:rPr lang="en-US" sz="1000" dirty="0">
-                <a:solidFill>
-                  <a:srgbClr val="E8ECEF"/>
-                </a:solidFill>
-                <a:latin typeface="Courier New" pitchFamily="34" charset="0"/>
-                <a:ea typeface="Courier New" pitchFamily="34" charset="-122"/>
-                <a:cs typeface="Courier New" pitchFamily="34" charset="-120"/>
-              </a:rPr>
-              <a:t>Prepare</a:t>
-            </a:r>
-            <a:pPr indent="0" marL="0">
-              <a:lnSpc>
-                <a:spcPct val="105000"/>
-              </a:lnSpc>
-              <a:buNone/>
-            </a:pPr>
-            <a:r>
-              <a:rPr lang="en-US" sz="1000" dirty="0">
-                <a:solidFill>
-                  <a:srgbClr val="E8ECEF"/>
-                </a:solidFill>
-                <a:latin typeface="Courier New" pitchFamily="34" charset="0"/>
-                <a:ea typeface="Courier New" pitchFamily="34" charset="-122"/>
-                <a:cs typeface="Courier New" pitchFamily="34" charset="-120"/>
-              </a:rPr>
-              <a:t>;</a:t>
-            </a:r>
-            <a:endParaRPr lang="en-US" sz="1000" dirty="0"/>
-          </a:p>
-          <a:p>
-            <a:pPr indent="0" marL="0">
-              <a:lnSpc>
-                <a:spcPct val="105000"/>
-              </a:lnSpc>
-              <a:buNone/>
-            </a:pPr>
-            <a:r>
-              <a:rPr lang="en-US" sz="1000" dirty="0">
-                <a:solidFill>
-                  <a:srgbClr val="E8ECEF"/>
-                </a:solidFill>
-                <a:latin typeface="Courier New" pitchFamily="34" charset="0"/>
-                <a:ea typeface="Courier New" pitchFamily="34" charset="-122"/>
-                <a:cs typeface="Courier New" pitchFamily="34" charset="-120"/>
-              </a:rPr>
-              <a:t>  </a:t>
-            </a:r>
-            <a:pPr indent="0" marL="0">
-              <a:lnSpc>
-                <a:spcPct val="105000"/>
-              </a:lnSpc>
-              <a:buNone/>
-            </a:pPr>
-            <a:r>
-              <a:rPr lang="en-US" sz="1000" dirty="0">
-                <a:solidFill>
-                  <a:srgbClr val="4DB1FF"/>
-                </a:solidFill>
-                <a:latin typeface="Courier New" pitchFamily="34" charset="0"/>
-                <a:ea typeface="Courier New" pitchFamily="34" charset="-122"/>
-                <a:cs typeface="Courier New" pitchFamily="34" charset="-120"/>
-              </a:rPr>
-              <a:t>use</a:t>
-            </a:r>
-            <a:pPr indent="0" marL="0">
-              <a:lnSpc>
-                <a:spcPct val="105000"/>
-              </a:lnSpc>
-              <a:buNone/>
-            </a:pPr>
-            <a:r>
-              <a:rPr lang="en-US" sz="1000" dirty="0">
-                <a:solidFill>
-                  <a:srgbClr val="E8ECEF"/>
-                </a:solidFill>
-                <a:latin typeface="Courier New" pitchFamily="34" charset="0"/>
-                <a:ea typeface="Courier New" pitchFamily="34" charset="-122"/>
-                <a:cs typeface="Courier New" pitchFamily="34" charset="-120"/>
-              </a:rPr>
-              <a:t> </a:t>
-            </a:r>
-            <a:pPr indent="0" marL="0">
-              <a:lnSpc>
-                <a:spcPct val="105000"/>
-              </a:lnSpc>
-              <a:buNone/>
-            </a:pPr>
-            <a:r>
-              <a:rPr lang="en-US" sz="1000" dirty="0">
-                <a:solidFill>
-                  <a:srgbClr val="4DB1FF"/>
-                </a:solidFill>
-                <a:latin typeface="Courier New" pitchFamily="34" charset="0"/>
-                <a:ea typeface="Courier New" pitchFamily="34" charset="-122"/>
-                <a:cs typeface="Courier New" pitchFamily="34" charset="-120"/>
-              </a:rPr>
-              <a:t>action</a:t>
-            </a:r>
-            <a:pPr indent="0" marL="0">
-              <a:lnSpc>
-                <a:spcPct val="105000"/>
-              </a:lnSpc>
-              <a:buNone/>
-            </a:pPr>
-            <a:r>
-              <a:rPr lang="en-US" sz="1000" dirty="0">
-                <a:solidFill>
-                  <a:srgbClr val="E8ECEF"/>
-                </a:solidFill>
-                <a:latin typeface="Courier New" pitchFamily="34" charset="0"/>
-                <a:ea typeface="Courier New" pitchFamily="34" charset="-122"/>
-                <a:cs typeface="Courier New" pitchFamily="34" charset="-120"/>
-              </a:rPr>
-              <a:t> </a:t>
-            </a:r>
-            <a:pPr indent="0" marL="0">
-              <a:lnSpc>
-                <a:spcPct val="105000"/>
-              </a:lnSpc>
-              <a:buNone/>
-            </a:pPr>
-            <a:r>
-              <a:rPr lang="en-US" sz="1000" dirty="0">
-                <a:solidFill>
-                  <a:srgbClr val="E8ECEF"/>
-                </a:solidFill>
-                <a:latin typeface="Courier New" pitchFamily="34" charset="0"/>
-                <a:ea typeface="Courier New" pitchFamily="34" charset="-122"/>
-                <a:cs typeface="Courier New" pitchFamily="34" charset="-120"/>
-              </a:rPr>
-              <a:t>SimularPagamento</a:t>
-            </a:r>
-            <a:pPr indent="0" marL="0">
-              <a:lnSpc>
-                <a:spcPct val="105000"/>
-              </a:lnSpc>
-              <a:buNone/>
-            </a:pPr>
-            <a:r>
-              <a:rPr lang="en-US" sz="1000" dirty="0">
-                <a:solidFill>
-                  <a:srgbClr val="E8ECEF"/>
-                </a:solidFill>
-                <a:latin typeface="Courier New" pitchFamily="34" charset="0"/>
-                <a:ea typeface="Courier New" pitchFamily="34" charset="-122"/>
-                <a:cs typeface="Courier New" pitchFamily="34" charset="-120"/>
-              </a:rPr>
-              <a:t>;</a:t>
-            </a:r>
-            <a:endParaRPr lang="en-US" sz="1000" dirty="0"/>
-          </a:p>
-          <a:p>
-            <a:pPr indent="0" marL="0">
-              <a:lnSpc>
-                <a:spcPct val="105000"/>
-              </a:lnSpc>
-              <a:buNone/>
-            </a:pPr>
-            <a:r>
-              <a:rPr lang="en-US" sz="1000" dirty="0">
-                <a:solidFill>
-                  <a:srgbClr val="E8ECEF"/>
-                </a:solidFill>
-                <a:latin typeface="Courier New" pitchFamily="34" charset="0"/>
-                <a:ea typeface="Courier New" pitchFamily="34" charset="-122"/>
-                <a:cs typeface="Courier New" pitchFamily="34" charset="-120"/>
-              </a:rPr>
-              <a:t>  </a:t>
-            </a:r>
-            <a:pPr indent="0" marL="0">
-              <a:lnSpc>
-                <a:spcPct val="105000"/>
-              </a:lnSpc>
-              <a:buNone/>
-            </a:pPr>
-            <a:r>
-              <a:rPr lang="en-US" sz="1000" dirty="0">
-                <a:solidFill>
-                  <a:srgbClr val="4DB1FF"/>
-                </a:solidFill>
-                <a:latin typeface="Courier New" pitchFamily="34" charset="0"/>
-                <a:ea typeface="Courier New" pitchFamily="34" charset="-122"/>
-                <a:cs typeface="Courier New" pitchFamily="34" charset="-120"/>
-              </a:rPr>
-              <a:t>use</a:t>
-            </a:r>
-            <a:pPr indent="0" marL="0">
-              <a:lnSpc>
-                <a:spcPct val="105000"/>
-              </a:lnSpc>
-              <a:buNone/>
-            </a:pPr>
-            <a:r>
-              <a:rPr lang="en-US" sz="1000" dirty="0">
-                <a:solidFill>
-                  <a:srgbClr val="E8ECEF"/>
-                </a:solidFill>
-                <a:latin typeface="Courier New" pitchFamily="34" charset="0"/>
-                <a:ea typeface="Courier New" pitchFamily="34" charset="-122"/>
-                <a:cs typeface="Courier New" pitchFamily="34" charset="-120"/>
-              </a:rPr>
-              <a:t> </a:t>
-            </a:r>
-            <a:pPr indent="0" marL="0">
-              <a:lnSpc>
-                <a:spcPct val="105000"/>
-              </a:lnSpc>
-              <a:buNone/>
-            </a:pPr>
-            <a:r>
-              <a:rPr lang="en-US" sz="1000" dirty="0">
-                <a:solidFill>
-                  <a:srgbClr val="4DB1FF"/>
-                </a:solidFill>
-                <a:latin typeface="Courier New" pitchFamily="34" charset="0"/>
-                <a:ea typeface="Courier New" pitchFamily="34" charset="-122"/>
-                <a:cs typeface="Courier New" pitchFamily="34" charset="-120"/>
-              </a:rPr>
-              <a:t>action</a:t>
-            </a:r>
-            <a:pPr indent="0" marL="0">
-              <a:lnSpc>
-                <a:spcPct val="105000"/>
-              </a:lnSpc>
-              <a:buNone/>
-            </a:pPr>
-            <a:r>
-              <a:rPr lang="en-US" sz="1000" dirty="0">
-                <a:solidFill>
-                  <a:srgbClr val="E8ECEF"/>
-                </a:solidFill>
-                <a:latin typeface="Courier New" pitchFamily="34" charset="0"/>
-                <a:ea typeface="Courier New" pitchFamily="34" charset="-122"/>
-                <a:cs typeface="Courier New" pitchFamily="34" charset="-120"/>
-              </a:rPr>
-              <a:t> </a:t>
-            </a:r>
-            <a:pPr indent="0" marL="0">
-              <a:lnSpc>
-                <a:spcPct val="105000"/>
-              </a:lnSpc>
-              <a:buNone/>
-            </a:pPr>
-            <a:r>
-              <a:rPr lang="en-US" sz="1000" dirty="0">
-                <a:solidFill>
-                  <a:srgbClr val="E8ECEF"/>
-                </a:solidFill>
-                <a:latin typeface="Courier New" pitchFamily="34" charset="0"/>
-                <a:ea typeface="Courier New" pitchFamily="34" charset="-122"/>
-                <a:cs typeface="Courier New" pitchFamily="34" charset="-120"/>
-              </a:rPr>
-              <a:t>AprovarPedido</a:t>
-            </a:r>
-            <a:pPr indent="0" marL="0">
-              <a:lnSpc>
-                <a:spcPct val="105000"/>
-              </a:lnSpc>
-              <a:buNone/>
-            </a:pPr>
-            <a:r>
-              <a:rPr lang="en-US" sz="1000" dirty="0">
-                <a:solidFill>
-                  <a:srgbClr val="E8ECEF"/>
-                </a:solidFill>
-                <a:latin typeface="Courier New" pitchFamily="34" charset="0"/>
-                <a:ea typeface="Courier New" pitchFamily="34" charset="-122"/>
-                <a:cs typeface="Courier New" pitchFamily="34" charset="-120"/>
-              </a:rPr>
-              <a:t>;</a:t>
-            </a:r>
-            <a:endParaRPr lang="en-US" sz="1000" dirty="0"/>
-          </a:p>
-          <a:p>
-            <a:pPr indent="0" marL="0">
-              <a:lnSpc>
-                <a:spcPct val="105000"/>
-              </a:lnSpc>
-              <a:buNone/>
-            </a:pPr>
-            <a:r>
-              <a:rPr lang="en-US" sz="1000" dirty="0">
-                <a:solidFill>
-                  <a:srgbClr val="E8ECEF"/>
-                </a:solidFill>
-                <a:latin typeface="Courier New" pitchFamily="34" charset="0"/>
-                <a:ea typeface="Courier New" pitchFamily="34" charset="-122"/>
-                <a:cs typeface="Courier New" pitchFamily="34" charset="-120"/>
-              </a:rPr>
-              <a:t>  </a:t>
-            </a:r>
-            <a:pPr indent="0" marL="0">
-              <a:lnSpc>
-                <a:spcPct val="105000"/>
-              </a:lnSpc>
-              <a:buNone/>
-            </a:pPr>
-            <a:r>
-              <a:rPr lang="en-US" sz="1000" dirty="0">
-                <a:solidFill>
-                  <a:srgbClr val="4DB1FF"/>
-                </a:solidFill>
-                <a:latin typeface="Courier New" pitchFamily="34" charset="0"/>
-                <a:ea typeface="Courier New" pitchFamily="34" charset="-122"/>
-                <a:cs typeface="Courier New" pitchFamily="34" charset="-120"/>
-              </a:rPr>
-              <a:t>use</a:t>
-            </a:r>
-            <a:pPr indent="0" marL="0">
-              <a:lnSpc>
-                <a:spcPct val="105000"/>
-              </a:lnSpc>
-              <a:buNone/>
-            </a:pPr>
-            <a:r>
-              <a:rPr lang="en-US" sz="1000" dirty="0">
-                <a:solidFill>
-                  <a:srgbClr val="E8ECEF"/>
-                </a:solidFill>
-                <a:latin typeface="Courier New" pitchFamily="34" charset="0"/>
-                <a:ea typeface="Courier New" pitchFamily="34" charset="-122"/>
-                <a:cs typeface="Courier New" pitchFamily="34" charset="-120"/>
-              </a:rPr>
-              <a:t> </a:t>
-            </a:r>
-            <a:pPr indent="0" marL="0">
-              <a:lnSpc>
-                <a:spcPct val="105000"/>
-              </a:lnSpc>
-              <a:buNone/>
-            </a:pPr>
-            <a:r>
-              <a:rPr lang="en-US" sz="1000" dirty="0">
-                <a:solidFill>
-                  <a:srgbClr val="4DB1FF"/>
-                </a:solidFill>
-                <a:latin typeface="Courier New" pitchFamily="34" charset="0"/>
-                <a:ea typeface="Courier New" pitchFamily="34" charset="-122"/>
-                <a:cs typeface="Courier New" pitchFamily="34" charset="-120"/>
-              </a:rPr>
-              <a:t>action</a:t>
-            </a:r>
-            <a:pPr indent="0" marL="0">
-              <a:lnSpc>
-                <a:spcPct val="105000"/>
-              </a:lnSpc>
-              <a:buNone/>
-            </a:pPr>
-            <a:r>
-              <a:rPr lang="en-US" sz="1000" dirty="0">
-                <a:solidFill>
-                  <a:srgbClr val="E8ECEF"/>
-                </a:solidFill>
-                <a:latin typeface="Courier New" pitchFamily="34" charset="0"/>
-                <a:ea typeface="Courier New" pitchFamily="34" charset="-122"/>
-                <a:cs typeface="Courier New" pitchFamily="34" charset="-120"/>
-              </a:rPr>
-              <a:t> </a:t>
-            </a:r>
-            <a:pPr indent="0" marL="0">
-              <a:lnSpc>
-                <a:spcPct val="105000"/>
-              </a:lnSpc>
-              <a:buNone/>
-            </a:pPr>
-            <a:r>
-              <a:rPr lang="en-US" sz="1000" dirty="0">
-                <a:solidFill>
-                  <a:srgbClr val="E8ECEF"/>
-                </a:solidFill>
-                <a:latin typeface="Courier New" pitchFamily="34" charset="0"/>
-                <a:ea typeface="Courier New" pitchFamily="34" charset="-122"/>
-                <a:cs typeface="Courier New" pitchFamily="34" charset="-120"/>
-              </a:rPr>
-              <a:t>CancelarPedido</a:t>
-            </a:r>
-            <a:pPr indent="0" marL="0">
-              <a:lnSpc>
-                <a:spcPct val="105000"/>
-              </a:lnSpc>
-              <a:buNone/>
-            </a:pPr>
-            <a:r>
-              <a:rPr lang="en-US" sz="1000" dirty="0">
-                <a:solidFill>
-                  <a:srgbClr val="E8ECEF"/>
-                </a:solidFill>
-                <a:latin typeface="Courier New" pitchFamily="34" charset="0"/>
-                <a:ea typeface="Courier New" pitchFamily="34" charset="-122"/>
-                <a:cs typeface="Courier New" pitchFamily="34" charset="-120"/>
-              </a:rPr>
-              <a:t>;</a:t>
-            </a:r>
-            <a:endParaRPr lang="en-US" sz="1000" dirty="0"/>
-          </a:p>
-          <a:p>
-            <a:pPr indent="0" marL="0">
-              <a:lnSpc>
-                <a:spcPct val="105000"/>
-              </a:lnSpc>
-              <a:buNone/>
-            </a:pPr>
-            <a:r>
-              <a:rPr lang="en-US" sz="1000" dirty="0">
-                <a:solidFill>
-                  <a:srgbClr val="E8ECEF"/>
-                </a:solidFill>
-                <a:latin typeface="Courier New" pitchFamily="34" charset="0"/>
-                <a:ea typeface="Courier New" pitchFamily="34" charset="-122"/>
-                <a:cs typeface="Courier New" pitchFamily="34" charset="-120"/>
-              </a:rPr>
-              <a:t>  </a:t>
-            </a:r>
-            <a:pPr indent="0" marL="0">
-              <a:lnSpc>
-                <a:spcPct val="105000"/>
-              </a:lnSpc>
-              <a:buNone/>
-            </a:pPr>
-            <a:r>
-              <a:rPr lang="en-US" sz="1000" dirty="0">
-                <a:solidFill>
-                  <a:srgbClr val="4DB1FF"/>
-                </a:solidFill>
-                <a:latin typeface="Courier New" pitchFamily="34" charset="0"/>
-                <a:ea typeface="Courier New" pitchFamily="34" charset="-122"/>
-                <a:cs typeface="Courier New" pitchFamily="34" charset="-120"/>
-              </a:rPr>
-              <a:t>use</a:t>
-            </a:r>
-            <a:pPr indent="0" marL="0">
-              <a:lnSpc>
-                <a:spcPct val="105000"/>
-              </a:lnSpc>
-              <a:buNone/>
-            </a:pPr>
-            <a:r>
-              <a:rPr lang="en-US" sz="1000" dirty="0">
-                <a:solidFill>
-                  <a:srgbClr val="E8ECEF"/>
-                </a:solidFill>
-                <a:latin typeface="Courier New" pitchFamily="34" charset="0"/>
-                <a:ea typeface="Courier New" pitchFamily="34" charset="-122"/>
-                <a:cs typeface="Courier New" pitchFamily="34" charset="-120"/>
-              </a:rPr>
-              <a:t> </a:t>
-            </a:r>
-            <a:pPr indent="0" marL="0">
-              <a:lnSpc>
-                <a:spcPct val="105000"/>
-              </a:lnSpc>
-              <a:buNone/>
-            </a:pPr>
-            <a:r>
-              <a:rPr lang="en-US" sz="1000" dirty="0">
-                <a:solidFill>
-                  <a:srgbClr val="4DB1FF"/>
-                </a:solidFill>
-                <a:latin typeface="Courier New" pitchFamily="34" charset="0"/>
-                <a:ea typeface="Courier New" pitchFamily="34" charset="-122"/>
-                <a:cs typeface="Courier New" pitchFamily="34" charset="-120"/>
-              </a:rPr>
-              <a:t>action</a:t>
-            </a:r>
-            <a:pPr indent="0" marL="0">
-              <a:lnSpc>
-                <a:spcPct val="105000"/>
-              </a:lnSpc>
-              <a:buNone/>
-            </a:pPr>
-            <a:r>
-              <a:rPr lang="en-US" sz="1000" dirty="0">
-                <a:solidFill>
-                  <a:srgbClr val="E8ECEF"/>
-                </a:solidFill>
-                <a:latin typeface="Courier New" pitchFamily="34" charset="0"/>
-                <a:ea typeface="Courier New" pitchFamily="34" charset="-122"/>
-                <a:cs typeface="Courier New" pitchFamily="34" charset="-120"/>
-              </a:rPr>
-              <a:t> </a:t>
-            </a:r>
-            <a:pPr indent="0" marL="0">
-              <a:lnSpc>
-                <a:spcPct val="105000"/>
-              </a:lnSpc>
-              <a:buNone/>
-            </a:pPr>
-            <a:r>
-              <a:rPr lang="en-US" sz="1000" dirty="0">
-                <a:solidFill>
-                  <a:srgbClr val="E8ECEF"/>
-                </a:solidFill>
-                <a:latin typeface="Courier New" pitchFamily="34" charset="0"/>
-                <a:ea typeface="Courier New" pitchFamily="34" charset="-122"/>
-                <a:cs typeface="Courier New" pitchFamily="34" charset="-120"/>
-              </a:rPr>
-              <a:t>ImportarPlanilha</a:t>
-            </a:r>
-            <a:pPr indent="0" marL="0">
-              <a:lnSpc>
-                <a:spcPct val="105000"/>
-              </a:lnSpc>
-              <a:buNone/>
-            </a:pPr>
-            <a:r>
-              <a:rPr lang="en-US" sz="1000" dirty="0">
-                <a:solidFill>
-                  <a:srgbClr val="E8ECEF"/>
-                </a:solidFill>
-                <a:latin typeface="Courier New" pitchFamily="34" charset="0"/>
-                <a:ea typeface="Courier New" pitchFamily="34" charset="-122"/>
-                <a:cs typeface="Courier New" pitchFamily="34" charset="-120"/>
-              </a:rPr>
-              <a:t>;</a:t>
-            </a:r>
-            <a:endParaRPr lang="en-US" sz="1000" dirty="0"/>
-          </a:p>
-          <a:p>
-            <a:pPr indent="0" marL="0">
-              <a:lnSpc>
-                <a:spcPct val="105000"/>
-              </a:lnSpc>
-              <a:buNone/>
-            </a:pPr>
-            <a:r>
-              <a:rPr lang="en-US" sz="1000" dirty="0">
-                <a:solidFill>
-                  <a:srgbClr val="E8ECEF"/>
-                </a:solidFill>
-                <a:latin typeface="Courier New" pitchFamily="34" charset="0"/>
-                <a:ea typeface="Courier New" pitchFamily="34" charset="-122"/>
-                <a:cs typeface="Courier New" pitchFamily="34" charset="-120"/>
-              </a:rPr>
-              <a:t> </a:t>
-            </a:r>
-            <a:endParaRPr lang="en-US" sz="1000" dirty="0"/>
-          </a:p>
-          <a:p>
-            <a:pPr indent="0" marL="0">
-              <a:lnSpc>
-                <a:spcPct val="105000"/>
-              </a:lnSpc>
-              <a:buNone/>
-            </a:pPr>
-            <a:r>
-              <a:rPr lang="en-US" sz="1000" dirty="0">
-                <a:solidFill>
-                  <a:srgbClr val="E8ECEF"/>
-                </a:solidFill>
-                <a:latin typeface="Courier New" pitchFamily="34" charset="0"/>
-                <a:ea typeface="Courier New" pitchFamily="34" charset="-122"/>
-                <a:cs typeface="Courier New" pitchFamily="34" charset="-120"/>
-              </a:rPr>
-              <a:t>  </a:t>
-            </a:r>
-            <a:pPr indent="0" marL="0">
-              <a:lnSpc>
-                <a:spcPct val="105000"/>
-              </a:lnSpc>
-              <a:buNone/>
-            </a:pPr>
-            <a:r>
-              <a:rPr lang="en-US" sz="1000" dirty="0">
-                <a:solidFill>
-                  <a:srgbClr val="4DB1FF"/>
-                </a:solidFill>
-                <a:latin typeface="Courier New" pitchFamily="34" charset="0"/>
-                <a:ea typeface="Courier New" pitchFamily="34" charset="-122"/>
-                <a:cs typeface="Courier New" pitchFamily="34" charset="-120"/>
-              </a:rPr>
-              <a:t>use</a:t>
-            </a:r>
-            <a:pPr indent="0" marL="0">
-              <a:lnSpc>
-                <a:spcPct val="105000"/>
-              </a:lnSpc>
-              <a:buNone/>
-            </a:pPr>
-            <a:r>
-              <a:rPr lang="en-US" sz="1000" dirty="0">
-                <a:solidFill>
-                  <a:srgbClr val="E8ECEF"/>
-                </a:solidFill>
-                <a:latin typeface="Courier New" pitchFamily="34" charset="0"/>
-                <a:ea typeface="Courier New" pitchFamily="34" charset="-122"/>
-                <a:cs typeface="Courier New" pitchFamily="34" charset="-120"/>
-              </a:rPr>
-              <a:t> </a:t>
-            </a:r>
-            <a:pPr indent="0" marL="0">
-              <a:lnSpc>
-                <a:spcPct val="105000"/>
-              </a:lnSpc>
-              <a:buNone/>
-            </a:pPr>
-            <a:r>
-              <a:rPr lang="en-US" sz="1000" dirty="0">
-                <a:solidFill>
-                  <a:srgbClr val="4DB1FF"/>
-                </a:solidFill>
-                <a:latin typeface="Courier New" pitchFamily="34" charset="0"/>
-                <a:ea typeface="Courier New" pitchFamily="34" charset="-122"/>
-                <a:cs typeface="Courier New" pitchFamily="34" charset="-120"/>
-              </a:rPr>
-              <a:t>association</a:t>
-            </a:r>
-            <a:pPr indent="0" marL="0">
-              <a:lnSpc>
-                <a:spcPct val="105000"/>
-              </a:lnSpc>
-              <a:buNone/>
-            </a:pPr>
-            <a:r>
-              <a:rPr lang="en-US" sz="1000" dirty="0">
-                <a:solidFill>
-                  <a:srgbClr val="E8ECEF"/>
-                </a:solidFill>
-                <a:latin typeface="Courier New" pitchFamily="34" charset="0"/>
-                <a:ea typeface="Courier New" pitchFamily="34" charset="-122"/>
-                <a:cs typeface="Courier New" pitchFamily="34" charset="-120"/>
-              </a:rPr>
-              <a:t> </a:t>
-            </a:r>
-            <a:pPr indent="0" marL="0">
-              <a:lnSpc>
-                <a:spcPct val="105000"/>
-              </a:lnSpc>
-              <a:buNone/>
-            </a:pPr>
-            <a:r>
-              <a:rPr lang="en-US" sz="1000" dirty="0">
-                <a:solidFill>
-                  <a:srgbClr val="E8ECEF"/>
-                </a:solidFill>
-                <a:latin typeface="Courier New" pitchFamily="34" charset="0"/>
-                <a:ea typeface="Courier New" pitchFamily="34" charset="-122"/>
-                <a:cs typeface="Courier New" pitchFamily="34" charset="-120"/>
-              </a:rPr>
-              <a:t>_Itens</a:t>
-            </a:r>
-            <a:pPr indent="0" marL="0">
-              <a:lnSpc>
-                <a:spcPct val="105000"/>
-              </a:lnSpc>
-              <a:buNone/>
-            </a:pPr>
-            <a:r>
-              <a:rPr lang="en-US" sz="1000" dirty="0">
-                <a:solidFill>
-                  <a:srgbClr val="E8ECEF"/>
-                </a:solidFill>
-                <a:latin typeface="Courier New" pitchFamily="34" charset="0"/>
-                <a:ea typeface="Courier New" pitchFamily="34" charset="-122"/>
-                <a:cs typeface="Courier New" pitchFamily="34" charset="-120"/>
-              </a:rPr>
-              <a:t> { </a:t>
-            </a:r>
-            <a:pPr indent="0" marL="0">
-              <a:lnSpc>
-                <a:spcPct val="105000"/>
-              </a:lnSpc>
-              <a:buNone/>
-            </a:pPr>
-            <a:r>
-              <a:rPr lang="en-US" sz="1000" dirty="0">
-                <a:solidFill>
-                  <a:srgbClr val="4DB1FF"/>
-                </a:solidFill>
-                <a:latin typeface="Courier New" pitchFamily="34" charset="0"/>
-                <a:ea typeface="Courier New" pitchFamily="34" charset="-122"/>
-                <a:cs typeface="Courier New" pitchFamily="34" charset="-120"/>
-              </a:rPr>
-              <a:t>create</a:t>
-            </a:r>
-            <a:pPr indent="0" marL="0">
-              <a:lnSpc>
-                <a:spcPct val="105000"/>
-              </a:lnSpc>
-              <a:buNone/>
-            </a:pPr>
-            <a:r>
-              <a:rPr lang="en-US" sz="1000" dirty="0">
-                <a:solidFill>
-                  <a:srgbClr val="E8ECEF"/>
-                </a:solidFill>
-                <a:latin typeface="Courier New" pitchFamily="34" charset="0"/>
-                <a:ea typeface="Courier New" pitchFamily="34" charset="-122"/>
-                <a:cs typeface="Courier New" pitchFamily="34" charset="-120"/>
-              </a:rPr>
-              <a:t>; </a:t>
-            </a:r>
-            <a:pPr indent="0" marL="0">
-              <a:lnSpc>
-                <a:spcPct val="105000"/>
-              </a:lnSpc>
-              <a:buNone/>
-            </a:pPr>
-            <a:r>
-              <a:rPr lang="en-US" sz="1000" dirty="0">
-                <a:solidFill>
-                  <a:srgbClr val="4DB1FF"/>
-                </a:solidFill>
-                <a:latin typeface="Courier New" pitchFamily="34" charset="0"/>
-                <a:ea typeface="Courier New" pitchFamily="34" charset="-122"/>
-                <a:cs typeface="Courier New" pitchFamily="34" charset="-120"/>
-              </a:rPr>
-              <a:t>with</a:t>
-            </a:r>
-            <a:pPr indent="0" marL="0">
-              <a:lnSpc>
-                <a:spcPct val="105000"/>
-              </a:lnSpc>
-              <a:buNone/>
-            </a:pPr>
-            <a:r>
-              <a:rPr lang="en-US" sz="1000" dirty="0">
-                <a:solidFill>
-                  <a:srgbClr val="E8ECEF"/>
-                </a:solidFill>
-                <a:latin typeface="Courier New" pitchFamily="34" charset="0"/>
-                <a:ea typeface="Courier New" pitchFamily="34" charset="-122"/>
-                <a:cs typeface="Courier New" pitchFamily="34" charset="-120"/>
-              </a:rPr>
-              <a:t> </a:t>
-            </a:r>
-            <a:pPr indent="0" marL="0">
-              <a:lnSpc>
-                <a:spcPct val="105000"/>
-              </a:lnSpc>
-              <a:buNone/>
-            </a:pPr>
-            <a:r>
-              <a:rPr lang="en-US" sz="1000" dirty="0">
-                <a:solidFill>
-                  <a:srgbClr val="4DB1FF"/>
-                </a:solidFill>
-                <a:latin typeface="Courier New" pitchFamily="34" charset="0"/>
-                <a:ea typeface="Courier New" pitchFamily="34" charset="-122"/>
-                <a:cs typeface="Courier New" pitchFamily="34" charset="-120"/>
-              </a:rPr>
-              <a:t>draft</a:t>
-            </a:r>
-            <a:pPr indent="0" marL="0">
-              <a:lnSpc>
-                <a:spcPct val="105000"/>
-              </a:lnSpc>
-              <a:buNone/>
-            </a:pPr>
-            <a:r>
-              <a:rPr lang="en-US" sz="1000" dirty="0">
-                <a:solidFill>
-                  <a:srgbClr val="E8ECEF"/>
-                </a:solidFill>
-                <a:latin typeface="Courier New" pitchFamily="34" charset="0"/>
-                <a:ea typeface="Courier New" pitchFamily="34" charset="-122"/>
-                <a:cs typeface="Courier New" pitchFamily="34" charset="-120"/>
-              </a:rPr>
-              <a:t>; }</a:t>
-            </a:r>
-            <a:endParaRPr lang="en-US" sz="1000" dirty="0"/>
-          </a:p>
-          <a:p>
-            <a:pPr indent="0" marL="0">
-              <a:lnSpc>
-                <a:spcPct val="105000"/>
-              </a:lnSpc>
-              <a:buNone/>
-            </a:pPr>
-            <a:r>
-              <a:rPr lang="en-US" sz="1000" dirty="0">
-                <a:solidFill>
-                  <a:srgbClr val="E8ECEF"/>
-                </a:solidFill>
-                <a:latin typeface="Courier New" pitchFamily="34" charset="0"/>
-                <a:ea typeface="Courier New" pitchFamily="34" charset="-122"/>
-                <a:cs typeface="Courier New" pitchFamily="34" charset="-120"/>
-              </a:rPr>
-              <a:t>}</a:t>
-            </a:r>
-            <a:endParaRPr lang="en-US" sz="1000" dirty="0"/>
-          </a:p>
         </p:txBody>
       </p:sp>
       <p:sp>
         <p:nvSpPr>
-          <p:cNvPr id="9" name="Cartão"/>
+          <p:cNvPr id="12" name="Cartão"/>
           <p:cNvSpPr/>
           <p:nvPr/>
         </p:nvSpPr>
@@ -10747,7 +11650,7 @@
       </p:sp>
       <p:sp>
         <p:nvSpPr>
-          <p:cNvPr id="10" name="Text 7"/>
+          <p:cNvPr id="13" name="Text 10"/>
           <p:cNvSpPr txBox="1"/>
           <p:nvPr/>
         </p:nvSpPr>
@@ -10783,7 +11686,7 @@
       </p:sp>
       <p:sp>
         <p:nvSpPr>
-          <p:cNvPr id="11" name="Status SimularPagamento"/>
+          <p:cNvPr id="14" name="Status SimularPagamento"/>
           <p:cNvSpPr/>
           <p:nvPr/>
         </p:nvSpPr>
@@ -10823,7 +11726,7 @@
       </p:sp>
       <p:sp>
         <p:nvSpPr>
-          <p:cNvPr id="12" name="Status AprovarPedido"/>
+          <p:cNvPr id="15" name="Status AprovarPedido"/>
           <p:cNvSpPr/>
           <p:nvPr/>
         </p:nvSpPr>
@@ -10863,7 +11766,7 @@
       </p:sp>
       <p:sp>
         <p:nvSpPr>
-          <p:cNvPr id="13" name="Status CancelarPedido"/>
+          <p:cNvPr id="16" name="Status CancelarPedido"/>
           <p:cNvSpPr/>
           <p:nvPr/>
         </p:nvSpPr>
@@ -10903,7 +11806,7 @@
       </p:sp>
       <p:sp>
         <p:nvSpPr>
-          <p:cNvPr id="14" name="Status ImportarPlanilha"/>
+          <p:cNvPr id="17" name="Status ImportarPlanilha"/>
           <p:cNvSpPr/>
           <p:nvPr/>
         </p:nvSpPr>
@@ -10943,7 +11846,7 @@
       </p:sp>
       <p:sp>
         <p:nvSpPr>
-          <p:cNvPr id="15" name="Status draft (Edit, Activate…)"/>
+          <p:cNvPr id="18" name="Status draft (Edit, Activate…)"/>
           <p:cNvSpPr/>
           <p:nvPr/>
         </p:nvSpPr>
@@ -10983,7 +11886,7 @@
       </p:sp>
       <p:sp>
         <p:nvSpPr>
-          <p:cNvPr id="16" name="Status use side effects"/>
+          <p:cNvPr id="19" name="Status use side effects"/>
           <p:cNvSpPr/>
           <p:nvPr/>
         </p:nvSpPr>
@@ -11023,7 +11926,7 @@
       </p:sp>
       <p:sp>
         <p:nvSpPr>
-          <p:cNvPr id="17" name="Cartão"/>
+          <p:cNvPr id="20" name="Cartão"/>
           <p:cNvSpPr/>
           <p:nvPr/>
         </p:nvSpPr>
@@ -11052,7 +11955,7 @@
       </p:sp>
       <p:sp>
         <p:nvSpPr>
-          <p:cNvPr id="18" name="Text 15"/>
+          <p:cNvPr id="21" name="Text 18"/>
           <p:cNvSpPr txBox="1"/>
           <p:nvPr/>
         </p:nvSpPr>
@@ -11088,7 +11991,7 @@
       </p:sp>
       <p:sp>
         <p:nvSpPr>
-          <p:cNvPr id="19" name="Status CancelarPorReembolso"/>
+          <p:cNvPr id="22" name="Status CancelarPorReembolso"/>
           <p:cNvSpPr/>
           <p:nvPr/>
         </p:nvSpPr>
@@ -11128,7 +12031,7 @@
       </p:sp>
       <p:sp>
         <p:nvSpPr>
-          <p:cNvPr id="20" name="Status RetomarPedido"/>
+          <p:cNvPr id="23" name="Status RetomarPedido"/>
           <p:cNvSpPr/>
           <p:nvPr/>
         </p:nvSpPr>
@@ -11168,7 +12071,7 @@
       </p:sp>
       <p:sp>
         <p:nvSpPr>
-          <p:cNvPr id="21" name="Status RecalcularTotal"/>
+          <p:cNvPr id="24" name="Status RecalcularTotal"/>
           <p:cNvSpPr/>
           <p:nvPr/>
         </p:nvSpPr>
@@ -11208,7 +12111,7 @@
       </p:sp>
       <p:sp>
         <p:nvSpPr>
-          <p:cNvPr id="22" name="Status ReservarEstoque"/>
+          <p:cNvPr id="25" name="Status ReservarEstoque"/>
           <p:cNvSpPr/>
           <p:nvPr/>
         </p:nvSpPr>
@@ -11248,7 +12151,7 @@
       </p:sp>
       <p:sp>
         <p:nvSpPr>
-          <p:cNvPr id="23" name="Status LiberarReserva"/>
+          <p:cNvPr id="26" name="Status LiberarReserva"/>
           <p:cNvSpPr/>
           <p:nvPr/>
         </p:nvSpPr>
@@ -11288,7 +12191,7 @@
       </p:sp>
       <p:sp>
         <p:nvSpPr>
-          <p:cNvPr id="24" name="Status BaixarEstoque"/>
+          <p:cNvPr id="27" name="Status BaixarEstoque"/>
           <p:cNvSpPr/>
           <p:nvPr/>
         </p:nvSpPr>
@@ -11328,7 +12231,7 @@
       </p:sp>
       <p:sp>
         <p:nvSpPr>
-          <p:cNvPr id="25" name="Text 22"/>
+          <p:cNvPr id="28" name="Text 25"/>
           <p:cNvSpPr txBox="1"/>
           <p:nvPr/>
         </p:nvSpPr>
@@ -16931,7 +17834,7 @@
       </p:sp>
       <p:sp>
         <p:nvSpPr>
-          <p:cNvPr id="21" name="Código"/>
+          <p:cNvPr id="21" name="Editor"/>
           <p:cNvSpPr/>
           <p:nvPr/>
         </p:nvSpPr>
@@ -16946,9 +17849,14 @@
             </a:avLst>
           </a:prstGeom>
           <a:solidFill>
-            <a:srgbClr val="12171C"/>
+            <a:srgbClr val="181818"/>
           </a:solidFill>
-          <a:ln/>
+          <a:ln w="9525">
+            <a:solidFill>
+              <a:srgbClr val="2B2B2B"/>
+            </a:solidFill>
+            <a:prstDash val="solid"/>
+          </a:ln>
           <a:effectLst>
             <a:outerShdw sx="100000" sy="100000" kx="0" ky="0" algn="bl" rotWithShape="0" blurRad="101600" dist="25400" dir="5400000">
               <a:srgbClr val="223548">
@@ -16960,38 +17868,102 @@
       </p:sp>
       <p:sp>
         <p:nvSpPr>
-          <p:cNvPr id="22" name="Text 19"/>
-          <p:cNvSpPr txBox="1"/>
-          <p:nvPr/>
-        </p:nvSpPr>
-        <p:spPr>
-          <a:xfrm>
-            <a:off x="6949440" y="1755648"/>
-            <a:ext cx="4465015" cy="256032"/>
+          <p:cNvPr id="22" name="Área do editor"/>
+          <p:cNvSpPr/>
+          <p:nvPr/>
+        </p:nvSpPr>
+        <p:spPr>
+          <a:xfrm>
+            <a:off x="6720840" y="1993392"/>
+            <a:ext cx="4922215" cy="2852928"/>
+          </a:xfrm>
+          <a:prstGeom prst="roundRect">
+            <a:avLst>
+              <a:gd name="adj" fmla="val 3205"/>
+            </a:avLst>
+          </a:prstGeom>
+          <a:solidFill>
+            <a:srgbClr val="1F1F1F"/>
+          </a:solidFill>
+          <a:ln/>
+        </p:spPr>
+      </p:sp>
+      <p:sp>
+        <p:nvSpPr>
+          <p:cNvPr id="23" name="Shape 20"/>
+          <p:cNvSpPr/>
+          <p:nvPr/>
+        </p:nvSpPr>
+        <p:spPr>
+          <a:xfrm>
+            <a:off x="6729984" y="1993392"/>
+            <a:ext cx="4903927" cy="137160"/>
           </a:xfrm>
           <a:prstGeom prst="rect">
             <a:avLst/>
           </a:prstGeom>
+          <a:solidFill>
+            <a:srgbClr val="1F1F1F"/>
+          </a:solidFill>
+          <a:ln/>
+        </p:spPr>
+      </p:sp>
+      <p:sp>
+        <p:nvSpPr>
+          <p:cNvPr id="24" name="Shape 21"/>
+          <p:cNvSpPr/>
+          <p:nvPr/>
+        </p:nvSpPr>
+        <p:spPr>
+          <a:xfrm>
+            <a:off x="6729984" y="1993392"/>
+            <a:ext cx="4903927" cy="0"/>
+          </a:xfrm>
+          <a:prstGeom prst="line">
+            <a:avLst/>
+          </a:prstGeom>
           <a:noFill/>
+          <a:ln w="9525">
+            <a:solidFill>
+              <a:srgbClr val="2B2B2B"/>
+            </a:solidFill>
+            <a:prstDash val="solid"/>
+          </a:ln>
+        </p:spPr>
+      </p:sp>
+      <p:sp>
+        <p:nvSpPr>
+          <p:cNvPr id="25" name="Aba ZCL_PC_SETUP"/>
+          <p:cNvSpPr/>
+          <p:nvPr/>
+        </p:nvSpPr>
+        <p:spPr>
+          <a:xfrm>
+            <a:off x="6812280" y="1719072"/>
+            <a:ext cx="1325880" cy="274320"/>
+          </a:xfrm>
+          <a:prstGeom prst="rect">
+            <a:avLst/>
+          </a:prstGeom>
+          <a:solidFill>
+            <a:srgbClr val="1F1F1F"/>
+          </a:solidFill>
           <a:ln/>
         </p:spPr>
         <p:txBody>
           <a:bodyPr wrap="square" lIns="0" tIns="0" rIns="0" bIns="0" rtlCol="0" anchor="ctr"/>
           <a:lstStyle/>
           <a:p>
-            <a:pPr indent="0" marL="0">
+            <a:pPr algn="ctr" indent="0" marL="0">
               <a:buNone/>
             </a:pPr>
             <a:r>
               <a:rPr lang="en-US" sz="1000" dirty="0">
                 <a:solidFill>
-                  <a:srgbClr val="A9B4BE"/>
-                </a:solidFill>
-                <a:latin typeface="Courier New" pitchFamily="34" charset="0"/>
-                <a:ea typeface="Courier New" pitchFamily="34" charset="-122"/>
-                <a:cs typeface="Courier New" pitchFamily="34" charset="-120"/>
-              </a:rPr>
-              <a:t>ZAVBS_PC_COMMON/ZCL_PC_SETUP</a:t>
+                  <a:srgbClr val="FFFFFF"/>
+                </a:solidFill>
+              </a:rPr>
+              <a:t>ZCL_PC_SETUP</a:t>
             </a:r>
             <a:endParaRPr lang="en-US" sz="1000" dirty="0"/>
           </a:p>
@@ -16999,22 +17971,22 @@
       </p:sp>
       <p:sp>
         <p:nvSpPr>
-          <p:cNvPr id="23" name="Shape 20"/>
+          <p:cNvPr id="26" name="Shape 23"/>
           <p:cNvSpPr/>
           <p:nvPr/>
         </p:nvSpPr>
         <p:spPr>
           <a:xfrm>
-            <a:off x="6949440" y="2066544"/>
-            <a:ext cx="4465015" cy="0"/>
+            <a:off x="6812280" y="1719072"/>
+            <a:ext cx="1325880" cy="0"/>
           </a:xfrm>
           <a:prstGeom prst="line">
             <a:avLst/>
           </a:prstGeom>
           <a:noFill/>
-          <a:ln w="12700">
+          <a:ln w="19050">
             <a:solidFill>
-              <a:srgbClr val="2E3A46"/>
+              <a:srgbClr val="0078D4"/>
             </a:solidFill>
             <a:prstDash val="solid"/>
           </a:ln>
@@ -17022,14 +17994,72 @@
       </p:sp>
       <p:sp>
         <p:nvSpPr>
-          <p:cNvPr id="24" name="Trecho de código"/>
+          <p:cNvPr id="27" name="Breadcrumb"/>
           <p:cNvSpPr txBox="1"/>
           <p:nvPr/>
         </p:nvSpPr>
         <p:spPr>
           <a:xfrm>
-            <a:off x="6949440" y="2157984"/>
-            <a:ext cx="4465015" cy="2578608"/>
+            <a:off x="6949440" y="2103120"/>
+            <a:ext cx="4465015" cy="219456"/>
+          </a:xfrm>
+          <a:prstGeom prst="rect">
+            <a:avLst/>
+          </a:prstGeom>
+          <a:noFill/>
+          <a:ln/>
+        </p:spPr>
+        <p:txBody>
+          <a:bodyPr wrap="square" lIns="0" tIns="0" rIns="0" bIns="0" rtlCol="0" anchor="ctr"/>
+          <a:lstStyle/>
+          <a:p>
+            <a:pPr indent="0" marL="0">
+              <a:buNone/>
+            </a:pPr>
+            <a:r>
+              <a:rPr lang="en-US" sz="900" dirty="0">
+                <a:solidFill>
+                  <a:srgbClr val="A9A9A9"/>
+                </a:solidFill>
+              </a:rPr>
+              <a:t>ZAVBS_PC_COMMON</a:t>
+            </a:r>
+            <a:pPr indent="0" marL="0">
+              <a:buNone/>
+            </a:pPr>
+            <a:r>
+              <a:rPr lang="en-US" sz="900" dirty="0">
+                <a:solidFill>
+                  <a:srgbClr val="6E7681"/>
+                </a:solidFill>
+              </a:rPr>
+              <a:t>  ›  </a:t>
+            </a:r>
+            <a:pPr indent="0" marL="0">
+              <a:buNone/>
+            </a:pPr>
+            <a:r>
+              <a:rPr lang="en-US" sz="900" dirty="0">
+                <a:solidFill>
+                  <a:srgbClr val="A9A9A9"/>
+                </a:solidFill>
+              </a:rPr>
+              <a:t>ZCL_PC_SETUP</a:t>
+            </a:r>
+            <a:endParaRPr lang="en-US" sz="900" dirty="0"/>
+          </a:p>
+        </p:txBody>
+      </p:sp>
+      <p:sp>
+        <p:nvSpPr>
+          <p:cNvPr id="28" name="Trecho de código"/>
+          <p:cNvSpPr txBox="1"/>
+          <p:nvPr/>
+        </p:nvSpPr>
+        <p:spPr>
+          <a:xfrm>
+            <a:off x="6903720" y="2414016"/>
+            <a:ext cx="4602175" cy="2340864"/>
           </a:xfrm>
           <a:prstGeom prst="rect">
             <a:avLst/>
@@ -17048,9 +18078,26 @@
               <a:buNone/>
             </a:pPr>
             <a:r>
-              <a:rPr lang="en-US" sz="1100" i="1" dirty="0">
-                <a:solidFill>
-                  <a:srgbClr val="8396A8"/>
+              <a:rPr lang="en-US" sz="1100" dirty="0">
+                <a:solidFill>
+                  <a:srgbClr val="6E7681"/>
+                </a:solidFill>
+                <a:latin typeface="Courier New" pitchFamily="34" charset="0"/>
+                <a:ea typeface="Courier New" pitchFamily="34" charset="-122"/>
+                <a:cs typeface="Courier New" pitchFamily="34" charset="-120"/>
+              </a:rPr>
+              <a:t> 1  </a:t>
+            </a:r>
+            <a:pPr indent="0" marL="0">
+              <a:lnSpc>
+                <a:spcPct val="105000"/>
+              </a:lnSpc>
+              <a:buNone/>
+            </a:pPr>
+            <a:r>
+              <a:rPr lang="en-US" sz="1100" dirty="0">
+                <a:solidFill>
+                  <a:srgbClr val="6A9955"/>
                 </a:solidFill>
                 <a:latin typeface="Courier New" pitchFamily="34" charset="0"/>
                 <a:ea typeface="Courier New" pitchFamily="34" charset="-122"/>
@@ -17070,7 +18117,24 @@
             <a:r>
               <a:rPr lang="en-US" sz="1100" dirty="0">
                 <a:solidFill>
-                  <a:srgbClr val="4DB1FF"/>
+                  <a:srgbClr val="6E7681"/>
+                </a:solidFill>
+                <a:latin typeface="Courier New" pitchFamily="34" charset="0"/>
+                <a:ea typeface="Courier New" pitchFamily="34" charset="-122"/>
+                <a:cs typeface="Courier New" pitchFamily="34" charset="-120"/>
+              </a:rPr>
+              <a:t> 2  </a:t>
+            </a:r>
+            <a:pPr indent="0" marL="0">
+              <a:lnSpc>
+                <a:spcPct val="105000"/>
+              </a:lnSpc>
+              <a:buNone/>
+            </a:pPr>
+            <a:r>
+              <a:rPr lang="en-US" sz="1100" dirty="0">
+                <a:solidFill>
+                  <a:srgbClr val="569CD6"/>
                 </a:solidFill>
                 <a:latin typeface="Courier New" pitchFamily="34" charset="0"/>
                 <a:ea typeface="Courier New" pitchFamily="34" charset="-122"/>
@@ -17087,7 +18151,7 @@
             <a:r>
               <a:rPr lang="en-US" sz="1100" dirty="0">
                 <a:solidFill>
-                  <a:srgbClr val="E8ECEF"/>
+                  <a:srgbClr val="CCCCCC"/>
                 </a:solidFill>
                 <a:latin typeface="Courier New" pitchFamily="34" charset="0"/>
                 <a:ea typeface="Courier New" pitchFamily="34" charset="-122"/>
@@ -17104,7 +18168,7 @@
             <a:r>
               <a:rPr lang="en-US" sz="1100" dirty="0">
                 <a:solidFill>
-                  <a:srgbClr val="E8ECEF"/>
+                  <a:srgbClr val="CCCCCC"/>
                 </a:solidFill>
                 <a:latin typeface="Courier New" pitchFamily="34" charset="0"/>
                 <a:ea typeface="Courier New" pitchFamily="34" charset="-122"/>
@@ -17121,7 +18185,7 @@
             <a:r>
               <a:rPr lang="en-US" sz="1100" dirty="0">
                 <a:solidFill>
-                  <a:srgbClr val="E8ECEF"/>
+                  <a:srgbClr val="CCCCCC"/>
                 </a:solidFill>
                 <a:latin typeface="Courier New" pitchFamily="34" charset="0"/>
                 <a:ea typeface="Courier New" pitchFamily="34" charset="-122"/>
@@ -17138,7 +18202,7 @@
             <a:r>
               <a:rPr lang="en-US" sz="1100" dirty="0">
                 <a:solidFill>
-                  <a:srgbClr val="E8ECEF"/>
+                  <a:srgbClr val="569CD6"/>
                 </a:solidFill>
                 <a:latin typeface="Courier New" pitchFamily="34" charset="0"/>
                 <a:ea typeface="Courier New" pitchFamily="34" charset="-122"/>
@@ -17155,7 +18219,7 @@
             <a:r>
               <a:rPr lang="en-US" sz="1100" dirty="0">
                 <a:solidFill>
-                  <a:srgbClr val="E8ECEF"/>
+                  <a:srgbClr val="CCCCCC"/>
                 </a:solidFill>
                 <a:latin typeface="Courier New" pitchFamily="34" charset="0"/>
                 <a:ea typeface="Courier New" pitchFamily="34" charset="-122"/>
@@ -17172,7 +18236,7 @@
             <a:r>
               <a:rPr lang="en-US" sz="1100" dirty="0">
                 <a:solidFill>
-                  <a:srgbClr val="E8ECEF"/>
+                  <a:srgbClr val="569CD6"/>
                 </a:solidFill>
                 <a:latin typeface="Courier New" pitchFamily="34" charset="0"/>
                 <a:ea typeface="Courier New" pitchFamily="34" charset="-122"/>
@@ -17189,7 +18253,7 @@
             <a:r>
               <a:rPr lang="en-US" sz="1100" dirty="0">
                 <a:solidFill>
-                  <a:srgbClr val="E8ECEF"/>
+                  <a:srgbClr val="CCCCCC"/>
                 </a:solidFill>
                 <a:latin typeface="Courier New" pitchFamily="34" charset="0"/>
                 <a:ea typeface="Courier New" pitchFamily="34" charset="-122"/>
@@ -17206,7 +18270,7 @@
             <a:r>
               <a:rPr lang="en-US" sz="1100" dirty="0">
                 <a:solidFill>
-                  <a:srgbClr val="E8ECEF"/>
+                  <a:srgbClr val="569CD6"/>
                 </a:solidFill>
                 <a:latin typeface="Courier New" pitchFamily="34" charset="0"/>
                 <a:ea typeface="Courier New" pitchFamily="34" charset="-122"/>
@@ -17223,7 +18287,7 @@
             <a:r>
               <a:rPr lang="en-US" sz="1100" dirty="0">
                 <a:solidFill>
-                  <a:srgbClr val="E8ECEF"/>
+                  <a:srgbClr val="CCCCCC"/>
                 </a:solidFill>
                 <a:latin typeface="Courier New" pitchFamily="34" charset="0"/>
                 <a:ea typeface="Courier New" pitchFamily="34" charset="-122"/>
@@ -17243,7 +18307,24 @@
             <a:r>
               <a:rPr lang="en-US" sz="1100" dirty="0">
                 <a:solidFill>
-                  <a:srgbClr val="E8ECEF"/>
+                  <a:srgbClr val="6E7681"/>
+                </a:solidFill>
+                <a:latin typeface="Courier New" pitchFamily="34" charset="0"/>
+                <a:ea typeface="Courier New" pitchFamily="34" charset="-122"/>
+                <a:cs typeface="Courier New" pitchFamily="34" charset="-120"/>
+              </a:rPr>
+              <a:t> 3  </a:t>
+            </a:r>
+            <a:pPr indent="0" marL="0">
+              <a:lnSpc>
+                <a:spcPct val="105000"/>
+              </a:lnSpc>
+              <a:buNone/>
+            </a:pPr>
+            <a:r>
+              <a:rPr lang="en-US" sz="1100" dirty="0">
+                <a:solidFill>
+                  <a:srgbClr val="CCCCCC"/>
                 </a:solidFill>
                 <a:latin typeface="Courier New" pitchFamily="34" charset="0"/>
                 <a:ea typeface="Courier New" pitchFamily="34" charset="-122"/>
@@ -17260,7 +18341,7 @@
             <a:r>
               <a:rPr lang="en-US" sz="1100" dirty="0">
                 <a:solidFill>
-                  <a:srgbClr val="E8ECEF"/>
+                  <a:srgbClr val="569CD6"/>
                 </a:solidFill>
                 <a:latin typeface="Courier New" pitchFamily="34" charset="0"/>
                 <a:ea typeface="Courier New" pitchFamily="34" charset="-122"/>
@@ -17277,7 +18358,7 @@
             <a:r>
               <a:rPr lang="en-US" sz="1100" dirty="0">
                 <a:solidFill>
-                  <a:srgbClr val="E8ECEF"/>
+                  <a:srgbClr val="CCCCCC"/>
                 </a:solidFill>
                 <a:latin typeface="Courier New" pitchFamily="34" charset="0"/>
                 <a:ea typeface="Courier New" pitchFamily="34" charset="-122"/>
@@ -17294,7 +18375,7 @@
             <a:r>
               <a:rPr lang="en-US" sz="1100" dirty="0">
                 <a:solidFill>
-                  <a:srgbClr val="E8ECEF"/>
+                  <a:srgbClr val="569CD6"/>
                 </a:solidFill>
                 <a:latin typeface="Courier New" pitchFamily="34" charset="0"/>
                 <a:ea typeface="Courier New" pitchFamily="34" charset="-122"/>
@@ -17311,7 +18392,7 @@
             <a:r>
               <a:rPr lang="en-US" sz="1100" dirty="0">
                 <a:solidFill>
-                  <a:srgbClr val="E8ECEF"/>
+                  <a:srgbClr val="CCCCCC"/>
                 </a:solidFill>
                 <a:latin typeface="Courier New" pitchFamily="34" charset="0"/>
                 <a:ea typeface="Courier New" pitchFamily="34" charset="-122"/>
@@ -17331,7 +18412,24 @@
             <a:r>
               <a:rPr lang="en-US" sz="1100" dirty="0">
                 <a:solidFill>
-                  <a:srgbClr val="E8ECEF"/>
+                  <a:srgbClr val="6E7681"/>
+                </a:solidFill>
+                <a:latin typeface="Courier New" pitchFamily="34" charset="0"/>
+                <a:ea typeface="Courier New" pitchFamily="34" charset="-122"/>
+                <a:cs typeface="Courier New" pitchFamily="34" charset="-120"/>
+              </a:rPr>
+              <a:t> 4  </a:t>
+            </a:r>
+            <a:pPr indent="0" marL="0">
+              <a:lnSpc>
+                <a:spcPct val="105000"/>
+              </a:lnSpc>
+              <a:buNone/>
+            </a:pPr>
+            <a:r>
+              <a:rPr lang="en-US" sz="1100" dirty="0">
+                <a:solidFill>
+                  <a:srgbClr val="CCCCCC"/>
                 </a:solidFill>
                 <a:latin typeface="Courier New" pitchFamily="34" charset="0"/>
                 <a:ea typeface="Courier New" pitchFamily="34" charset="-122"/>
@@ -17348,7 +18446,7 @@
             <a:r>
               <a:rPr lang="en-US" sz="1100" dirty="0">
                 <a:solidFill>
-                  <a:srgbClr val="E8ECEF"/>
+                  <a:srgbClr val="569CD6"/>
                 </a:solidFill>
                 <a:latin typeface="Courier New" pitchFamily="34" charset="0"/>
                 <a:ea typeface="Courier New" pitchFamily="34" charset="-122"/>
@@ -17365,7 +18463,7 @@
             <a:r>
               <a:rPr lang="en-US" sz="1100" dirty="0">
                 <a:solidFill>
-                  <a:srgbClr val="E8ECEF"/>
+                  <a:srgbClr val="CCCCCC"/>
                 </a:solidFill>
                 <a:latin typeface="Courier New" pitchFamily="34" charset="0"/>
                 <a:ea typeface="Courier New" pitchFamily="34" charset="-122"/>
@@ -17382,7 +18480,7 @@
             <a:r>
               <a:rPr lang="en-US" sz="1100" dirty="0">
                 <a:solidFill>
-                  <a:srgbClr val="E8ECEF"/>
+                  <a:srgbClr val="CCCCCC"/>
                 </a:solidFill>
                 <a:latin typeface="Courier New" pitchFamily="34" charset="0"/>
                 <a:ea typeface="Courier New" pitchFamily="34" charset="-122"/>
@@ -17399,7 +18497,7 @@
             <a:r>
               <a:rPr lang="en-US" sz="1100" dirty="0">
                 <a:solidFill>
-                  <a:srgbClr val="E8ECEF"/>
+                  <a:srgbClr val="CCCCCC"/>
                 </a:solidFill>
                 <a:latin typeface="Courier New" pitchFamily="34" charset="0"/>
                 <a:ea typeface="Courier New" pitchFamily="34" charset="-122"/>
@@ -17419,7 +18517,24 @@
             <a:r>
               <a:rPr lang="en-US" sz="1100" dirty="0">
                 <a:solidFill>
-                  <a:srgbClr val="E8ECEF"/>
+                  <a:srgbClr val="6E7681"/>
+                </a:solidFill>
+                <a:latin typeface="Courier New" pitchFamily="34" charset="0"/>
+                <a:ea typeface="Courier New" pitchFamily="34" charset="-122"/>
+                <a:cs typeface="Courier New" pitchFamily="34" charset="-120"/>
+              </a:rPr>
+              <a:t> 5  </a:t>
+            </a:r>
+            <a:pPr indent="0" marL="0">
+              <a:lnSpc>
+                <a:spcPct val="105000"/>
+              </a:lnSpc>
+              <a:buNone/>
+            </a:pPr>
+            <a:r>
+              <a:rPr lang="en-US" sz="1100" dirty="0">
+                <a:solidFill>
+                  <a:srgbClr val="569CD6"/>
                 </a:solidFill>
                 <a:latin typeface="Courier New" pitchFamily="34" charset="0"/>
                 <a:ea typeface="Courier New" pitchFamily="34" charset="-122"/>
@@ -17436,7 +18551,7 @@
             <a:r>
               <a:rPr lang="en-US" sz="1100" dirty="0">
                 <a:solidFill>
-                  <a:srgbClr val="E8ECEF"/>
+                  <a:srgbClr val="CCCCCC"/>
                 </a:solidFill>
                 <a:latin typeface="Courier New" pitchFamily="34" charset="0"/>
                 <a:ea typeface="Courier New" pitchFamily="34" charset="-122"/>
@@ -17456,13 +18571,13 @@
             <a:r>
               <a:rPr lang="en-US" sz="1100" dirty="0">
                 <a:solidFill>
-                  <a:srgbClr val="E8ECEF"/>
-                </a:solidFill>
-                <a:latin typeface="Courier New" pitchFamily="34" charset="0"/>
-                <a:ea typeface="Courier New" pitchFamily="34" charset="-122"/>
-                <a:cs typeface="Courier New" pitchFamily="34" charset="-120"/>
-              </a:rPr>
-              <a:t> </a:t>
+                  <a:srgbClr val="6E7681"/>
+                </a:solidFill>
+                <a:latin typeface="Courier New" pitchFamily="34" charset="0"/>
+                <a:ea typeface="Courier New" pitchFamily="34" charset="-122"/>
+                <a:cs typeface="Courier New" pitchFamily="34" charset="-120"/>
+              </a:rPr>
+              <a:t> 6  </a:t>
             </a:r>
             <a:endParaRPr lang="en-US" sz="1100" dirty="0"/>
           </a:p>
@@ -17474,9 +18589,26 @@
               <a:buNone/>
             </a:pPr>
             <a:r>
-              <a:rPr lang="en-US" sz="1100" i="1" dirty="0">
-                <a:solidFill>
-                  <a:srgbClr val="8396A8"/>
+              <a:rPr lang="en-US" sz="1100" dirty="0">
+                <a:solidFill>
+                  <a:srgbClr val="6E7681"/>
+                </a:solidFill>
+                <a:latin typeface="Courier New" pitchFamily="34" charset="0"/>
+                <a:ea typeface="Courier New" pitchFamily="34" charset="-122"/>
+                <a:cs typeface="Courier New" pitchFamily="34" charset="-120"/>
+              </a:rPr>
+              <a:t> 7  </a:t>
+            </a:r>
+            <a:pPr indent="0" marL="0">
+              <a:lnSpc>
+                <a:spcPct val="105000"/>
+              </a:lnSpc>
+              <a:buNone/>
+            </a:pPr>
+            <a:r>
+              <a:rPr lang="en-US" sz="1100" dirty="0">
+                <a:solidFill>
+                  <a:srgbClr val="6A9955"/>
                 </a:solidFill>
                 <a:latin typeface="Courier New" pitchFamily="34" charset="0"/>
                 <a:ea typeface="Courier New" pitchFamily="34" charset="-122"/>
@@ -17494,9 +18626,26 @@
               <a:buNone/>
             </a:pPr>
             <a:r>
-              <a:rPr lang="en-US" sz="1100" i="1" dirty="0">
-                <a:solidFill>
-                  <a:srgbClr val="8396A8"/>
+              <a:rPr lang="en-US" sz="1100" dirty="0">
+                <a:solidFill>
+                  <a:srgbClr val="6E7681"/>
+                </a:solidFill>
+                <a:latin typeface="Courier New" pitchFamily="34" charset="0"/>
+                <a:ea typeface="Courier New" pitchFamily="34" charset="-122"/>
+                <a:cs typeface="Courier New" pitchFamily="34" charset="-120"/>
+              </a:rPr>
+              <a:t> 8  </a:t>
+            </a:r>
+            <a:pPr indent="0" marL="0">
+              <a:lnSpc>
+                <a:spcPct val="105000"/>
+              </a:lnSpc>
+              <a:buNone/>
+            </a:pPr>
+            <a:r>
+              <a:rPr lang="en-US" sz="1100" dirty="0">
+                <a:solidFill>
+                  <a:srgbClr val="6A9955"/>
                 </a:solidFill>
                 <a:latin typeface="Courier New" pitchFamily="34" charset="0"/>
                 <a:ea typeface="Courier New" pitchFamily="34" charset="-122"/>
@@ -17514,9 +18663,26 @@
               <a:buNone/>
             </a:pPr>
             <a:r>
-              <a:rPr lang="en-US" sz="1100" i="1" dirty="0">
-                <a:solidFill>
-                  <a:srgbClr val="8396A8"/>
+              <a:rPr lang="en-US" sz="1100" dirty="0">
+                <a:solidFill>
+                  <a:srgbClr val="6E7681"/>
+                </a:solidFill>
+                <a:latin typeface="Courier New" pitchFamily="34" charset="0"/>
+                <a:ea typeface="Courier New" pitchFamily="34" charset="-122"/>
+                <a:cs typeface="Courier New" pitchFamily="34" charset="-120"/>
+              </a:rPr>
+              <a:t> 9  </a:t>
+            </a:r>
+            <a:pPr indent="0" marL="0">
+              <a:lnSpc>
+                <a:spcPct val="105000"/>
+              </a:lnSpc>
+              <a:buNone/>
+            </a:pPr>
+            <a:r>
+              <a:rPr lang="en-US" sz="1100" dirty="0">
+                <a:solidFill>
+                  <a:srgbClr val="6A9955"/>
                 </a:solidFill>
                 <a:latin typeface="Courier New" pitchFamily="34" charset="0"/>
                 <a:ea typeface="Courier New" pitchFamily="34" charset="-122"/>
@@ -17534,9 +18700,26 @@
               <a:buNone/>
             </a:pPr>
             <a:r>
-              <a:rPr lang="en-US" sz="1100" i="1" dirty="0">
-                <a:solidFill>
-                  <a:srgbClr val="8396A8"/>
+              <a:rPr lang="en-US" sz="1100" dirty="0">
+                <a:solidFill>
+                  <a:srgbClr val="6E7681"/>
+                </a:solidFill>
+                <a:latin typeface="Courier New" pitchFamily="34" charset="0"/>
+                <a:ea typeface="Courier New" pitchFamily="34" charset="-122"/>
+                <a:cs typeface="Courier New" pitchFamily="34" charset="-120"/>
+              </a:rPr>
+              <a:t>10  </a:t>
+            </a:r>
+            <a:pPr indent="0" marL="0">
+              <a:lnSpc>
+                <a:spcPct val="105000"/>
+              </a:lnSpc>
+              <a:buNone/>
+            </a:pPr>
+            <a:r>
+              <a:rPr lang="en-US" sz="1100" dirty="0">
+                <a:solidFill>
+                  <a:srgbClr val="6A9955"/>
                 </a:solidFill>
                 <a:latin typeface="Courier New" pitchFamily="34" charset="0"/>
                 <a:ea typeface="Courier New" pitchFamily="34" charset="-122"/>
@@ -17554,9 +18737,26 @@
               <a:buNone/>
             </a:pPr>
             <a:r>
-              <a:rPr lang="en-US" sz="1100" i="1" dirty="0">
-                <a:solidFill>
-                  <a:srgbClr val="8396A8"/>
+              <a:rPr lang="en-US" sz="1100" dirty="0">
+                <a:solidFill>
+                  <a:srgbClr val="6E7681"/>
+                </a:solidFill>
+                <a:latin typeface="Courier New" pitchFamily="34" charset="0"/>
+                <a:ea typeface="Courier New" pitchFamily="34" charset="-122"/>
+                <a:cs typeface="Courier New" pitchFamily="34" charset="-120"/>
+              </a:rPr>
+              <a:t>11  </a:t>
+            </a:r>
+            <a:pPr indent="0" marL="0">
+              <a:lnSpc>
+                <a:spcPct val="105000"/>
+              </a:lnSpc>
+              <a:buNone/>
+            </a:pPr>
+            <a:r>
+              <a:rPr lang="en-US" sz="1100" dirty="0">
+                <a:solidFill>
+                  <a:srgbClr val="6A9955"/>
                 </a:solidFill>
                 <a:latin typeface="Courier New" pitchFamily="34" charset="0"/>
                 <a:ea typeface="Courier New" pitchFamily="34" charset="-122"/>
@@ -17574,9 +18774,26 @@
               <a:buNone/>
             </a:pPr>
             <a:r>
-              <a:rPr lang="en-US" sz="1100" i="1" dirty="0">
-                <a:solidFill>
-                  <a:srgbClr val="8396A8"/>
+              <a:rPr lang="en-US" sz="1100" dirty="0">
+                <a:solidFill>
+                  <a:srgbClr val="6E7681"/>
+                </a:solidFill>
+                <a:latin typeface="Courier New" pitchFamily="34" charset="0"/>
+                <a:ea typeface="Courier New" pitchFamily="34" charset="-122"/>
+                <a:cs typeface="Courier New" pitchFamily="34" charset="-120"/>
+              </a:rPr>
+              <a:t>12  </a:t>
+            </a:r>
+            <a:pPr indent="0" marL="0">
+              <a:lnSpc>
+                <a:spcPct val="105000"/>
+              </a:lnSpc>
+              <a:buNone/>
+            </a:pPr>
+            <a:r>
+              <a:rPr lang="en-US" sz="1100" dirty="0">
+                <a:solidFill>
+                  <a:srgbClr val="6A9955"/>
                 </a:solidFill>
                 <a:latin typeface="Courier New" pitchFamily="34" charset="0"/>
                 <a:ea typeface="Courier New" pitchFamily="34" charset="-122"/>
@@ -17590,7 +18807,7 @@
       </p:sp>
       <p:sp>
         <p:nvSpPr>
-          <p:cNvPr id="25" name="Cartão"/>
+          <p:cNvPr id="29" name="Cartão"/>
           <p:cNvSpPr/>
           <p:nvPr/>
         </p:nvSpPr>
@@ -17612,7 +18829,7 @@
       </p:sp>
       <p:pic>
         <p:nvPicPr>
-          <p:cNvPr id="26" name="Image 0" descr="message-success">    </p:cNvPr>
+          <p:cNvPr id="30" name="Image 0" descr="message-success">    </p:cNvPr>
           <p:cNvPicPr>
             <a:picLocks noChangeAspect="1"/>
           </p:cNvPicPr>
@@ -17636,7 +18853,7 @@
       </p:pic>
       <p:sp>
         <p:nvSpPr>
-          <p:cNvPr id="27" name="Text 23"/>
+          <p:cNvPr id="31" name="Text 27"/>
           <p:cNvSpPr txBox="1"/>
           <p:nvPr/>
         </p:nvSpPr>

--- a/docs/apresentacoes/04-servicos-odata.pptx
+++ b/docs/apresentacoes/04-servicos-odata.pptx
@@ -2936,7 +2936,7 @@
                   <a:srgbClr val="556B82"/>
                 </a:solidFill>
               </a:rPr>
-              <a:t>Pedidos de Compras · SAP RAP / ABAP Cloud  ·  Etapa 4 de 5 — Serviços OData</a:t>
+              <a:t>Pedidos de Compras · SAP RAP no BTP e On-Premise  ·  Etapa 4 de 5 — Serviços OData</a:t>
             </a:r>
             <a:endParaRPr lang="en-US" sz="900" dirty="0"/>
           </a:p>
@@ -3525,7 +3525,7 @@
                   <a:schemeClr val="accent1"/>
                 </a:solidFill>
               </a:rPr>
-              <a:t>ETAPA 4 DE 5 · PEDIDOS DE COMPRAS NO SAP BTP</a:t>
+              <a:t>ETAPA 4 DE 5 · SAP RAP NO BTP OU ON-PREMISE</a:t>
             </a:r>
             <a:endParaRPr lang="en-US" sz="1400" dirty="0"/>
           </a:p>
@@ -3601,7 +3601,7 @@
                   <a:schemeClr val="bg2"/>
                 </a:solidFill>
               </a:rPr>
-              <a:t>Expor cada BO como serviço OData V4, publicar os bindings e liberar o acesso com IAM Apps, catálogos e roles</a:t>
+              <a:t>Expor cada BO como serviço OData V4, publicar os bindings e liberar o acesso: IAM Apps no BTP, SU24 e PFCG no On-Premise</a:t>
             </a:r>
             <a:endParaRPr lang="en-US" sz="1800" dirty="0"/>
           </a:p>
@@ -4121,7 +4121,7 @@
                   <a:schemeClr val="accent1"/>
                 </a:solidFill>
               </a:rPr>
-              <a:t>COMMON · IAM POR DOMÍNIO</a:t>
+              <a:t>COMMON · IAM POR DOMÍNIO (SAP BTP)</a:t>
             </a:r>
             <a:endParaRPr lang="en-US" sz="1100" dirty="0"/>
           </a:p>
@@ -25584,7 +25584,7 @@
                   <a:schemeClr val="bg2"/>
                 </a:solidFill>
               </a:rPr>
-              <a:t>Cinco serviços OData V4, BDEFs de projeção, objetos de autorização, IAM Apps, catálogos, roles e dados de demonstração.</a:t>
+              <a:t>Cinco serviços OData V4, BDEFs de projeção, objetos de autorização, IAM Apps (BTP) ou roles PFCG (On-Premise) e dados de demonstração.</a:t>
             </a:r>
             <a:endParaRPr lang="en-US" sz="1800" dirty="0"/>
           </a:p>
@@ -32804,7 +32804,7 @@
                   <a:schemeClr val="accent1"/>
                 </a:solidFill>
               </a:rPr>
-              <a:t>PUBLICAÇÃO</a:t>
+              <a:t>PUBLICAÇÃO · SAP BTP</a:t>
             </a:r>
             <a:endParaRPr lang="en-US" sz="1100" dirty="0"/>
           </a:p>
@@ -32842,7 +32842,7 @@
                   <a:schemeClr val="tx1"/>
                 </a:solidFill>
               </a:rPr>
-              <a:t>O que o Publish cria por trás</a:t>
+              <a:t>O que o Publish cria por trás no SAP BTP</a:t>
             </a:r>
             <a:endParaRPr lang="en-US" sz="3000" dirty="0"/>
           </a:p>
@@ -33602,7 +33602,7 @@
                   <a:schemeClr val="bg2"/>
                 </a:solidFill>
               </a:rPr>
-              <a:t>Os dois objetos de autorização, a cadeia de IAM que libera os serviços aos usuários e o serviço analítico compartilhado pelas quatro apps de análise.</a:t>
+              <a:t>Os dois objetos de autorização, a cadeia de IAM que libera os serviços no SAP BTP e o serviço analítico compartilhado pelas quatro apps de análise.</a:t>
             </a:r>
             <a:endParaRPr lang="en-US" sz="1800" dirty="0"/>
           </a:p>
@@ -35967,7 +35967,7 @@
                   <a:schemeClr val="accent1"/>
                 </a:solidFill>
               </a:rPr>
-              <a:t>COMMON · IAM</a:t>
+              <a:t>COMMON · IAM (SAP BTP)</a:t>
             </a:r>
             <a:endParaRPr lang="en-US" sz="1100" dirty="0"/>
           </a:p>
@@ -36005,7 +36005,7 @@
                   <a:schemeClr val="tx1"/>
                 </a:solidFill>
               </a:rPr>
-              <a:t>Do objeto de autorização ao usuário</a:t>
+              <a:t>Do objeto de autorização ao usuário no SAP BTP</a:t>
             </a:r>
             <a:endParaRPr lang="en-US" sz="3000" dirty="0"/>
           </a:p>

--- a/docs/apresentacoes/04-servicos-odata.pptx
+++ b/docs/apresentacoes/04-servicos-odata.pptx
@@ -16,6 +16,12 @@
     <p:sldId id="264" r:id="rId10"/>
     <p:sldId id="265" r:id="rId11"/>
     <p:sldId id="266" r:id="rId12"/>
+    <p:sldId id="278" r:id="rId29"/>
+    <p:sldId id="279" r:id="rId30"/>
+    <p:sldId id="280" r:id="rId31"/>
+    <p:sldId id="281" r:id="rId32"/>
+    <p:sldId id="282" r:id="rId33"/>
+    <p:sldId id="283" r:id="rId34"/>
     <p:sldId id="267" r:id="rId13"/>
     <p:sldId id="268" r:id="rId14"/>
     <p:sldId id="269" r:id="rId15"/>
@@ -1842,6 +1848,534 @@
             <a:fld id="{F7021451-1387-4CA6-816F-3879F97B5CBC}" type="slidenum">
               <a:rPr lang="en-US"/>
               <a:t>22</a:t>
+            </a:fld>
+            <a:endParaRPr lang="en-US"/>
+          </a:p>
+        </p:txBody>
+      </p:sp>
+    </p:spTree>
+    <p:extLst>
+      <p:ext uri="{BB962C8B-B14F-4D97-AF65-F5344CB8AC3E}">
+        <p14:creationId xmlns:p14="http://schemas.microsoft.com/office/powerpoint/2010/main" val="1024086991"/>
+      </p:ext>
+    </p:extLst>
+  </p:cSld>
+  <p:clrMapOvr>
+    <a:masterClrMapping/>
+  </p:clrMapOvr>
+</p:notes>
+</file>
+
+<file path=ppt/notesSlides/notesSlide23.xml><?xml version="1.0" encoding="utf-8"?>
+<p:notes xmlns:a="http://schemas.openxmlformats.org/drawingml/2006/main" xmlns:r="http://schemas.openxmlformats.org/officeDocument/2006/relationships" xmlns:p="http://schemas.openxmlformats.org/presentationml/2006/main">
+  <p:cSld>
+    <p:spTree>
+      <p:nvGrpSpPr>
+        <p:cNvPr id="1" name=""/>
+        <p:cNvGrpSpPr/>
+        <p:nvPr/>
+      </p:nvGrpSpPr>
+      <p:grpSpPr>
+        <a:xfrm>
+          <a:off x="0" y="0"/>
+          <a:ext cx="0" cy="0"/>
+          <a:chOff x="0" y="0"/>
+          <a:chExt cx="0" cy="0"/>
+        </a:xfrm>
+      </p:grpSpPr>
+      <p:sp>
+        <p:nvSpPr>
+          <p:cNvPr id="2" name="Slide Image Placeholder 1"/>
+          <p:cNvSpPr>
+            <a:spLocks noGrp="1" noRot="1" noChangeAspect="1"/>
+          </p:cNvSpPr>
+          <p:nvPr>
+            <p:ph type="sldImg"/>
+          </p:nvPr>
+        </p:nvSpPr>
+        <p:spPr/>
+      </p:sp>
+      <p:sp>
+        <p:nvSpPr>
+          <p:cNvPr id="3" name="Notes Placeholder 2"/>
+          <p:cNvSpPr>
+            <a:spLocks noGrp="1"/>
+          </p:cNvSpPr>
+          <p:nvPr>
+            <p:ph type="body" idx="1"/>
+          </p:nvPr>
+        </p:nvSpPr>
+        <p:spPr/>
+        <p:txBody>
+          <a:bodyPr/>
+          <a:lstStyle/>
+          <a:p>
+            <a:r>
+              <a:rPr lang="en-US" dirty="0"/>
+              <a:t>Esta seção é para quem estuda num SAP S/4HANA On-Premise. O código de autorização não muda: ZCL_PC_AUTH e os métodos get_global_authorizations são os mesmos. Muda onde os objetos são criados e como chegam ao usuário: SU21, SU24, PFCG e SU01 no SAP GUI, no lugar de IAM Apps, Business Catalogs e Business Roles. Lembre de manter c_modo_trial = abap_false.</a:t>
+            </a:r>
+            <a:endParaRPr lang="en-US" dirty="0"/>
+          </a:p>
+        </p:txBody>
+      </p:sp>
+      <p:sp>
+        <p:nvSpPr>
+          <p:cNvPr id="4" name="Slide Number Placeholder 3"/>
+          <p:cNvSpPr>
+            <a:spLocks noGrp="1"/>
+          </p:cNvSpPr>
+          <p:nvPr>
+            <p:ph type="sldNum" sz="quarter" idx="10"/>
+          </p:nvPr>
+        </p:nvSpPr>
+        <p:spPr/>
+        <p:txBody>
+          <a:bodyPr/>
+          <a:lstStyle/>
+          <a:p>
+            <a:fld id="{F7021451-1387-4CA6-816F-3879F97B5CBC}" type="slidenum">
+              <a:rPr lang="en-US"/>
+              <a:t>7</a:t>
+            </a:fld>
+            <a:endParaRPr lang="en-US"/>
+          </a:p>
+        </p:txBody>
+      </p:sp>
+    </p:spTree>
+    <p:extLst>
+      <p:ext uri="{BB962C8B-B14F-4D97-AF65-F5344CB8AC3E}">
+        <p14:creationId xmlns:p14="http://schemas.microsoft.com/office/powerpoint/2010/main" val="1024086991"/>
+      </p:ext>
+    </p:extLst>
+  </p:cSld>
+  <p:clrMapOvr>
+    <a:masterClrMapping/>
+  </p:clrMapOvr>
+</p:notes>
+</file>
+
+<file path=ppt/notesSlides/notesSlide24.xml><?xml version="1.0" encoding="utf-8"?>
+<p:notes xmlns:a="http://schemas.openxmlformats.org/drawingml/2006/main" xmlns:r="http://schemas.openxmlformats.org/officeDocument/2006/relationships" xmlns:p="http://schemas.openxmlformats.org/presentationml/2006/main">
+  <p:cSld>
+    <p:spTree>
+      <p:nvGrpSpPr>
+        <p:cNvPr id="1" name=""/>
+        <p:cNvGrpSpPr/>
+        <p:nvPr/>
+      </p:nvGrpSpPr>
+      <p:grpSpPr>
+        <a:xfrm>
+          <a:off x="0" y="0"/>
+          <a:ext cx="0" cy="0"/>
+          <a:chOff x="0" y="0"/>
+          <a:chExt cx="0" cy="0"/>
+        </a:xfrm>
+      </p:grpSpPr>
+      <p:sp>
+        <p:nvSpPr>
+          <p:cNvPr id="2" name="Slide Image Placeholder 1"/>
+          <p:cNvSpPr>
+            <a:spLocks noGrp="1" noRot="1" noChangeAspect="1"/>
+          </p:cNvSpPr>
+          <p:nvPr>
+            <p:ph type="sldImg"/>
+          </p:nvPr>
+        </p:nvSpPr>
+        <p:spPr/>
+      </p:sp>
+      <p:sp>
+        <p:nvSpPr>
+          <p:cNvPr id="3" name="Notes Placeholder 2"/>
+          <p:cNvSpPr>
+            <a:spLocks noGrp="1"/>
+          </p:cNvSpPr>
+          <p:nvPr>
+            <p:ph type="body" idx="1"/>
+          </p:nvPr>
+        </p:nvSpPr>
+        <p:spPr/>
+        <p:txBody>
+          <a:bodyPr/>
+          <a:lstStyle/>
+          <a:p>
+            <a:r>
+              <a:rPr lang="en-US" dirty="0"/>
+              <a:t>SU21 cria a classe ZPC e os objetos ZPC_ADMIN e ZPC_PEDIDO, com o campo ACTVT restrito às atividades permitidas (a 16 é obrigatória em ZPC_PEDIDO). SU24 liga cada grupo de serviços OData V4 aos objetos. A PFCG monta as roles Z_PC_ADMIN e Z_PC_COMUM, e a SU01 atribui as roles aos usuários de teste. SU53 e STAUTHTRACE mostram o que foi negado. SU21, SU24 e as roles vão por ordem Workbench; a atribuição de usuários é feita em cada sistema.</a:t>
+            </a:r>
+            <a:endParaRPr lang="en-US" dirty="0"/>
+          </a:p>
+        </p:txBody>
+      </p:sp>
+      <p:sp>
+        <p:nvSpPr>
+          <p:cNvPr id="4" name="Slide Number Placeholder 3"/>
+          <p:cNvSpPr>
+            <a:spLocks noGrp="1"/>
+          </p:cNvSpPr>
+          <p:nvPr>
+            <p:ph type="sldNum" sz="quarter" idx="10"/>
+          </p:nvPr>
+        </p:nvSpPr>
+        <p:spPr/>
+        <p:txBody>
+          <a:bodyPr/>
+          <a:lstStyle/>
+          <a:p>
+            <a:fld id="{F7021451-1387-4CA6-816F-3879F97B5CBC}" type="slidenum">
+              <a:rPr lang="en-US"/>
+              <a:t>8</a:t>
+            </a:fld>
+            <a:endParaRPr lang="en-US"/>
+          </a:p>
+        </p:txBody>
+      </p:sp>
+    </p:spTree>
+    <p:extLst>
+      <p:ext uri="{BB962C8B-B14F-4D97-AF65-F5344CB8AC3E}">
+        <p14:creationId xmlns:p14="http://schemas.microsoft.com/office/powerpoint/2010/main" val="1024086991"/>
+      </p:ext>
+    </p:extLst>
+  </p:cSld>
+  <p:clrMapOvr>
+    <a:masterClrMapping/>
+  </p:clrMapOvr>
+</p:notes>
+</file>
+
+<file path=ppt/notesSlides/notesSlide25.xml><?xml version="1.0" encoding="utf-8"?>
+<p:notes xmlns:a="http://schemas.openxmlformats.org/drawingml/2006/main" xmlns:r="http://schemas.openxmlformats.org/officeDocument/2006/relationships" xmlns:p="http://schemas.openxmlformats.org/presentationml/2006/main">
+  <p:cSld>
+    <p:spTree>
+      <p:nvGrpSpPr>
+        <p:cNvPr id="1" name=""/>
+        <p:cNvGrpSpPr/>
+        <p:nvPr/>
+      </p:nvGrpSpPr>
+      <p:grpSpPr>
+        <a:xfrm>
+          <a:off x="0" y="0"/>
+          <a:ext cx="0" cy="0"/>
+          <a:chOff x="0" y="0"/>
+          <a:chExt cx="0" cy="0"/>
+        </a:xfrm>
+      </p:grpSpPr>
+      <p:sp>
+        <p:nvSpPr>
+          <p:cNvPr id="2" name="Slide Image Placeholder 1"/>
+          <p:cNvSpPr>
+            <a:spLocks noGrp="1" noRot="1" noChangeAspect="1"/>
+          </p:cNvSpPr>
+          <p:nvPr>
+            <p:ph type="sldImg"/>
+          </p:nvPr>
+        </p:nvSpPr>
+        <p:spPr/>
+      </p:sp>
+      <p:sp>
+        <p:nvSpPr>
+          <p:cNvPr id="3" name="Notes Placeholder 2"/>
+          <p:cNvSpPr>
+            <a:spLocks noGrp="1"/>
+          </p:cNvSpPr>
+          <p:nvPr>
+            <p:ph type="body" idx="1"/>
+          </p:nvPr>
+        </p:nvSpPr>
+        <p:spPr/>
+        <p:txBody>
+          <a:bodyPr/>
+          <a:lstStyle/>
+          <a:p>
+            <a:r>
+              <a:rPr lang="en-US" dirty="0"/>
+              <a:t>No On-Premise não há serviço de entrada nem IAM App. O Publish do ADT, ou a transação /IWFND/V4_ADMIN com o alias de sistema LOCAL, registra cada binding como grupo de serviços OData V4. O acesso ao grupo é verificado pelo objeto S_START, que entra na role quando o serviço é inserido no menu da PFCG. Os valores propostos da SU24 fazem a PFCG trazer também ZPC_ADMIN ou ZPC_PEDIDO.</a:t>
+            </a:r>
+            <a:endParaRPr lang="en-US" dirty="0"/>
+          </a:p>
+        </p:txBody>
+      </p:sp>
+      <p:sp>
+        <p:nvSpPr>
+          <p:cNvPr id="4" name="Slide Number Placeholder 3"/>
+          <p:cNvSpPr>
+            <a:spLocks noGrp="1"/>
+          </p:cNvSpPr>
+          <p:nvPr>
+            <p:ph type="sldNum" sz="quarter" idx="10"/>
+          </p:nvPr>
+        </p:nvSpPr>
+        <p:spPr/>
+        <p:txBody>
+          <a:bodyPr/>
+          <a:lstStyle/>
+          <a:p>
+            <a:fld id="{F7021451-1387-4CA6-816F-3879F97B5CBC}" type="slidenum">
+              <a:rPr lang="en-US"/>
+              <a:t>6</a:t>
+            </a:fld>
+            <a:endParaRPr lang="en-US"/>
+          </a:p>
+        </p:txBody>
+      </p:sp>
+    </p:spTree>
+    <p:extLst>
+      <p:ext uri="{BB962C8B-B14F-4D97-AF65-F5344CB8AC3E}">
+        <p14:creationId xmlns:p14="http://schemas.microsoft.com/office/powerpoint/2010/main" val="1024086991"/>
+      </p:ext>
+    </p:extLst>
+  </p:cSld>
+  <p:clrMapOvr>
+    <a:masterClrMapping/>
+  </p:clrMapOvr>
+</p:notes>
+</file>
+
+<file path=ppt/notesSlides/notesSlide26.xml><?xml version="1.0" encoding="utf-8"?>
+<p:notes xmlns:a="http://schemas.openxmlformats.org/drawingml/2006/main" xmlns:r="http://schemas.openxmlformats.org/officeDocument/2006/relationships" xmlns:p="http://schemas.openxmlformats.org/presentationml/2006/main">
+  <p:cSld>
+    <p:spTree>
+      <p:nvGrpSpPr>
+        <p:cNvPr id="1" name=""/>
+        <p:cNvGrpSpPr/>
+        <p:nvPr/>
+      </p:nvGrpSpPr>
+      <p:grpSpPr>
+        <a:xfrm>
+          <a:off x="0" y="0"/>
+          <a:ext cx="0" cy="0"/>
+          <a:chOff x="0" y="0"/>
+          <a:chExt cx="0" cy="0"/>
+        </a:xfrm>
+      </p:grpSpPr>
+      <p:sp>
+        <p:nvSpPr>
+          <p:cNvPr id="2" name="Slide Image Placeholder 1"/>
+          <p:cNvSpPr>
+            <a:spLocks noGrp="1" noRot="1" noChangeAspect="1"/>
+          </p:cNvSpPr>
+          <p:nvPr>
+            <p:ph type="sldImg"/>
+          </p:nvPr>
+        </p:nvSpPr>
+        <p:spPr/>
+      </p:sp>
+      <p:sp>
+        <p:nvSpPr>
+          <p:cNvPr id="3" name="Notes Placeholder 2"/>
+          <p:cNvSpPr>
+            <a:spLocks noGrp="1"/>
+          </p:cNvSpPr>
+          <p:nvPr>
+            <p:ph type="body" idx="1"/>
+          </p:nvPr>
+        </p:nvSpPr>
+        <p:spPr/>
+        <p:txBody>
+          <a:bodyPr/>
+          <a:lstStyle/>
+          <a:p>
+            <a:r>
+              <a:rPr lang="en-US" dirty="0"/>
+              <a:t>A cadeia equivalente à do BTP: os objetos da SU21 entram na SU24 como valores propostos do grupo de serviços; na PFCG, o serviço é inserido no menu da role (gera S_START), as autorizações são ajustadas e o perfil é gerado; por fim a role é atribuída na SU01 e a comparação de usuários grava o perfil. Depois de alterar uma role, faça logoff e logon ou limpe o cache do launchpad.</a:t>
+            </a:r>
+            <a:endParaRPr lang="en-US" dirty="0"/>
+          </a:p>
+        </p:txBody>
+      </p:sp>
+      <p:sp>
+        <p:nvSpPr>
+          <p:cNvPr id="4" name="Slide Number Placeholder 3"/>
+          <p:cNvSpPr>
+            <a:spLocks noGrp="1"/>
+          </p:cNvSpPr>
+          <p:nvPr>
+            <p:ph type="sldNum" sz="quarter" idx="10"/>
+          </p:nvPr>
+        </p:nvSpPr>
+        <p:spPr/>
+        <p:txBody>
+          <a:bodyPr/>
+          <a:lstStyle/>
+          <a:p>
+            <a:fld id="{F7021451-1387-4CA6-816F-3879F97B5CBC}" type="slidenum">
+              <a:rPr lang="en-US"/>
+              <a:t>9</a:t>
+            </a:fld>
+            <a:endParaRPr lang="en-US"/>
+          </a:p>
+        </p:txBody>
+      </p:sp>
+    </p:spTree>
+    <p:extLst>
+      <p:ext uri="{BB962C8B-B14F-4D97-AF65-F5344CB8AC3E}">
+        <p14:creationId xmlns:p14="http://schemas.microsoft.com/office/powerpoint/2010/main" val="1024086991"/>
+      </p:ext>
+    </p:extLst>
+  </p:cSld>
+  <p:clrMapOvr>
+    <a:masterClrMapping/>
+  </p:clrMapOvr>
+</p:notes>
+</file>
+
+<file path=ppt/notesSlides/notesSlide27.xml><?xml version="1.0" encoding="utf-8"?>
+<p:notes xmlns:a="http://schemas.openxmlformats.org/drawingml/2006/main" xmlns:r="http://schemas.openxmlformats.org/officeDocument/2006/relationships" xmlns:p="http://schemas.openxmlformats.org/presentationml/2006/main">
+  <p:cSld>
+    <p:spTree>
+      <p:nvGrpSpPr>
+        <p:cNvPr id="1" name=""/>
+        <p:cNvGrpSpPr/>
+        <p:nvPr/>
+      </p:nvGrpSpPr>
+      <p:grpSpPr>
+        <a:xfrm>
+          <a:off x="0" y="0"/>
+          <a:ext cx="0" cy="0"/>
+          <a:chOff x="0" y="0"/>
+          <a:chExt cx="0" cy="0"/>
+        </a:xfrm>
+      </p:grpSpPr>
+      <p:sp>
+        <p:nvSpPr>
+          <p:cNvPr id="2" name="Slide Image Placeholder 1"/>
+          <p:cNvSpPr>
+            <a:spLocks noGrp="1" noRot="1" noChangeAspect="1"/>
+          </p:cNvSpPr>
+          <p:nvPr>
+            <p:ph type="sldImg"/>
+          </p:nvPr>
+        </p:nvSpPr>
+        <p:spPr/>
+      </p:sp>
+      <p:sp>
+        <p:nvSpPr>
+          <p:cNvPr id="3" name="Notes Placeholder 2"/>
+          <p:cNvSpPr>
+            <a:spLocks noGrp="1"/>
+          </p:cNvSpPr>
+          <p:nvPr>
+            <p:ph type="body" idx="1"/>
+          </p:nvPr>
+        </p:nvSpPr>
+        <p:spPr/>
+        <p:txBody>
+          <a:bodyPr/>
+          <a:lstStyle/>
+          <a:p>
+            <a:r>
+              <a:rPr lang="en-US" dirty="0"/>
+              <a:t>Cada linha mostra o grupo de serviços que vai ao menu da role e os valores de ACTVT de cada perfil. Z_PC_ADMIN tem os quatro serviços de gestão e o analítico (ZUI_PC_ANALITICO_O4). Z_PC_COMUM opera pedidos sem a atividade 16 e recebe ZPC_ADMIN 03 para ler clientes e itens nos value helps. Ajuste a matriz ao processo da empresa.</a:t>
+            </a:r>
+            <a:endParaRPr lang="en-US" dirty="0"/>
+          </a:p>
+        </p:txBody>
+      </p:sp>
+      <p:sp>
+        <p:nvSpPr>
+          <p:cNvPr id="4" name="Slide Number Placeholder 3"/>
+          <p:cNvSpPr>
+            <a:spLocks noGrp="1"/>
+          </p:cNvSpPr>
+          <p:nvPr>
+            <p:ph type="sldNum" sz="quarter" idx="10"/>
+          </p:nvPr>
+        </p:nvSpPr>
+        <p:spPr/>
+        <p:txBody>
+          <a:bodyPr/>
+          <a:lstStyle/>
+          <a:p>
+            <a:fld id="{F7021451-1387-4CA6-816F-3879F97B5CBC}" type="slidenum">
+              <a:rPr lang="en-US"/>
+              <a:t>10</a:t>
+            </a:fld>
+            <a:endParaRPr lang="en-US"/>
+          </a:p>
+        </p:txBody>
+      </p:sp>
+    </p:spTree>
+    <p:extLst>
+      <p:ext uri="{BB962C8B-B14F-4D97-AF65-F5344CB8AC3E}">
+        <p14:creationId xmlns:p14="http://schemas.microsoft.com/office/powerpoint/2010/main" val="1024086991"/>
+      </p:ext>
+    </p:extLst>
+  </p:cSld>
+  <p:clrMapOvr>
+    <a:masterClrMapping/>
+  </p:clrMapOvr>
+</p:notes>
+</file>
+
+<file path=ppt/notesSlides/notesSlide28.xml><?xml version="1.0" encoding="utf-8"?>
+<p:notes xmlns:a="http://schemas.openxmlformats.org/drawingml/2006/main" xmlns:r="http://schemas.openxmlformats.org/officeDocument/2006/relationships" xmlns:p="http://schemas.openxmlformats.org/presentationml/2006/main">
+  <p:cSld>
+    <p:spTree>
+      <p:nvGrpSpPr>
+        <p:cNvPr id="1" name=""/>
+        <p:cNvGrpSpPr/>
+        <p:nvPr/>
+      </p:nvGrpSpPr>
+      <p:grpSpPr>
+        <a:xfrm>
+          <a:off x="0" y="0"/>
+          <a:ext cx="0" cy="0"/>
+          <a:chOff x="0" y="0"/>
+          <a:chExt cx="0" cy="0"/>
+        </a:xfrm>
+      </p:grpSpPr>
+      <p:sp>
+        <p:nvSpPr>
+          <p:cNvPr id="2" name="Slide Image Placeholder 1"/>
+          <p:cNvSpPr>
+            <a:spLocks noGrp="1" noRot="1" noChangeAspect="1"/>
+          </p:cNvSpPr>
+          <p:nvPr>
+            <p:ph type="sldImg"/>
+          </p:nvPr>
+        </p:nvSpPr>
+        <p:spPr/>
+      </p:sp>
+      <p:sp>
+        <p:nvSpPr>
+          <p:cNvPr id="3" name="Notes Placeholder 2"/>
+          <p:cNvSpPr>
+            <a:spLocks noGrp="1"/>
+          </p:cNvSpPr>
+          <p:nvPr>
+            <p:ph type="body" idx="1"/>
+          </p:nvPr>
+        </p:nvSpPr>
+        <p:spPr/>
+        <p:txBody>
+          <a:bodyPr/>
+          <a:lstStyle/>
+          <a:p>
+            <a:r>
+              <a:rPr lang="en-US" dirty="0"/>
+              <a:t>Crie PC_ADMIN com Z_PC_ADMIN e PC_COMUM com Z_PC_COMUM. Com PC_COMUM, Criar e Editar ficam indisponíveis em Clientes, e Efetuar Pagamento, Aprovar e Cancelar são negados em Pedidos; com PC_ADMIN tudo funciona. Sem a role, o serviço responde 403. O roteiro completo está em abap/README.md, seção 6.</a:t>
+            </a:r>
+            <a:endParaRPr lang="en-US" dirty="0"/>
+          </a:p>
+        </p:txBody>
+      </p:sp>
+      <p:sp>
+        <p:nvSpPr>
+          <p:cNvPr id="4" name="Slide Number Placeholder 3"/>
+          <p:cNvSpPr>
+            <a:spLocks noGrp="1"/>
+          </p:cNvSpPr>
+          <p:nvPr>
+            <p:ph type="sldNum" sz="quarter" idx="10"/>
+          </p:nvPr>
+        </p:nvSpPr>
+        <p:spPr/>
+        <p:txBody>
+          <a:bodyPr/>
+          <a:lstStyle/>
+          <a:p>
+            <a:fld id="{F7021451-1387-4CA6-816F-3879F97B5CBC}" type="slidenum">
+              <a:rPr lang="en-US"/>
+              <a:t>21</a:t>
             </a:fld>
             <a:endParaRPr lang="en-US"/>
           </a:p>
@@ -26138,6 +26672,7520 @@
               <a:t>Apps Fiori: gerar, navegar e implantar</a:t>
             </a:r>
             <a:endParaRPr lang="en-US" sz="1800" dirty="0"/>
+          </a:p>
+        </p:txBody>
+      </p:sp>
+    </p:spTree>
+  </p:cSld>
+  <p:clrMapOvr>
+    <a:masterClrMapping/>
+  </p:clrMapOvr>
+</p:sld>
+</file>
+
+<file path=ppt/slides/slide23.xml><?xml version="1.0" encoding="utf-8"?>
+<p:sld xmlns:a="http://schemas.openxmlformats.org/drawingml/2006/main" xmlns:r="http://schemas.openxmlformats.org/officeDocument/2006/relationships" xmlns:p="http://schemas.openxmlformats.org/presentationml/2006/main">
+  <p:cSld name="Slide 7">
+    <p:spTree>
+      <p:nvGrpSpPr>
+        <p:cNvPr id="1" name=""/>
+        <p:cNvGrpSpPr/>
+        <p:nvPr/>
+      </p:nvGrpSpPr>
+      <p:grpSpPr>
+        <a:xfrm>
+          <a:off x="0" y="0"/>
+          <a:ext cx="0" cy="0"/>
+          <a:chOff x="0" y="0"/>
+          <a:chExt cx="0" cy="0"/>
+        </a:xfrm>
+      </p:grpSpPr>
+      <p:sp>
+        <p:nvSpPr>
+          <p:cNvPr id="2" name="Text 0"/>
+          <p:cNvSpPr/>
+          <p:nvPr>
+            <p:ph idx="100" type="body" hasCustomPrompt="1"/>
+          </p:nvPr>
+        </p:nvSpPr>
+        <p:spPr>
+          <a:xfrm>
+            <a:off x="731520" y="1325880"/>
+            <a:ext cx="6949440" cy="365760"/>
+          </a:xfrm>
+          <a:prstGeom prst="rect">
+            <a:avLst/>
+          </a:prstGeom>
+          <a:noFill/>
+          <a:ln/>
+        </p:spPr>
+        <p:txBody>
+          <a:bodyPr wrap="square" lIns="0" tIns="0" rIns="0" bIns="0" rtlCol="0" anchor="ctr"/>
+          <a:lstStyle/>
+          <a:p>
+            <a:pPr algn="l" indent="0" marL="0">
+              <a:buNone/>
+            </a:pPr>
+            <a:r>
+              <a:rPr lang="en-US" sz="1400" b="1" spc="200" kern="0" dirty="0">
+                <a:solidFill>
+                  <a:schemeClr val="accent1"/>
+                </a:solidFill>
+              </a:rPr>
+              <a:t>ETAPA 4 · ON-PREMISE</a:t>
+            </a:r>
+            <a:endParaRPr lang="en-US" sz="1400" dirty="0"/>
+          </a:p>
+        </p:txBody>
+      </p:sp>
+      <p:sp>
+        <p:nvSpPr>
+          <p:cNvPr id="3" name="Text 0"/>
+          <p:cNvSpPr/>
+          <p:nvPr>
+            <p:ph idx="101" type="title" hasCustomPrompt="1"/>
+          </p:nvPr>
+        </p:nvSpPr>
+        <p:spPr>
+          <a:xfrm>
+            <a:off x="731520" y="1737360"/>
+            <a:ext cx="6949440" cy="1600200"/>
+          </a:xfrm>
+          <a:prstGeom prst="rect">
+            <a:avLst/>
+          </a:prstGeom>
+          <a:noFill/>
+          <a:ln/>
+        </p:spPr>
+        <p:txBody>
+          <a:bodyPr wrap="square" lIns="0" tIns="0" rIns="0" bIns="0" rtlCol="0" anchor="t"/>
+          <a:lstStyle/>
+          <a:p>
+            <a:pPr algn="l" indent="0" marL="0">
+              <a:buNone/>
+            </a:pPr>
+            <a:r>
+              <a:rPr lang="en-US" sz="4400" b="1" dirty="0">
+                <a:solidFill>
+                  <a:schemeClr val="bg1"/>
+                </a:solidFill>
+              </a:rPr>
+              <a:t>Autorização com o SAP GUI</a:t>
+            </a:r>
+            <a:endParaRPr lang="en-US" sz="4400" dirty="0"/>
+          </a:p>
+        </p:txBody>
+      </p:sp>
+      <p:sp>
+        <p:nvSpPr>
+          <p:cNvPr id="4" name="Text 0"/>
+          <p:cNvSpPr/>
+          <p:nvPr>
+            <p:ph idx="102" type="body" hasCustomPrompt="1"/>
+          </p:nvPr>
+        </p:nvSpPr>
+        <p:spPr>
+          <a:xfrm>
+            <a:off x="731520" y="3383280"/>
+            <a:ext cx="6949440" cy="914400"/>
+          </a:xfrm>
+          <a:prstGeom prst="rect">
+            <a:avLst/>
+          </a:prstGeom>
+          <a:noFill/>
+          <a:ln/>
+        </p:spPr>
+        <p:txBody>
+          <a:bodyPr wrap="square" lIns="0" tIns="0" rIns="0" bIns="0" rtlCol="0" anchor="t"/>
+          <a:lstStyle/>
+          <a:p>
+            <a:pPr algn="l" indent="0" marL="0">
+              <a:buNone/>
+            </a:pPr>
+            <a:r>
+              <a:rPr lang="en-US" sz="1800" dirty="0">
+                <a:solidFill>
+                  <a:schemeClr val="bg2"/>
+                </a:solidFill>
+              </a:rPr>
+              <a:t>Os mesmos ZPC_ADMIN e ZPC_PEDIDO, agora criados e atribuídos pelas transações clássicas: SU21, publicação do grupo de serviços, SU24, PFCG e SU01.</a:t>
+            </a:r>
+            <a:endParaRPr lang="en-US" sz="1800" dirty="0"/>
+          </a:p>
+        </p:txBody>
+      </p:sp>
+      <p:sp>
+        <p:nvSpPr>
+          <p:cNvPr id="5" name="Decoração 1"/>
+          <p:cNvSpPr/>
+          <p:nvPr/>
+        </p:nvSpPr>
+        <p:spPr>
+          <a:xfrm>
+            <a:off x="8503920" y="-1463040"/>
+            <a:ext cx="5120640" cy="5120640"/>
+          </a:xfrm>
+          <a:prstGeom prst="ellipse">
+            <a:avLst/>
+          </a:prstGeom>
+          <a:solidFill>
+            <a:srgbClr val="0070F2">
+              <a:alpha val="28000"/>
+            </a:srgbClr>
+          </a:solidFill>
+          <a:ln/>
+        </p:spPr>
+      </p:sp>
+      <p:sp>
+        <p:nvSpPr>
+          <p:cNvPr id="6" name="Decoração 2"/>
+          <p:cNvSpPr/>
+          <p:nvPr/>
+        </p:nvSpPr>
+        <p:spPr>
+          <a:xfrm>
+            <a:off x="9784080" y="1828800"/>
+            <a:ext cx="2834640" cy="2834640"/>
+          </a:xfrm>
+          <a:prstGeom prst="ellipse">
+            <a:avLst/>
+          </a:prstGeom>
+          <a:solidFill>
+            <a:srgbClr val="4DB1FF">
+              <a:alpha val="18000"/>
+            </a:srgbClr>
+          </a:solidFill>
+          <a:ln/>
+        </p:spPr>
+      </p:sp>
+      <p:sp>
+        <p:nvSpPr>
+          <p:cNvPr id="7" name="Ícone settings"/>
+          <p:cNvSpPr/>
+          <p:nvPr/>
+        </p:nvSpPr>
+        <p:spPr>
+          <a:xfrm>
+            <a:off x="731520" y="411480"/>
+            <a:ext cx="731520" cy="731520"/>
+          </a:xfrm>
+          <a:prstGeom prst="roundRect">
+            <a:avLst>
+              <a:gd name="adj" fmla="val 22000"/>
+            </a:avLst>
+          </a:prstGeom>
+          <a:solidFill>
+            <a:srgbClr val="1D232A"/>
+          </a:solidFill>
+          <a:ln/>
+        </p:spPr>
+      </p:sp>
+      <p:pic>
+        <p:nvPicPr>
+          <p:cNvPr id="8" name="Image 0" descr="settings">    </p:cNvPr>
+          <p:cNvPicPr>
+            <a:picLocks noChangeAspect="1"/>
+          </p:cNvPicPr>
+          <p:nvPr/>
+        </p:nvPicPr>
+        <p:blipFill>
+          <a:blip r:embed="rId1"/>
+          <a:stretch>
+            <a:fillRect/>
+          </a:stretch>
+        </p:blipFill>
+        <p:spPr>
+          <a:xfrm>
+            <a:off x="907085" y="587045"/>
+            <a:ext cx="380390" cy="380390"/>
+          </a:xfrm>
+          <a:prstGeom prst="rect">
+            <a:avLst/>
+          </a:prstGeom>
+        </p:spPr>
+      </p:pic>
+      <p:sp>
+        <p:nvSpPr>
+          <p:cNvPr id="9" name="Objetos da seção"/>
+          <p:cNvSpPr/>
+          <p:nvPr/>
+        </p:nvSpPr>
+        <p:spPr>
+          <a:xfrm>
+            <a:off x="8001000" y="1325880"/>
+            <a:ext cx="3639312" cy="3374136"/>
+          </a:xfrm>
+          <a:prstGeom prst="roundRect">
+            <a:avLst>
+              <a:gd name="adj" fmla="val 3252"/>
+            </a:avLst>
+          </a:prstGeom>
+          <a:solidFill>
+            <a:srgbClr val="1D232A"/>
+          </a:solidFill>
+          <a:ln/>
+        </p:spPr>
+      </p:sp>
+      <p:sp>
+        <p:nvSpPr>
+          <p:cNvPr id="10" name="Text 7"/>
+          <p:cNvSpPr txBox="1"/>
+          <p:nvPr/>
+        </p:nvSpPr>
+        <p:spPr>
+          <a:xfrm>
+            <a:off x="8275320" y="1481328"/>
+            <a:ext cx="3090672" cy="274320"/>
+          </a:xfrm>
+          <a:prstGeom prst="rect">
+            <a:avLst/>
+          </a:prstGeom>
+          <a:noFill/>
+          <a:ln/>
+        </p:spPr>
+        <p:txBody>
+          <a:bodyPr wrap="square" lIns="0" tIns="0" rIns="0" bIns="0" rtlCol="0" anchor="ctr"/>
+          <a:lstStyle/>
+          <a:p>
+            <a:pPr indent="0" marL="0">
+              <a:buNone/>
+            </a:pPr>
+            <a:r>
+              <a:rPr lang="en-US" sz="1100" b="1" spc="150" kern="0" dirty="0">
+                <a:solidFill>
+                  <a:srgbClr val="4DB1FF"/>
+                </a:solidFill>
+              </a:rPr>
+              <a:t>OBJETOS NESTA SEÇÃO</a:t>
+            </a:r>
+            <a:endParaRPr lang="en-US" sz="1100" dirty="0"/>
+          </a:p>
+        </p:txBody>
+      </p:sp>
+      <p:sp>
+        <p:nvSpPr>
+          <p:cNvPr id="11" name="Text 8"/>
+          <p:cNvSpPr txBox="1"/>
+          <p:nvPr/>
+        </p:nvSpPr>
+        <p:spPr>
+          <a:xfrm>
+            <a:off x="8275320" y="1874520"/>
+            <a:ext cx="3182112" cy="384048"/>
+          </a:xfrm>
+          <a:prstGeom prst="rect">
+            <a:avLst/>
+          </a:prstGeom>
+          <a:noFill/>
+          <a:ln/>
+        </p:spPr>
+        <p:txBody>
+          <a:bodyPr wrap="square" lIns="0" tIns="0" rIns="0" bIns="0" rtlCol="0" anchor="ctr"/>
+          <a:lstStyle/>
+          <a:p>
+            <a:pPr indent="0" marL="0">
+              <a:buNone/>
+            </a:pPr>
+            <a:r>
+              <a:rPr lang="en-US" sz="1100" b="1" dirty="0">
+                <a:solidFill>
+                  <a:srgbClr val="FFFFFF"/>
+                </a:solidFill>
+                <a:latin typeface="Courier New" pitchFamily="34" charset="0"/>
+                <a:ea typeface="Courier New" pitchFamily="34" charset="-122"/>
+                <a:cs typeface="Courier New" pitchFamily="34" charset="-120"/>
+              </a:rPr>
+              <a:t>ZPC (SU21)</a:t>
+            </a:r>
+            <a:pPr indent="0" marL="0">
+              <a:buNone/>
+            </a:pPr>
+            <a:r>
+              <a:rPr lang="en-US" sz="1100" dirty="0">
+                <a:solidFill>
+                  <a:srgbClr val="A9B4BE"/>
+                </a:solidFill>
+              </a:rPr>
+              <a:t>  classe de objetos</a:t>
+            </a:r>
+            <a:endParaRPr lang="en-US" sz="1100" dirty="0"/>
+          </a:p>
+        </p:txBody>
+      </p:sp>
+      <p:sp>
+        <p:nvSpPr>
+          <p:cNvPr id="12" name="Text 9"/>
+          <p:cNvSpPr txBox="1"/>
+          <p:nvPr/>
+        </p:nvSpPr>
+        <p:spPr>
+          <a:xfrm>
+            <a:off x="8275320" y="2258568"/>
+            <a:ext cx="3182112" cy="384048"/>
+          </a:xfrm>
+          <a:prstGeom prst="rect">
+            <a:avLst/>
+          </a:prstGeom>
+          <a:noFill/>
+          <a:ln/>
+        </p:spPr>
+        <p:txBody>
+          <a:bodyPr wrap="square" lIns="0" tIns="0" rIns="0" bIns="0" rtlCol="0" anchor="ctr"/>
+          <a:lstStyle/>
+          <a:p>
+            <a:pPr indent="0" marL="0">
+              <a:buNone/>
+            </a:pPr>
+            <a:r>
+              <a:rPr lang="en-US" sz="1100" b="1" dirty="0">
+                <a:solidFill>
+                  <a:srgbClr val="FFFFFF"/>
+                </a:solidFill>
+                <a:latin typeface="Courier New" pitchFamily="34" charset="0"/>
+                <a:ea typeface="Courier New" pitchFamily="34" charset="-122"/>
+                <a:cs typeface="Courier New" pitchFamily="34" charset="-120"/>
+              </a:rPr>
+              <a:t>ZPC_ADMIN · ZPC_PEDIDO</a:t>
+            </a:r>
+            <a:pPr indent="0" marL="0">
+              <a:buNone/>
+            </a:pPr>
+            <a:r>
+              <a:rPr lang="en-US" sz="1100" dirty="0">
+                <a:solidFill>
+                  <a:srgbClr val="A9B4BE"/>
+                </a:solidFill>
+              </a:rPr>
+              <a:t>  objetos</a:t>
+            </a:r>
+            <a:endParaRPr lang="en-US" sz="1100" dirty="0"/>
+          </a:p>
+        </p:txBody>
+      </p:sp>
+      <p:sp>
+        <p:nvSpPr>
+          <p:cNvPr id="13" name="Text 10"/>
+          <p:cNvSpPr txBox="1"/>
+          <p:nvPr/>
+        </p:nvSpPr>
+        <p:spPr>
+          <a:xfrm>
+            <a:off x="8275320" y="2642616"/>
+            <a:ext cx="3182112" cy="384048"/>
+          </a:xfrm>
+          <a:prstGeom prst="rect">
+            <a:avLst/>
+          </a:prstGeom>
+          <a:noFill/>
+          <a:ln/>
+        </p:spPr>
+        <p:txBody>
+          <a:bodyPr wrap="square" lIns="0" tIns="0" rIns="0" bIns="0" rtlCol="0" anchor="ctr"/>
+          <a:lstStyle/>
+          <a:p>
+            <a:pPr indent="0" marL="0">
+              <a:buNone/>
+            </a:pPr>
+            <a:r>
+              <a:rPr lang="en-US" sz="1100" b="1" dirty="0">
+                <a:solidFill>
+                  <a:srgbClr val="FFFFFF"/>
+                </a:solidFill>
+                <a:latin typeface="Courier New" pitchFamily="34" charset="0"/>
+                <a:ea typeface="Courier New" pitchFamily="34" charset="-122"/>
+                <a:cs typeface="Courier New" pitchFamily="34" charset="-120"/>
+              </a:rPr>
+              <a:t>/IWFND/V4_ADMIN</a:t>
+            </a:r>
+            <a:pPr indent="0" marL="0">
+              <a:buNone/>
+            </a:pPr>
+            <a:r>
+              <a:rPr lang="en-US" sz="1100" dirty="0">
+                <a:solidFill>
+                  <a:srgbClr val="A9B4BE"/>
+                </a:solidFill>
+              </a:rPr>
+              <a:t>  grupos de serviços</a:t>
+            </a:r>
+            <a:endParaRPr lang="en-US" sz="1100" dirty="0"/>
+          </a:p>
+        </p:txBody>
+      </p:sp>
+      <p:sp>
+        <p:nvSpPr>
+          <p:cNvPr id="14" name="Text 11"/>
+          <p:cNvSpPr txBox="1"/>
+          <p:nvPr/>
+        </p:nvSpPr>
+        <p:spPr>
+          <a:xfrm>
+            <a:off x="8275320" y="3026664"/>
+            <a:ext cx="3182112" cy="384048"/>
+          </a:xfrm>
+          <a:prstGeom prst="rect">
+            <a:avLst/>
+          </a:prstGeom>
+          <a:noFill/>
+          <a:ln/>
+        </p:spPr>
+        <p:txBody>
+          <a:bodyPr wrap="square" lIns="0" tIns="0" rIns="0" bIns="0" rtlCol="0" anchor="ctr"/>
+          <a:lstStyle/>
+          <a:p>
+            <a:pPr indent="0" marL="0">
+              <a:buNone/>
+            </a:pPr>
+            <a:r>
+              <a:rPr lang="en-US" sz="1100" b="1" dirty="0">
+                <a:solidFill>
+                  <a:srgbClr val="FFFFFF"/>
+                </a:solidFill>
+                <a:latin typeface="Courier New" pitchFamily="34" charset="0"/>
+                <a:ea typeface="Courier New" pitchFamily="34" charset="-122"/>
+                <a:cs typeface="Courier New" pitchFamily="34" charset="-120"/>
+              </a:rPr>
+              <a:t>SU24</a:t>
+            </a:r>
+            <a:pPr indent="0" marL="0">
+              <a:buNone/>
+            </a:pPr>
+            <a:r>
+              <a:rPr lang="en-US" sz="1100" dirty="0">
+                <a:solidFill>
+                  <a:srgbClr val="A9B4BE"/>
+                </a:solidFill>
+              </a:rPr>
+              <a:t>  valores propostos (G4BA)</a:t>
+            </a:r>
+            <a:endParaRPr lang="en-US" sz="1100" dirty="0"/>
+          </a:p>
+        </p:txBody>
+      </p:sp>
+      <p:sp>
+        <p:nvSpPr>
+          <p:cNvPr id="15" name="Text 12"/>
+          <p:cNvSpPr txBox="1"/>
+          <p:nvPr/>
+        </p:nvSpPr>
+        <p:spPr>
+          <a:xfrm>
+            <a:off x="8275320" y="3410712"/>
+            <a:ext cx="3182112" cy="384048"/>
+          </a:xfrm>
+          <a:prstGeom prst="rect">
+            <a:avLst/>
+          </a:prstGeom>
+          <a:noFill/>
+          <a:ln/>
+        </p:spPr>
+        <p:txBody>
+          <a:bodyPr wrap="square" lIns="0" tIns="0" rIns="0" bIns="0" rtlCol="0" anchor="ctr"/>
+          <a:lstStyle/>
+          <a:p>
+            <a:pPr indent="0" marL="0">
+              <a:buNone/>
+            </a:pPr>
+            <a:r>
+              <a:rPr lang="en-US" sz="1100" b="1" dirty="0">
+                <a:solidFill>
+                  <a:srgbClr val="FFFFFF"/>
+                </a:solidFill>
+                <a:latin typeface="Courier New" pitchFamily="34" charset="0"/>
+                <a:ea typeface="Courier New" pitchFamily="34" charset="-122"/>
+                <a:cs typeface="Courier New" pitchFamily="34" charset="-120"/>
+              </a:rPr>
+              <a:t>Z_PC_ADMIN · Z_PC_COMUM</a:t>
+            </a:r>
+            <a:pPr indent="0" marL="0">
+              <a:buNone/>
+            </a:pPr>
+            <a:r>
+              <a:rPr lang="en-US" sz="1100" dirty="0">
+                <a:solidFill>
+                  <a:srgbClr val="A9B4BE"/>
+                </a:solidFill>
+              </a:rPr>
+              <a:t>  roles PFCG</a:t>
+            </a:r>
+            <a:endParaRPr lang="en-US" sz="1100" dirty="0"/>
+          </a:p>
+        </p:txBody>
+      </p:sp>
+      <p:sp>
+        <p:nvSpPr>
+          <p:cNvPr id="16" name="Text 13"/>
+          <p:cNvSpPr txBox="1"/>
+          <p:nvPr/>
+        </p:nvSpPr>
+        <p:spPr>
+          <a:xfrm>
+            <a:off x="8275320" y="3794760"/>
+            <a:ext cx="3182112" cy="384048"/>
+          </a:xfrm>
+          <a:prstGeom prst="rect">
+            <a:avLst/>
+          </a:prstGeom>
+          <a:noFill/>
+          <a:ln/>
+        </p:spPr>
+        <p:txBody>
+          <a:bodyPr wrap="square" lIns="0" tIns="0" rIns="0" bIns="0" rtlCol="0" anchor="ctr"/>
+          <a:lstStyle/>
+          <a:p>
+            <a:pPr indent="0" marL="0">
+              <a:buNone/>
+            </a:pPr>
+            <a:r>
+              <a:rPr lang="en-US" sz="1100" b="1" dirty="0">
+                <a:solidFill>
+                  <a:srgbClr val="FFFFFF"/>
+                </a:solidFill>
+                <a:latin typeface="Courier New" pitchFamily="34" charset="0"/>
+                <a:ea typeface="Courier New" pitchFamily="34" charset="-122"/>
+                <a:cs typeface="Courier New" pitchFamily="34" charset="-120"/>
+              </a:rPr>
+              <a:t>S_START</a:t>
+            </a:r>
+            <a:pPr indent="0" marL="0">
+              <a:buNone/>
+            </a:pPr>
+            <a:r>
+              <a:rPr lang="en-US" sz="1100" dirty="0">
+                <a:solidFill>
+                  <a:srgbClr val="A9B4BE"/>
+                </a:solidFill>
+              </a:rPr>
+              <a:t>  acesso ao serviço OData V4</a:t>
+            </a:r>
+            <a:endParaRPr lang="en-US" sz="1100" dirty="0"/>
+          </a:p>
+        </p:txBody>
+      </p:sp>
+      <p:sp>
+        <p:nvSpPr>
+          <p:cNvPr id="17" name="Text 14"/>
+          <p:cNvSpPr txBox="1"/>
+          <p:nvPr/>
+        </p:nvSpPr>
+        <p:spPr>
+          <a:xfrm>
+            <a:off x="8275320" y="4178808"/>
+            <a:ext cx="3182112" cy="384048"/>
+          </a:xfrm>
+          <a:prstGeom prst="rect">
+            <a:avLst/>
+          </a:prstGeom>
+          <a:noFill/>
+          <a:ln/>
+        </p:spPr>
+        <p:txBody>
+          <a:bodyPr wrap="square" lIns="0" tIns="0" rIns="0" bIns="0" rtlCol="0" anchor="ctr"/>
+          <a:lstStyle/>
+          <a:p>
+            <a:pPr indent="0" marL="0">
+              <a:buNone/>
+            </a:pPr>
+            <a:r>
+              <a:rPr lang="en-US" sz="1100" b="1" dirty="0">
+                <a:solidFill>
+                  <a:srgbClr val="FFFFFF"/>
+                </a:solidFill>
+                <a:latin typeface="Courier New" pitchFamily="34" charset="0"/>
+                <a:ea typeface="Courier New" pitchFamily="34" charset="-122"/>
+                <a:cs typeface="Courier New" pitchFamily="34" charset="-120"/>
+              </a:rPr>
+              <a:t>SU53 · STAUTHTRACE</a:t>
+            </a:r>
+            <a:pPr indent="0" marL="0">
+              <a:buNone/>
+            </a:pPr>
+            <a:r>
+              <a:rPr lang="en-US" sz="1100" dirty="0">
+                <a:solidFill>
+                  <a:srgbClr val="A9B4BE"/>
+                </a:solidFill>
+              </a:rPr>
+              <a:t>  diagnóstico</a:t>
+            </a:r>
+            <a:endParaRPr lang="en-US" sz="1100" dirty="0"/>
+          </a:p>
+        </p:txBody>
+      </p:sp>
+    </p:spTree>
+  </p:cSld>
+  <p:clrMapOvr>
+    <a:masterClrMapping/>
+  </p:clrMapOvr>
+</p:sld>
+</file>
+
+<file path=ppt/slides/slide24.xml><?xml version="1.0" encoding="utf-8"?>
+<p:sld xmlns:a="http://schemas.openxmlformats.org/drawingml/2006/main" xmlns:r="http://schemas.openxmlformats.org/officeDocument/2006/relationships" xmlns:p="http://schemas.openxmlformats.org/presentationml/2006/main">
+  <p:cSld name="Slide 8">
+    <p:spTree>
+      <p:nvGrpSpPr>
+        <p:cNvPr id="1" name=""/>
+        <p:cNvGrpSpPr/>
+        <p:nvPr/>
+      </p:nvGrpSpPr>
+      <p:grpSpPr>
+        <a:xfrm>
+          <a:off x="0" y="0"/>
+          <a:ext cx="0" cy="0"/>
+          <a:chOff x="0" y="0"/>
+          <a:chExt cx="0" cy="0"/>
+        </a:xfrm>
+      </p:grpSpPr>
+      <p:sp>
+        <p:nvSpPr>
+          <p:cNvPr id="2" name="Text 0"/>
+          <p:cNvSpPr/>
+          <p:nvPr>
+            <p:ph idx="100" type="body" hasCustomPrompt="1"/>
+          </p:nvPr>
+        </p:nvSpPr>
+        <p:spPr>
+          <a:xfrm>
+            <a:off x="548640" y="384048"/>
+            <a:ext cx="9144000" cy="274320"/>
+          </a:xfrm>
+          <a:prstGeom prst="rect">
+            <a:avLst/>
+          </a:prstGeom>
+          <a:noFill/>
+          <a:ln/>
+        </p:spPr>
+        <p:txBody>
+          <a:bodyPr wrap="square" lIns="0" tIns="0" rIns="0" bIns="0" rtlCol="0" anchor="ctr"/>
+          <a:lstStyle/>
+          <a:p>
+            <a:pPr algn="l" indent="0" marL="0">
+              <a:buNone/>
+            </a:pPr>
+            <a:r>
+              <a:rPr lang="en-US" sz="1100" b="1" spc="150" kern="0" dirty="0">
+                <a:solidFill>
+                  <a:schemeClr val="accent1"/>
+                </a:solidFill>
+              </a:rPr>
+              <a:t>ON-PREMISE · TRANSAÇÕES</a:t>
+            </a:r>
+            <a:endParaRPr lang="en-US" sz="1100" dirty="0"/>
+          </a:p>
+        </p:txBody>
+      </p:sp>
+      <p:sp>
+        <p:nvSpPr>
+          <p:cNvPr id="3" name="Text 0"/>
+          <p:cNvSpPr/>
+          <p:nvPr>
+            <p:ph idx="101" type="title" hasCustomPrompt="1"/>
+          </p:nvPr>
+        </p:nvSpPr>
+        <p:spPr>
+          <a:xfrm>
+            <a:off x="548640" y="676656"/>
+            <a:ext cx="11094415" cy="658368"/>
+          </a:xfrm>
+          <a:prstGeom prst="rect">
+            <a:avLst/>
+          </a:prstGeom>
+          <a:noFill/>
+          <a:ln/>
+        </p:spPr>
+        <p:txBody>
+          <a:bodyPr wrap="square" lIns="0" tIns="0" rIns="0" bIns="0" rtlCol="0" anchor="ctr"/>
+          <a:lstStyle/>
+          <a:p>
+            <a:pPr algn="l" indent="0" marL="0">
+              <a:buNone/>
+            </a:pPr>
+            <a:r>
+              <a:rPr lang="en-US" sz="3000" b="1" dirty="0">
+                <a:solidFill>
+                  <a:schemeClr val="tx1"/>
+                </a:solidFill>
+              </a:rPr>
+              <a:t>Cinco transações do SAP GUI fazem o papel do IAM</a:t>
+            </a:r>
+            <a:endParaRPr lang="en-US" sz="3000" dirty="0"/>
+          </a:p>
+        </p:txBody>
+      </p:sp>
+      <p:sp>
+        <p:nvSpPr>
+          <p:cNvPr id="5" name="Fundo da tabela"/>
+          <p:cNvSpPr/>
+          <p:nvPr/>
+        </p:nvSpPr>
+        <p:spPr>
+          <a:xfrm>
+            <a:off x="548640" y="1645920"/>
+            <a:ext cx="7040880" cy="3236976"/>
+          </a:xfrm>
+          <a:prstGeom prst="roundRect">
+            <a:avLst>
+              <a:gd name="adj" fmla="val 3390"/>
+            </a:avLst>
+          </a:prstGeom>
+          <a:solidFill>
+            <a:srgbClr val="FFFFFF"/>
+          </a:solidFill>
+          <a:ln/>
+          <a:effectLst>
+            <a:outerShdw sx="100000" sy="100000" kx="0" ky="0" algn="bl" rotWithShape="0" blurRad="101600" dist="25400" dir="5400000">
+              <a:srgbClr val="223548">
+                <a:alpha val="16000"/>
+              </a:srgbClr>
+            </a:outerShdw>
+          </a:effectLst>
+        </p:spPr>
+      </p:sp>
+      <p:graphicFrame>
+        <p:nvGraphicFramePr>
+          <p:cNvPr id="9" name="Table 0"/>
+          <p:cNvGraphicFramePr>
+            <a:graphicFrameLocks noGrp="1"/>
+          </p:cNvGraphicFramePr>
+          <p:nvPr>
+            <p:extLst>
+              <p:ext uri="{D42A27DB-BD31-4B8C-83A1-F6EECF244321}">
+                <p14:modId xmlns:p14="http://schemas.microsoft.com/office/powerpoint/2010/main" val="1579011935"/>
+              </p:ext>
+            </p:extLst>
+          </p:nvPr>
+        </p:nvGraphicFramePr>
+        <p:xfrm>
+          <a:off x="685800" y="1755648"/>
+          <a:ext cx="6766560" cy="914400"/>
+        </p:xfrm>
+        <a:graphic>
+          <a:graphicData uri="http://schemas.openxmlformats.org/drawingml/2006/table">
+            <a:tbl>
+              <a:tblPr/>
+              <a:tblGrid>
+                <a:gridCol w="950000"/>
+                <a:gridCol w="1500000"/>
+                <a:gridCol w="2100000"/>
+                <a:gridCol w="1000000"/>
+                <a:gridCol w="1216560"/>
+              </a:tblGrid>
+              <a:tr h="502920">
+                <a:tc>
+                  <a:txBody>
+                    <a:bodyPr/>
+                    <a:lstStyle/>
+                    <a:p>
+                      <a:pPr indent="0" marL="0">
+                        <a:buNone/>
+                      </a:pPr>
+                      <a:r>
+                        <a:rPr lang="en-US" sz="1200" b="1" dirty="0">
+                          <a:solidFill>
+                            <a:srgbClr val="1D2D3E"/>
+                          </a:solidFill>
+                        </a:rPr>
+                        <a:t>Transação</a:t>
+                      </a:r>
+                      <a:endParaRPr lang="en-US" sz="1200" dirty="0"/>
+                    </a:p>
+                  </a:txBody>
+                  <a:tcPr marL="73152" marR="73152" marT="36576" marB="36576" anchor="ctr">
+                    <a:lnL w="0" cap="flat" cmpd="sng" algn="ctr">
+                      <a:noFill/>
+                    </a:lnL>
+                    <a:lnR w="0" cap="flat" cmpd="sng" algn="ctr">
+                      <a:noFill/>
+                    </a:lnR>
+                    <a:lnT w="0" cap="flat" cmpd="sng" algn="ctr">
+                      <a:noFill/>
+                    </a:lnT>
+                    <a:lnB w="19050" cap="flat" cmpd="sng" algn="ctr">
+                      <a:solidFill>
+                        <a:srgbClr val="A8B3BD"/>
+                      </a:solidFill>
+                      <a:prstDash val="solid"/>
+                      <a:round/>
+                      <a:headEnd type="none" w="med" len="med"/>
+                      <a:tailEnd type="none" w="med" len="med"/>
+                    </a:lnB>
+                    <a:solidFill>
+                      <a:srgbClr val="FFFFFF"/>
+                    </a:solidFill>
+                  </a:tcPr>
+                </a:tc>
+                <a:tc>
+                  <a:txBody>
+                    <a:bodyPr/>
+                    <a:lstStyle/>
+                    <a:p>
+                      <a:pPr indent="0" marL="0">
+                        <a:buNone/>
+                      </a:pPr>
+                      <a:r>
+                        <a:rPr lang="en-US" sz="1200" b="1" dirty="0">
+                          <a:solidFill>
+                            <a:srgbClr val="1D2D3E"/>
+                          </a:solidFill>
+                        </a:rPr>
+                        <a:t>Função</a:t>
+                      </a:r>
+                      <a:endParaRPr lang="en-US" sz="1200" dirty="0"/>
+                    </a:p>
+                  </a:txBody>
+                  <a:tcPr marL="73152" marR="73152" marT="36576" marB="36576" anchor="ctr">
+                    <a:lnL w="0" cap="flat" cmpd="sng" algn="ctr">
+                      <a:noFill/>
+                    </a:lnL>
+                    <a:lnR w="0" cap="flat" cmpd="sng" algn="ctr">
+                      <a:noFill/>
+                    </a:lnR>
+                    <a:lnT w="0" cap="flat" cmpd="sng" algn="ctr">
+                      <a:noFill/>
+                    </a:lnT>
+                    <a:lnB w="19050" cap="flat" cmpd="sng" algn="ctr">
+                      <a:solidFill>
+                        <a:srgbClr val="A8B3BD"/>
+                      </a:solidFill>
+                      <a:prstDash val="solid"/>
+                      <a:round/>
+                      <a:headEnd type="none" w="med" len="med"/>
+                      <a:tailEnd type="none" w="med" len="med"/>
+                    </a:lnB>
+                    <a:solidFill>
+                      <a:srgbClr val="FFFFFF"/>
+                    </a:solidFill>
+                  </a:tcPr>
+                </a:tc>
+                <a:tc>
+                  <a:txBody>
+                    <a:bodyPr/>
+                    <a:lstStyle/>
+                    <a:p>
+                      <a:pPr indent="0" marL="0">
+                        <a:buNone/>
+                      </a:pPr>
+                      <a:r>
+                        <a:rPr lang="en-US" sz="1200" b="1" dirty="0">
+                          <a:solidFill>
+                            <a:srgbClr val="1D2D3E"/>
+                          </a:solidFill>
+                        </a:rPr>
+                        <a:t>Objetos do projeto</a:t>
+                      </a:r>
+                      <a:endParaRPr lang="en-US" sz="1200" dirty="0"/>
+                    </a:p>
+                  </a:txBody>
+                  <a:tcPr marL="73152" marR="73152" marT="36576" marB="36576" anchor="ctr">
+                    <a:lnL w="0" cap="flat" cmpd="sng" algn="ctr">
+                      <a:noFill/>
+                    </a:lnL>
+                    <a:lnR w="0" cap="flat" cmpd="sng" algn="ctr">
+                      <a:noFill/>
+                    </a:lnR>
+                    <a:lnT w="0" cap="flat" cmpd="sng" algn="ctr">
+                      <a:noFill/>
+                    </a:lnT>
+                    <a:lnB w="19050" cap="flat" cmpd="sng" algn="ctr">
+                      <a:solidFill>
+                        <a:srgbClr val="A8B3BD"/>
+                      </a:solidFill>
+                      <a:prstDash val="solid"/>
+                      <a:round/>
+                      <a:headEnd type="none" w="med" len="med"/>
+                      <a:tailEnd type="none" w="med" len="med"/>
+                    </a:lnB>
+                    <a:solidFill>
+                      <a:srgbClr val="FFFFFF"/>
+                    </a:solidFill>
+                  </a:tcPr>
+                </a:tc>
+                <a:tc>
+                  <a:txBody>
+                    <a:bodyPr/>
+                    <a:lstStyle/>
+                    <a:p>
+                      <a:pPr indent="0" marL="0">
+                        <a:buNone/>
+                      </a:pPr>
+                      <a:r>
+                        <a:rPr lang="en-US" sz="1200" b="1" dirty="0">
+                          <a:solidFill>
+                            <a:srgbClr val="1D2D3E"/>
+                          </a:solidFill>
+                        </a:rPr>
+                        <a:t>Ordem</a:t>
+                      </a:r>
+                      <a:endParaRPr lang="en-US" sz="1200" dirty="0"/>
+                    </a:p>
+                  </a:txBody>
+                  <a:tcPr marL="73152" marR="73152" marT="36576" marB="36576" anchor="ctr">
+                    <a:lnL w="0" cap="flat" cmpd="sng" algn="ctr">
+                      <a:noFill/>
+                    </a:lnL>
+                    <a:lnR w="0" cap="flat" cmpd="sng" algn="ctr">
+                      <a:noFill/>
+                    </a:lnR>
+                    <a:lnT w="0" cap="flat" cmpd="sng" algn="ctr">
+                      <a:noFill/>
+                    </a:lnT>
+                    <a:lnB w="19050" cap="flat" cmpd="sng" algn="ctr">
+                      <a:solidFill>
+                        <a:srgbClr val="A8B3BD"/>
+                      </a:solidFill>
+                      <a:prstDash val="solid"/>
+                      <a:round/>
+                      <a:headEnd type="none" w="med" len="med"/>
+                      <a:tailEnd type="none" w="med" len="med"/>
+                    </a:lnB>
+                    <a:solidFill>
+                      <a:srgbClr val="FFFFFF"/>
+                    </a:solidFill>
+                  </a:tcPr>
+                </a:tc>
+                <a:tc>
+                  <a:txBody>
+                    <a:bodyPr/>
+                    <a:lstStyle/>
+                    <a:p>
+                      <a:pPr indent="0" marL="0">
+                        <a:buNone/>
+                      </a:pPr>
+                      <a:r>
+                        <a:rPr lang="en-US" sz="1200" b="1" dirty="0">
+                          <a:solidFill>
+                            <a:srgbClr val="1D2D3E"/>
+                          </a:solidFill>
+                        </a:rPr>
+                        <a:t>No BTP</a:t>
+                      </a:r>
+                      <a:endParaRPr lang="en-US" sz="1200" dirty="0"/>
+                    </a:p>
+                  </a:txBody>
+                  <a:tcPr marL="73152" marR="73152" marT="36576" marB="36576" anchor="ctr">
+                    <a:lnL w="0" cap="flat" cmpd="sng" algn="ctr">
+                      <a:noFill/>
+                    </a:lnL>
+                    <a:lnR w="0" cap="flat" cmpd="sng" algn="ctr">
+                      <a:noFill/>
+                    </a:lnR>
+                    <a:lnT w="0" cap="flat" cmpd="sng" algn="ctr">
+                      <a:noFill/>
+                    </a:lnT>
+                    <a:lnB w="19050" cap="flat" cmpd="sng" algn="ctr">
+                      <a:solidFill>
+                        <a:srgbClr val="A8B3BD"/>
+                      </a:solidFill>
+                      <a:prstDash val="solid"/>
+                      <a:round/>
+                      <a:headEnd type="none" w="med" len="med"/>
+                      <a:tailEnd type="none" w="med" len="med"/>
+                    </a:lnB>
+                    <a:solidFill>
+                      <a:srgbClr val="FFFFFF"/>
+                    </a:solidFill>
+                  </a:tcPr>
+                </a:tc>
+              </a:tr>
+              <a:tr h="502920">
+                <a:tc>
+                  <a:txBody>
+                    <a:bodyPr/>
+                    <a:lstStyle/>
+                    <a:p>
+                      <a:pPr indent="0" marL="0">
+                        <a:buNone/>
+                      </a:pPr>
+                      <a:r>
+                        <a:rPr lang="en-US" sz="1200" b="1" dirty="0">
+                          <a:solidFill>
+                            <a:srgbClr val="1D2D3E"/>
+                          </a:solidFill>
+                        </a:rPr>
+                        <a:t>SU21</a:t>
+                      </a:r>
+                      <a:endParaRPr lang="en-US" sz="1200" dirty="0"/>
+                    </a:p>
+                  </a:txBody>
+                  <a:tcPr marL="73152" marR="73152" marT="36576" marB="36576" anchor="ctr">
+                    <a:lnL w="0" cap="flat" cmpd="sng" algn="ctr">
+                      <a:noFill/>
+                    </a:lnL>
+                    <a:lnR w="0" cap="flat" cmpd="sng" algn="ctr">
+                      <a:noFill/>
+                    </a:lnR>
+                    <a:lnT w="0" cap="flat" cmpd="sng" algn="ctr">
+                      <a:noFill/>
+                    </a:lnT>
+                    <a:lnB w="12700" cap="flat" cmpd="sng" algn="ctr">
+                      <a:solidFill>
+                        <a:srgbClr val="E5E5E5"/>
+                      </a:solidFill>
+                      <a:prstDash val="solid"/>
+                      <a:round/>
+                      <a:headEnd type="none" w="med" len="med"/>
+                      <a:tailEnd type="none" w="med" len="med"/>
+                    </a:lnB>
+                    <a:solidFill>
+                      <a:srgbClr val="FFFFFF"/>
+                    </a:solidFill>
+                  </a:tcPr>
+                </a:tc>
+                <a:tc>
+                  <a:txBody>
+                    <a:bodyPr/>
+                    <a:lstStyle/>
+                    <a:p>
+                      <a:pPr indent="0" marL="0">
+                        <a:buNone/>
+                      </a:pPr>
+                      <a:r>
+                        <a:rPr lang="en-US" sz="1200" dirty="0">
+                          <a:solidFill>
+                            <a:srgbClr val="1D2D3E"/>
+                          </a:solidFill>
+                        </a:rPr>
+                        <a:t>Objetos de autorização</a:t>
+                      </a:r>
+                      <a:endParaRPr lang="en-US" sz="1200" dirty="0"/>
+                    </a:p>
+                  </a:txBody>
+                  <a:tcPr marL="73152" marR="73152" marT="36576" marB="36576" anchor="ctr">
+                    <a:lnL w="0" cap="flat" cmpd="sng" algn="ctr">
+                      <a:noFill/>
+                    </a:lnL>
+                    <a:lnR w="0" cap="flat" cmpd="sng" algn="ctr">
+                      <a:noFill/>
+                    </a:lnR>
+                    <a:lnT w="0" cap="flat" cmpd="sng" algn="ctr">
+                      <a:noFill/>
+                    </a:lnT>
+                    <a:lnB w="12700" cap="flat" cmpd="sng" algn="ctr">
+                      <a:solidFill>
+                        <a:srgbClr val="E5E5E5"/>
+                      </a:solidFill>
+                      <a:prstDash val="solid"/>
+                      <a:round/>
+                      <a:headEnd type="none" w="med" len="med"/>
+                      <a:tailEnd type="none" w="med" len="med"/>
+                    </a:lnB>
+                    <a:solidFill>
+                      <a:srgbClr val="FFFFFF"/>
+                    </a:solidFill>
+                  </a:tcPr>
+                </a:tc>
+                <a:tc>
+                  <a:txBody>
+                    <a:bodyPr/>
+                    <a:lstStyle/>
+                    <a:p>
+                      <a:pPr indent="0" marL="0">
+                        <a:buNone/>
+                      </a:pPr>
+                      <a:r>
+                        <a:rPr lang="en-US" sz="1200" b="1" dirty="0">
+                          <a:solidFill>
+                            <a:srgbClr val="256F3A"/>
+                          </a:solidFill>
+                        </a:rPr>
+                        <a:t>ZPC_ADMIN · ZPC_PEDIDO</a:t>
+                      </a:r>
+                      <a:endParaRPr lang="en-US" sz="1200" dirty="0"/>
+                    </a:p>
+                  </a:txBody>
+                  <a:tcPr marL="73152" marR="73152" marT="36576" marB="36576" anchor="ctr">
+                    <a:lnL w="0" cap="flat" cmpd="sng" algn="ctr">
+                      <a:noFill/>
+                    </a:lnL>
+                    <a:lnR w="0" cap="flat" cmpd="sng" algn="ctr">
+                      <a:noFill/>
+                    </a:lnR>
+                    <a:lnT w="0" cap="flat" cmpd="sng" algn="ctr">
+                      <a:noFill/>
+                    </a:lnT>
+                    <a:lnB w="12700" cap="flat" cmpd="sng" algn="ctr">
+                      <a:solidFill>
+                        <a:srgbClr val="E5E5E5"/>
+                      </a:solidFill>
+                      <a:prstDash val="solid"/>
+                      <a:round/>
+                      <a:headEnd type="none" w="med" len="med"/>
+                      <a:tailEnd type="none" w="med" len="med"/>
+                    </a:lnB>
+                    <a:solidFill>
+                      <a:srgbClr val="FFFFFF"/>
+                    </a:solidFill>
+                  </a:tcPr>
+                </a:tc>
+                <a:tc>
+                  <a:txBody>
+                    <a:bodyPr/>
+                    <a:lstStyle/>
+                    <a:p>
+                      <a:pPr indent="0" marL="0">
+                        <a:buNone/>
+                      </a:pPr>
+                      <a:r>
+                        <a:rPr lang="en-US" sz="1200" b="1" dirty="0">
+                          <a:solidFill>
+                            <a:srgbClr val="256F3A"/>
+                          </a:solidFill>
+                        </a:rPr>
+                        <a:t>Workbench</a:t>
+                      </a:r>
+                      <a:endParaRPr lang="en-US" sz="1200" dirty="0"/>
+                    </a:p>
+                  </a:txBody>
+                  <a:tcPr marL="73152" marR="73152" marT="36576" marB="36576" anchor="ctr">
+                    <a:lnL w="0" cap="flat" cmpd="sng" algn="ctr">
+                      <a:noFill/>
+                    </a:lnL>
+                    <a:lnR w="0" cap="flat" cmpd="sng" algn="ctr">
+                      <a:noFill/>
+                    </a:lnR>
+                    <a:lnT w="0" cap="flat" cmpd="sng" algn="ctr">
+                      <a:noFill/>
+                    </a:lnT>
+                    <a:lnB w="12700" cap="flat" cmpd="sng" algn="ctr">
+                      <a:solidFill>
+                        <a:srgbClr val="E5E5E5"/>
+                      </a:solidFill>
+                      <a:prstDash val="solid"/>
+                      <a:round/>
+                      <a:headEnd type="none" w="med" len="med"/>
+                      <a:tailEnd type="none" w="med" len="med"/>
+                    </a:lnB>
+                    <a:solidFill>
+                      <a:srgbClr val="FFFFFF"/>
+                    </a:solidFill>
+                  </a:tcPr>
+                </a:tc>
+                <a:tc>
+                  <a:txBody>
+                    <a:bodyPr/>
+                    <a:lstStyle/>
+                    <a:p>
+                      <a:pPr indent="0" marL="0">
+                        <a:buNone/>
+                      </a:pPr>
+                      <a:r>
+                        <a:rPr lang="en-US" sz="1200" dirty="0">
+                          <a:solidFill>
+                            <a:srgbClr val="1D2D3E"/>
+                          </a:solidFill>
+                        </a:rPr>
+                        <a:t>ADT (CPAE)</a:t>
+                      </a:r>
+                      <a:endParaRPr lang="en-US" sz="1200" dirty="0"/>
+                    </a:p>
+                  </a:txBody>
+                  <a:tcPr marL="73152" marR="73152" marT="36576" marB="36576" anchor="ctr">
+                    <a:lnL w="0" cap="flat" cmpd="sng" algn="ctr">
+                      <a:noFill/>
+                    </a:lnL>
+                    <a:lnR w="0" cap="flat" cmpd="sng" algn="ctr">
+                      <a:noFill/>
+                    </a:lnR>
+                    <a:lnT w="0" cap="flat" cmpd="sng" algn="ctr">
+                      <a:noFill/>
+                    </a:lnT>
+                    <a:lnB w="12700" cap="flat" cmpd="sng" algn="ctr">
+                      <a:solidFill>
+                        <a:srgbClr val="E5E5E5"/>
+                      </a:solidFill>
+                      <a:prstDash val="solid"/>
+                      <a:round/>
+                      <a:headEnd type="none" w="med" len="med"/>
+                      <a:tailEnd type="none" w="med" len="med"/>
+                    </a:lnB>
+                    <a:solidFill>
+                      <a:srgbClr val="FFFFFF"/>
+                    </a:solidFill>
+                  </a:tcPr>
+                </a:tc>
+              </a:tr>
+              <a:tr h="502920">
+                <a:tc>
+                  <a:txBody>
+                    <a:bodyPr/>
+                    <a:lstStyle/>
+                    <a:p>
+                      <a:pPr indent="0" marL="0">
+                        <a:buNone/>
+                      </a:pPr>
+                      <a:r>
+                        <a:rPr lang="en-US" sz="1200" b="1" dirty="0">
+                          <a:solidFill>
+                            <a:srgbClr val="1D2D3E"/>
+                          </a:solidFill>
+                        </a:rPr>
+                        <a:t>SU24</a:t>
+                      </a:r>
+                      <a:endParaRPr lang="en-US" sz="1200" dirty="0"/>
+                    </a:p>
+                  </a:txBody>
+                  <a:tcPr marL="73152" marR="73152" marT="36576" marB="36576" anchor="ctr">
+                    <a:lnL w="0" cap="flat" cmpd="sng" algn="ctr">
+                      <a:noFill/>
+                    </a:lnL>
+                    <a:lnR w="0" cap="flat" cmpd="sng" algn="ctr">
+                      <a:noFill/>
+                    </a:lnR>
+                    <a:lnT w="0" cap="flat" cmpd="sng" algn="ctr">
+                      <a:noFill/>
+                    </a:lnT>
+                    <a:lnB w="12700" cap="flat" cmpd="sng" algn="ctr">
+                      <a:solidFill>
+                        <a:srgbClr val="E5E5E5"/>
+                      </a:solidFill>
+                      <a:prstDash val="solid"/>
+                      <a:round/>
+                      <a:headEnd type="none" w="med" len="med"/>
+                      <a:tailEnd type="none" w="med" len="med"/>
+                    </a:lnB>
+                    <a:solidFill>
+                      <a:srgbClr val="FFFFFF"/>
+                    </a:solidFill>
+                  </a:tcPr>
+                </a:tc>
+                <a:tc>
+                  <a:txBody>
+                    <a:bodyPr/>
+                    <a:lstStyle/>
+                    <a:p>
+                      <a:pPr indent="0" marL="0">
+                        <a:buNone/>
+                      </a:pPr>
+                      <a:r>
+                        <a:rPr lang="en-US" sz="1200" dirty="0">
+                          <a:solidFill>
+                            <a:srgbClr val="1D2D3E"/>
+                          </a:solidFill>
+                        </a:rPr>
+                        <a:t>Valores propostos</a:t>
+                      </a:r>
+                      <a:endParaRPr lang="en-US" sz="1200" dirty="0"/>
+                    </a:p>
+                  </a:txBody>
+                  <a:tcPr marL="73152" marR="73152" marT="36576" marB="36576" anchor="ctr">
+                    <a:lnL w="0" cap="flat" cmpd="sng" algn="ctr">
+                      <a:noFill/>
+                    </a:lnL>
+                    <a:lnR w="0" cap="flat" cmpd="sng" algn="ctr">
+                      <a:noFill/>
+                    </a:lnR>
+                    <a:lnT w="0" cap="flat" cmpd="sng" algn="ctr">
+                      <a:noFill/>
+                    </a:lnT>
+                    <a:lnB w="12700" cap="flat" cmpd="sng" algn="ctr">
+                      <a:solidFill>
+                        <a:srgbClr val="E5E5E5"/>
+                      </a:solidFill>
+                      <a:prstDash val="solid"/>
+                      <a:round/>
+                      <a:headEnd type="none" w="med" len="med"/>
+                      <a:tailEnd type="none" w="med" len="med"/>
+                    </a:lnB>
+                    <a:solidFill>
+                      <a:srgbClr val="FFFFFF"/>
+                    </a:solidFill>
+                  </a:tcPr>
+                </a:tc>
+                <a:tc>
+                  <a:txBody>
+                    <a:bodyPr/>
+                    <a:lstStyle/>
+                    <a:p>
+                      <a:pPr indent="0" marL="0">
+                        <a:buNone/>
+                      </a:pPr>
+                      <a:r>
+                        <a:rPr lang="en-US" sz="1200" b="1" dirty="0">
+                          <a:solidFill>
+                            <a:srgbClr val="256F3A"/>
+                          </a:solidFill>
+                        </a:rPr>
+                        <a:t>ZUI_PC_*_O4 (G4BA)</a:t>
+                      </a:r>
+                      <a:endParaRPr lang="en-US" sz="1200" dirty="0"/>
+                    </a:p>
+                  </a:txBody>
+                  <a:tcPr marL="73152" marR="73152" marT="36576" marB="36576" anchor="ctr">
+                    <a:lnL w="0" cap="flat" cmpd="sng" algn="ctr">
+                      <a:noFill/>
+                    </a:lnL>
+                    <a:lnR w="0" cap="flat" cmpd="sng" algn="ctr">
+                      <a:noFill/>
+                    </a:lnR>
+                    <a:lnT w="0" cap="flat" cmpd="sng" algn="ctr">
+                      <a:noFill/>
+                    </a:lnT>
+                    <a:lnB w="12700" cap="flat" cmpd="sng" algn="ctr">
+                      <a:solidFill>
+                        <a:srgbClr val="E5E5E5"/>
+                      </a:solidFill>
+                      <a:prstDash val="solid"/>
+                      <a:round/>
+                      <a:headEnd type="none" w="med" len="med"/>
+                      <a:tailEnd type="none" w="med" len="med"/>
+                    </a:lnB>
+                    <a:solidFill>
+                      <a:srgbClr val="FFFFFF"/>
+                    </a:solidFill>
+                  </a:tcPr>
+                </a:tc>
+                <a:tc>
+                  <a:txBody>
+                    <a:bodyPr/>
+                    <a:lstStyle/>
+                    <a:p>
+                      <a:pPr indent="0" marL="0">
+                        <a:buNone/>
+                      </a:pPr>
+                      <a:r>
+                        <a:rPr lang="en-US" sz="1200" b="1" dirty="0">
+                          <a:solidFill>
+                            <a:srgbClr val="256F3A"/>
+                          </a:solidFill>
+                        </a:rPr>
+                        <a:t>Workbench</a:t>
+                      </a:r>
+                      <a:endParaRPr lang="en-US" sz="1200" dirty="0"/>
+                    </a:p>
+                  </a:txBody>
+                  <a:tcPr marL="73152" marR="73152" marT="36576" marB="36576" anchor="ctr">
+                    <a:lnL w="0" cap="flat" cmpd="sng" algn="ctr">
+                      <a:noFill/>
+                    </a:lnL>
+                    <a:lnR w="0" cap="flat" cmpd="sng" algn="ctr">
+                      <a:noFill/>
+                    </a:lnR>
+                    <a:lnT w="0" cap="flat" cmpd="sng" algn="ctr">
+                      <a:noFill/>
+                    </a:lnT>
+                    <a:lnB w="12700" cap="flat" cmpd="sng" algn="ctr">
+                      <a:solidFill>
+                        <a:srgbClr val="E5E5E5"/>
+                      </a:solidFill>
+                      <a:prstDash val="solid"/>
+                      <a:round/>
+                      <a:headEnd type="none" w="med" len="med"/>
+                      <a:tailEnd type="none" w="med" len="med"/>
+                    </a:lnB>
+                    <a:solidFill>
+                      <a:srgbClr val="FFFFFF"/>
+                    </a:solidFill>
+                  </a:tcPr>
+                </a:tc>
+                <a:tc>
+                  <a:txBody>
+                    <a:bodyPr/>
+                    <a:lstStyle/>
+                    <a:p>
+                      <a:pPr indent="0" marL="0">
+                        <a:buNone/>
+                      </a:pPr>
+                      <a:r>
+                        <a:rPr lang="en-US" sz="1200" dirty="0">
+                          <a:solidFill>
+                            <a:srgbClr val="1D2D3E"/>
+                          </a:solidFill>
+                        </a:rPr>
+                        <a:t>IAM App</a:t>
+                      </a:r>
+                      <a:endParaRPr lang="en-US" sz="1200" dirty="0"/>
+                    </a:p>
+                  </a:txBody>
+                  <a:tcPr marL="73152" marR="73152" marT="36576" marB="36576" anchor="ctr">
+                    <a:lnL w="0" cap="flat" cmpd="sng" algn="ctr">
+                      <a:noFill/>
+                    </a:lnL>
+                    <a:lnR w="0" cap="flat" cmpd="sng" algn="ctr">
+                      <a:noFill/>
+                    </a:lnR>
+                    <a:lnT w="0" cap="flat" cmpd="sng" algn="ctr">
+                      <a:noFill/>
+                    </a:lnT>
+                    <a:lnB w="12700" cap="flat" cmpd="sng" algn="ctr">
+                      <a:solidFill>
+                        <a:srgbClr val="E5E5E5"/>
+                      </a:solidFill>
+                      <a:prstDash val="solid"/>
+                      <a:round/>
+                      <a:headEnd type="none" w="med" len="med"/>
+                      <a:tailEnd type="none" w="med" len="med"/>
+                    </a:lnB>
+                    <a:solidFill>
+                      <a:srgbClr val="FFFFFF"/>
+                    </a:solidFill>
+                  </a:tcPr>
+                </a:tc>
+              </a:tr>
+              <a:tr h="502920">
+                <a:tc>
+                  <a:txBody>
+                    <a:bodyPr/>
+                    <a:lstStyle/>
+                    <a:p>
+                      <a:pPr indent="0" marL="0">
+                        <a:buNone/>
+                      </a:pPr>
+                      <a:r>
+                        <a:rPr lang="en-US" sz="1200" b="1" dirty="0">
+                          <a:solidFill>
+                            <a:srgbClr val="1D2D3E"/>
+                          </a:solidFill>
+                        </a:rPr>
+                        <a:t>PFCG</a:t>
+                      </a:r>
+                      <a:endParaRPr lang="en-US" sz="1200" dirty="0"/>
+                    </a:p>
+                  </a:txBody>
+                  <a:tcPr marL="73152" marR="73152" marT="36576" marB="36576" anchor="ctr">
+                    <a:lnL w="0" cap="flat" cmpd="sng" algn="ctr">
+                      <a:noFill/>
+                    </a:lnL>
+                    <a:lnR w="0" cap="flat" cmpd="sng" algn="ctr">
+                      <a:noFill/>
+                    </a:lnR>
+                    <a:lnT w="0" cap="flat" cmpd="sng" algn="ctr">
+                      <a:noFill/>
+                    </a:lnT>
+                    <a:lnB w="12700" cap="flat" cmpd="sng" algn="ctr">
+                      <a:solidFill>
+                        <a:srgbClr val="E5E5E5"/>
+                      </a:solidFill>
+                      <a:prstDash val="solid"/>
+                      <a:round/>
+                      <a:headEnd type="none" w="med" len="med"/>
+                      <a:tailEnd type="none" w="med" len="med"/>
+                    </a:lnB>
+                    <a:solidFill>
+                      <a:srgbClr val="FFFFFF"/>
+                    </a:solidFill>
+                  </a:tcPr>
+                </a:tc>
+                <a:tc>
+                  <a:txBody>
+                    <a:bodyPr/>
+                    <a:lstStyle/>
+                    <a:p>
+                      <a:pPr indent="0" marL="0">
+                        <a:buNone/>
+                      </a:pPr>
+                      <a:r>
+                        <a:rPr lang="en-US" sz="1200" dirty="0">
+                          <a:solidFill>
+                            <a:srgbClr val="1D2D3E"/>
+                          </a:solidFill>
+                        </a:rPr>
+                        <a:t>Roles e perfis</a:t>
+                      </a:r>
+                      <a:endParaRPr lang="en-US" sz="1200" dirty="0"/>
+                    </a:p>
+                  </a:txBody>
+                  <a:tcPr marL="73152" marR="73152" marT="36576" marB="36576" anchor="ctr">
+                    <a:lnL w="0" cap="flat" cmpd="sng" algn="ctr">
+                      <a:noFill/>
+                    </a:lnL>
+                    <a:lnR w="0" cap="flat" cmpd="sng" algn="ctr">
+                      <a:noFill/>
+                    </a:lnR>
+                    <a:lnT w="0" cap="flat" cmpd="sng" algn="ctr">
+                      <a:noFill/>
+                    </a:lnT>
+                    <a:lnB w="12700" cap="flat" cmpd="sng" algn="ctr">
+                      <a:solidFill>
+                        <a:srgbClr val="E5E5E5"/>
+                      </a:solidFill>
+                      <a:prstDash val="solid"/>
+                      <a:round/>
+                      <a:headEnd type="none" w="med" len="med"/>
+                      <a:tailEnd type="none" w="med" len="med"/>
+                    </a:lnB>
+                    <a:solidFill>
+                      <a:srgbClr val="FFFFFF"/>
+                    </a:solidFill>
+                  </a:tcPr>
+                </a:tc>
+                <a:tc>
+                  <a:txBody>
+                    <a:bodyPr/>
+                    <a:lstStyle/>
+                    <a:p>
+                      <a:pPr indent="0" marL="0">
+                        <a:buNone/>
+                      </a:pPr>
+                      <a:r>
+                        <a:rPr lang="en-US" sz="1200" b="1" dirty="0">
+                          <a:solidFill>
+                            <a:srgbClr val="256F3A"/>
+                          </a:solidFill>
+                        </a:rPr>
+                        <a:t>Z_PC_ADMIN · Z_PC_COMUM</a:t>
+                      </a:r>
+                      <a:endParaRPr lang="en-US" sz="1200" dirty="0"/>
+                    </a:p>
+                  </a:txBody>
+                  <a:tcPr marL="73152" marR="73152" marT="36576" marB="36576" anchor="ctr">
+                    <a:lnL w="0" cap="flat" cmpd="sng" algn="ctr">
+                      <a:noFill/>
+                    </a:lnL>
+                    <a:lnR w="0" cap="flat" cmpd="sng" algn="ctr">
+                      <a:noFill/>
+                    </a:lnR>
+                    <a:lnT w="0" cap="flat" cmpd="sng" algn="ctr">
+                      <a:noFill/>
+                    </a:lnT>
+                    <a:lnB w="12700" cap="flat" cmpd="sng" algn="ctr">
+                      <a:solidFill>
+                        <a:srgbClr val="E5E5E5"/>
+                      </a:solidFill>
+                      <a:prstDash val="solid"/>
+                      <a:round/>
+                      <a:headEnd type="none" w="med" len="med"/>
+                      <a:tailEnd type="none" w="med" len="med"/>
+                    </a:lnB>
+                    <a:solidFill>
+                      <a:srgbClr val="FFFFFF"/>
+                    </a:solidFill>
+                  </a:tcPr>
+                </a:tc>
+                <a:tc>
+                  <a:txBody>
+                    <a:bodyPr/>
+                    <a:lstStyle/>
+                    <a:p>
+                      <a:pPr indent="0" marL="0">
+                        <a:buNone/>
+                      </a:pPr>
+                      <a:r>
+                        <a:rPr lang="en-US" sz="1200" b="1" dirty="0">
+                          <a:solidFill>
+                            <a:srgbClr val="256F3A"/>
+                          </a:solidFill>
+                        </a:rPr>
+                        <a:t>Workbench</a:t>
+                      </a:r>
+                      <a:endParaRPr lang="en-US" sz="1200" dirty="0"/>
+                    </a:p>
+                  </a:txBody>
+                  <a:tcPr marL="73152" marR="73152" marT="36576" marB="36576" anchor="ctr">
+                    <a:lnL w="0" cap="flat" cmpd="sng" algn="ctr">
+                      <a:noFill/>
+                    </a:lnL>
+                    <a:lnR w="0" cap="flat" cmpd="sng" algn="ctr">
+                      <a:noFill/>
+                    </a:lnR>
+                    <a:lnT w="0" cap="flat" cmpd="sng" algn="ctr">
+                      <a:noFill/>
+                    </a:lnT>
+                    <a:lnB w="12700" cap="flat" cmpd="sng" algn="ctr">
+                      <a:solidFill>
+                        <a:srgbClr val="E5E5E5"/>
+                      </a:solidFill>
+                      <a:prstDash val="solid"/>
+                      <a:round/>
+                      <a:headEnd type="none" w="med" len="med"/>
+                      <a:tailEnd type="none" w="med" len="med"/>
+                    </a:lnB>
+                    <a:solidFill>
+                      <a:srgbClr val="FFFFFF"/>
+                    </a:solidFill>
+                  </a:tcPr>
+                </a:tc>
+                <a:tc>
+                  <a:txBody>
+                    <a:bodyPr/>
+                    <a:lstStyle/>
+                    <a:p>
+                      <a:pPr indent="0" marL="0">
+                        <a:buNone/>
+                      </a:pPr>
+                      <a:r>
+                        <a:rPr lang="en-US" sz="1200" dirty="0">
+                          <a:solidFill>
+                            <a:srgbClr val="1D2D3E"/>
+                          </a:solidFill>
+                        </a:rPr>
+                        <a:t>Business Role</a:t>
+                      </a:r>
+                      <a:endParaRPr lang="en-US" sz="1200" dirty="0"/>
+                    </a:p>
+                  </a:txBody>
+                  <a:tcPr marL="73152" marR="73152" marT="36576" marB="36576" anchor="ctr">
+                    <a:lnL w="0" cap="flat" cmpd="sng" algn="ctr">
+                      <a:noFill/>
+                    </a:lnL>
+                    <a:lnR w="0" cap="flat" cmpd="sng" algn="ctr">
+                      <a:noFill/>
+                    </a:lnR>
+                    <a:lnT w="0" cap="flat" cmpd="sng" algn="ctr">
+                      <a:noFill/>
+                    </a:lnT>
+                    <a:lnB w="12700" cap="flat" cmpd="sng" algn="ctr">
+                      <a:solidFill>
+                        <a:srgbClr val="E5E5E5"/>
+                      </a:solidFill>
+                      <a:prstDash val="solid"/>
+                      <a:round/>
+                      <a:headEnd type="none" w="med" len="med"/>
+                      <a:tailEnd type="none" w="med" len="med"/>
+                    </a:lnB>
+                    <a:solidFill>
+                      <a:srgbClr val="FFFFFF"/>
+                    </a:solidFill>
+                  </a:tcPr>
+                </a:tc>
+              </a:tr>
+              <a:tr h="502920">
+                <a:tc>
+                  <a:txBody>
+                    <a:bodyPr/>
+                    <a:lstStyle/>
+                    <a:p>
+                      <a:pPr indent="0" marL="0">
+                        <a:buNone/>
+                      </a:pPr>
+                      <a:r>
+                        <a:rPr lang="en-US" sz="1200" b="1" dirty="0">
+                          <a:solidFill>
+                            <a:srgbClr val="1D2D3E"/>
+                          </a:solidFill>
+                        </a:rPr>
+                        <a:t>SU01</a:t>
+                      </a:r>
+                      <a:endParaRPr lang="en-US" sz="1200" dirty="0"/>
+                    </a:p>
+                  </a:txBody>
+                  <a:tcPr marL="73152" marR="73152" marT="36576" marB="36576" anchor="ctr">
+                    <a:lnL w="0" cap="flat" cmpd="sng" algn="ctr">
+                      <a:noFill/>
+                    </a:lnL>
+                    <a:lnR w="0" cap="flat" cmpd="sng" algn="ctr">
+                      <a:noFill/>
+                    </a:lnR>
+                    <a:lnT w="0" cap="flat" cmpd="sng" algn="ctr">
+                      <a:noFill/>
+                    </a:lnT>
+                    <a:lnB w="12700" cap="flat" cmpd="sng" algn="ctr">
+                      <a:solidFill>
+                        <a:srgbClr val="E5E5E5"/>
+                      </a:solidFill>
+                      <a:prstDash val="solid"/>
+                      <a:round/>
+                      <a:headEnd type="none" w="med" len="med"/>
+                      <a:tailEnd type="none" w="med" len="med"/>
+                    </a:lnB>
+                    <a:solidFill>
+                      <a:srgbClr val="FFFFFF"/>
+                    </a:solidFill>
+                  </a:tcPr>
+                </a:tc>
+                <a:tc>
+                  <a:txBody>
+                    <a:bodyPr/>
+                    <a:lstStyle/>
+                    <a:p>
+                      <a:pPr indent="0" marL="0">
+                        <a:buNone/>
+                      </a:pPr>
+                      <a:r>
+                        <a:rPr lang="en-US" sz="1200" dirty="0">
+                          <a:solidFill>
+                            <a:srgbClr val="1D2D3E"/>
+                          </a:solidFill>
+                        </a:rPr>
+                        <a:t>Usuários</a:t>
+                      </a:r>
+                      <a:endParaRPr lang="en-US" sz="1200" dirty="0"/>
+                    </a:p>
+                  </a:txBody>
+                  <a:tcPr marL="73152" marR="73152" marT="36576" marB="36576" anchor="ctr">
+                    <a:lnL w="0" cap="flat" cmpd="sng" algn="ctr">
+                      <a:noFill/>
+                    </a:lnL>
+                    <a:lnR w="0" cap="flat" cmpd="sng" algn="ctr">
+                      <a:noFill/>
+                    </a:lnR>
+                    <a:lnT w="0" cap="flat" cmpd="sng" algn="ctr">
+                      <a:noFill/>
+                    </a:lnT>
+                    <a:lnB w="12700" cap="flat" cmpd="sng" algn="ctr">
+                      <a:solidFill>
+                        <a:srgbClr val="E5E5E5"/>
+                      </a:solidFill>
+                      <a:prstDash val="solid"/>
+                      <a:round/>
+                      <a:headEnd type="none" w="med" len="med"/>
+                      <a:tailEnd type="none" w="med" len="med"/>
+                    </a:lnB>
+                    <a:solidFill>
+                      <a:srgbClr val="FFFFFF"/>
+                    </a:solidFill>
+                  </a:tcPr>
+                </a:tc>
+                <a:tc>
+                  <a:txBody>
+                    <a:bodyPr/>
+                    <a:lstStyle/>
+                    <a:p>
+                      <a:pPr indent="0" marL="0">
+                        <a:buNone/>
+                      </a:pPr>
+                      <a:r>
+                        <a:rPr lang="en-US" sz="1200" b="1" dirty="0">
+                          <a:solidFill>
+                            <a:srgbClr val="256F3A"/>
+                          </a:solidFill>
+                        </a:rPr>
+                        <a:t>PC_ADMIN · PC_COMUM</a:t>
+                      </a:r>
+                      <a:endParaRPr lang="en-US" sz="1200" dirty="0"/>
+                    </a:p>
+                  </a:txBody>
+                  <a:tcPr marL="73152" marR="73152" marT="36576" marB="36576" anchor="ctr">
+                    <a:lnL w="0" cap="flat" cmpd="sng" algn="ctr">
+                      <a:noFill/>
+                    </a:lnL>
+                    <a:lnR w="0" cap="flat" cmpd="sng" algn="ctr">
+                      <a:noFill/>
+                    </a:lnR>
+                    <a:lnT w="0" cap="flat" cmpd="sng" algn="ctr">
+                      <a:noFill/>
+                    </a:lnT>
+                    <a:lnB w="12700" cap="flat" cmpd="sng" algn="ctr">
+                      <a:solidFill>
+                        <a:srgbClr val="E5E5E5"/>
+                      </a:solidFill>
+                      <a:prstDash val="solid"/>
+                      <a:round/>
+                      <a:headEnd type="none" w="med" len="med"/>
+                      <a:tailEnd type="none" w="med" len="med"/>
+                    </a:lnB>
+                    <a:solidFill>
+                      <a:srgbClr val="FFFFFF"/>
+                    </a:solidFill>
+                  </a:tcPr>
+                </a:tc>
+                <a:tc>
+                  <a:txBody>
+                    <a:bodyPr/>
+                    <a:lstStyle/>
+                    <a:p>
+                      <a:pPr indent="0" marL="0">
+                        <a:buNone/>
+                      </a:pPr>
+                      <a:r>
+                        <a:rPr lang="en-US" sz="1200" b="1" dirty="0">
+                          <a:solidFill>
+                            <a:srgbClr val="256F3A"/>
+                          </a:solidFill>
+                        </a:rPr>
+                        <a:t>manual</a:t>
+                      </a:r>
+                      <a:endParaRPr lang="en-US" sz="1200" dirty="0"/>
+                    </a:p>
+                  </a:txBody>
+                  <a:tcPr marL="73152" marR="73152" marT="36576" marB="36576" anchor="ctr">
+                    <a:lnL w="0" cap="flat" cmpd="sng" algn="ctr">
+                      <a:noFill/>
+                    </a:lnL>
+                    <a:lnR w="0" cap="flat" cmpd="sng" algn="ctr">
+                      <a:noFill/>
+                    </a:lnR>
+                    <a:lnT w="0" cap="flat" cmpd="sng" algn="ctr">
+                      <a:noFill/>
+                    </a:lnT>
+                    <a:lnB w="12700" cap="flat" cmpd="sng" algn="ctr">
+                      <a:solidFill>
+                        <a:srgbClr val="E5E5E5"/>
+                      </a:solidFill>
+                      <a:prstDash val="solid"/>
+                      <a:round/>
+                      <a:headEnd type="none" w="med" len="med"/>
+                      <a:tailEnd type="none" w="med" len="med"/>
+                    </a:lnB>
+                    <a:solidFill>
+                      <a:srgbClr val="FFFFFF"/>
+                    </a:solidFill>
+                  </a:tcPr>
+                </a:tc>
+                <a:tc>
+                  <a:txBody>
+                    <a:bodyPr/>
+                    <a:lstStyle/>
+                    <a:p>
+                      <a:pPr indent="0" marL="0">
+                        <a:buNone/>
+                      </a:pPr>
+                      <a:r>
+                        <a:rPr lang="en-US" sz="1200" dirty="0">
+                          <a:solidFill>
+                            <a:srgbClr val="1D2D3E"/>
+                          </a:solidFill>
+                        </a:rPr>
+                        <a:t>Business Users</a:t>
+                      </a:r>
+                      <a:endParaRPr lang="en-US" sz="1200" dirty="0"/>
+                    </a:p>
+                  </a:txBody>
+                  <a:tcPr marL="73152" marR="73152" marT="36576" marB="36576" anchor="ctr">
+                    <a:lnL w="0" cap="flat" cmpd="sng" algn="ctr">
+                      <a:noFill/>
+                    </a:lnL>
+                    <a:lnR w="0" cap="flat" cmpd="sng" algn="ctr">
+                      <a:noFill/>
+                    </a:lnR>
+                    <a:lnT w="0" cap="flat" cmpd="sng" algn="ctr">
+                      <a:noFill/>
+                    </a:lnT>
+                    <a:lnB w="12700" cap="flat" cmpd="sng" algn="ctr">
+                      <a:solidFill>
+                        <a:srgbClr val="E5E5E5"/>
+                      </a:solidFill>
+                      <a:prstDash val="solid"/>
+                      <a:round/>
+                      <a:headEnd type="none" w="med" len="med"/>
+                      <a:tailEnd type="none" w="med" len="med"/>
+                    </a:lnB>
+                    <a:solidFill>
+                      <a:srgbClr val="FFFFFF"/>
+                    </a:solidFill>
+                  </a:tcPr>
+                </a:tc>
+              </a:tr>
+              <a:tr h="502920">
+                <a:tc>
+                  <a:txBody>
+                    <a:bodyPr/>
+                    <a:lstStyle/>
+                    <a:p>
+                      <a:pPr indent="0" marL="0">
+                        <a:buNone/>
+                      </a:pPr>
+                      <a:r>
+                        <a:rPr lang="en-US" sz="1200" b="1" dirty="0">
+                          <a:solidFill>
+                            <a:srgbClr val="1D2D3E"/>
+                          </a:solidFill>
+                        </a:rPr>
+                        <a:t>SU53</a:t>
+                      </a:r>
+                      <a:endParaRPr lang="en-US" sz="1200" dirty="0"/>
+                    </a:p>
+                  </a:txBody>
+                  <a:tcPr marL="73152" marR="73152" marT="36576" marB="36576" anchor="ctr">
+                    <a:lnL w="0" cap="flat" cmpd="sng" algn="ctr">
+                      <a:noFill/>
+                    </a:lnL>
+                    <a:lnR w="0" cap="flat" cmpd="sng" algn="ctr">
+                      <a:noFill/>
+                    </a:lnR>
+                    <a:lnT w="0" cap="flat" cmpd="sng" algn="ctr">
+                      <a:noFill/>
+                    </a:lnT>
+                    <a:lnB w="12700" cap="flat" cmpd="sng" algn="ctr">
+                      <a:solidFill>
+                        <a:srgbClr val="E5E5E5"/>
+                      </a:solidFill>
+                      <a:prstDash val="solid"/>
+                      <a:round/>
+                      <a:headEnd type="none" w="med" len="med"/>
+                      <a:tailEnd type="none" w="med" len="med"/>
+                    </a:lnB>
+                    <a:solidFill>
+                      <a:srgbClr val="FFFFFF"/>
+                    </a:solidFill>
+                  </a:tcPr>
+                </a:tc>
+                <a:tc>
+                  <a:txBody>
+                    <a:bodyPr/>
+                    <a:lstStyle/>
+                    <a:p>
+                      <a:pPr indent="0" marL="0">
+                        <a:buNone/>
+                      </a:pPr>
+                      <a:r>
+                        <a:rPr lang="en-US" sz="1200" dirty="0">
+                          <a:solidFill>
+                            <a:srgbClr val="1D2D3E"/>
+                          </a:solidFill>
+                        </a:rPr>
+                        <a:t>Diagnóstico</a:t>
+                      </a:r>
+                      <a:endParaRPr lang="en-US" sz="1200" dirty="0"/>
+                    </a:p>
+                  </a:txBody>
+                  <a:tcPr marL="73152" marR="73152" marT="36576" marB="36576" anchor="ctr">
+                    <a:lnL w="0" cap="flat" cmpd="sng" algn="ctr">
+                      <a:noFill/>
+                    </a:lnL>
+                    <a:lnR w="0" cap="flat" cmpd="sng" algn="ctr">
+                      <a:noFill/>
+                    </a:lnR>
+                    <a:lnT w="0" cap="flat" cmpd="sng" algn="ctr">
+                      <a:noFill/>
+                    </a:lnT>
+                    <a:lnB w="12700" cap="flat" cmpd="sng" algn="ctr">
+                      <a:solidFill>
+                        <a:srgbClr val="E5E5E5"/>
+                      </a:solidFill>
+                      <a:prstDash val="solid"/>
+                      <a:round/>
+                      <a:headEnd type="none" w="med" len="med"/>
+                      <a:tailEnd type="none" w="med" len="med"/>
+                    </a:lnB>
+                    <a:solidFill>
+                      <a:srgbClr val="FFFFFF"/>
+                    </a:solidFill>
+                  </a:tcPr>
+                </a:tc>
+                <a:tc>
+                  <a:txBody>
+                    <a:bodyPr/>
+                    <a:lstStyle/>
+                    <a:p>
+                      <a:pPr indent="0" marL="0">
+                        <a:buNone/>
+                      </a:pPr>
+                      <a:r>
+                        <a:rPr lang="en-US" sz="1200" dirty="0">
+                          <a:solidFill>
+                            <a:srgbClr val="556B82"/>
+                          </a:solidFill>
+                        </a:rPr>
+                        <a:t>+ STAUTHTRACE e SUIM</a:t>
+                      </a:r>
+                      <a:endParaRPr lang="en-US" sz="1200" dirty="0"/>
+                    </a:p>
+                  </a:txBody>
+                  <a:tcPr marL="73152" marR="73152" marT="36576" marB="36576" anchor="ctr">
+                    <a:lnL w="0" cap="flat" cmpd="sng" algn="ctr">
+                      <a:noFill/>
+                    </a:lnL>
+                    <a:lnR w="0" cap="flat" cmpd="sng" algn="ctr">
+                      <a:noFill/>
+                    </a:lnR>
+                    <a:lnT w="0" cap="flat" cmpd="sng" algn="ctr">
+                      <a:noFill/>
+                    </a:lnT>
+                    <a:lnB w="12700" cap="flat" cmpd="sng" algn="ctr">
+                      <a:solidFill>
+                        <a:srgbClr val="E5E5E5"/>
+                      </a:solidFill>
+                      <a:prstDash val="solid"/>
+                      <a:round/>
+                      <a:headEnd type="none" w="med" len="med"/>
+                      <a:tailEnd type="none" w="med" len="med"/>
+                    </a:lnB>
+                    <a:solidFill>
+                      <a:srgbClr val="FFFFFF"/>
+                    </a:solidFill>
+                  </a:tcPr>
+                </a:tc>
+                <a:tc>
+                  <a:txBody>
+                    <a:bodyPr/>
+                    <a:lstStyle/>
+                    <a:p>
+                      <a:pPr indent="0" marL="0">
+                        <a:buNone/>
+                      </a:pPr>
+                      <a:r>
+                        <a:rPr lang="en-US" sz="1200" b="1" dirty="0">
+                          <a:solidFill>
+                            <a:srgbClr val="256F3A"/>
+                          </a:solidFill>
+                        </a:rPr>
+                        <a:t>—</a:t>
+                      </a:r>
+                      <a:endParaRPr lang="en-US" sz="1200" dirty="0"/>
+                    </a:p>
+                  </a:txBody>
+                  <a:tcPr marL="73152" marR="73152" marT="36576" marB="36576" anchor="ctr">
+                    <a:lnL w="0" cap="flat" cmpd="sng" algn="ctr">
+                      <a:noFill/>
+                    </a:lnL>
+                    <a:lnR w="0" cap="flat" cmpd="sng" algn="ctr">
+                      <a:noFill/>
+                    </a:lnR>
+                    <a:lnT w="0" cap="flat" cmpd="sng" algn="ctr">
+                      <a:noFill/>
+                    </a:lnT>
+                    <a:lnB w="12700" cap="flat" cmpd="sng" algn="ctr">
+                      <a:solidFill>
+                        <a:srgbClr val="E5E5E5"/>
+                      </a:solidFill>
+                      <a:prstDash val="solid"/>
+                      <a:round/>
+                      <a:headEnd type="none" w="med" len="med"/>
+                      <a:tailEnd type="none" w="med" len="med"/>
+                    </a:lnB>
+                    <a:solidFill>
+                      <a:srgbClr val="FFFFFF"/>
+                    </a:solidFill>
+                  </a:tcPr>
+                </a:tc>
+                <a:tc>
+                  <a:txBody>
+                    <a:bodyPr/>
+                    <a:lstStyle/>
+                    <a:p>
+                      <a:pPr indent="0" marL="0">
+                        <a:buNone/>
+                      </a:pPr>
+                      <a:r>
+                        <a:rPr lang="en-US" sz="1200" dirty="0">
+                          <a:solidFill>
+                            <a:srgbClr val="1D2D3E"/>
+                          </a:solidFill>
+                        </a:rPr>
+                        <a:t>Auth. Trace</a:t>
+                      </a:r>
+                      <a:endParaRPr lang="en-US" sz="1200" dirty="0"/>
+                    </a:p>
+                  </a:txBody>
+                  <a:tcPr marL="73152" marR="73152" marT="36576" marB="36576" anchor="ctr">
+                    <a:lnL w="0" cap="flat" cmpd="sng" algn="ctr">
+                      <a:noFill/>
+                    </a:lnL>
+                    <a:lnR w="0" cap="flat" cmpd="sng" algn="ctr">
+                      <a:noFill/>
+                    </a:lnR>
+                    <a:lnT w="0" cap="flat" cmpd="sng" algn="ctr">
+                      <a:noFill/>
+                    </a:lnT>
+                    <a:lnB w="12700" cap="flat" cmpd="sng" algn="ctr">
+                      <a:solidFill>
+                        <a:srgbClr val="E5E5E5"/>
+                      </a:solidFill>
+                      <a:prstDash val="solid"/>
+                      <a:round/>
+                      <a:headEnd type="none" w="med" len="med"/>
+                      <a:tailEnd type="none" w="med" len="med"/>
+                    </a:lnB>
+                    <a:solidFill>
+                      <a:srgbClr val="FFFFFF"/>
+                    </a:solidFill>
+                  </a:tcPr>
+                </a:tc>
+              </a:tr>
+            </a:tbl>
+          </a:graphicData>
+        </a:graphic>
+      </p:graphicFrame>
+      <p:sp>
+        <p:nvSpPr>
+          <p:cNvPr id="7" name="Cartão"/>
+          <p:cNvSpPr/>
+          <p:nvPr/>
+        </p:nvSpPr>
+        <p:spPr>
+          <a:xfrm>
+            <a:off x="7635240" y="1645920"/>
+            <a:ext cx="4007815" cy="2148840"/>
+          </a:xfrm>
+          <a:prstGeom prst="roundRect">
+            <a:avLst>
+              <a:gd name="adj" fmla="val 5106"/>
+            </a:avLst>
+          </a:prstGeom>
+          <a:solidFill>
+            <a:srgbClr val="FFFFFF"/>
+          </a:solidFill>
+          <a:ln/>
+          <a:effectLst>
+            <a:outerShdw sx="100000" sy="100000" kx="0" ky="0" algn="bl" rotWithShape="0" blurRad="101600" dist="25400" dir="5400000">
+              <a:srgbClr val="223548">
+                <a:alpha val="16000"/>
+              </a:srgbClr>
+            </a:outerShdw>
+          </a:effectLst>
+        </p:spPr>
+      </p:sp>
+      <p:sp>
+        <p:nvSpPr>
+          <p:cNvPr id="8" name="Ícone locked"/>
+          <p:cNvSpPr/>
+          <p:nvPr/>
+        </p:nvSpPr>
+        <p:spPr>
+          <a:xfrm>
+            <a:off x="7863840" y="1874520"/>
+            <a:ext cx="475488" cy="475488"/>
+          </a:xfrm>
+          <a:prstGeom prst="roundRect">
+            <a:avLst>
+              <a:gd name="adj" fmla="val 22000"/>
+            </a:avLst>
+          </a:prstGeom>
+          <a:solidFill>
+            <a:srgbClr val="F3ECFB"/>
+          </a:solidFill>
+          <a:ln/>
+        </p:spPr>
+      </p:sp>
+      <p:pic>
+        <p:nvPicPr>
+          <p:cNvPr id="9" name="Image 0" descr="locked">    </p:cNvPr>
+          <p:cNvPicPr>
+            <a:picLocks noChangeAspect="1"/>
+          </p:cNvPicPr>
+          <p:nvPr/>
+        </p:nvPicPr>
+        <p:blipFill>
+          <a:blip r:embed="rId1"/>
+          <a:stretch>
+            <a:fillRect/>
+          </a:stretch>
+        </p:blipFill>
+        <p:spPr>
+          <a:xfrm>
+            <a:off x="7977957" y="1988637"/>
+            <a:ext cx="247254" cy="247254"/>
+          </a:xfrm>
+          <a:prstGeom prst="rect">
+            <a:avLst/>
+          </a:prstGeom>
+        </p:spPr>
+      </p:pic>
+      <p:sp>
+        <p:nvSpPr>
+          <p:cNvPr id="10" name="Text 5"/>
+          <p:cNvSpPr txBox="1"/>
+          <p:nvPr/>
+        </p:nvSpPr>
+        <p:spPr>
+          <a:xfrm>
+            <a:off x="8476488" y="1874520"/>
+            <a:ext cx="2983687" cy="475488"/>
+          </a:xfrm>
+          <a:prstGeom prst="rect">
+            <a:avLst/>
+          </a:prstGeom>
+          <a:noFill/>
+          <a:ln/>
+        </p:spPr>
+        <p:txBody>
+          <a:bodyPr wrap="square" lIns="0" tIns="0" rIns="0" bIns="0" rtlCol="0" anchor="ctr"/>
+          <a:lstStyle/>
+          <a:p>
+            <a:pPr indent="0" marL="0">
+              <a:buNone/>
+            </a:pPr>
+            <a:r>
+              <a:rPr lang="en-US" sz="1500" b="1" dirty="0">
+                <a:solidFill>
+                  <a:srgbClr val="1D2D3E"/>
+                </a:solidFill>
+              </a:rPr>
+              <a:t>SU21 · classe ZPC</a:t>
+            </a:r>
+            <a:endParaRPr lang="en-US" sz="1500" dirty="0"/>
+          </a:p>
+        </p:txBody>
+      </p:sp>
+      <p:sp>
+        <p:nvSpPr>
+          <p:cNvPr id="11" name="Text 6"/>
+          <p:cNvSpPr txBox="1"/>
+          <p:nvPr/>
+        </p:nvSpPr>
+        <p:spPr>
+          <a:xfrm>
+            <a:off x="7863840" y="2487168"/>
+            <a:ext cx="3550615" cy="1143000"/>
+          </a:xfrm>
+          <a:prstGeom prst="rect">
+            <a:avLst/>
+          </a:prstGeom>
+          <a:noFill/>
+          <a:ln/>
+        </p:spPr>
+        <p:txBody>
+          <a:bodyPr wrap="square" lIns="0" tIns="0" rIns="0" bIns="0" rtlCol="0" anchor="t"/>
+          <a:lstStyle/>
+          <a:p>
+            <a:pPr indent="0" marL="0">
+              <a:buNone/>
+            </a:pPr>
+            <a:r>
+              <a:rPr lang="en-US" sz="1200" dirty="0">
+                <a:solidFill>
+                  <a:srgbClr val="556B82"/>
+                </a:solidFill>
+              </a:rPr>
+              <a:t>ZPC_ADMIN: 01, 02, 03, 06. ZPC_PEDIDO: 01, 02, 03, 06 e 16 (Executar). As mesmas atividades do BTP.</a:t>
+            </a:r>
+            <a:endParaRPr lang="en-US" sz="1200" dirty="0"/>
+          </a:p>
+        </p:txBody>
+      </p:sp>
+      <p:sp>
+        <p:nvSpPr>
+          <p:cNvPr id="12" name="Cartão"/>
+          <p:cNvSpPr/>
+          <p:nvPr/>
+        </p:nvSpPr>
+        <p:spPr>
+          <a:xfrm>
+            <a:off x="7635240" y="4023360"/>
+            <a:ext cx="4007815" cy="2148840"/>
+          </a:xfrm>
+          <a:prstGeom prst="roundRect">
+            <a:avLst>
+              <a:gd name="adj" fmla="val 5106"/>
+            </a:avLst>
+          </a:prstGeom>
+          <a:solidFill>
+            <a:srgbClr val="FFFFFF"/>
+          </a:solidFill>
+          <a:ln/>
+          <a:effectLst>
+            <a:outerShdw sx="100000" sy="100000" kx="0" ky="0" algn="bl" rotWithShape="0" blurRad="101600" dist="25400" dir="5400000">
+              <a:srgbClr val="223548">
+                <a:alpha val="16000"/>
+              </a:srgbClr>
+            </a:outerShdw>
+          </a:effectLst>
+        </p:spPr>
+      </p:sp>
+      <p:sp>
+        <p:nvSpPr>
+          <p:cNvPr id="13" name="Ícone locked"/>
+          <p:cNvSpPr/>
+          <p:nvPr/>
+        </p:nvSpPr>
+        <p:spPr>
+          <a:xfrm>
+            <a:off x="7863840" y="4251960"/>
+            <a:ext cx="475488" cy="475488"/>
+          </a:xfrm>
+          <a:prstGeom prst="roundRect">
+            <a:avLst>
+              <a:gd name="adj" fmla="val 22000"/>
+            </a:avLst>
+          </a:prstGeom>
+          <a:solidFill>
+            <a:srgbClr val="E1F4FF"/>
+          </a:solidFill>
+          <a:ln/>
+        </p:spPr>
+      </p:sp>
+      <p:pic>
+        <p:nvPicPr>
+          <p:cNvPr id="14" name="Image 1" descr="locked">    </p:cNvPr>
+          <p:cNvPicPr>
+            <a:picLocks noChangeAspect="1"/>
+          </p:cNvPicPr>
+          <p:nvPr/>
+        </p:nvPicPr>
+        <p:blipFill>
+          <a:blip r:embed="rId2"/>
+          <a:stretch>
+            <a:fillRect/>
+          </a:stretch>
+        </p:blipFill>
+        <p:spPr>
+          <a:xfrm>
+            <a:off x="7977957" y="4366077"/>
+            <a:ext cx="247254" cy="247254"/>
+          </a:xfrm>
+          <a:prstGeom prst="rect">
+            <a:avLst/>
+          </a:prstGeom>
+        </p:spPr>
+      </p:pic>
+      <p:sp>
+        <p:nvSpPr>
+          <p:cNvPr id="15" name="Text 9"/>
+          <p:cNvSpPr txBox="1"/>
+          <p:nvPr/>
+        </p:nvSpPr>
+        <p:spPr>
+          <a:xfrm>
+            <a:off x="8476488" y="4251960"/>
+            <a:ext cx="2983687" cy="475488"/>
+          </a:xfrm>
+          <a:prstGeom prst="rect">
+            <a:avLst/>
+          </a:prstGeom>
+          <a:noFill/>
+          <a:ln/>
+        </p:spPr>
+        <p:txBody>
+          <a:bodyPr wrap="square" lIns="0" tIns="0" rIns="0" bIns="0" rtlCol="0" anchor="ctr"/>
+          <a:lstStyle/>
+          <a:p>
+            <a:pPr indent="0" marL="0">
+              <a:buNone/>
+            </a:pPr>
+            <a:r>
+              <a:rPr lang="en-US" sz="1500" b="1" dirty="0">
+                <a:solidFill>
+                  <a:srgbClr val="1D2D3E"/>
+                </a:solidFill>
+              </a:rPr>
+              <a:t>c_modo_trial = abap_false</a:t>
+            </a:r>
+            <a:endParaRPr lang="en-US" sz="1500" dirty="0"/>
+          </a:p>
+        </p:txBody>
+      </p:sp>
+      <p:sp>
+        <p:nvSpPr>
+          <p:cNvPr id="16" name="Text 10"/>
+          <p:cNvSpPr txBox="1"/>
+          <p:nvPr/>
+        </p:nvSpPr>
+        <p:spPr>
+          <a:xfrm>
+            <a:off x="7863840" y="4864608"/>
+            <a:ext cx="3550615" cy="1143000"/>
+          </a:xfrm>
+          <a:prstGeom prst="rect">
+            <a:avLst/>
+          </a:prstGeom>
+          <a:noFill/>
+          <a:ln/>
+        </p:spPr>
+        <p:txBody>
+          <a:bodyPr wrap="square" lIns="0" tIns="0" rIns="0" bIns="0" rtlCol="0" anchor="t"/>
+          <a:lstStyle/>
+          <a:p>
+            <a:pPr indent="0" marL="0">
+              <a:buNone/>
+            </a:pPr>
+            <a:r>
+              <a:rPr lang="en-US" sz="1200" dirty="0">
+                <a:solidFill>
+                  <a:srgbClr val="556B82"/>
+                </a:solidFill>
+              </a:rPr>
+              <a:t>No On-Premise o AUTHORITY-CHECK de ZCL_PC_AUTH sempre vale: nunca transporte com abap_true.</a:t>
+            </a:r>
+            <a:endParaRPr lang="en-US" sz="1200" dirty="0"/>
+          </a:p>
+        </p:txBody>
+      </p:sp>
+      <p:sp>
+        <p:nvSpPr>
+          <p:cNvPr id="25" name="Slide Number Placeholder 0"/>
+          <p:cNvSpPr>
+            <a:spLocks noGrp="1"/>
+          </p:cNvSpPr>
+          <p:nvPr>
+            <p:ph type="sldNum" sz="quarter" idx="4294967295"/>
+          </p:nvPr>
+        </p:nvSpPr>
+        <p:spPr>
+          <a:xfrm>
+            <a:off x="11183112" y="6419088"/>
+            <a:ext cx="457200" cy="274320"/>
+          </a:xfrm>
+          <a:prstGeom prst="rect">
+            <a:avLst/>
+          </a:prstGeom>
+          <a:extLst>
+            <a:ext uri="{C572A759-6A51-4108-AA02-DFA0A04FC94B}">
+              <ma14:wrappingTextBoxFlag xmlns:ma14="http://schemas.microsoft.com/office/mac/drawingml/2011/main" val="0"/>
+            </a:ext>
+          </a:extLst>
+        </p:spPr>
+        <p:txBody>
+          <a:bodyPr lIns="0" tIns="0" rIns="0" bIns="0" anchor="ctr"/>
+          <a:lstStyle>
+            <a:lvl1pPr>
+              <a:defRPr sz="900">
+                <a:solidFill>
+                  <a:srgbClr val="556B82"/>
+                </a:solidFill>
+              </a:defRPr>
+            </a:lvl1pPr>
+          </a:lstStyle>
+          <a:p>
+            <a:pPr algn="r"/>
+            <a:fld id="{F7021451-1387-4CA6-816F-3879F97B5CBC}" type="slidenum">
+              <a:rPr b="0" lang="en-US"/>
+              <a:t>8</a:t>
+            </a:fld>
+            <a:endParaRPr lang="en-US"/>
+          </a:p>
+        </p:txBody>
+      </p:sp>
+    </p:spTree>
+  </p:cSld>
+  <p:clrMapOvr>
+    <a:masterClrMapping/>
+  </p:clrMapOvr>
+</p:sld>
+</file>
+
+<file path=ppt/slides/slide25.xml><?xml version="1.0" encoding="utf-8"?>
+<p:sld xmlns:a="http://schemas.openxmlformats.org/drawingml/2006/main" xmlns:r="http://schemas.openxmlformats.org/officeDocument/2006/relationships" xmlns:p="http://schemas.openxmlformats.org/presentationml/2006/main">
+  <p:cSld name="Slide 6">
+    <p:spTree>
+      <p:nvGrpSpPr>
+        <p:cNvPr id="1" name=""/>
+        <p:cNvGrpSpPr/>
+        <p:nvPr/>
+      </p:nvGrpSpPr>
+      <p:grpSpPr>
+        <a:xfrm>
+          <a:off x="0" y="0"/>
+          <a:ext cx="0" cy="0"/>
+          <a:chOff x="0" y="0"/>
+          <a:chExt cx="0" cy="0"/>
+        </a:xfrm>
+      </p:grpSpPr>
+      <p:sp>
+        <p:nvSpPr>
+          <p:cNvPr id="2" name="Text 0"/>
+          <p:cNvSpPr/>
+          <p:nvPr>
+            <p:ph idx="100" type="body" hasCustomPrompt="1"/>
+          </p:nvPr>
+        </p:nvSpPr>
+        <p:spPr>
+          <a:xfrm>
+            <a:off x="548640" y="384048"/>
+            <a:ext cx="9144000" cy="274320"/>
+          </a:xfrm>
+          <a:prstGeom prst="rect">
+            <a:avLst/>
+          </a:prstGeom>
+          <a:noFill/>
+          <a:ln/>
+        </p:spPr>
+        <p:txBody>
+          <a:bodyPr wrap="square" lIns="0" tIns="0" rIns="0" bIns="0" rtlCol="0" anchor="ctr"/>
+          <a:lstStyle/>
+          <a:p>
+            <a:pPr algn="l" indent="0" marL="0">
+              <a:buNone/>
+            </a:pPr>
+            <a:r>
+              <a:rPr lang="en-US" sz="1100" b="1" spc="150" kern="0" dirty="0">
+                <a:solidFill>
+                  <a:schemeClr val="accent1"/>
+                </a:solidFill>
+              </a:rPr>
+              <a:t>ON-PREMISE · PUBLICAÇÃO</a:t>
+            </a:r>
+            <a:endParaRPr lang="en-US" sz="1100" dirty="0"/>
+          </a:p>
+        </p:txBody>
+      </p:sp>
+      <p:sp>
+        <p:nvSpPr>
+          <p:cNvPr id="3" name="Text 0"/>
+          <p:cNvSpPr/>
+          <p:nvPr>
+            <p:ph idx="101" type="title" hasCustomPrompt="1"/>
+          </p:nvPr>
+        </p:nvSpPr>
+        <p:spPr>
+          <a:xfrm>
+            <a:off x="548640" y="676656"/>
+            <a:ext cx="11094415" cy="658368"/>
+          </a:xfrm>
+          <a:prstGeom prst="rect">
+            <a:avLst/>
+          </a:prstGeom>
+          <a:noFill/>
+          <a:ln/>
+        </p:spPr>
+        <p:txBody>
+          <a:bodyPr wrap="square" lIns="0" tIns="0" rIns="0" bIns="0" rtlCol="0" anchor="ctr"/>
+          <a:lstStyle/>
+          <a:p>
+            <a:pPr algn="l" indent="0" marL="0">
+              <a:buNone/>
+            </a:pPr>
+            <a:r>
+              <a:rPr lang="en-US" sz="3000" b="1" dirty="0">
+                <a:solidFill>
+                  <a:schemeClr val="tx1"/>
+                </a:solidFill>
+              </a:rPr>
+              <a:t>O que a publicação cria no On-Premise</a:t>
+            </a:r>
+            <a:endParaRPr lang="en-US" sz="3000" dirty="0"/>
+          </a:p>
+        </p:txBody>
+      </p:sp>
+      <p:sp>
+        <p:nvSpPr>
+          <p:cNvPr id="5" name="Cartão"/>
+          <p:cNvSpPr/>
+          <p:nvPr/>
+        </p:nvSpPr>
+        <p:spPr>
+          <a:xfrm>
+            <a:off x="548640" y="1645920"/>
+            <a:ext cx="5432908" cy="2148840"/>
+          </a:xfrm>
+          <a:prstGeom prst="roundRect">
+            <a:avLst>
+              <a:gd name="adj" fmla="val 5106"/>
+            </a:avLst>
+          </a:prstGeom>
+          <a:solidFill>
+            <a:srgbClr val="FFFFFF"/>
+          </a:solidFill>
+          <a:ln/>
+          <a:effectLst>
+            <a:outerShdw sx="100000" sy="100000" kx="0" ky="0" algn="bl" rotWithShape="0" blurRad="101600" dist="25400" dir="5400000">
+              <a:srgbClr val="223548">
+                <a:alpha val="16000"/>
+              </a:srgbClr>
+            </a:outerShdw>
+          </a:effectLst>
+        </p:spPr>
+      </p:sp>
+      <p:sp>
+        <p:nvSpPr>
+          <p:cNvPr id="6" name="Text 3"/>
+          <p:cNvSpPr txBox="1"/>
+          <p:nvPr/>
+        </p:nvSpPr>
+        <p:spPr>
+          <a:xfrm>
+            <a:off x="731520" y="1783080"/>
+            <a:ext cx="5067148" cy="274320"/>
+          </a:xfrm>
+          <a:prstGeom prst="rect">
+            <a:avLst/>
+          </a:prstGeom>
+          <a:noFill/>
+          <a:ln/>
+        </p:spPr>
+        <p:txBody>
+          <a:bodyPr wrap="square" lIns="0" tIns="0" rIns="0" bIns="0" rtlCol="0" anchor="t"/>
+          <a:lstStyle/>
+          <a:p>
+            <a:pPr indent="0" marL="0">
+              <a:buNone/>
+            </a:pPr>
+            <a:r>
+              <a:rPr lang="en-US" sz="1100" b="1" dirty="0">
+                <a:solidFill>
+                  <a:srgbClr val="1D2D3E"/>
+                </a:solidFill>
+                <a:latin typeface="Courier New" pitchFamily="34" charset="0"/>
+                <a:ea typeface="Courier New" pitchFamily="34" charset="-122"/>
+                <a:cs typeface="Courier New" pitchFamily="34" charset="-120"/>
+              </a:rPr>
+              <a:t>ZUI_PC_REEMBOLSOS_O4</a:t>
+            </a:r>
+            <a:endParaRPr lang="en-US" sz="1100" dirty="0"/>
+          </a:p>
+        </p:txBody>
+      </p:sp>
+      <p:sp>
+        <p:nvSpPr>
+          <p:cNvPr id="7" name="Status SCO2 · serviço de entrada"/>
+          <p:cNvSpPr/>
+          <p:nvPr/>
+        </p:nvSpPr>
+        <p:spPr>
+          <a:xfrm>
+            <a:off x="731520" y="2103120"/>
+            <a:ext cx="1856232" cy="237744"/>
+          </a:xfrm>
+          <a:prstGeom prst="roundRect">
+            <a:avLst>
+              <a:gd name="adj" fmla="val 50000"/>
+            </a:avLst>
+          </a:prstGeom>
+          <a:solidFill>
+            <a:srgbClr val="E1F4FF"/>
+          </a:solidFill>
+          <a:ln/>
+        </p:spPr>
+        <p:txBody>
+          <a:bodyPr wrap="square" lIns="0" tIns="0" rIns="0" bIns="0" rtlCol="0" anchor="ctr"/>
+          <a:lstStyle/>
+          <a:p>
+            <a:pPr algn="ctr" indent="0" marL="0">
+              <a:buNone/>
+            </a:pPr>
+            <a:r>
+              <a:rPr lang="en-US" sz="950" b="1" dirty="0">
+                <a:solidFill>
+                  <a:srgbClr val="0064D9"/>
+                </a:solidFill>
+              </a:rPr>
+              <a:t>/IWFND/V4_ADMIN · grupo</a:t>
+            </a:r>
+            <a:endParaRPr lang="en-US" sz="950" dirty="0"/>
+          </a:p>
+        </p:txBody>
+      </p:sp>
+      <p:sp>
+        <p:nvSpPr>
+          <p:cNvPr id="8" name="Text 5"/>
+          <p:cNvSpPr txBox="1"/>
+          <p:nvPr/>
+        </p:nvSpPr>
+        <p:spPr>
+          <a:xfrm>
+            <a:off x="731520" y="2423160"/>
+            <a:ext cx="5067148" cy="1280160"/>
+          </a:xfrm>
+          <a:prstGeom prst="rect">
+            <a:avLst/>
+          </a:prstGeom>
+          <a:noFill/>
+          <a:ln/>
+        </p:spPr>
+        <p:txBody>
+          <a:bodyPr wrap="square" lIns="0" tIns="0" rIns="0" bIns="0" rtlCol="0" anchor="t"/>
+          <a:lstStyle/>
+          <a:p>
+            <a:pPr indent="0" marL="0">
+              <a:buNone/>
+            </a:pPr>
+            <a:r>
+              <a:rPr lang="en-US" sz="1200" dirty="0">
+                <a:solidFill>
+                  <a:srgbClr val="556B82"/>
+                </a:solidFill>
+              </a:rPr>
+              <a:t>Publish no ADT ou em /IWFND/V4_ADMIN (alias LOCAL): cada binding vira um grupo de serviços OData V4.</a:t>
+            </a:r>
+            <a:endParaRPr lang="en-US" sz="1200" dirty="0"/>
+          </a:p>
+        </p:txBody>
+      </p:sp>
+      <p:sp>
+        <p:nvSpPr>
+          <p:cNvPr id="9" name="Cartão"/>
+          <p:cNvSpPr/>
+          <p:nvPr/>
+        </p:nvSpPr>
+        <p:spPr>
+          <a:xfrm>
+            <a:off x="6210148" y="1645920"/>
+            <a:ext cx="5432908" cy="2148840"/>
+          </a:xfrm>
+          <a:prstGeom prst="roundRect">
+            <a:avLst>
+              <a:gd name="adj" fmla="val 5106"/>
+            </a:avLst>
+          </a:prstGeom>
+          <a:solidFill>
+            <a:srgbClr val="FFFFFF"/>
+          </a:solidFill>
+          <a:ln/>
+          <a:effectLst>
+            <a:outerShdw sx="100000" sy="100000" kx="0" ky="0" algn="bl" rotWithShape="0" blurRad="101600" dist="25400" dir="5400000">
+              <a:srgbClr val="223548">
+                <a:alpha val="16000"/>
+              </a:srgbClr>
+            </a:outerShdw>
+          </a:effectLst>
+        </p:spPr>
+      </p:sp>
+      <p:sp>
+        <p:nvSpPr>
+          <p:cNvPr id="10" name="Text 7"/>
+          <p:cNvSpPr txBox="1"/>
+          <p:nvPr/>
+        </p:nvSpPr>
+        <p:spPr>
+          <a:xfrm>
+            <a:off x="6393028" y="1783080"/>
+            <a:ext cx="5067148" cy="274320"/>
+          </a:xfrm>
+          <a:prstGeom prst="rect">
+            <a:avLst/>
+          </a:prstGeom>
+          <a:noFill/>
+          <a:ln/>
+        </p:spPr>
+        <p:txBody>
+          <a:bodyPr wrap="square" lIns="0" tIns="0" rIns="0" bIns="0" rtlCol="0" anchor="t"/>
+          <a:lstStyle/>
+          <a:p>
+            <a:pPr indent="0" marL="0">
+              <a:buNone/>
+            </a:pPr>
+            <a:r>
+              <a:rPr lang="en-US" sz="1100" b="1" dirty="0">
+                <a:solidFill>
+                  <a:srgbClr val="1D2D3E"/>
+                </a:solidFill>
+                <a:latin typeface="Courier New" pitchFamily="34" charset="0"/>
+                <a:ea typeface="Courier New" pitchFamily="34" charset="-122"/>
+                <a:cs typeface="Courier New" pitchFamily="34" charset="-120"/>
+              </a:rPr>
+              <a:t>S_START</a:t>
+            </a:r>
+            <a:endParaRPr lang="en-US" sz="1100" dirty="0"/>
+          </a:p>
+        </p:txBody>
+      </p:sp>
+      <p:sp>
+        <p:nvSpPr>
+          <p:cNvPr id="11" name="Status SUSH · valores padrão"/>
+          <p:cNvSpPr/>
+          <p:nvPr/>
+        </p:nvSpPr>
+        <p:spPr>
+          <a:xfrm>
+            <a:off x="6393028" y="2103120"/>
+            <a:ext cx="1606052" cy="237744"/>
+          </a:xfrm>
+          <a:prstGeom prst="roundRect">
+            <a:avLst>
+              <a:gd name="adj" fmla="val 50000"/>
+            </a:avLst>
+          </a:prstGeom>
+          <a:solidFill>
+            <a:srgbClr val="FFF3B8"/>
+          </a:solidFill>
+          <a:ln/>
+        </p:spPr>
+        <p:txBody>
+          <a:bodyPr wrap="square" lIns="0" tIns="0" rIns="0" bIns="0" rtlCol="0" anchor="ctr"/>
+          <a:lstStyle/>
+          <a:p>
+            <a:pPr algn="ctr" indent="0" marL="0">
+              <a:buNone/>
+            </a:pPr>
+            <a:r>
+              <a:rPr lang="en-US" sz="950" b="1" dirty="0">
+                <a:solidFill>
+                  <a:srgbClr val="A93E00"/>
+                </a:solidFill>
+              </a:rPr>
+              <a:t>R3TR G4BA · acesso</a:t>
+            </a:r>
+            <a:endParaRPr lang="en-US" sz="950" dirty="0"/>
+          </a:p>
+        </p:txBody>
+      </p:sp>
+      <p:sp>
+        <p:nvSpPr>
+          <p:cNvPr id="12" name="Text 9"/>
+          <p:cNvSpPr txBox="1"/>
+          <p:nvPr/>
+        </p:nvSpPr>
+        <p:spPr>
+          <a:xfrm>
+            <a:off x="6393028" y="2423160"/>
+            <a:ext cx="5067148" cy="1280160"/>
+          </a:xfrm>
+          <a:prstGeom prst="rect">
+            <a:avLst/>
+          </a:prstGeom>
+          <a:noFill/>
+          <a:ln/>
+        </p:spPr>
+        <p:txBody>
+          <a:bodyPr wrap="square" lIns="0" tIns="0" rIns="0" bIns="0" rtlCol="0" anchor="t"/>
+          <a:lstStyle/>
+          <a:p>
+            <a:pPr indent="0" marL="0">
+              <a:buNone/>
+            </a:pPr>
+            <a:r>
+              <a:rPr lang="en-US" sz="1200" dirty="0">
+                <a:solidFill>
+                  <a:srgbClr val="556B82"/>
+                </a:solidFill>
+              </a:rPr>
+              <a:t>O grupo de serviços é verificado pelo objeto S_START (AUTHOBJTYP = G4BA, AUTHOBJNAM = grupo).</a:t>
+            </a:r>
+            <a:endParaRPr lang="en-US" sz="1200" dirty="0"/>
+          </a:p>
+        </p:txBody>
+      </p:sp>
+      <p:sp>
+        <p:nvSpPr>
+          <p:cNvPr id="13" name="Cartão"/>
+          <p:cNvSpPr/>
+          <p:nvPr/>
+        </p:nvSpPr>
+        <p:spPr>
+          <a:xfrm>
+            <a:off x="548640" y="4023360"/>
+            <a:ext cx="5432908" cy="2148840"/>
+          </a:xfrm>
+          <a:prstGeom prst="roundRect">
+            <a:avLst>
+              <a:gd name="adj" fmla="val 5106"/>
+            </a:avLst>
+          </a:prstGeom>
+          <a:solidFill>
+            <a:srgbClr val="FFFFFF"/>
+          </a:solidFill>
+          <a:ln/>
+          <a:effectLst>
+            <a:outerShdw sx="100000" sy="100000" kx="0" ky="0" algn="bl" rotWithShape="0" blurRad="101600" dist="25400" dir="5400000">
+              <a:srgbClr val="223548">
+                <a:alpha val="16000"/>
+              </a:srgbClr>
+            </a:outerShdw>
+          </a:effectLst>
+        </p:spPr>
+      </p:sp>
+      <p:sp>
+        <p:nvSpPr>
+          <p:cNvPr id="14" name="Text 11"/>
+          <p:cNvSpPr txBox="1"/>
+          <p:nvPr/>
+        </p:nvSpPr>
+        <p:spPr>
+          <a:xfrm>
+            <a:off x="731520" y="4160520"/>
+            <a:ext cx="5067148" cy="274320"/>
+          </a:xfrm>
+          <a:prstGeom prst="rect">
+            <a:avLst/>
+          </a:prstGeom>
+          <a:noFill/>
+          <a:ln/>
+        </p:spPr>
+        <p:txBody>
+          <a:bodyPr wrap="square" lIns="0" tIns="0" rIns="0" bIns="0" rtlCol="0" anchor="t"/>
+          <a:lstStyle/>
+          <a:p>
+            <a:pPr indent="0" marL="0">
+              <a:buNone/>
+            </a:pPr>
+            <a:r>
+              <a:rPr lang="en-US" sz="1100" b="1" dirty="0">
+                <a:solidFill>
+                  <a:srgbClr val="1D2D3E"/>
+                </a:solidFill>
+                <a:latin typeface="Courier New" pitchFamily="34" charset="0"/>
+                <a:ea typeface="Courier New" pitchFamily="34" charset="-122"/>
+                <a:cs typeface="Courier New" pitchFamily="34" charset="-120"/>
+              </a:rPr>
+              <a:t>ZUI_PC_*_O4 → ZPC_*</a:t>
+            </a:r>
+            <a:endParaRPr lang="en-US" sz="1100" dirty="0"/>
+          </a:p>
+        </p:txBody>
+      </p:sp>
+      <p:sp>
+        <p:nvSpPr>
+          <p:cNvPr id="15" name="Status SIA6 · IAM"/>
+          <p:cNvSpPr/>
+          <p:nvPr/>
+        </p:nvSpPr>
+        <p:spPr>
+          <a:xfrm>
+            <a:off x="731520" y="4480560"/>
+            <a:ext cx="918058" cy="237744"/>
+          </a:xfrm>
+          <a:prstGeom prst="roundRect">
+            <a:avLst>
+              <a:gd name="adj" fmla="val 50000"/>
+            </a:avLst>
+          </a:prstGeom>
+          <a:solidFill>
+            <a:srgbClr val="EFF1F2"/>
+          </a:solidFill>
+          <a:ln/>
+        </p:spPr>
+        <p:txBody>
+          <a:bodyPr wrap="square" lIns="0" tIns="0" rIns="0" bIns="0" rtlCol="0" anchor="ctr"/>
+          <a:lstStyle/>
+          <a:p>
+            <a:pPr algn="ctr" indent="0" marL="0">
+              <a:buNone/>
+            </a:pPr>
+            <a:r>
+              <a:rPr lang="en-US" sz="950" b="1" dirty="0">
+                <a:solidFill>
+                  <a:srgbClr val="556B82"/>
+                </a:solidFill>
+              </a:rPr>
+              <a:t>SU24 · valores</a:t>
+            </a:r>
+            <a:endParaRPr lang="en-US" sz="950" dirty="0"/>
+          </a:p>
+        </p:txBody>
+      </p:sp>
+      <p:sp>
+        <p:nvSpPr>
+          <p:cNvPr id="16" name="Text 13"/>
+          <p:cNvSpPr txBox="1"/>
+          <p:nvPr/>
+        </p:nvSpPr>
+        <p:spPr>
+          <a:xfrm>
+            <a:off x="731520" y="4800600"/>
+            <a:ext cx="5067148" cy="1280160"/>
+          </a:xfrm>
+          <a:prstGeom prst="rect">
+            <a:avLst/>
+          </a:prstGeom>
+          <a:noFill/>
+          <a:ln/>
+        </p:spPr>
+        <p:txBody>
+          <a:bodyPr wrap="square" lIns="0" tIns="0" rIns="0" bIns="0" rtlCol="0" anchor="t"/>
+          <a:lstStyle/>
+          <a:p>
+            <a:pPr indent="0" marL="0">
+              <a:buNone/>
+            </a:pPr>
+            <a:r>
+              <a:rPr lang="en-US" sz="1200" dirty="0">
+                <a:solidFill>
+                  <a:srgbClr val="556B82"/>
+                </a:solidFill>
+              </a:rPr>
+              <a:t>Liga o grupo de serviços a ZPC_ADMIN ou ZPC_PEDIDO: a PFCG traz os objetos ao inserir o serviço.</a:t>
+            </a:r>
+            <a:endParaRPr lang="en-US" sz="1200" dirty="0"/>
+          </a:p>
+        </p:txBody>
+      </p:sp>
+      <p:sp>
+        <p:nvSpPr>
+          <p:cNvPr id="17" name="Cartão"/>
+          <p:cNvSpPr/>
+          <p:nvPr/>
+        </p:nvSpPr>
+        <p:spPr>
+          <a:xfrm>
+            <a:off x="6210148" y="4023360"/>
+            <a:ext cx="5432908" cy="2148840"/>
+          </a:xfrm>
+          <a:prstGeom prst="roundRect">
+            <a:avLst>
+              <a:gd name="adj" fmla="val 5106"/>
+            </a:avLst>
+          </a:prstGeom>
+          <a:solidFill>
+            <a:srgbClr val="FFFFFF"/>
+          </a:solidFill>
+          <a:ln/>
+          <a:effectLst>
+            <a:outerShdw sx="100000" sy="100000" kx="0" ky="0" algn="bl" rotWithShape="0" blurRad="101600" dist="25400" dir="5400000">
+              <a:srgbClr val="223548">
+                <a:alpha val="16000"/>
+              </a:srgbClr>
+            </a:outerShdw>
+          </a:effectLst>
+        </p:spPr>
+      </p:sp>
+      <p:sp>
+        <p:nvSpPr>
+          <p:cNvPr id="18" name="Text 15"/>
+          <p:cNvSpPr txBox="1"/>
+          <p:nvPr/>
+        </p:nvSpPr>
+        <p:spPr>
+          <a:xfrm>
+            <a:off x="6393028" y="4160520"/>
+            <a:ext cx="5067148" cy="274320"/>
+          </a:xfrm>
+          <a:prstGeom prst="rect">
+            <a:avLst/>
+          </a:prstGeom>
+          <a:noFill/>
+          <a:ln/>
+        </p:spPr>
+        <p:txBody>
+          <a:bodyPr wrap="square" lIns="0" tIns="0" rIns="0" bIns="0" rtlCol="0" anchor="t"/>
+          <a:lstStyle/>
+          <a:p>
+            <a:pPr indent="0" marL="0">
+              <a:buNone/>
+            </a:pPr>
+            <a:r>
+              <a:rPr lang="en-US" sz="1100" b="1" dirty="0">
+                <a:solidFill>
+                  <a:srgbClr val="1D2D3E"/>
+                </a:solidFill>
+                <a:latin typeface="Courier New" pitchFamily="34" charset="0"/>
+                <a:ea typeface="Courier New" pitchFamily="34" charset="-122"/>
+                <a:cs typeface="Courier New" pitchFamily="34" charset="-120"/>
+              </a:rPr>
+              <a:t>ZUI_PC_ANALITICO_O2</a:t>
+            </a:r>
+            <a:endParaRPr lang="en-US" sz="1100" dirty="0"/>
+          </a:p>
+        </p:txBody>
+      </p:sp>
+      <p:sp>
+        <p:nvSpPr>
+          <p:cNvPr id="19" name="Status SIA6 · IAM App"/>
+          <p:cNvSpPr/>
+          <p:nvPr/>
+        </p:nvSpPr>
+        <p:spPr>
+          <a:xfrm>
+            <a:off x="6393028" y="4480560"/>
+            <a:ext cx="1168237" cy="237744"/>
+          </a:xfrm>
+          <a:prstGeom prst="roundRect">
+            <a:avLst>
+              <a:gd name="adj" fmla="val 50000"/>
+            </a:avLst>
+          </a:prstGeom>
+          <a:solidFill>
+            <a:srgbClr val="F5FAE5"/>
+          </a:solidFill>
+          <a:ln/>
+        </p:spPr>
+        <p:txBody>
+          <a:bodyPr wrap="square" lIns="0" tIns="0" rIns="0" bIns="0" rtlCol="0" anchor="ctr"/>
+          <a:lstStyle/>
+          <a:p>
+            <a:pPr algn="ctr" indent="0" marL="0">
+              <a:buNone/>
+            </a:pPr>
+            <a:r>
+              <a:rPr lang="en-US" sz="950" b="1" dirty="0">
+                <a:solidFill>
+                  <a:srgbClr val="256F3A"/>
+                </a:solidFill>
+              </a:rPr>
+              <a:t>IWSG · OData V2</a:t>
+            </a:r>
+            <a:endParaRPr lang="en-US" sz="950" dirty="0"/>
+          </a:p>
+        </p:txBody>
+      </p:sp>
+      <p:sp>
+        <p:nvSpPr>
+          <p:cNvPr id="20" name="Text 17"/>
+          <p:cNvSpPr txBox="1"/>
+          <p:nvPr/>
+        </p:nvSpPr>
+        <p:spPr>
+          <a:xfrm>
+            <a:off x="6393028" y="4800600"/>
+            <a:ext cx="5067148" cy="1280160"/>
+          </a:xfrm>
+          <a:prstGeom prst="rect">
+            <a:avLst/>
+          </a:prstGeom>
+          <a:noFill/>
+          <a:ln/>
+        </p:spPr>
+        <p:txBody>
+          <a:bodyPr wrap="square" lIns="0" tIns="0" rIns="0" bIns="0" rtlCol="0" anchor="t"/>
+          <a:lstStyle/>
+          <a:p>
+            <a:pPr indent="0" marL="0">
+              <a:buNone/>
+            </a:pPr>
+            <a:r>
+              <a:rPr lang="en-US" sz="1200" dirty="0">
+                <a:solidFill>
+                  <a:srgbClr val="556B82"/>
+                </a:solidFill>
+              </a:rPr>
+              <a:t>Binding V2 opcional: registrado em /IWFND/MAINT_SERVICE e verificado por S_SERVICE, não S_START.</a:t>
+            </a:r>
+            <a:endParaRPr lang="en-US" sz="1200" dirty="0"/>
+          </a:p>
+        </p:txBody>
+      </p:sp>
+      <p:sp>
+        <p:nvSpPr>
+          <p:cNvPr id="25" name="Slide Number Placeholder 0"/>
+          <p:cNvSpPr>
+            <a:spLocks noGrp="1"/>
+          </p:cNvSpPr>
+          <p:nvPr>
+            <p:ph type="sldNum" sz="quarter" idx="4294967295"/>
+          </p:nvPr>
+        </p:nvSpPr>
+        <p:spPr>
+          <a:xfrm>
+            <a:off x="11183112" y="6419088"/>
+            <a:ext cx="457200" cy="274320"/>
+          </a:xfrm>
+          <a:prstGeom prst="rect">
+            <a:avLst/>
+          </a:prstGeom>
+          <a:extLst>
+            <a:ext uri="{C572A759-6A51-4108-AA02-DFA0A04FC94B}">
+              <ma14:wrappingTextBoxFlag xmlns:ma14="http://schemas.microsoft.com/office/mac/drawingml/2011/main" val="0"/>
+            </a:ext>
+          </a:extLst>
+        </p:spPr>
+        <p:txBody>
+          <a:bodyPr lIns="0" tIns="0" rIns="0" bIns="0" anchor="ctr"/>
+          <a:lstStyle>
+            <a:lvl1pPr>
+              <a:defRPr sz="900">
+                <a:solidFill>
+                  <a:srgbClr val="556B82"/>
+                </a:solidFill>
+              </a:defRPr>
+            </a:lvl1pPr>
+          </a:lstStyle>
+          <a:p>
+            <a:pPr algn="r"/>
+            <a:fld id="{F7021451-1387-4CA6-816F-3879F97B5CBC}" type="slidenum">
+              <a:rPr b="0" lang="en-US"/>
+              <a:t>6</a:t>
+            </a:fld>
+            <a:endParaRPr lang="en-US"/>
+          </a:p>
+        </p:txBody>
+      </p:sp>
+    </p:spTree>
+  </p:cSld>
+  <p:clrMapOvr>
+    <a:masterClrMapping/>
+  </p:clrMapOvr>
+</p:sld>
+</file>
+
+<file path=ppt/slides/slide26.xml><?xml version="1.0" encoding="utf-8"?>
+<p:sld xmlns:a="http://schemas.openxmlformats.org/drawingml/2006/main" xmlns:r="http://schemas.openxmlformats.org/officeDocument/2006/relationships" xmlns:p="http://schemas.openxmlformats.org/presentationml/2006/main">
+  <p:cSld name="Slide 9">
+    <p:spTree>
+      <p:nvGrpSpPr>
+        <p:cNvPr id="1" name=""/>
+        <p:cNvGrpSpPr/>
+        <p:nvPr/>
+      </p:nvGrpSpPr>
+      <p:grpSpPr>
+        <a:xfrm>
+          <a:off x="0" y="0"/>
+          <a:ext cx="0" cy="0"/>
+          <a:chOff x="0" y="0"/>
+          <a:chExt cx="0" cy="0"/>
+        </a:xfrm>
+      </p:grpSpPr>
+      <p:sp>
+        <p:nvSpPr>
+          <p:cNvPr id="2" name="Text 0"/>
+          <p:cNvSpPr/>
+          <p:nvPr>
+            <p:ph idx="100" type="body" hasCustomPrompt="1"/>
+          </p:nvPr>
+        </p:nvSpPr>
+        <p:spPr>
+          <a:xfrm>
+            <a:off x="548640" y="384048"/>
+            <a:ext cx="9144000" cy="274320"/>
+          </a:xfrm>
+          <a:prstGeom prst="rect">
+            <a:avLst/>
+          </a:prstGeom>
+          <a:noFill/>
+          <a:ln/>
+        </p:spPr>
+        <p:txBody>
+          <a:bodyPr wrap="square" lIns="0" tIns="0" rIns="0" bIns="0" rtlCol="0" anchor="ctr"/>
+          <a:lstStyle/>
+          <a:p>
+            <a:pPr algn="l" indent="0" marL="0">
+              <a:buNone/>
+            </a:pPr>
+            <a:r>
+              <a:rPr lang="en-US" sz="1100" b="1" spc="150" kern="0" dirty="0">
+                <a:solidFill>
+                  <a:schemeClr val="accent1"/>
+                </a:solidFill>
+              </a:rPr>
+              <a:t>ON-PREMISE · PFCG</a:t>
+            </a:r>
+            <a:endParaRPr lang="en-US" sz="1100" dirty="0"/>
+          </a:p>
+        </p:txBody>
+      </p:sp>
+      <p:sp>
+        <p:nvSpPr>
+          <p:cNvPr id="3" name="Text 0"/>
+          <p:cNvSpPr/>
+          <p:nvPr>
+            <p:ph idx="101" type="title" hasCustomPrompt="1"/>
+          </p:nvPr>
+        </p:nvSpPr>
+        <p:spPr>
+          <a:xfrm>
+            <a:off x="548640" y="676656"/>
+            <a:ext cx="11094415" cy="658368"/>
+          </a:xfrm>
+          <a:prstGeom prst="rect">
+            <a:avLst/>
+          </a:prstGeom>
+          <a:noFill/>
+          <a:ln/>
+        </p:spPr>
+        <p:txBody>
+          <a:bodyPr wrap="square" lIns="0" tIns="0" rIns="0" bIns="0" rtlCol="0" anchor="ctr"/>
+          <a:lstStyle/>
+          <a:p>
+            <a:pPr algn="l" indent="0" marL="0">
+              <a:buNone/>
+            </a:pPr>
+            <a:r>
+              <a:rPr lang="en-US" sz="3000" b="1" dirty="0">
+                <a:solidFill>
+                  <a:schemeClr val="tx1"/>
+                </a:solidFill>
+              </a:rPr>
+              <a:t>Do objeto de autorização ao usuário no On-Premise</a:t>
+            </a:r>
+            <a:endParaRPr lang="en-US" sz="3000" dirty="0"/>
+          </a:p>
+        </p:txBody>
+      </p:sp>
+      <p:sp>
+        <p:nvSpPr>
+          <p:cNvPr id="5" name="Cartão"/>
+          <p:cNvSpPr/>
+          <p:nvPr/>
+        </p:nvSpPr>
+        <p:spPr>
+          <a:xfrm>
+            <a:off x="548640" y="1783080"/>
+            <a:ext cx="1962851" cy="2514600"/>
+          </a:xfrm>
+          <a:prstGeom prst="roundRect">
+            <a:avLst>
+              <a:gd name="adj" fmla="val 5590"/>
+            </a:avLst>
+          </a:prstGeom>
+          <a:solidFill>
+            <a:srgbClr val="FFFFFF"/>
+          </a:solidFill>
+          <a:ln/>
+          <a:effectLst>
+            <a:outerShdw sx="100000" sy="100000" kx="0" ky="0" algn="bl" rotWithShape="0" blurRad="101600" dist="25400" dir="5400000">
+              <a:srgbClr val="223548">
+                <a:alpha val="16000"/>
+              </a:srgbClr>
+            </a:outerShdw>
+          </a:effectLst>
+        </p:spPr>
+      </p:sp>
+      <p:sp>
+        <p:nvSpPr>
+          <p:cNvPr id="6" name="Ícone locked"/>
+          <p:cNvSpPr/>
+          <p:nvPr/>
+        </p:nvSpPr>
+        <p:spPr>
+          <a:xfrm>
+            <a:off x="1210026" y="2011680"/>
+            <a:ext cx="640080" cy="640080"/>
+          </a:xfrm>
+          <a:prstGeom prst="roundRect">
+            <a:avLst>
+              <a:gd name="adj" fmla="val 22000"/>
+            </a:avLst>
+          </a:prstGeom>
+          <a:solidFill>
+            <a:srgbClr val="F3ECFB"/>
+          </a:solidFill>
+          <a:ln/>
+        </p:spPr>
+      </p:sp>
+      <p:pic>
+        <p:nvPicPr>
+          <p:cNvPr id="7" name="Image 0" descr="locked">    </p:cNvPr>
+          <p:cNvPicPr>
+            <a:picLocks noChangeAspect="1"/>
+          </p:cNvPicPr>
+          <p:nvPr/>
+        </p:nvPicPr>
+        <p:blipFill>
+          <a:blip r:embed="rId1"/>
+          <a:stretch>
+            <a:fillRect/>
+          </a:stretch>
+        </p:blipFill>
+        <p:spPr>
+          <a:xfrm>
+            <a:off x="1363645" y="2165299"/>
+            <a:ext cx="332842" cy="332842"/>
+          </a:xfrm>
+          <a:prstGeom prst="rect">
+            <a:avLst/>
+          </a:prstGeom>
+        </p:spPr>
+      </p:pic>
+      <p:sp>
+        <p:nvSpPr>
+          <p:cNvPr id="8" name="Text 4"/>
+          <p:cNvSpPr txBox="1"/>
+          <p:nvPr/>
+        </p:nvSpPr>
+        <p:spPr>
+          <a:xfrm>
+            <a:off x="685800" y="2788920"/>
+            <a:ext cx="1688531" cy="502920"/>
+          </a:xfrm>
+          <a:prstGeom prst="rect">
+            <a:avLst/>
+          </a:prstGeom>
+          <a:noFill/>
+          <a:ln/>
+        </p:spPr>
+        <p:txBody>
+          <a:bodyPr wrap="square" lIns="0" tIns="0" rIns="0" bIns="0" rtlCol="0" anchor="ctr"/>
+          <a:lstStyle/>
+          <a:p>
+            <a:pPr algn="ctr" indent="0" marL="0">
+              <a:buNone/>
+            </a:pPr>
+            <a:r>
+              <a:rPr lang="en-US" sz="1400" b="1" dirty="0">
+                <a:solidFill>
+                  <a:srgbClr val="1D2D3E"/>
+                </a:solidFill>
+              </a:rPr>
+              <a:t>Objetos (SU21)</a:t>
+            </a:r>
+            <a:endParaRPr lang="en-US" sz="1400" dirty="0"/>
+          </a:p>
+        </p:txBody>
+      </p:sp>
+      <p:sp>
+        <p:nvSpPr>
+          <p:cNvPr id="9" name="Text 5"/>
+          <p:cNvSpPr txBox="1"/>
+          <p:nvPr/>
+        </p:nvSpPr>
+        <p:spPr>
+          <a:xfrm>
+            <a:off x="685800" y="3310128"/>
+            <a:ext cx="1688531" cy="457200"/>
+          </a:xfrm>
+          <a:prstGeom prst="rect">
+            <a:avLst/>
+          </a:prstGeom>
+          <a:noFill/>
+          <a:ln/>
+        </p:spPr>
+        <p:txBody>
+          <a:bodyPr wrap="square" lIns="0" tIns="0" rIns="0" bIns="0" rtlCol="0" anchor="t"/>
+          <a:lstStyle/>
+          <a:p>
+            <a:pPr algn="ctr" indent="0" marL="0">
+              <a:buNone/>
+            </a:pPr>
+            <a:r>
+              <a:rPr lang="en-US" sz="1000" dirty="0">
+                <a:solidFill>
+                  <a:srgbClr val="0064D9"/>
+                </a:solidFill>
+                <a:latin typeface="Courier New" pitchFamily="34" charset="0"/>
+                <a:ea typeface="Courier New" pitchFamily="34" charset="-122"/>
+                <a:cs typeface="Courier New" pitchFamily="34" charset="-120"/>
+              </a:rPr>
+              <a:t>ZPC_ADMIN</a:t>
+            </a:r>
+            <a:endParaRPr lang="en-US" sz="1000" dirty="0"/>
+          </a:p>
+          <a:p>
+            <a:pPr algn="ctr" indent="0" marL="0">
+              <a:buNone/>
+            </a:pPr>
+            <a:r>
+              <a:rPr lang="en-US" sz="1000" dirty="0">
+                <a:solidFill>
+                  <a:srgbClr val="0064D9"/>
+                </a:solidFill>
+                <a:latin typeface="Courier New" pitchFamily="34" charset="0"/>
+                <a:ea typeface="Courier New" pitchFamily="34" charset="-122"/>
+                <a:cs typeface="Courier New" pitchFamily="34" charset="-120"/>
+              </a:rPr>
+              <a:t>ZPC_PEDIDO</a:t>
+            </a:r>
+            <a:endParaRPr lang="en-US" sz="1000" dirty="0"/>
+          </a:p>
+        </p:txBody>
+      </p:sp>
+      <p:sp>
+        <p:nvSpPr>
+          <p:cNvPr id="10" name="Text 6"/>
+          <p:cNvSpPr txBox="1"/>
+          <p:nvPr/>
+        </p:nvSpPr>
+        <p:spPr>
+          <a:xfrm>
+            <a:off x="685800" y="3822192"/>
+            <a:ext cx="1688531" cy="320040"/>
+          </a:xfrm>
+          <a:prstGeom prst="rect">
+            <a:avLst/>
+          </a:prstGeom>
+          <a:noFill/>
+          <a:ln/>
+        </p:spPr>
+        <p:txBody>
+          <a:bodyPr wrap="square" lIns="0" tIns="0" rIns="0" bIns="0" rtlCol="0" anchor="t"/>
+          <a:lstStyle/>
+          <a:p>
+            <a:pPr algn="ctr" indent="0" marL="0">
+              <a:buNone/>
+            </a:pPr>
+            <a:r>
+              <a:rPr lang="en-US" sz="1100" dirty="0">
+                <a:solidFill>
+                  <a:srgbClr val="556B82"/>
+                </a:solidFill>
+              </a:rPr>
+              <a:t>classe ZPC · ACTVT</a:t>
+            </a:r>
+            <a:endParaRPr lang="en-US" sz="1100" dirty="0"/>
+          </a:p>
+        </p:txBody>
+      </p:sp>
+      <p:sp>
+        <p:nvSpPr>
+          <p:cNvPr id="11" name="Shape 7"/>
+          <p:cNvSpPr/>
+          <p:nvPr/>
+        </p:nvSpPr>
+        <p:spPr>
+          <a:xfrm>
+            <a:off x="2548067" y="3035808"/>
+            <a:ext cx="246888" cy="0"/>
+          </a:xfrm>
+          <a:prstGeom prst="line">
+            <a:avLst/>
+          </a:prstGeom>
+          <a:noFill/>
+          <a:ln w="25400">
+            <a:solidFill>
+              <a:srgbClr val="556B82"/>
+            </a:solidFill>
+            <a:prstDash val="solid"/>
+            <a:tailEnd type="triangle"/>
+          </a:ln>
+        </p:spPr>
+      </p:sp>
+      <p:sp>
+        <p:nvSpPr>
+          <p:cNvPr id="12" name="Cartão"/>
+          <p:cNvSpPr/>
+          <p:nvPr/>
+        </p:nvSpPr>
+        <p:spPr>
+          <a:xfrm>
+            <a:off x="2831531" y="1783080"/>
+            <a:ext cx="1962851" cy="2514600"/>
+          </a:xfrm>
+          <a:prstGeom prst="roundRect">
+            <a:avLst>
+              <a:gd name="adj" fmla="val 5590"/>
+            </a:avLst>
+          </a:prstGeom>
+          <a:solidFill>
+            <a:srgbClr val="FFFFFF"/>
+          </a:solidFill>
+          <a:ln/>
+          <a:effectLst>
+            <a:outerShdw sx="100000" sy="100000" kx="0" ky="0" algn="bl" rotWithShape="0" blurRad="101600" dist="25400" dir="5400000">
+              <a:srgbClr val="223548">
+                <a:alpha val="16000"/>
+              </a:srgbClr>
+            </a:outerShdw>
+          </a:effectLst>
+        </p:spPr>
+      </p:sp>
+      <p:sp>
+        <p:nvSpPr>
+          <p:cNvPr id="13" name="Ícone action-settings"/>
+          <p:cNvSpPr/>
+          <p:nvPr/>
+        </p:nvSpPr>
+        <p:spPr>
+          <a:xfrm>
+            <a:off x="3492917" y="2011680"/>
+            <a:ext cx="640080" cy="640080"/>
+          </a:xfrm>
+          <a:prstGeom prst="roundRect">
+            <a:avLst>
+              <a:gd name="adj" fmla="val 22000"/>
+            </a:avLst>
+          </a:prstGeom>
+          <a:solidFill>
+            <a:srgbClr val="E1F4FF"/>
+          </a:solidFill>
+          <a:ln/>
+        </p:spPr>
+      </p:sp>
+      <p:pic>
+        <p:nvPicPr>
+          <p:cNvPr id="14" name="Image 1" descr="action-settings">    </p:cNvPr>
+          <p:cNvPicPr>
+            <a:picLocks noChangeAspect="1"/>
+          </p:cNvPicPr>
+          <p:nvPr/>
+        </p:nvPicPr>
+        <p:blipFill>
+          <a:blip r:embed="rId2"/>
+          <a:stretch>
+            <a:fillRect/>
+          </a:stretch>
+        </p:blipFill>
+        <p:spPr>
+          <a:xfrm>
+            <a:off x="3646536" y="2165299"/>
+            <a:ext cx="332842" cy="332842"/>
+          </a:xfrm>
+          <a:prstGeom prst="rect">
+            <a:avLst/>
+          </a:prstGeom>
+        </p:spPr>
+      </p:pic>
+      <p:sp>
+        <p:nvSpPr>
+          <p:cNvPr id="15" name="Text 10"/>
+          <p:cNvSpPr txBox="1"/>
+          <p:nvPr/>
+        </p:nvSpPr>
+        <p:spPr>
+          <a:xfrm>
+            <a:off x="2968691" y="2788920"/>
+            <a:ext cx="1688531" cy="502920"/>
+          </a:xfrm>
+          <a:prstGeom prst="rect">
+            <a:avLst/>
+          </a:prstGeom>
+          <a:noFill/>
+          <a:ln/>
+        </p:spPr>
+        <p:txBody>
+          <a:bodyPr wrap="square" lIns="0" tIns="0" rIns="0" bIns="0" rtlCol="0" anchor="ctr"/>
+          <a:lstStyle/>
+          <a:p>
+            <a:pPr algn="ctr" indent="0" marL="0">
+              <a:buNone/>
+            </a:pPr>
+            <a:r>
+              <a:rPr lang="en-US" sz="1400" b="1" dirty="0">
+                <a:solidFill>
+                  <a:srgbClr val="1D2D3E"/>
+                </a:solidFill>
+              </a:rPr>
+              <a:t>SU24</a:t>
+            </a:r>
+            <a:endParaRPr lang="en-US" sz="1400" dirty="0"/>
+          </a:p>
+        </p:txBody>
+      </p:sp>
+      <p:sp>
+        <p:nvSpPr>
+          <p:cNvPr id="16" name="Text 11"/>
+          <p:cNvSpPr txBox="1"/>
+          <p:nvPr/>
+        </p:nvSpPr>
+        <p:spPr>
+          <a:xfrm>
+            <a:off x="2968691" y="3310128"/>
+            <a:ext cx="1688531" cy="457200"/>
+          </a:xfrm>
+          <a:prstGeom prst="rect">
+            <a:avLst/>
+          </a:prstGeom>
+          <a:noFill/>
+          <a:ln/>
+        </p:spPr>
+        <p:txBody>
+          <a:bodyPr wrap="square" lIns="0" tIns="0" rIns="0" bIns="0" rtlCol="0" anchor="t"/>
+          <a:lstStyle/>
+          <a:p>
+            <a:pPr algn="ctr" indent="0" marL="0">
+              <a:buNone/>
+            </a:pPr>
+            <a:r>
+              <a:rPr lang="en-US" sz="1000" dirty="0">
+                <a:solidFill>
+                  <a:srgbClr val="0064D9"/>
+                </a:solidFill>
+                <a:latin typeface="Courier New" pitchFamily="34" charset="0"/>
+                <a:ea typeface="Courier New" pitchFamily="34" charset="-122"/>
+                <a:cs typeface="Courier New" pitchFamily="34" charset="-120"/>
+              </a:rPr>
+              <a:t>ZUI_PC_*_O4</a:t>
+            </a:r>
+            <a:endParaRPr lang="en-US" sz="1000" dirty="0"/>
+          </a:p>
+        </p:txBody>
+      </p:sp>
+      <p:sp>
+        <p:nvSpPr>
+          <p:cNvPr id="17" name="Text 12"/>
+          <p:cNvSpPr txBox="1"/>
+          <p:nvPr/>
+        </p:nvSpPr>
+        <p:spPr>
+          <a:xfrm>
+            <a:off x="2968691" y="3822192"/>
+            <a:ext cx="1688531" cy="320040"/>
+          </a:xfrm>
+          <a:prstGeom prst="rect">
+            <a:avLst/>
+          </a:prstGeom>
+          <a:noFill/>
+          <a:ln/>
+        </p:spPr>
+        <p:txBody>
+          <a:bodyPr wrap="square" lIns="0" tIns="0" rIns="0" bIns="0" rtlCol="0" anchor="t"/>
+          <a:lstStyle/>
+          <a:p>
+            <a:pPr algn="ctr" indent="0" marL="0">
+              <a:buNone/>
+            </a:pPr>
+            <a:r>
+              <a:rPr lang="en-US" sz="1100" dirty="0">
+                <a:solidFill>
+                  <a:srgbClr val="556B82"/>
+                </a:solidFill>
+              </a:rPr>
+              <a:t>serviço + valores ACTVT</a:t>
+            </a:r>
+            <a:endParaRPr lang="en-US" sz="1100" dirty="0"/>
+          </a:p>
+        </p:txBody>
+      </p:sp>
+      <p:sp>
+        <p:nvSpPr>
+          <p:cNvPr id="18" name="Shape 13"/>
+          <p:cNvSpPr/>
+          <p:nvPr/>
+        </p:nvSpPr>
+        <p:spPr>
+          <a:xfrm>
+            <a:off x="4830958" y="3035808"/>
+            <a:ext cx="246888" cy="0"/>
+          </a:xfrm>
+          <a:prstGeom prst="line">
+            <a:avLst/>
+          </a:prstGeom>
+          <a:noFill/>
+          <a:ln w="25400">
+            <a:solidFill>
+              <a:srgbClr val="556B82"/>
+            </a:solidFill>
+            <a:prstDash val="solid"/>
+            <a:tailEnd type="triangle"/>
+          </a:ln>
+        </p:spPr>
+      </p:sp>
+      <p:sp>
+        <p:nvSpPr>
+          <p:cNvPr id="19" name="Cartão"/>
+          <p:cNvSpPr/>
+          <p:nvPr/>
+        </p:nvSpPr>
+        <p:spPr>
+          <a:xfrm>
+            <a:off x="5114422" y="1783080"/>
+            <a:ext cx="1962851" cy="2514600"/>
+          </a:xfrm>
+          <a:prstGeom prst="roundRect">
+            <a:avLst>
+              <a:gd name="adj" fmla="val 5590"/>
+            </a:avLst>
+          </a:prstGeom>
+          <a:solidFill>
+            <a:srgbClr val="FFFFFF"/>
+          </a:solidFill>
+          <a:ln/>
+          <a:effectLst>
+            <a:outerShdw sx="100000" sy="100000" kx="0" ky="0" algn="bl" rotWithShape="0" blurRad="101600" dist="25400" dir="5400000">
+              <a:srgbClr val="223548">
+                <a:alpha val="16000"/>
+              </a:srgbClr>
+            </a:outerShdw>
+          </a:effectLst>
+        </p:spPr>
+      </p:sp>
+      <p:sp>
+        <p:nvSpPr>
+          <p:cNvPr id="20" name="Ícone list"/>
+          <p:cNvSpPr/>
+          <p:nvPr/>
+        </p:nvSpPr>
+        <p:spPr>
+          <a:xfrm>
+            <a:off x="5775808" y="2011680"/>
+            <a:ext cx="640080" cy="640080"/>
+          </a:xfrm>
+          <a:prstGeom prst="roundRect">
+            <a:avLst>
+              <a:gd name="adj" fmla="val 22000"/>
+            </a:avLst>
+          </a:prstGeom>
+          <a:solidFill>
+            <a:srgbClr val="E3F7F6"/>
+          </a:solidFill>
+          <a:ln/>
+        </p:spPr>
+      </p:sp>
+      <p:pic>
+        <p:nvPicPr>
+          <p:cNvPr id="21" name="Image 2" descr="list">    </p:cNvPr>
+          <p:cNvPicPr>
+            <a:picLocks noChangeAspect="1"/>
+          </p:cNvPicPr>
+          <p:nvPr/>
+        </p:nvPicPr>
+        <p:blipFill>
+          <a:blip r:embed="rId3"/>
+          <a:stretch>
+            <a:fillRect/>
+          </a:stretch>
+        </p:blipFill>
+        <p:spPr>
+          <a:xfrm>
+            <a:off x="5929427" y="2165299"/>
+            <a:ext cx="332842" cy="332842"/>
+          </a:xfrm>
+          <a:prstGeom prst="rect">
+            <a:avLst/>
+          </a:prstGeom>
+        </p:spPr>
+      </p:pic>
+      <p:sp>
+        <p:nvSpPr>
+          <p:cNvPr id="22" name="Text 16"/>
+          <p:cNvSpPr txBox="1"/>
+          <p:nvPr/>
+        </p:nvSpPr>
+        <p:spPr>
+          <a:xfrm>
+            <a:off x="5251582" y="2788920"/>
+            <a:ext cx="1688531" cy="502920"/>
+          </a:xfrm>
+          <a:prstGeom prst="rect">
+            <a:avLst/>
+          </a:prstGeom>
+          <a:noFill/>
+          <a:ln/>
+        </p:spPr>
+        <p:txBody>
+          <a:bodyPr wrap="square" lIns="0" tIns="0" rIns="0" bIns="0" rtlCol="0" anchor="ctr"/>
+          <a:lstStyle/>
+          <a:p>
+            <a:pPr algn="ctr" indent="0" marL="0">
+              <a:buNone/>
+            </a:pPr>
+            <a:r>
+              <a:rPr lang="en-US" sz="1400" b="1" dirty="0">
+                <a:solidFill>
+                  <a:srgbClr val="1D2D3E"/>
+                </a:solidFill>
+              </a:rPr>
+              <a:t>Menu da role</a:t>
+            </a:r>
+            <a:endParaRPr lang="en-US" sz="1400" dirty="0"/>
+          </a:p>
+        </p:txBody>
+      </p:sp>
+      <p:sp>
+        <p:nvSpPr>
+          <p:cNvPr id="23" name="Text 17"/>
+          <p:cNvSpPr txBox="1"/>
+          <p:nvPr/>
+        </p:nvSpPr>
+        <p:spPr>
+          <a:xfrm>
+            <a:off x="5251582" y="3310128"/>
+            <a:ext cx="1688531" cy="457200"/>
+          </a:xfrm>
+          <a:prstGeom prst="rect">
+            <a:avLst/>
+          </a:prstGeom>
+          <a:noFill/>
+          <a:ln/>
+        </p:spPr>
+        <p:txBody>
+          <a:bodyPr wrap="square" lIns="0" tIns="0" rIns="0" bIns="0" rtlCol="0" anchor="t"/>
+          <a:lstStyle/>
+          <a:p>
+            <a:pPr algn="ctr" indent="0" marL="0">
+              <a:buNone/>
+            </a:pPr>
+            <a:r>
+              <a:rPr lang="en-US" sz="1000" dirty="0">
+                <a:solidFill>
+                  <a:srgbClr val="0064D9"/>
+                </a:solidFill>
+                <a:latin typeface="Courier New" pitchFamily="34" charset="0"/>
+                <a:ea typeface="Courier New" pitchFamily="34" charset="-122"/>
+                <a:cs typeface="Courier New" pitchFamily="34" charset="-120"/>
+              </a:rPr>
+              <a:t>S_START</a:t>
+            </a:r>
+            <a:endParaRPr lang="en-US" sz="1000" dirty="0"/>
+          </a:p>
+        </p:txBody>
+      </p:sp>
+      <p:sp>
+        <p:nvSpPr>
+          <p:cNvPr id="24" name="Text 18"/>
+          <p:cNvSpPr txBox="1"/>
+          <p:nvPr/>
+        </p:nvSpPr>
+        <p:spPr>
+          <a:xfrm>
+            <a:off x="5251582" y="3822192"/>
+            <a:ext cx="1688531" cy="320040"/>
+          </a:xfrm>
+          <a:prstGeom prst="rect">
+            <a:avLst/>
+          </a:prstGeom>
+          <a:noFill/>
+          <a:ln/>
+        </p:spPr>
+        <p:txBody>
+          <a:bodyPr wrap="square" lIns="0" tIns="0" rIns="0" bIns="0" rtlCol="0" anchor="t"/>
+          <a:lstStyle/>
+          <a:p>
+            <a:pPr algn="ctr" indent="0" marL="0">
+              <a:buNone/>
+            </a:pPr>
+            <a:r>
+              <a:rPr lang="en-US" sz="1100" dirty="0">
+                <a:solidFill>
+                  <a:srgbClr val="556B82"/>
+                </a:solidFill>
+              </a:rPr>
+              <a:t>um por grupo de serviços</a:t>
+            </a:r>
+            <a:endParaRPr lang="en-US" sz="1100" dirty="0"/>
+          </a:p>
+        </p:txBody>
+      </p:sp>
+      <p:sp>
+        <p:nvSpPr>
+          <p:cNvPr id="25" name="Shape 19"/>
+          <p:cNvSpPr/>
+          <p:nvPr/>
+        </p:nvSpPr>
+        <p:spPr>
+          <a:xfrm>
+            <a:off x="7113849" y="3035808"/>
+            <a:ext cx="246888" cy="0"/>
+          </a:xfrm>
+          <a:prstGeom prst="line">
+            <a:avLst/>
+          </a:prstGeom>
+          <a:noFill/>
+          <a:ln w="25400">
+            <a:solidFill>
+              <a:srgbClr val="556B82"/>
+            </a:solidFill>
+            <a:prstDash val="solid"/>
+            <a:tailEnd type="triangle"/>
+          </a:ln>
+        </p:spPr>
+      </p:sp>
+      <p:sp>
+        <p:nvSpPr>
+          <p:cNvPr id="26" name="Cartão"/>
+          <p:cNvSpPr/>
+          <p:nvPr/>
+        </p:nvSpPr>
+        <p:spPr>
+          <a:xfrm>
+            <a:off x="7397313" y="1783080"/>
+            <a:ext cx="1962851" cy="2514600"/>
+          </a:xfrm>
+          <a:prstGeom prst="roundRect">
+            <a:avLst>
+              <a:gd name="adj" fmla="val 5590"/>
+            </a:avLst>
+          </a:prstGeom>
+          <a:solidFill>
+            <a:srgbClr val="FFFFFF"/>
+          </a:solidFill>
+          <a:ln/>
+          <a:effectLst>
+            <a:outerShdw sx="100000" sy="100000" kx="0" ky="0" algn="bl" rotWithShape="0" blurRad="101600" dist="25400" dir="5400000">
+              <a:srgbClr val="223548">
+                <a:alpha val="16000"/>
+              </a:srgbClr>
+            </a:outerShdw>
+          </a:effectLst>
+        </p:spPr>
+      </p:sp>
+      <p:sp>
+        <p:nvSpPr>
+          <p:cNvPr id="27" name="Ícone role"/>
+          <p:cNvSpPr/>
+          <p:nvPr/>
+        </p:nvSpPr>
+        <p:spPr>
+          <a:xfrm>
+            <a:off x="8058699" y="2011680"/>
+            <a:ext cx="640080" cy="640080"/>
+          </a:xfrm>
+          <a:prstGeom prst="roundRect">
+            <a:avLst>
+              <a:gd name="adj" fmla="val 22000"/>
+            </a:avLst>
+          </a:prstGeom>
+          <a:solidFill>
+            <a:srgbClr val="FFF3E0"/>
+          </a:solidFill>
+          <a:ln/>
+        </p:spPr>
+      </p:sp>
+      <p:pic>
+        <p:nvPicPr>
+          <p:cNvPr id="28" name="Image 3" descr="role">    </p:cNvPr>
+          <p:cNvPicPr>
+            <a:picLocks noChangeAspect="1"/>
+          </p:cNvPicPr>
+          <p:nvPr/>
+        </p:nvPicPr>
+        <p:blipFill>
+          <a:blip r:embed="rId4"/>
+          <a:stretch>
+            <a:fillRect/>
+          </a:stretch>
+        </p:blipFill>
+        <p:spPr>
+          <a:xfrm>
+            <a:off x="8212318" y="2165299"/>
+            <a:ext cx="332842" cy="332842"/>
+          </a:xfrm>
+          <a:prstGeom prst="rect">
+            <a:avLst/>
+          </a:prstGeom>
+        </p:spPr>
+      </p:pic>
+      <p:sp>
+        <p:nvSpPr>
+          <p:cNvPr id="29" name="Text 22"/>
+          <p:cNvSpPr txBox="1"/>
+          <p:nvPr/>
+        </p:nvSpPr>
+        <p:spPr>
+          <a:xfrm>
+            <a:off x="7534473" y="2788920"/>
+            <a:ext cx="1688531" cy="502920"/>
+          </a:xfrm>
+          <a:prstGeom prst="rect">
+            <a:avLst/>
+          </a:prstGeom>
+          <a:noFill/>
+          <a:ln/>
+        </p:spPr>
+        <p:txBody>
+          <a:bodyPr wrap="square" lIns="0" tIns="0" rIns="0" bIns="0" rtlCol="0" anchor="ctr"/>
+          <a:lstStyle/>
+          <a:p>
+            <a:pPr algn="ctr" indent="0" marL="0">
+              <a:buNone/>
+            </a:pPr>
+            <a:r>
+              <a:rPr lang="en-US" sz="1400" b="1" dirty="0">
+                <a:solidFill>
+                  <a:srgbClr val="1D2D3E"/>
+                </a:solidFill>
+              </a:rPr>
+              <a:t>Role (PFCG)</a:t>
+            </a:r>
+            <a:endParaRPr lang="en-US" sz="1400" dirty="0"/>
+          </a:p>
+        </p:txBody>
+      </p:sp>
+      <p:sp>
+        <p:nvSpPr>
+          <p:cNvPr id="30" name="Text 23"/>
+          <p:cNvSpPr txBox="1"/>
+          <p:nvPr/>
+        </p:nvSpPr>
+        <p:spPr>
+          <a:xfrm>
+            <a:off x="7534473" y="3310128"/>
+            <a:ext cx="1688531" cy="457200"/>
+          </a:xfrm>
+          <a:prstGeom prst="rect">
+            <a:avLst/>
+          </a:prstGeom>
+          <a:noFill/>
+          <a:ln/>
+        </p:spPr>
+        <p:txBody>
+          <a:bodyPr wrap="square" lIns="0" tIns="0" rIns="0" bIns="0" rtlCol="0" anchor="t"/>
+          <a:lstStyle/>
+          <a:p>
+            <a:pPr algn="ctr" indent="0" marL="0">
+              <a:buNone/>
+            </a:pPr>
+            <a:r>
+              <a:rPr lang="en-US" sz="1000" dirty="0">
+                <a:solidFill>
+                  <a:srgbClr val="0064D9"/>
+                </a:solidFill>
+                <a:latin typeface="Courier New" pitchFamily="34" charset="0"/>
+                <a:ea typeface="Courier New" pitchFamily="34" charset="-122"/>
+                <a:cs typeface="Courier New" pitchFamily="34" charset="-120"/>
+              </a:rPr>
+              <a:t>Z_PC_ADMIN</a:t>
+            </a:r>
+            <a:endParaRPr lang="en-US" sz="1000" dirty="0"/>
+          </a:p>
+          <a:p>
+            <a:pPr algn="ctr" indent="0" marL="0">
+              <a:buNone/>
+            </a:pPr>
+            <a:r>
+              <a:rPr lang="en-US" sz="1000" dirty="0">
+                <a:solidFill>
+                  <a:srgbClr val="0064D9"/>
+                </a:solidFill>
+                <a:latin typeface="Courier New" pitchFamily="34" charset="0"/>
+                <a:ea typeface="Courier New" pitchFamily="34" charset="-122"/>
+                <a:cs typeface="Courier New" pitchFamily="34" charset="-120"/>
+              </a:rPr>
+              <a:t>Z_PC_COMUM</a:t>
+            </a:r>
+            <a:endParaRPr lang="en-US" sz="1000" dirty="0"/>
+          </a:p>
+        </p:txBody>
+      </p:sp>
+      <p:sp>
+        <p:nvSpPr>
+          <p:cNvPr id="31" name="Text 24"/>
+          <p:cNvSpPr txBox="1"/>
+          <p:nvPr/>
+        </p:nvSpPr>
+        <p:spPr>
+          <a:xfrm>
+            <a:off x="7534473" y="3822192"/>
+            <a:ext cx="1688531" cy="320040"/>
+          </a:xfrm>
+          <a:prstGeom prst="rect">
+            <a:avLst/>
+          </a:prstGeom>
+          <a:noFill/>
+          <a:ln/>
+        </p:spPr>
+        <p:txBody>
+          <a:bodyPr wrap="square" lIns="0" tIns="0" rIns="0" bIns="0" rtlCol="0" anchor="t"/>
+          <a:lstStyle/>
+          <a:p>
+            <a:pPr algn="ctr" indent="0" marL="0">
+              <a:buNone/>
+            </a:pPr>
+            <a:r>
+              <a:rPr lang="en-US" sz="1100" dirty="0">
+                <a:solidFill>
+                  <a:srgbClr val="556B82"/>
+                </a:solidFill>
+              </a:rPr>
+              <a:t>perfil gerado</a:t>
+            </a:r>
+            <a:endParaRPr lang="en-US" sz="1100" dirty="0"/>
+          </a:p>
+        </p:txBody>
+      </p:sp>
+      <p:sp>
+        <p:nvSpPr>
+          <p:cNvPr id="32" name="Shape 25"/>
+          <p:cNvSpPr/>
+          <p:nvPr/>
+        </p:nvSpPr>
+        <p:spPr>
+          <a:xfrm>
+            <a:off x="9396740" y="3035808"/>
+            <a:ext cx="246888" cy="0"/>
+          </a:xfrm>
+          <a:prstGeom prst="line">
+            <a:avLst/>
+          </a:prstGeom>
+          <a:noFill/>
+          <a:ln w="25400">
+            <a:solidFill>
+              <a:srgbClr val="556B82"/>
+            </a:solidFill>
+            <a:prstDash val="solid"/>
+            <a:tailEnd type="triangle"/>
+          </a:ln>
+        </p:spPr>
+      </p:sp>
+      <p:sp>
+        <p:nvSpPr>
+          <p:cNvPr id="33" name="Cartão"/>
+          <p:cNvSpPr/>
+          <p:nvPr/>
+        </p:nvSpPr>
+        <p:spPr>
+          <a:xfrm>
+            <a:off x="9680204" y="1783080"/>
+            <a:ext cx="1962851" cy="2514600"/>
+          </a:xfrm>
+          <a:prstGeom prst="roundRect">
+            <a:avLst>
+              <a:gd name="adj" fmla="val 5590"/>
+            </a:avLst>
+          </a:prstGeom>
+          <a:solidFill>
+            <a:srgbClr val="FFFFFF"/>
+          </a:solidFill>
+          <a:ln/>
+          <a:effectLst>
+            <a:outerShdw sx="100000" sy="100000" kx="0" ky="0" algn="bl" rotWithShape="0" blurRad="101600" dist="25400" dir="5400000">
+              <a:srgbClr val="223548">
+                <a:alpha val="16000"/>
+              </a:srgbClr>
+            </a:outerShdw>
+          </a:effectLst>
+        </p:spPr>
+      </p:sp>
+      <p:sp>
+        <p:nvSpPr>
+          <p:cNvPr id="34" name="Ícone employee"/>
+          <p:cNvSpPr/>
+          <p:nvPr/>
+        </p:nvSpPr>
+        <p:spPr>
+          <a:xfrm>
+            <a:off x="10341590" y="2011680"/>
+            <a:ext cx="640080" cy="640080"/>
+          </a:xfrm>
+          <a:prstGeom prst="roundRect">
+            <a:avLst>
+              <a:gd name="adj" fmla="val 22000"/>
+            </a:avLst>
+          </a:prstGeom>
+          <a:solidFill>
+            <a:srgbClr val="FDE8F1"/>
+          </a:solidFill>
+          <a:ln/>
+        </p:spPr>
+      </p:sp>
+      <p:pic>
+        <p:nvPicPr>
+          <p:cNvPr id="35" name="Image 4" descr="employee">    </p:cNvPr>
+          <p:cNvPicPr>
+            <a:picLocks noChangeAspect="1"/>
+          </p:cNvPicPr>
+          <p:nvPr/>
+        </p:nvPicPr>
+        <p:blipFill>
+          <a:blip r:embed="rId5"/>
+          <a:stretch>
+            <a:fillRect/>
+          </a:stretch>
+        </p:blipFill>
+        <p:spPr>
+          <a:xfrm>
+            <a:off x="10495209" y="2165299"/>
+            <a:ext cx="332842" cy="332842"/>
+          </a:xfrm>
+          <a:prstGeom prst="rect">
+            <a:avLst/>
+          </a:prstGeom>
+        </p:spPr>
+      </p:pic>
+      <p:sp>
+        <p:nvSpPr>
+          <p:cNvPr id="36" name="Text 28"/>
+          <p:cNvSpPr txBox="1"/>
+          <p:nvPr/>
+        </p:nvSpPr>
+        <p:spPr>
+          <a:xfrm>
+            <a:off x="9817364" y="2788920"/>
+            <a:ext cx="1688531" cy="502920"/>
+          </a:xfrm>
+          <a:prstGeom prst="rect">
+            <a:avLst/>
+          </a:prstGeom>
+          <a:noFill/>
+          <a:ln/>
+        </p:spPr>
+        <p:txBody>
+          <a:bodyPr wrap="square" lIns="0" tIns="0" rIns="0" bIns="0" rtlCol="0" anchor="ctr"/>
+          <a:lstStyle/>
+          <a:p>
+            <a:pPr algn="ctr" indent="0" marL="0">
+              <a:buNone/>
+            </a:pPr>
+            <a:r>
+              <a:rPr lang="en-US" sz="1400" b="1" dirty="0">
+                <a:solidFill>
+                  <a:srgbClr val="1D2D3E"/>
+                </a:solidFill>
+              </a:rPr>
+              <a:t>Usuário</a:t>
+            </a:r>
+            <a:endParaRPr lang="en-US" sz="1400" dirty="0"/>
+          </a:p>
+        </p:txBody>
+      </p:sp>
+      <p:sp>
+        <p:nvSpPr>
+          <p:cNvPr id="37" name="Text 29"/>
+          <p:cNvSpPr txBox="1"/>
+          <p:nvPr/>
+        </p:nvSpPr>
+        <p:spPr>
+          <a:xfrm>
+            <a:off x="9817364" y="3310128"/>
+            <a:ext cx="1688531" cy="457200"/>
+          </a:xfrm>
+          <a:prstGeom prst="rect">
+            <a:avLst/>
+          </a:prstGeom>
+          <a:noFill/>
+          <a:ln/>
+        </p:spPr>
+        <p:txBody>
+          <a:bodyPr wrap="square" lIns="0" tIns="0" rIns="0" bIns="0" rtlCol="0" anchor="t"/>
+          <a:lstStyle/>
+          <a:p>
+            <a:pPr algn="ctr" indent="0" marL="0">
+              <a:buNone/>
+            </a:pPr>
+            <a:r>
+              <a:rPr lang="en-US" sz="1000" dirty="0">
+                <a:solidFill>
+                  <a:srgbClr val="0064D9"/>
+                </a:solidFill>
+                <a:latin typeface="Courier New" pitchFamily="34" charset="0"/>
+                <a:ea typeface="Courier New" pitchFamily="34" charset="-122"/>
+                <a:cs typeface="Courier New" pitchFamily="34" charset="-120"/>
+              </a:rPr>
+              <a:t>SU01 · PFCG</a:t>
+            </a:r>
+            <a:endParaRPr lang="en-US" sz="1000" dirty="0"/>
+          </a:p>
+        </p:txBody>
+      </p:sp>
+      <p:sp>
+        <p:nvSpPr>
+          <p:cNvPr id="38" name="Text 30"/>
+          <p:cNvSpPr txBox="1"/>
+          <p:nvPr/>
+        </p:nvSpPr>
+        <p:spPr>
+          <a:xfrm>
+            <a:off x="9817364" y="3822192"/>
+            <a:ext cx="1688531" cy="320040"/>
+          </a:xfrm>
+          <a:prstGeom prst="rect">
+            <a:avLst/>
+          </a:prstGeom>
+          <a:noFill/>
+          <a:ln/>
+        </p:spPr>
+        <p:txBody>
+          <a:bodyPr wrap="square" lIns="0" tIns="0" rIns="0" bIns="0" rtlCol="0" anchor="t"/>
+          <a:lstStyle/>
+          <a:p>
+            <a:pPr algn="ctr" indent="0" marL="0">
+              <a:buNone/>
+            </a:pPr>
+            <a:r>
+              <a:rPr lang="en-US" sz="1100" dirty="0">
+                <a:solidFill>
+                  <a:srgbClr val="556B82"/>
+                </a:solidFill>
+              </a:rPr>
+              <a:t>comparação de usuários</a:t>
+            </a:r>
+            <a:endParaRPr lang="en-US" sz="1100" dirty="0"/>
+          </a:p>
+        </p:txBody>
+      </p:sp>
+      <p:sp>
+        <p:nvSpPr>
+          <p:cNvPr id="39" name="Cartão"/>
+          <p:cNvSpPr/>
+          <p:nvPr/>
+        </p:nvSpPr>
+        <p:spPr>
+          <a:xfrm>
+            <a:off x="548640" y="4526280"/>
+            <a:ext cx="3515258" cy="1645920"/>
+          </a:xfrm>
+          <a:prstGeom prst="roundRect">
+            <a:avLst>
+              <a:gd name="adj" fmla="val 6667"/>
+            </a:avLst>
+          </a:prstGeom>
+          <a:solidFill>
+            <a:srgbClr val="FFFFFF"/>
+          </a:solidFill>
+          <a:ln/>
+          <a:effectLst>
+            <a:outerShdw sx="100000" sy="100000" kx="0" ky="0" algn="bl" rotWithShape="0" blurRad="101600" dist="25400" dir="5400000">
+              <a:srgbClr val="223548">
+                <a:alpha val="16000"/>
+              </a:srgbClr>
+            </a:outerShdw>
+          </a:effectLst>
+        </p:spPr>
+      </p:sp>
+      <p:sp>
+        <p:nvSpPr>
+          <p:cNvPr id="40" name="Text 32"/>
+          <p:cNvSpPr txBox="1"/>
+          <p:nvPr/>
+        </p:nvSpPr>
+        <p:spPr>
+          <a:xfrm>
+            <a:off x="777240" y="4681728"/>
+            <a:ext cx="3058058" cy="274320"/>
+          </a:xfrm>
+          <a:prstGeom prst="rect">
+            <a:avLst/>
+          </a:prstGeom>
+          <a:noFill/>
+          <a:ln/>
+        </p:spPr>
+        <p:txBody>
+          <a:bodyPr wrap="square" lIns="0" tIns="0" rIns="0" bIns="0" rtlCol="0" anchor="t"/>
+          <a:lstStyle/>
+          <a:p>
+            <a:pPr indent="0" marL="0">
+              <a:buNone/>
+            </a:pPr>
+            <a:r>
+              <a:rPr lang="en-US" sz="1350" b="1" dirty="0">
+                <a:solidFill>
+                  <a:srgbClr val="1D2D3E"/>
+                </a:solidFill>
+              </a:rPr>
+              <a:t>Conteúdo do launchpad</a:t>
+            </a:r>
+            <a:endParaRPr lang="en-US" sz="1350" dirty="0"/>
+          </a:p>
+        </p:txBody>
+      </p:sp>
+      <p:sp>
+        <p:nvSpPr>
+          <p:cNvPr id="41" name="Text 33"/>
+          <p:cNvSpPr txBox="1"/>
+          <p:nvPr/>
+        </p:nvSpPr>
+        <p:spPr>
+          <a:xfrm>
+            <a:off x="777240" y="5010912"/>
+            <a:ext cx="3058058" cy="1051560"/>
+          </a:xfrm>
+          <a:prstGeom prst="rect">
+            <a:avLst/>
+          </a:prstGeom>
+          <a:noFill/>
+          <a:ln/>
+        </p:spPr>
+        <p:txBody>
+          <a:bodyPr wrap="square" lIns="0" tIns="0" rIns="0" bIns="0" rtlCol="0" anchor="t"/>
+          <a:lstStyle/>
+          <a:p>
+            <a:pPr indent="0" marL="0">
+              <a:buNone/>
+            </a:pPr>
+            <a:r>
+              <a:rPr lang="en-US" sz="1200" dirty="0">
+                <a:solidFill>
+                  <a:srgbClr val="556B82"/>
+                </a:solidFill>
+              </a:rPr>
+              <a:t>O menu da role recebe também o catálogo e o espaço do SAP Fiori launchpad (etapa 5).</a:t>
+            </a:r>
+            <a:endParaRPr lang="en-US" sz="1200" dirty="0"/>
+          </a:p>
+        </p:txBody>
+      </p:sp>
+      <p:sp>
+        <p:nvSpPr>
+          <p:cNvPr id="42" name="Cartão"/>
+          <p:cNvSpPr/>
+          <p:nvPr/>
+        </p:nvSpPr>
+        <p:spPr>
+          <a:xfrm>
+            <a:off x="4338218" y="4526280"/>
+            <a:ext cx="3515258" cy="1645920"/>
+          </a:xfrm>
+          <a:prstGeom prst="roundRect">
+            <a:avLst>
+              <a:gd name="adj" fmla="val 6667"/>
+            </a:avLst>
+          </a:prstGeom>
+          <a:solidFill>
+            <a:srgbClr val="FFFFFF"/>
+          </a:solidFill>
+          <a:ln/>
+          <a:effectLst>
+            <a:outerShdw sx="100000" sy="100000" kx="0" ky="0" algn="bl" rotWithShape="0" blurRad="101600" dist="25400" dir="5400000">
+              <a:srgbClr val="223548">
+                <a:alpha val="16000"/>
+              </a:srgbClr>
+            </a:outerShdw>
+          </a:effectLst>
+        </p:spPr>
+      </p:sp>
+      <p:sp>
+        <p:nvSpPr>
+          <p:cNvPr id="43" name="Text 35"/>
+          <p:cNvSpPr txBox="1"/>
+          <p:nvPr/>
+        </p:nvSpPr>
+        <p:spPr>
+          <a:xfrm>
+            <a:off x="4566818" y="4681728"/>
+            <a:ext cx="3058058" cy="274320"/>
+          </a:xfrm>
+          <a:prstGeom prst="rect">
+            <a:avLst/>
+          </a:prstGeom>
+          <a:noFill/>
+          <a:ln/>
+        </p:spPr>
+        <p:txBody>
+          <a:bodyPr wrap="square" lIns="0" tIns="0" rIns="0" bIns="0" rtlCol="0" anchor="t"/>
+          <a:lstStyle/>
+          <a:p>
+            <a:pPr indent="0" marL="0">
+              <a:buNone/>
+            </a:pPr>
+            <a:r>
+              <a:rPr lang="en-US" sz="1350" b="1" dirty="0">
+                <a:solidFill>
+                  <a:srgbClr val="1D2D3E"/>
+                </a:solidFill>
+              </a:rPr>
+              <a:t>Roles do projeto</a:t>
+            </a:r>
+            <a:endParaRPr lang="en-US" sz="1350" dirty="0"/>
+          </a:p>
+        </p:txBody>
+      </p:sp>
+      <p:sp>
+        <p:nvSpPr>
+          <p:cNvPr id="44" name="Text 36"/>
+          <p:cNvSpPr txBox="1"/>
+          <p:nvPr/>
+        </p:nvSpPr>
+        <p:spPr>
+          <a:xfrm>
+            <a:off x="4566818" y="5010912"/>
+            <a:ext cx="3058058" cy="1051560"/>
+          </a:xfrm>
+          <a:prstGeom prst="rect">
+            <a:avLst/>
+          </a:prstGeom>
+          <a:noFill/>
+          <a:ln/>
+        </p:spPr>
+        <p:txBody>
+          <a:bodyPr wrap="square" lIns="0" tIns="0" rIns="0" bIns="0" rtlCol="0" anchor="t"/>
+          <a:lstStyle/>
+          <a:p>
+            <a:pPr indent="0" marL="0">
+              <a:buNone/>
+            </a:pPr>
+            <a:r>
+              <a:rPr lang="en-US" sz="1200" dirty="0">
+                <a:solidFill>
+                  <a:srgbClr val="556B82"/>
+                </a:solidFill>
+              </a:rPr>
+              <a:t>Z_PC_ADMIN: os quatro serviços e as análises. Z_PC_COMUM: Pedidos e Reembolsos, sem a 16.</a:t>
+            </a:r>
+            <a:endParaRPr lang="en-US" sz="1200" dirty="0"/>
+          </a:p>
+        </p:txBody>
+      </p:sp>
+      <p:sp>
+        <p:nvSpPr>
+          <p:cNvPr id="45" name="Cartão"/>
+          <p:cNvSpPr/>
+          <p:nvPr/>
+        </p:nvSpPr>
+        <p:spPr>
+          <a:xfrm>
+            <a:off x="8127797" y="4526280"/>
+            <a:ext cx="3515258" cy="1645920"/>
+          </a:xfrm>
+          <a:prstGeom prst="roundRect">
+            <a:avLst>
+              <a:gd name="adj" fmla="val 6667"/>
+            </a:avLst>
+          </a:prstGeom>
+          <a:solidFill>
+            <a:srgbClr val="FFF3B8"/>
+          </a:solidFill>
+          <a:ln/>
+        </p:spPr>
+      </p:sp>
+      <p:sp>
+        <p:nvSpPr>
+          <p:cNvPr id="46" name="Text 38"/>
+          <p:cNvSpPr txBox="1"/>
+          <p:nvPr/>
+        </p:nvSpPr>
+        <p:spPr>
+          <a:xfrm>
+            <a:off x="8356397" y="4681728"/>
+            <a:ext cx="3058058" cy="274320"/>
+          </a:xfrm>
+          <a:prstGeom prst="rect">
+            <a:avLst/>
+          </a:prstGeom>
+          <a:noFill/>
+          <a:ln/>
+        </p:spPr>
+        <p:txBody>
+          <a:bodyPr wrap="square" lIns="0" tIns="0" rIns="0" bIns="0" rtlCol="0" anchor="t"/>
+          <a:lstStyle/>
+          <a:p>
+            <a:pPr indent="0" marL="0">
+              <a:buNone/>
+            </a:pPr>
+            <a:r>
+              <a:rPr lang="en-US" sz="1350" b="1" dirty="0">
+                <a:solidFill>
+                  <a:srgbClr val="1D2D3E"/>
+                </a:solidFill>
+              </a:rPr>
+              <a:t>Atenção</a:t>
+            </a:r>
+            <a:endParaRPr lang="en-US" sz="1350" dirty="0"/>
+          </a:p>
+        </p:txBody>
+      </p:sp>
+      <p:sp>
+        <p:nvSpPr>
+          <p:cNvPr id="47" name="Text 39"/>
+          <p:cNvSpPr txBox="1"/>
+          <p:nvPr/>
+        </p:nvSpPr>
+        <p:spPr>
+          <a:xfrm>
+            <a:off x="8356397" y="5010912"/>
+            <a:ext cx="3058058" cy="1051560"/>
+          </a:xfrm>
+          <a:prstGeom prst="rect">
+            <a:avLst/>
+          </a:prstGeom>
+          <a:noFill/>
+          <a:ln/>
+        </p:spPr>
+        <p:txBody>
+          <a:bodyPr wrap="square" lIns="0" tIns="0" rIns="0" bIns="0" rtlCol="0" anchor="t"/>
+          <a:lstStyle/>
+          <a:p>
+            <a:pPr indent="0" marL="0">
+              <a:buNone/>
+            </a:pPr>
+            <a:r>
+              <a:rPr lang="en-US" sz="1200" dirty="0">
+                <a:solidFill>
+                  <a:srgbClr val="556B82"/>
+                </a:solidFill>
+              </a:rPr>
+              <a:t>Sem a atividade 16 em ZPC_PEDIDO, ninguém paga, aprova, cancela ou decide reembolso.</a:t>
+            </a:r>
+            <a:endParaRPr lang="en-US" sz="1200" dirty="0"/>
+          </a:p>
+        </p:txBody>
+      </p:sp>
+      <p:sp>
+        <p:nvSpPr>
+          <p:cNvPr id="25" name="Slide Number Placeholder 0"/>
+          <p:cNvSpPr>
+            <a:spLocks noGrp="1"/>
+          </p:cNvSpPr>
+          <p:nvPr>
+            <p:ph type="sldNum" sz="quarter" idx="4294967295"/>
+          </p:nvPr>
+        </p:nvSpPr>
+        <p:spPr>
+          <a:xfrm>
+            <a:off x="11183112" y="6419088"/>
+            <a:ext cx="457200" cy="274320"/>
+          </a:xfrm>
+          <a:prstGeom prst="rect">
+            <a:avLst/>
+          </a:prstGeom>
+          <a:extLst>
+            <a:ext uri="{C572A759-6A51-4108-AA02-DFA0A04FC94B}">
+              <ma14:wrappingTextBoxFlag xmlns:ma14="http://schemas.microsoft.com/office/mac/drawingml/2011/main" val="0"/>
+            </a:ext>
+          </a:extLst>
+        </p:spPr>
+        <p:txBody>
+          <a:bodyPr lIns="0" tIns="0" rIns="0" bIns="0" anchor="ctr"/>
+          <a:lstStyle>
+            <a:lvl1pPr>
+              <a:defRPr sz="900">
+                <a:solidFill>
+                  <a:srgbClr val="556B82"/>
+                </a:solidFill>
+              </a:defRPr>
+            </a:lvl1pPr>
+          </a:lstStyle>
+          <a:p>
+            <a:pPr algn="r"/>
+            <a:fld id="{F7021451-1387-4CA6-816F-3879F97B5CBC}" type="slidenum">
+              <a:rPr b="0" lang="en-US"/>
+              <a:t>9</a:t>
+            </a:fld>
+            <a:endParaRPr lang="en-US"/>
+          </a:p>
+        </p:txBody>
+      </p:sp>
+    </p:spTree>
+  </p:cSld>
+  <p:clrMapOvr>
+    <a:masterClrMapping/>
+  </p:clrMapOvr>
+</p:sld>
+</file>
+
+<file path=ppt/slides/slide27.xml><?xml version="1.0" encoding="utf-8"?>
+<p:sld xmlns:a="http://schemas.openxmlformats.org/drawingml/2006/main" xmlns:r="http://schemas.openxmlformats.org/officeDocument/2006/relationships" xmlns:p="http://schemas.openxmlformats.org/presentationml/2006/main">
+  <p:cSld name="Slide 10">
+    <p:spTree>
+      <p:nvGrpSpPr>
+        <p:cNvPr id="1" name=""/>
+        <p:cNvGrpSpPr/>
+        <p:nvPr/>
+      </p:nvGrpSpPr>
+      <p:grpSpPr>
+        <a:xfrm>
+          <a:off x="0" y="0"/>
+          <a:ext cx="0" cy="0"/>
+          <a:chOff x="0" y="0"/>
+          <a:chExt cx="0" cy="0"/>
+        </a:xfrm>
+      </p:grpSpPr>
+      <p:sp>
+        <p:nvSpPr>
+          <p:cNvPr id="2" name="Text 0"/>
+          <p:cNvSpPr/>
+          <p:nvPr>
+            <p:ph idx="100" type="body" hasCustomPrompt="1"/>
+          </p:nvPr>
+        </p:nvSpPr>
+        <p:spPr>
+          <a:xfrm>
+            <a:off x="548640" y="384048"/>
+            <a:ext cx="9144000" cy="274320"/>
+          </a:xfrm>
+          <a:prstGeom prst="rect">
+            <a:avLst/>
+          </a:prstGeom>
+          <a:noFill/>
+          <a:ln/>
+        </p:spPr>
+        <p:txBody>
+          <a:bodyPr wrap="square" lIns="0" tIns="0" rIns="0" bIns="0" rtlCol="0" anchor="ctr"/>
+          <a:lstStyle/>
+          <a:p>
+            <a:pPr algn="l" indent="0" marL="0">
+              <a:buNone/>
+            </a:pPr>
+            <a:r>
+              <a:rPr lang="en-US" sz="1100" b="1" spc="150" kern="0" dirty="0">
+                <a:solidFill>
+                  <a:schemeClr val="accent1"/>
+                </a:solidFill>
+              </a:rPr>
+              <a:t>ON-PREMISE · ROLES POR DOMÍNIO</a:t>
+            </a:r>
+            <a:endParaRPr lang="en-US" sz="1100" dirty="0"/>
+          </a:p>
+        </p:txBody>
+      </p:sp>
+      <p:sp>
+        <p:nvSpPr>
+          <p:cNvPr id="3" name="Text 0"/>
+          <p:cNvSpPr/>
+          <p:nvPr>
+            <p:ph idx="101" type="title" hasCustomPrompt="1"/>
+          </p:nvPr>
+        </p:nvSpPr>
+        <p:spPr>
+          <a:xfrm>
+            <a:off x="548640" y="676656"/>
+            <a:ext cx="11094415" cy="658368"/>
+          </a:xfrm>
+          <a:prstGeom prst="rect">
+            <a:avLst/>
+          </a:prstGeom>
+          <a:noFill/>
+          <a:ln/>
+        </p:spPr>
+        <p:txBody>
+          <a:bodyPr wrap="square" lIns="0" tIns="0" rIns="0" bIns="0" rtlCol="0" anchor="ctr"/>
+          <a:lstStyle/>
+          <a:p>
+            <a:pPr algn="l" indent="0" marL="0">
+              <a:buNone/>
+            </a:pPr>
+            <a:r>
+              <a:rPr lang="en-US" sz="3000" b="1" dirty="0">
+                <a:solidFill>
+                  <a:schemeClr val="tx1"/>
+                </a:solidFill>
+              </a:rPr>
+              <a:t>Uma role PFCG por perfil, com S_START por serviço</a:t>
+            </a:r>
+            <a:endParaRPr lang="en-US" sz="3000" dirty="0"/>
+          </a:p>
+        </p:txBody>
+      </p:sp>
+      <p:sp>
+        <p:nvSpPr>
+          <p:cNvPr id="5" name="Fundo da tabela"/>
+          <p:cNvSpPr/>
+          <p:nvPr/>
+        </p:nvSpPr>
+        <p:spPr>
+          <a:xfrm>
+            <a:off x="548640" y="1645920"/>
+            <a:ext cx="11094415" cy="2962656"/>
+          </a:xfrm>
+          <a:prstGeom prst="roundRect">
+            <a:avLst>
+              <a:gd name="adj" fmla="val 3704"/>
+            </a:avLst>
+          </a:prstGeom>
+          <a:solidFill>
+            <a:srgbClr val="FFFFFF"/>
+          </a:solidFill>
+          <a:ln/>
+          <a:effectLst>
+            <a:outerShdw sx="100000" sy="100000" kx="0" ky="0" algn="bl" rotWithShape="0" blurRad="101600" dist="25400" dir="5400000">
+              <a:srgbClr val="223548">
+                <a:alpha val="16000"/>
+              </a:srgbClr>
+            </a:outerShdw>
+          </a:effectLst>
+        </p:spPr>
+      </p:sp>
+      <p:graphicFrame>
+        <p:nvGraphicFramePr>
+          <p:cNvPr id="11" name="Table 0"/>
+          <p:cNvGraphicFramePr>
+            <a:graphicFrameLocks noGrp="1"/>
+          </p:cNvGraphicFramePr>
+          <p:nvPr>
+            <p:extLst>
+              <p:ext uri="{D42A27DB-BD31-4B8C-83A1-F6EECF244321}">
+                <p14:modId xmlns:p14="http://schemas.microsoft.com/office/powerpoint/2010/main" val="1579011935"/>
+              </p:ext>
+            </p:extLst>
+          </p:nvPr>
+        </p:nvGraphicFramePr>
+        <p:xfrm>
+          <a:off x="685800" y="1755648"/>
+          <a:ext cx="10820095" cy="914400"/>
+        </p:xfrm>
+        <a:graphic>
+          <a:graphicData uri="http://schemas.openxmlformats.org/drawingml/2006/table">
+            <a:tbl>
+              <a:tblPr/>
+              <a:tblGrid>
+                <a:gridCol w="1371600"/>
+                <a:gridCol w="2834640"/>
+                <a:gridCol w="2606040"/>
+                <a:gridCol w="2286000"/>
+                <a:gridCol w="1721815"/>
+              </a:tblGrid>
+              <a:tr h="548640">
+                <a:tc>
+                  <a:txBody>
+                    <a:bodyPr/>
+                    <a:lstStyle/>
+                    <a:p>
+                      <a:pPr indent="0" marL="0">
+                        <a:buNone/>
+                      </a:pPr>
+                      <a:r>
+                        <a:rPr lang="en-US" sz="1200" b="1" dirty="0">
+                          <a:solidFill>
+                            <a:srgbClr val="1D2D3E"/>
+                          </a:solidFill>
+                        </a:rPr>
+                        <a:t>Domínio</a:t>
+                      </a:r>
+                      <a:endParaRPr lang="en-US" sz="1200" dirty="0"/>
+                    </a:p>
+                  </a:txBody>
+                  <a:tcPr marL="73152" marR="73152" marT="36576" marB="36576" anchor="ctr">
+                    <a:lnL w="0" cap="flat" cmpd="sng" algn="ctr">
+                      <a:noFill/>
+                    </a:lnL>
+                    <a:lnR w="0" cap="flat" cmpd="sng" algn="ctr">
+                      <a:noFill/>
+                    </a:lnR>
+                    <a:lnT w="0" cap="flat" cmpd="sng" algn="ctr">
+                      <a:noFill/>
+                    </a:lnT>
+                    <a:lnB w="19050" cap="flat" cmpd="sng" algn="ctr">
+                      <a:solidFill>
+                        <a:srgbClr val="A8B3BD"/>
+                      </a:solidFill>
+                      <a:prstDash val="solid"/>
+                      <a:round/>
+                      <a:headEnd type="none" w="med" len="med"/>
+                      <a:tailEnd type="none" w="med" len="med"/>
+                    </a:lnB>
+                    <a:solidFill>
+                      <a:srgbClr val="FFFFFF"/>
+                    </a:solidFill>
+                  </a:tcPr>
+                </a:tc>
+                <a:tc>
+                  <a:txBody>
+                    <a:bodyPr/>
+                    <a:lstStyle/>
+                    <a:p>
+                      <a:pPr indent="0" marL="0">
+                        <a:buNone/>
+                      </a:pPr>
+                      <a:r>
+                        <a:rPr lang="en-US" sz="1200" b="1" dirty="0">
+                          <a:solidFill>
+                            <a:srgbClr val="1D2D3E"/>
+                          </a:solidFill>
+                        </a:rPr>
+                        <a:t>Grupo de serviços (S_START)</a:t>
+                      </a:r>
+                      <a:endParaRPr lang="en-US" sz="1200" dirty="0"/>
+                    </a:p>
+                  </a:txBody>
+                  <a:tcPr marL="73152" marR="73152" marT="36576" marB="36576" anchor="ctr">
+                    <a:lnL w="0" cap="flat" cmpd="sng" algn="ctr">
+                      <a:noFill/>
+                    </a:lnL>
+                    <a:lnR w="0" cap="flat" cmpd="sng" algn="ctr">
+                      <a:noFill/>
+                    </a:lnR>
+                    <a:lnT w="0" cap="flat" cmpd="sng" algn="ctr">
+                      <a:noFill/>
+                    </a:lnT>
+                    <a:lnB w="19050" cap="flat" cmpd="sng" algn="ctr">
+                      <a:solidFill>
+                        <a:srgbClr val="A8B3BD"/>
+                      </a:solidFill>
+                      <a:prstDash val="solid"/>
+                      <a:round/>
+                      <a:headEnd type="none" w="med" len="med"/>
+                      <a:tailEnd type="none" w="med" len="med"/>
+                    </a:lnB>
+                    <a:solidFill>
+                      <a:srgbClr val="FFFFFF"/>
+                    </a:solidFill>
+                  </a:tcPr>
+                </a:tc>
+                <a:tc>
+                  <a:txBody>
+                    <a:bodyPr/>
+                    <a:lstStyle/>
+                    <a:p>
+                      <a:pPr indent="0" marL="0">
+                        <a:buNone/>
+                      </a:pPr>
+                      <a:r>
+                        <a:rPr lang="en-US" sz="1200" b="1" dirty="0">
+                          <a:solidFill>
+                            <a:srgbClr val="1D2D3E"/>
+                          </a:solidFill>
+                        </a:rPr>
+                        <a:t>Objeto (SU24)</a:t>
+                      </a:r>
+                      <a:endParaRPr lang="en-US" sz="1200" dirty="0"/>
+                    </a:p>
+                  </a:txBody>
+                  <a:tcPr marL="73152" marR="73152" marT="36576" marB="36576" anchor="ctr">
+                    <a:lnL w="0" cap="flat" cmpd="sng" algn="ctr">
+                      <a:noFill/>
+                    </a:lnL>
+                    <a:lnR w="0" cap="flat" cmpd="sng" algn="ctr">
+                      <a:noFill/>
+                    </a:lnR>
+                    <a:lnT w="0" cap="flat" cmpd="sng" algn="ctr">
+                      <a:noFill/>
+                    </a:lnT>
+                    <a:lnB w="19050" cap="flat" cmpd="sng" algn="ctr">
+                      <a:solidFill>
+                        <a:srgbClr val="A8B3BD"/>
+                      </a:solidFill>
+                      <a:prstDash val="solid"/>
+                      <a:round/>
+                      <a:headEnd type="none" w="med" len="med"/>
+                      <a:tailEnd type="none" w="med" len="med"/>
+                    </a:lnB>
+                    <a:solidFill>
+                      <a:srgbClr val="FFFFFF"/>
+                    </a:solidFill>
+                  </a:tcPr>
+                </a:tc>
+                <a:tc>
+                  <a:txBody>
+                    <a:bodyPr/>
+                    <a:lstStyle/>
+                    <a:p>
+                      <a:pPr indent="0" marL="0">
+                        <a:buNone/>
+                      </a:pPr>
+                      <a:r>
+                        <a:rPr lang="en-US" sz="1200" b="1" dirty="0">
+                          <a:solidFill>
+                            <a:srgbClr val="1D2D3E"/>
+                          </a:solidFill>
+                        </a:rPr>
+                        <a:t>Z_PC_ADMIN</a:t>
+                      </a:r>
+                      <a:endParaRPr lang="en-US" sz="1200" dirty="0"/>
+                    </a:p>
+                  </a:txBody>
+                  <a:tcPr marL="73152" marR="73152" marT="36576" marB="36576" anchor="ctr">
+                    <a:lnL w="0" cap="flat" cmpd="sng" algn="ctr">
+                      <a:noFill/>
+                    </a:lnL>
+                    <a:lnR w="0" cap="flat" cmpd="sng" algn="ctr">
+                      <a:noFill/>
+                    </a:lnR>
+                    <a:lnT w="0" cap="flat" cmpd="sng" algn="ctr">
+                      <a:noFill/>
+                    </a:lnT>
+                    <a:lnB w="19050" cap="flat" cmpd="sng" algn="ctr">
+                      <a:solidFill>
+                        <a:srgbClr val="A8B3BD"/>
+                      </a:solidFill>
+                      <a:prstDash val="solid"/>
+                      <a:round/>
+                      <a:headEnd type="none" w="med" len="med"/>
+                      <a:tailEnd type="none" w="med" len="med"/>
+                    </a:lnB>
+                    <a:solidFill>
+                      <a:srgbClr val="FFFFFF"/>
+                    </a:solidFill>
+                  </a:tcPr>
+                </a:tc>
+                <a:tc>
+                  <a:txBody>
+                    <a:bodyPr/>
+                    <a:lstStyle/>
+                    <a:p>
+                      <a:pPr indent="0" marL="0">
+                        <a:buNone/>
+                      </a:pPr>
+                      <a:r>
+                        <a:rPr lang="en-US" sz="1200" b="1" dirty="0">
+                          <a:solidFill>
+                            <a:srgbClr val="1D2D3E"/>
+                          </a:solidFill>
+                        </a:rPr>
+                        <a:t>Z_PC_COMUM</a:t>
+                      </a:r>
+                      <a:endParaRPr lang="en-US" sz="1200" dirty="0"/>
+                    </a:p>
+                  </a:txBody>
+                  <a:tcPr marL="73152" marR="73152" marT="36576" marB="36576" anchor="ctr">
+                    <a:lnL w="0" cap="flat" cmpd="sng" algn="ctr">
+                      <a:noFill/>
+                    </a:lnL>
+                    <a:lnR w="0" cap="flat" cmpd="sng" algn="ctr">
+                      <a:noFill/>
+                    </a:lnR>
+                    <a:lnT w="0" cap="flat" cmpd="sng" algn="ctr">
+                      <a:noFill/>
+                    </a:lnT>
+                    <a:lnB w="19050" cap="flat" cmpd="sng" algn="ctr">
+                      <a:solidFill>
+                        <a:srgbClr val="A8B3BD"/>
+                      </a:solidFill>
+                      <a:prstDash val="solid"/>
+                      <a:round/>
+                      <a:headEnd type="none" w="med" len="med"/>
+                      <a:tailEnd type="none" w="med" len="med"/>
+                    </a:lnB>
+                    <a:solidFill>
+                      <a:srgbClr val="FFFFFF"/>
+                    </a:solidFill>
+                  </a:tcPr>
+                </a:tc>
+              </a:tr>
+              <a:tr h="548640">
+                <a:tc>
+                  <a:txBody>
+                    <a:bodyPr/>
+                    <a:lstStyle/>
+                    <a:p>
+                      <a:pPr indent="0" marL="0">
+                        <a:buNone/>
+                      </a:pPr>
+                      <a:r>
+                        <a:rPr lang="en-US" sz="1200" dirty="0">
+                          <a:solidFill>
+                            <a:srgbClr val="1D2D3E"/>
+                          </a:solidFill>
+                        </a:rPr>
+                        <a:t>Clientes</a:t>
+                      </a:r>
+                      <a:endParaRPr lang="en-US" sz="1200" dirty="0"/>
+                    </a:p>
+                  </a:txBody>
+                  <a:tcPr marL="73152" marR="73152" marT="36576" marB="36576" anchor="ctr">
+                    <a:lnL w="0" cap="flat" cmpd="sng" algn="ctr">
+                      <a:noFill/>
+                    </a:lnL>
+                    <a:lnR w="0" cap="flat" cmpd="sng" algn="ctr">
+                      <a:noFill/>
+                    </a:lnR>
+                    <a:lnT w="0" cap="flat" cmpd="sng" algn="ctr">
+                      <a:noFill/>
+                    </a:lnT>
+                    <a:lnB w="12700" cap="flat" cmpd="sng" algn="ctr">
+                      <a:solidFill>
+                        <a:srgbClr val="E5E5E5"/>
+                      </a:solidFill>
+                      <a:prstDash val="solid"/>
+                      <a:round/>
+                      <a:headEnd type="none" w="med" len="med"/>
+                      <a:tailEnd type="none" w="med" len="med"/>
+                    </a:lnB>
+                    <a:solidFill>
+                      <a:srgbClr val="FFFFFF"/>
+                    </a:solidFill>
+                  </a:tcPr>
+                </a:tc>
+                <a:tc>
+                  <a:txBody>
+                    <a:bodyPr/>
+                    <a:lstStyle/>
+                    <a:p>
+                      <a:pPr indent="0" marL="0">
+                        <a:buNone/>
+                      </a:pPr>
+                      <a:r>
+                        <a:rPr lang="en-US" sz="1200" dirty="0">
+                          <a:solidFill>
+                            <a:srgbClr val="1D2D3E"/>
+                          </a:solidFill>
+                          <a:latin typeface="Courier New" pitchFamily="34" charset="0"/>
+                          <a:ea typeface="Courier New" pitchFamily="34" charset="-122"/>
+                          <a:cs typeface="Courier New" pitchFamily="34" charset="-120"/>
+                        </a:rPr>
+                        <a:t>ZUI_PC_CLIENTES_O4</a:t>
+                      </a:r>
+                      <a:endParaRPr lang="en-US" sz="1200" dirty="0">
+                        <a:latin typeface="Courier New" charset="0"/>
+                        <a:ea typeface="Courier New" charset="0"/>
+                        <a:cs typeface="Courier New" charset="0"/>
+                      </a:endParaRPr>
+                    </a:p>
+                  </a:txBody>
+                  <a:tcPr marL="73152" marR="73152" marT="36576" marB="36576" anchor="ctr">
+                    <a:lnL w="0" cap="flat" cmpd="sng" algn="ctr">
+                      <a:noFill/>
+                    </a:lnL>
+                    <a:lnR w="0" cap="flat" cmpd="sng" algn="ctr">
+                      <a:noFill/>
+                    </a:lnR>
+                    <a:lnT w="0" cap="flat" cmpd="sng" algn="ctr">
+                      <a:noFill/>
+                    </a:lnT>
+                    <a:lnB w="12700" cap="flat" cmpd="sng" algn="ctr">
+                      <a:solidFill>
+                        <a:srgbClr val="E5E5E5"/>
+                      </a:solidFill>
+                      <a:prstDash val="solid"/>
+                      <a:round/>
+                      <a:headEnd type="none" w="med" len="med"/>
+                      <a:tailEnd type="none" w="med" len="med"/>
+                    </a:lnB>
+                    <a:solidFill>
+                      <a:srgbClr val="FFFFFF"/>
+                    </a:solidFill>
+                  </a:tcPr>
+                </a:tc>
+                <a:tc>
+                  <a:txBody>
+                    <a:bodyPr/>
+                    <a:lstStyle/>
+                    <a:p>
+                      <a:pPr indent="0" marL="0">
+                        <a:buNone/>
+                      </a:pPr>
+                      <a:r>
+                        <a:rPr lang="en-US" sz="1200" dirty="0">
+                          <a:solidFill>
+                            <a:srgbClr val="1D2D3E"/>
+                          </a:solidFill>
+                          <a:latin typeface="Courier New" pitchFamily="34" charset="0"/>
+                          <a:ea typeface="Courier New" pitchFamily="34" charset="-122"/>
+                          <a:cs typeface="Courier New" pitchFamily="34" charset="-120"/>
+                        </a:rPr>
+                        <a:t>ZPC_ADMIN</a:t>
+                      </a:r>
+                      <a:endParaRPr lang="en-US" sz="1200" dirty="0">
+                        <a:latin typeface="Courier New" charset="0"/>
+                        <a:ea typeface="Courier New" charset="0"/>
+                        <a:cs typeface="Courier New" charset="0"/>
+                      </a:endParaRPr>
+                    </a:p>
+                  </a:txBody>
+                  <a:tcPr marL="73152" marR="73152" marT="36576" marB="36576" anchor="ctr">
+                    <a:lnL w="0" cap="flat" cmpd="sng" algn="ctr">
+                      <a:noFill/>
+                    </a:lnL>
+                    <a:lnR w="0" cap="flat" cmpd="sng" algn="ctr">
+                      <a:noFill/>
+                    </a:lnR>
+                    <a:lnT w="0" cap="flat" cmpd="sng" algn="ctr">
+                      <a:noFill/>
+                    </a:lnT>
+                    <a:lnB w="12700" cap="flat" cmpd="sng" algn="ctr">
+                      <a:solidFill>
+                        <a:srgbClr val="E5E5E5"/>
+                      </a:solidFill>
+                      <a:prstDash val="solid"/>
+                      <a:round/>
+                      <a:headEnd type="none" w="med" len="med"/>
+                      <a:tailEnd type="none" w="med" len="med"/>
+                    </a:lnB>
+                    <a:solidFill>
+                      <a:srgbClr val="FFFFFF"/>
+                    </a:solidFill>
+                  </a:tcPr>
+                </a:tc>
+                <a:tc>
+                  <a:txBody>
+                    <a:bodyPr/>
+                    <a:lstStyle/>
+                    <a:p>
+                      <a:pPr indent="0" marL="0">
+                        <a:buNone/>
+                      </a:pPr>
+                      <a:r>
+                        <a:rPr lang="en-US" sz="1200" dirty="0">
+                          <a:solidFill>
+                            <a:srgbClr val="1D2D3E"/>
+                          </a:solidFill>
+                          <a:latin typeface="Courier New" pitchFamily="34" charset="0"/>
+                          <a:ea typeface="Courier New" pitchFamily="34" charset="-122"/>
+                          <a:cs typeface="Courier New" pitchFamily="34" charset="-120"/>
+                        </a:rPr>
+                        <a:t>01 02 03 06</a:t>
+                      </a:r>
+                      <a:endParaRPr lang="en-US" sz="1200" dirty="0">
+                        <a:latin typeface="Courier New" charset="0"/>
+                        <a:ea typeface="Courier New" charset="0"/>
+                        <a:cs typeface="Courier New" charset="0"/>
+                      </a:endParaRPr>
+                    </a:p>
+                  </a:txBody>
+                  <a:tcPr marL="73152" marR="73152" marT="36576" marB="36576" anchor="ctr">
+                    <a:lnL w="0" cap="flat" cmpd="sng" algn="ctr">
+                      <a:noFill/>
+                    </a:lnL>
+                    <a:lnR w="0" cap="flat" cmpd="sng" algn="ctr">
+                      <a:noFill/>
+                    </a:lnR>
+                    <a:lnT w="0" cap="flat" cmpd="sng" algn="ctr">
+                      <a:noFill/>
+                    </a:lnT>
+                    <a:lnB w="12700" cap="flat" cmpd="sng" algn="ctr">
+                      <a:solidFill>
+                        <a:srgbClr val="E5E5E5"/>
+                      </a:solidFill>
+                      <a:prstDash val="solid"/>
+                      <a:round/>
+                      <a:headEnd type="none" w="med" len="med"/>
+                      <a:tailEnd type="none" w="med" len="med"/>
+                    </a:lnB>
+                    <a:solidFill>
+                      <a:srgbClr val="FFFFFF"/>
+                    </a:solidFill>
+                  </a:tcPr>
+                </a:tc>
+                <a:tc>
+                  <a:txBody>
+                    <a:bodyPr/>
+                    <a:lstStyle/>
+                    <a:p>
+                      <a:pPr indent="0" marL="0">
+                        <a:buNone/>
+                      </a:pPr>
+                      <a:r>
+                        <a:rPr lang="en-US" sz="1200" dirty="0">
+                          <a:solidFill>
+                            <a:srgbClr val="1D2D3E"/>
+                          </a:solidFill>
+                          <a:latin typeface="Courier New" pitchFamily="34" charset="0"/>
+                          <a:ea typeface="Courier New" pitchFamily="34" charset="-122"/>
+                          <a:cs typeface="Courier New" pitchFamily="34" charset="-120"/>
+                        </a:rPr>
+                        <a:t>— (fora do menu)</a:t>
+                      </a:r>
+                      <a:endParaRPr lang="en-US" sz="1200" dirty="0">
+                        <a:latin typeface="Courier New" charset="0"/>
+                        <a:ea typeface="Courier New" charset="0"/>
+                        <a:cs typeface="Courier New" charset="0"/>
+                      </a:endParaRPr>
+                    </a:p>
+                  </a:txBody>
+                  <a:tcPr marL="73152" marR="73152" marT="36576" marB="36576" anchor="ctr">
+                    <a:lnL w="0" cap="flat" cmpd="sng" algn="ctr">
+                      <a:noFill/>
+                    </a:lnL>
+                    <a:lnR w="0" cap="flat" cmpd="sng" algn="ctr">
+                      <a:noFill/>
+                    </a:lnR>
+                    <a:lnT w="0" cap="flat" cmpd="sng" algn="ctr">
+                      <a:noFill/>
+                    </a:lnT>
+                    <a:lnB w="12700" cap="flat" cmpd="sng" algn="ctr">
+                      <a:solidFill>
+                        <a:srgbClr val="E5E5E5"/>
+                      </a:solidFill>
+                      <a:prstDash val="solid"/>
+                      <a:round/>
+                      <a:headEnd type="none" w="med" len="med"/>
+                      <a:tailEnd type="none" w="med" len="med"/>
+                    </a:lnB>
+                    <a:solidFill>
+                      <a:srgbClr val="FFFFFF"/>
+                    </a:solidFill>
+                  </a:tcPr>
+                </a:tc>
+              </a:tr>
+              <a:tr h="548640">
+                <a:tc>
+                  <a:txBody>
+                    <a:bodyPr/>
+                    <a:lstStyle/>
+                    <a:p>
+                      <a:pPr indent="0" marL="0">
+                        <a:buNone/>
+                      </a:pPr>
+                      <a:r>
+                        <a:rPr lang="en-US" sz="1200" dirty="0">
+                          <a:solidFill>
+                            <a:srgbClr val="1D2D3E"/>
+                          </a:solidFill>
+                        </a:rPr>
+                        <a:t>Estoque</a:t>
+                      </a:r>
+                      <a:endParaRPr lang="en-US" sz="1200" dirty="0"/>
+                    </a:p>
+                  </a:txBody>
+                  <a:tcPr marL="73152" marR="73152" marT="36576" marB="36576" anchor="ctr">
+                    <a:lnL w="0" cap="flat" cmpd="sng" algn="ctr">
+                      <a:noFill/>
+                    </a:lnL>
+                    <a:lnR w="0" cap="flat" cmpd="sng" algn="ctr">
+                      <a:noFill/>
+                    </a:lnR>
+                    <a:lnT w="0" cap="flat" cmpd="sng" algn="ctr">
+                      <a:noFill/>
+                    </a:lnT>
+                    <a:lnB w="12700" cap="flat" cmpd="sng" algn="ctr">
+                      <a:solidFill>
+                        <a:srgbClr val="E5E5E5"/>
+                      </a:solidFill>
+                      <a:prstDash val="solid"/>
+                      <a:round/>
+                      <a:headEnd type="none" w="med" len="med"/>
+                      <a:tailEnd type="none" w="med" len="med"/>
+                    </a:lnB>
+                    <a:solidFill>
+                      <a:srgbClr val="FFFFFF"/>
+                    </a:solidFill>
+                  </a:tcPr>
+                </a:tc>
+                <a:tc>
+                  <a:txBody>
+                    <a:bodyPr/>
+                    <a:lstStyle/>
+                    <a:p>
+                      <a:pPr indent="0" marL="0">
+                        <a:buNone/>
+                      </a:pPr>
+                      <a:r>
+                        <a:rPr lang="en-US" sz="1200" dirty="0">
+                          <a:solidFill>
+                            <a:srgbClr val="1D2D3E"/>
+                          </a:solidFill>
+                          <a:latin typeface="Courier New" pitchFamily="34" charset="0"/>
+                          <a:ea typeface="Courier New" pitchFamily="34" charset="-122"/>
+                          <a:cs typeface="Courier New" pitchFamily="34" charset="-120"/>
+                        </a:rPr>
+                        <a:t>ZUI_PC_ESTOQUE_O4</a:t>
+                      </a:r>
+                      <a:endParaRPr lang="en-US" sz="1200" dirty="0">
+                        <a:latin typeface="Courier New" charset="0"/>
+                        <a:ea typeface="Courier New" charset="0"/>
+                        <a:cs typeface="Courier New" charset="0"/>
+                      </a:endParaRPr>
+                    </a:p>
+                  </a:txBody>
+                  <a:tcPr marL="73152" marR="73152" marT="36576" marB="36576" anchor="ctr">
+                    <a:lnL w="0" cap="flat" cmpd="sng" algn="ctr">
+                      <a:noFill/>
+                    </a:lnL>
+                    <a:lnR w="0" cap="flat" cmpd="sng" algn="ctr">
+                      <a:noFill/>
+                    </a:lnR>
+                    <a:lnT w="0" cap="flat" cmpd="sng" algn="ctr">
+                      <a:noFill/>
+                    </a:lnT>
+                    <a:lnB w="12700" cap="flat" cmpd="sng" algn="ctr">
+                      <a:solidFill>
+                        <a:srgbClr val="E5E5E5"/>
+                      </a:solidFill>
+                      <a:prstDash val="solid"/>
+                      <a:round/>
+                      <a:headEnd type="none" w="med" len="med"/>
+                      <a:tailEnd type="none" w="med" len="med"/>
+                    </a:lnB>
+                    <a:solidFill>
+                      <a:srgbClr val="FFFFFF"/>
+                    </a:solidFill>
+                  </a:tcPr>
+                </a:tc>
+                <a:tc>
+                  <a:txBody>
+                    <a:bodyPr/>
+                    <a:lstStyle/>
+                    <a:p>
+                      <a:pPr indent="0" marL="0">
+                        <a:buNone/>
+                      </a:pPr>
+                      <a:r>
+                        <a:rPr lang="en-US" sz="1200" dirty="0">
+                          <a:solidFill>
+                            <a:srgbClr val="1D2D3E"/>
+                          </a:solidFill>
+                          <a:latin typeface="Courier New" pitchFamily="34" charset="0"/>
+                          <a:ea typeface="Courier New" pitchFamily="34" charset="-122"/>
+                          <a:cs typeface="Courier New" pitchFamily="34" charset="-120"/>
+                        </a:rPr>
+                        <a:t>ZPC_ADMIN</a:t>
+                      </a:r>
+                      <a:endParaRPr lang="en-US" sz="1200" dirty="0">
+                        <a:latin typeface="Courier New" charset="0"/>
+                        <a:ea typeface="Courier New" charset="0"/>
+                        <a:cs typeface="Courier New" charset="0"/>
+                      </a:endParaRPr>
+                    </a:p>
+                  </a:txBody>
+                  <a:tcPr marL="73152" marR="73152" marT="36576" marB="36576" anchor="ctr">
+                    <a:lnL w="0" cap="flat" cmpd="sng" algn="ctr">
+                      <a:noFill/>
+                    </a:lnL>
+                    <a:lnR w="0" cap="flat" cmpd="sng" algn="ctr">
+                      <a:noFill/>
+                    </a:lnR>
+                    <a:lnT w="0" cap="flat" cmpd="sng" algn="ctr">
+                      <a:noFill/>
+                    </a:lnT>
+                    <a:lnB w="12700" cap="flat" cmpd="sng" algn="ctr">
+                      <a:solidFill>
+                        <a:srgbClr val="E5E5E5"/>
+                      </a:solidFill>
+                      <a:prstDash val="solid"/>
+                      <a:round/>
+                      <a:headEnd type="none" w="med" len="med"/>
+                      <a:tailEnd type="none" w="med" len="med"/>
+                    </a:lnB>
+                    <a:solidFill>
+                      <a:srgbClr val="FFFFFF"/>
+                    </a:solidFill>
+                  </a:tcPr>
+                </a:tc>
+                <a:tc>
+                  <a:txBody>
+                    <a:bodyPr/>
+                    <a:lstStyle/>
+                    <a:p>
+                      <a:pPr indent="0" marL="0">
+                        <a:buNone/>
+                      </a:pPr>
+                      <a:r>
+                        <a:rPr lang="en-US" sz="1200" dirty="0">
+                          <a:solidFill>
+                            <a:srgbClr val="1D2D3E"/>
+                          </a:solidFill>
+                          <a:latin typeface="Courier New" pitchFamily="34" charset="0"/>
+                          <a:ea typeface="Courier New" pitchFamily="34" charset="-122"/>
+                          <a:cs typeface="Courier New" pitchFamily="34" charset="-120"/>
+                        </a:rPr>
+                        <a:t>01 02 03 06</a:t>
+                      </a:r>
+                      <a:endParaRPr lang="en-US" sz="1200" dirty="0">
+                        <a:latin typeface="Courier New" charset="0"/>
+                        <a:ea typeface="Courier New" charset="0"/>
+                        <a:cs typeface="Courier New" charset="0"/>
+                      </a:endParaRPr>
+                    </a:p>
+                  </a:txBody>
+                  <a:tcPr marL="73152" marR="73152" marT="36576" marB="36576" anchor="ctr">
+                    <a:lnL w="0" cap="flat" cmpd="sng" algn="ctr">
+                      <a:noFill/>
+                    </a:lnL>
+                    <a:lnR w="0" cap="flat" cmpd="sng" algn="ctr">
+                      <a:noFill/>
+                    </a:lnR>
+                    <a:lnT w="0" cap="flat" cmpd="sng" algn="ctr">
+                      <a:noFill/>
+                    </a:lnT>
+                    <a:lnB w="12700" cap="flat" cmpd="sng" algn="ctr">
+                      <a:solidFill>
+                        <a:srgbClr val="E5E5E5"/>
+                      </a:solidFill>
+                      <a:prstDash val="solid"/>
+                      <a:round/>
+                      <a:headEnd type="none" w="med" len="med"/>
+                      <a:tailEnd type="none" w="med" len="med"/>
+                    </a:lnB>
+                    <a:solidFill>
+                      <a:srgbClr val="FFFFFF"/>
+                    </a:solidFill>
+                  </a:tcPr>
+                </a:tc>
+                <a:tc>
+                  <a:txBody>
+                    <a:bodyPr/>
+                    <a:lstStyle/>
+                    <a:p>
+                      <a:pPr indent="0" marL="0">
+                        <a:buNone/>
+                      </a:pPr>
+                      <a:r>
+                        <a:rPr lang="en-US" sz="1200" dirty="0">
+                          <a:solidFill>
+                            <a:srgbClr val="1D2D3E"/>
+                          </a:solidFill>
+                          <a:latin typeface="Courier New" pitchFamily="34" charset="0"/>
+                          <a:ea typeface="Courier New" pitchFamily="34" charset="-122"/>
+                          <a:cs typeface="Courier New" pitchFamily="34" charset="-120"/>
+                        </a:rPr>
+                        <a:t>— (fora do menu)</a:t>
+                      </a:r>
+                      <a:endParaRPr lang="en-US" sz="1200" dirty="0">
+                        <a:latin typeface="Courier New" charset="0"/>
+                        <a:ea typeface="Courier New" charset="0"/>
+                        <a:cs typeface="Courier New" charset="0"/>
+                      </a:endParaRPr>
+                    </a:p>
+                  </a:txBody>
+                  <a:tcPr marL="73152" marR="73152" marT="36576" marB="36576" anchor="ctr">
+                    <a:lnL w="0" cap="flat" cmpd="sng" algn="ctr">
+                      <a:noFill/>
+                    </a:lnL>
+                    <a:lnR w="0" cap="flat" cmpd="sng" algn="ctr">
+                      <a:noFill/>
+                    </a:lnR>
+                    <a:lnT w="0" cap="flat" cmpd="sng" algn="ctr">
+                      <a:noFill/>
+                    </a:lnT>
+                    <a:lnB w="12700" cap="flat" cmpd="sng" algn="ctr">
+                      <a:solidFill>
+                        <a:srgbClr val="E5E5E5"/>
+                      </a:solidFill>
+                      <a:prstDash val="solid"/>
+                      <a:round/>
+                      <a:headEnd type="none" w="med" len="med"/>
+                      <a:tailEnd type="none" w="med" len="med"/>
+                    </a:lnB>
+                    <a:solidFill>
+                      <a:srgbClr val="FFFFFF"/>
+                    </a:solidFill>
+                  </a:tcPr>
+                </a:tc>
+              </a:tr>
+              <a:tr h="548640">
+                <a:tc>
+                  <a:txBody>
+                    <a:bodyPr/>
+                    <a:lstStyle/>
+                    <a:p>
+                      <a:pPr indent="0" marL="0">
+                        <a:buNone/>
+                      </a:pPr>
+                      <a:r>
+                        <a:rPr lang="en-US" sz="1200" dirty="0">
+                          <a:solidFill>
+                            <a:srgbClr val="1D2D3E"/>
+                          </a:solidFill>
+                        </a:rPr>
+                        <a:t>Pedidos</a:t>
+                      </a:r>
+                      <a:endParaRPr lang="en-US" sz="1200" dirty="0"/>
+                    </a:p>
+                  </a:txBody>
+                  <a:tcPr marL="73152" marR="73152" marT="36576" marB="36576" anchor="ctr">
+                    <a:lnL w="0" cap="flat" cmpd="sng" algn="ctr">
+                      <a:noFill/>
+                    </a:lnL>
+                    <a:lnR w="0" cap="flat" cmpd="sng" algn="ctr">
+                      <a:noFill/>
+                    </a:lnR>
+                    <a:lnT w="0" cap="flat" cmpd="sng" algn="ctr">
+                      <a:noFill/>
+                    </a:lnT>
+                    <a:lnB w="12700" cap="flat" cmpd="sng" algn="ctr">
+                      <a:solidFill>
+                        <a:srgbClr val="E5E5E5"/>
+                      </a:solidFill>
+                      <a:prstDash val="solid"/>
+                      <a:round/>
+                      <a:headEnd type="none" w="med" len="med"/>
+                      <a:tailEnd type="none" w="med" len="med"/>
+                    </a:lnB>
+                    <a:solidFill>
+                      <a:srgbClr val="FFFFFF"/>
+                    </a:solidFill>
+                  </a:tcPr>
+                </a:tc>
+                <a:tc>
+                  <a:txBody>
+                    <a:bodyPr/>
+                    <a:lstStyle/>
+                    <a:p>
+                      <a:pPr indent="0" marL="0">
+                        <a:buNone/>
+                      </a:pPr>
+                      <a:r>
+                        <a:rPr lang="en-US" sz="1200" dirty="0">
+                          <a:solidFill>
+                            <a:srgbClr val="1D2D3E"/>
+                          </a:solidFill>
+                          <a:latin typeface="Courier New" pitchFamily="34" charset="0"/>
+                          <a:ea typeface="Courier New" pitchFamily="34" charset="-122"/>
+                          <a:cs typeface="Courier New" pitchFamily="34" charset="-120"/>
+                        </a:rPr>
+                        <a:t>ZUI_PC_PEDIDOS_COMPRAS_O4</a:t>
+                      </a:r>
+                      <a:endParaRPr lang="en-US" sz="1200" dirty="0">
+                        <a:latin typeface="Courier New" charset="0"/>
+                        <a:ea typeface="Courier New" charset="0"/>
+                        <a:cs typeface="Courier New" charset="0"/>
+                      </a:endParaRPr>
+                    </a:p>
+                  </a:txBody>
+                  <a:tcPr marL="73152" marR="73152" marT="36576" marB="36576" anchor="ctr">
+                    <a:lnL w="0" cap="flat" cmpd="sng" algn="ctr">
+                      <a:noFill/>
+                    </a:lnL>
+                    <a:lnR w="0" cap="flat" cmpd="sng" algn="ctr">
+                      <a:noFill/>
+                    </a:lnR>
+                    <a:lnT w="0" cap="flat" cmpd="sng" algn="ctr">
+                      <a:noFill/>
+                    </a:lnT>
+                    <a:lnB w="12700" cap="flat" cmpd="sng" algn="ctr">
+                      <a:solidFill>
+                        <a:srgbClr val="E5E5E5"/>
+                      </a:solidFill>
+                      <a:prstDash val="solid"/>
+                      <a:round/>
+                      <a:headEnd type="none" w="med" len="med"/>
+                      <a:tailEnd type="none" w="med" len="med"/>
+                    </a:lnB>
+                    <a:solidFill>
+                      <a:srgbClr val="FFFFFF"/>
+                    </a:solidFill>
+                  </a:tcPr>
+                </a:tc>
+                <a:tc>
+                  <a:txBody>
+                    <a:bodyPr/>
+                    <a:lstStyle/>
+                    <a:p>
+                      <a:pPr indent="0" marL="0">
+                        <a:buNone/>
+                      </a:pPr>
+                      <a:r>
+                        <a:rPr lang="en-US" sz="1200" dirty="0">
+                          <a:solidFill>
+                            <a:srgbClr val="1D2D3E"/>
+                          </a:solidFill>
+                          <a:latin typeface="Courier New" pitchFamily="34" charset="0"/>
+                          <a:ea typeface="Courier New" pitchFamily="34" charset="-122"/>
+                          <a:cs typeface="Courier New" pitchFamily="34" charset="-120"/>
+                        </a:rPr>
+                        <a:t>ZPC_PEDIDO</a:t>
+                      </a:r>
+                      <a:endParaRPr lang="en-US" sz="1200" dirty="0">
+                        <a:latin typeface="Courier New" charset="0"/>
+                        <a:ea typeface="Courier New" charset="0"/>
+                        <a:cs typeface="Courier New" charset="0"/>
+                      </a:endParaRPr>
+                    </a:p>
+                  </a:txBody>
+                  <a:tcPr marL="73152" marR="73152" marT="36576" marB="36576" anchor="ctr">
+                    <a:lnL w="0" cap="flat" cmpd="sng" algn="ctr">
+                      <a:noFill/>
+                    </a:lnL>
+                    <a:lnR w="0" cap="flat" cmpd="sng" algn="ctr">
+                      <a:noFill/>
+                    </a:lnR>
+                    <a:lnT w="0" cap="flat" cmpd="sng" algn="ctr">
+                      <a:noFill/>
+                    </a:lnT>
+                    <a:lnB w="12700" cap="flat" cmpd="sng" algn="ctr">
+                      <a:solidFill>
+                        <a:srgbClr val="E5E5E5"/>
+                      </a:solidFill>
+                      <a:prstDash val="solid"/>
+                      <a:round/>
+                      <a:headEnd type="none" w="med" len="med"/>
+                      <a:tailEnd type="none" w="med" len="med"/>
+                    </a:lnB>
+                    <a:solidFill>
+                      <a:srgbClr val="FFFFFF"/>
+                    </a:solidFill>
+                  </a:tcPr>
+                </a:tc>
+                <a:tc>
+                  <a:txBody>
+                    <a:bodyPr/>
+                    <a:lstStyle/>
+                    <a:p>
+                      <a:pPr indent="0" marL="0">
+                        <a:buNone/>
+                      </a:pPr>
+                      <a:r>
+                        <a:rPr lang="en-US" sz="1200" dirty="0">
+                          <a:solidFill>
+                            <a:srgbClr val="1D2D3E"/>
+                          </a:solidFill>
+                          <a:latin typeface="Courier New" pitchFamily="34" charset="0"/>
+                          <a:ea typeface="Courier New" pitchFamily="34" charset="-122"/>
+                          <a:cs typeface="Courier New" pitchFamily="34" charset="-120"/>
+                        </a:rPr>
+                        <a:t>01 02 03 06 16</a:t>
+                      </a:r>
+                      <a:endParaRPr lang="en-US" sz="1200" dirty="0">
+                        <a:latin typeface="Courier New" charset="0"/>
+                        <a:ea typeface="Courier New" charset="0"/>
+                        <a:cs typeface="Courier New" charset="0"/>
+                      </a:endParaRPr>
+                    </a:p>
+                  </a:txBody>
+                  <a:tcPr marL="73152" marR="73152" marT="36576" marB="36576" anchor="ctr">
+                    <a:lnL w="0" cap="flat" cmpd="sng" algn="ctr">
+                      <a:noFill/>
+                    </a:lnL>
+                    <a:lnR w="0" cap="flat" cmpd="sng" algn="ctr">
+                      <a:noFill/>
+                    </a:lnR>
+                    <a:lnT w="0" cap="flat" cmpd="sng" algn="ctr">
+                      <a:noFill/>
+                    </a:lnT>
+                    <a:lnB w="12700" cap="flat" cmpd="sng" algn="ctr">
+                      <a:solidFill>
+                        <a:srgbClr val="E5E5E5"/>
+                      </a:solidFill>
+                      <a:prstDash val="solid"/>
+                      <a:round/>
+                      <a:headEnd type="none" w="med" len="med"/>
+                      <a:tailEnd type="none" w="med" len="med"/>
+                    </a:lnB>
+                    <a:solidFill>
+                      <a:srgbClr val="FFFFFF"/>
+                    </a:solidFill>
+                  </a:tcPr>
+                </a:tc>
+                <a:tc>
+                  <a:txBody>
+                    <a:bodyPr/>
+                    <a:lstStyle/>
+                    <a:p>
+                      <a:pPr indent="0" marL="0">
+                        <a:buNone/>
+                      </a:pPr>
+                      <a:r>
+                        <a:rPr lang="en-US" sz="1200" dirty="0">
+                          <a:solidFill>
+                            <a:srgbClr val="1D2D3E"/>
+                          </a:solidFill>
+                          <a:latin typeface="Courier New" pitchFamily="34" charset="0"/>
+                          <a:ea typeface="Courier New" pitchFamily="34" charset="-122"/>
+                          <a:cs typeface="Courier New" pitchFamily="34" charset="-120"/>
+                        </a:rPr>
+                        <a:t>01 02 03</a:t>
+                      </a:r>
+                      <a:endParaRPr lang="en-US" sz="1200" dirty="0">
+                        <a:latin typeface="Courier New" charset="0"/>
+                        <a:ea typeface="Courier New" charset="0"/>
+                        <a:cs typeface="Courier New" charset="0"/>
+                      </a:endParaRPr>
+                    </a:p>
+                  </a:txBody>
+                  <a:tcPr marL="73152" marR="73152" marT="36576" marB="36576" anchor="ctr">
+                    <a:lnL w="0" cap="flat" cmpd="sng" algn="ctr">
+                      <a:noFill/>
+                    </a:lnL>
+                    <a:lnR w="0" cap="flat" cmpd="sng" algn="ctr">
+                      <a:noFill/>
+                    </a:lnR>
+                    <a:lnT w="0" cap="flat" cmpd="sng" algn="ctr">
+                      <a:noFill/>
+                    </a:lnT>
+                    <a:lnB w="12700" cap="flat" cmpd="sng" algn="ctr">
+                      <a:solidFill>
+                        <a:srgbClr val="E5E5E5"/>
+                      </a:solidFill>
+                      <a:prstDash val="solid"/>
+                      <a:round/>
+                      <a:headEnd type="none" w="med" len="med"/>
+                      <a:tailEnd type="none" w="med" len="med"/>
+                    </a:lnB>
+                    <a:solidFill>
+                      <a:srgbClr val="FFFFFF"/>
+                    </a:solidFill>
+                  </a:tcPr>
+                </a:tc>
+              </a:tr>
+              <a:tr h="548640">
+                <a:tc>
+                  <a:txBody>
+                    <a:bodyPr/>
+                    <a:lstStyle/>
+                    <a:p>
+                      <a:pPr indent="0" marL="0">
+                        <a:buNone/>
+                      </a:pPr>
+                      <a:r>
+                        <a:rPr lang="en-US" sz="1200" dirty="0">
+                          <a:solidFill>
+                            <a:srgbClr val="1D2D3E"/>
+                          </a:solidFill>
+                        </a:rPr>
+                        <a:t>Reembolsos</a:t>
+                      </a:r>
+                      <a:endParaRPr lang="en-US" sz="1200" dirty="0"/>
+                    </a:p>
+                  </a:txBody>
+                  <a:tcPr marL="73152" marR="73152" marT="36576" marB="36576" anchor="ctr">
+                    <a:lnL w="0" cap="flat" cmpd="sng" algn="ctr">
+                      <a:noFill/>
+                    </a:lnL>
+                    <a:lnR w="0" cap="flat" cmpd="sng" algn="ctr">
+                      <a:noFill/>
+                    </a:lnR>
+                    <a:lnT w="0" cap="flat" cmpd="sng" algn="ctr">
+                      <a:noFill/>
+                    </a:lnT>
+                    <a:lnB w="12700" cap="flat" cmpd="sng" algn="ctr">
+                      <a:solidFill>
+                        <a:srgbClr val="E5E5E5"/>
+                      </a:solidFill>
+                      <a:prstDash val="solid"/>
+                      <a:round/>
+                      <a:headEnd type="none" w="med" len="med"/>
+                      <a:tailEnd type="none" w="med" len="med"/>
+                    </a:lnB>
+                    <a:solidFill>
+                      <a:srgbClr val="FFFFFF"/>
+                    </a:solidFill>
+                  </a:tcPr>
+                </a:tc>
+                <a:tc>
+                  <a:txBody>
+                    <a:bodyPr/>
+                    <a:lstStyle/>
+                    <a:p>
+                      <a:pPr indent="0" marL="0">
+                        <a:buNone/>
+                      </a:pPr>
+                      <a:r>
+                        <a:rPr lang="en-US" sz="1200" dirty="0">
+                          <a:solidFill>
+                            <a:srgbClr val="1D2D3E"/>
+                          </a:solidFill>
+                          <a:latin typeface="Courier New" pitchFamily="34" charset="0"/>
+                          <a:ea typeface="Courier New" pitchFamily="34" charset="-122"/>
+                          <a:cs typeface="Courier New" pitchFamily="34" charset="-120"/>
+                        </a:rPr>
+                        <a:t>ZUI_PC_REEMBOLSOS_O4</a:t>
+                      </a:r>
+                      <a:endParaRPr lang="en-US" sz="1200" dirty="0">
+                        <a:latin typeface="Courier New" charset="0"/>
+                        <a:ea typeface="Courier New" charset="0"/>
+                        <a:cs typeface="Courier New" charset="0"/>
+                      </a:endParaRPr>
+                    </a:p>
+                  </a:txBody>
+                  <a:tcPr marL="73152" marR="73152" marT="36576" marB="36576" anchor="ctr">
+                    <a:lnL w="0" cap="flat" cmpd="sng" algn="ctr">
+                      <a:noFill/>
+                    </a:lnL>
+                    <a:lnR w="0" cap="flat" cmpd="sng" algn="ctr">
+                      <a:noFill/>
+                    </a:lnR>
+                    <a:lnT w="0" cap="flat" cmpd="sng" algn="ctr">
+                      <a:noFill/>
+                    </a:lnT>
+                    <a:lnB w="12700" cap="flat" cmpd="sng" algn="ctr">
+                      <a:solidFill>
+                        <a:srgbClr val="E5E5E5"/>
+                      </a:solidFill>
+                      <a:prstDash val="solid"/>
+                      <a:round/>
+                      <a:headEnd type="none" w="med" len="med"/>
+                      <a:tailEnd type="none" w="med" len="med"/>
+                    </a:lnB>
+                    <a:solidFill>
+                      <a:srgbClr val="FFFFFF"/>
+                    </a:solidFill>
+                  </a:tcPr>
+                </a:tc>
+                <a:tc>
+                  <a:txBody>
+                    <a:bodyPr/>
+                    <a:lstStyle/>
+                    <a:p>
+                      <a:pPr indent="0" marL="0">
+                        <a:buNone/>
+                      </a:pPr>
+                      <a:r>
+                        <a:rPr lang="en-US" sz="1200" dirty="0">
+                          <a:solidFill>
+                            <a:srgbClr val="1D2D3E"/>
+                          </a:solidFill>
+                          <a:latin typeface="Courier New" pitchFamily="34" charset="0"/>
+                          <a:ea typeface="Courier New" pitchFamily="34" charset="-122"/>
+                          <a:cs typeface="Courier New" pitchFamily="34" charset="-120"/>
+                        </a:rPr>
+                        <a:t>ZPC_PEDIDO</a:t>
+                      </a:r>
+                      <a:endParaRPr lang="en-US" sz="1200" dirty="0">
+                        <a:latin typeface="Courier New" charset="0"/>
+                        <a:ea typeface="Courier New" charset="0"/>
+                        <a:cs typeface="Courier New" charset="0"/>
+                      </a:endParaRPr>
+                    </a:p>
+                  </a:txBody>
+                  <a:tcPr marL="73152" marR="73152" marT="36576" marB="36576" anchor="ctr">
+                    <a:lnL w="0" cap="flat" cmpd="sng" algn="ctr">
+                      <a:noFill/>
+                    </a:lnL>
+                    <a:lnR w="0" cap="flat" cmpd="sng" algn="ctr">
+                      <a:noFill/>
+                    </a:lnR>
+                    <a:lnT w="0" cap="flat" cmpd="sng" algn="ctr">
+                      <a:noFill/>
+                    </a:lnT>
+                    <a:lnB w="12700" cap="flat" cmpd="sng" algn="ctr">
+                      <a:solidFill>
+                        <a:srgbClr val="E5E5E5"/>
+                      </a:solidFill>
+                      <a:prstDash val="solid"/>
+                      <a:round/>
+                      <a:headEnd type="none" w="med" len="med"/>
+                      <a:tailEnd type="none" w="med" len="med"/>
+                    </a:lnB>
+                    <a:solidFill>
+                      <a:srgbClr val="FFFFFF"/>
+                    </a:solidFill>
+                  </a:tcPr>
+                </a:tc>
+                <a:tc>
+                  <a:txBody>
+                    <a:bodyPr/>
+                    <a:lstStyle/>
+                    <a:p>
+                      <a:pPr indent="0" marL="0">
+                        <a:buNone/>
+                      </a:pPr>
+                      <a:r>
+                        <a:rPr lang="en-US" sz="1200" dirty="0">
+                          <a:solidFill>
+                            <a:srgbClr val="1D2D3E"/>
+                          </a:solidFill>
+                          <a:latin typeface="Courier New" pitchFamily="34" charset="0"/>
+                          <a:ea typeface="Courier New" pitchFamily="34" charset="-122"/>
+                          <a:cs typeface="Courier New" pitchFamily="34" charset="-120"/>
+                        </a:rPr>
+                        <a:t>03 16</a:t>
+                      </a:r>
+                      <a:endParaRPr lang="en-US" sz="1200" dirty="0">
+                        <a:latin typeface="Courier New" charset="0"/>
+                        <a:ea typeface="Courier New" charset="0"/>
+                        <a:cs typeface="Courier New" charset="0"/>
+                      </a:endParaRPr>
+                    </a:p>
+                  </a:txBody>
+                  <a:tcPr marL="73152" marR="73152" marT="36576" marB="36576" anchor="ctr">
+                    <a:lnL w="0" cap="flat" cmpd="sng" algn="ctr">
+                      <a:noFill/>
+                    </a:lnL>
+                    <a:lnR w="0" cap="flat" cmpd="sng" algn="ctr">
+                      <a:noFill/>
+                    </a:lnR>
+                    <a:lnT w="0" cap="flat" cmpd="sng" algn="ctr">
+                      <a:noFill/>
+                    </a:lnT>
+                    <a:lnB w="12700" cap="flat" cmpd="sng" algn="ctr">
+                      <a:solidFill>
+                        <a:srgbClr val="E5E5E5"/>
+                      </a:solidFill>
+                      <a:prstDash val="solid"/>
+                      <a:round/>
+                      <a:headEnd type="none" w="med" len="med"/>
+                      <a:tailEnd type="none" w="med" len="med"/>
+                    </a:lnB>
+                    <a:solidFill>
+                      <a:srgbClr val="FFFFFF"/>
+                    </a:solidFill>
+                  </a:tcPr>
+                </a:tc>
+                <a:tc>
+                  <a:txBody>
+                    <a:bodyPr/>
+                    <a:lstStyle/>
+                    <a:p>
+                      <a:pPr indent="0" marL="0">
+                        <a:buNone/>
+                      </a:pPr>
+                      <a:r>
+                        <a:rPr lang="en-US" sz="1200" dirty="0">
+                          <a:solidFill>
+                            <a:srgbClr val="1D2D3E"/>
+                          </a:solidFill>
+                          <a:latin typeface="Courier New" pitchFamily="34" charset="0"/>
+                          <a:ea typeface="Courier New" pitchFamily="34" charset="-122"/>
+                          <a:cs typeface="Courier New" pitchFamily="34" charset="-120"/>
+                        </a:rPr>
+                        <a:t>03</a:t>
+                      </a:r>
+                      <a:endParaRPr lang="en-US" sz="1200" dirty="0">
+                        <a:latin typeface="Courier New" charset="0"/>
+                        <a:ea typeface="Courier New" charset="0"/>
+                        <a:cs typeface="Courier New" charset="0"/>
+                      </a:endParaRPr>
+                    </a:p>
+                  </a:txBody>
+                  <a:tcPr marL="73152" marR="73152" marT="36576" marB="36576" anchor="ctr">
+                    <a:lnL w="0" cap="flat" cmpd="sng" algn="ctr">
+                      <a:noFill/>
+                    </a:lnL>
+                    <a:lnR w="0" cap="flat" cmpd="sng" algn="ctr">
+                      <a:noFill/>
+                    </a:lnR>
+                    <a:lnT w="0" cap="flat" cmpd="sng" algn="ctr">
+                      <a:noFill/>
+                    </a:lnT>
+                    <a:lnB w="12700" cap="flat" cmpd="sng" algn="ctr">
+                      <a:solidFill>
+                        <a:srgbClr val="E5E5E5"/>
+                      </a:solidFill>
+                      <a:prstDash val="solid"/>
+                      <a:round/>
+                      <a:headEnd type="none" w="med" len="med"/>
+                      <a:tailEnd type="none" w="med" len="med"/>
+                    </a:lnB>
+                    <a:solidFill>
+                      <a:srgbClr val="FFFFFF"/>
+                    </a:solidFill>
+                  </a:tcPr>
+                </a:tc>
+              </a:tr>
+            </a:tbl>
+          </a:graphicData>
+        </a:graphic>
+      </p:graphicFrame>
+      <p:sp>
+        <p:nvSpPr>
+          <p:cNvPr id="7" name="Cartão"/>
+          <p:cNvSpPr/>
+          <p:nvPr/>
+        </p:nvSpPr>
+        <p:spPr>
+          <a:xfrm>
+            <a:off x="548640" y="4754880"/>
+            <a:ext cx="5410048" cy="1417320"/>
+          </a:xfrm>
+          <a:prstGeom prst="roundRect">
+            <a:avLst>
+              <a:gd name="adj" fmla="val 7742"/>
+            </a:avLst>
+          </a:prstGeom>
+          <a:solidFill>
+            <a:srgbClr val="FFFFFF"/>
+          </a:solidFill>
+          <a:ln/>
+          <a:effectLst>
+            <a:outerShdw sx="100000" sy="100000" kx="0" ky="0" algn="bl" rotWithShape="0" blurRad="101600" dist="25400" dir="5400000">
+              <a:srgbClr val="223548">
+                <a:alpha val="16000"/>
+              </a:srgbClr>
+            </a:outerShdw>
+          </a:effectLst>
+        </p:spPr>
+      </p:sp>
+      <p:sp>
+        <p:nvSpPr>
+          <p:cNvPr id="8" name="Text 4"/>
+          <p:cNvSpPr txBox="1"/>
+          <p:nvPr/>
+        </p:nvSpPr>
+        <p:spPr>
+          <a:xfrm>
+            <a:off x="777240" y="4892040"/>
+            <a:ext cx="4952848" cy="320040"/>
+          </a:xfrm>
+          <a:prstGeom prst="rect">
+            <a:avLst/>
+          </a:prstGeom>
+          <a:noFill/>
+          <a:ln/>
+        </p:spPr>
+        <p:txBody>
+          <a:bodyPr wrap="square" lIns="0" tIns="0" rIns="0" bIns="0" rtlCol="0" anchor="ctr"/>
+          <a:lstStyle/>
+          <a:p>
+            <a:pPr indent="0" marL="0">
+              <a:buNone/>
+            </a:pPr>
+            <a:r>
+              <a:rPr lang="en-US" sz="1400" b="1" dirty="0">
+                <a:solidFill>
+                  <a:srgbClr val="0064D9"/>
+                </a:solidFill>
+                <a:latin typeface="Courier New" pitchFamily="34" charset="0"/>
+                <a:ea typeface="Courier New" pitchFamily="34" charset="-122"/>
+                <a:cs typeface="Courier New" pitchFamily="34" charset="-120"/>
+              </a:rPr>
+              <a:t>Z_PC_ADMIN</a:t>
+            </a:r>
+            <a:pPr indent="0" marL="0">
+              <a:buNone/>
+            </a:pPr>
+            <a:r>
+              <a:rPr lang="en-US" sz="1400" dirty="0">
+                <a:solidFill>
+                  <a:srgbClr val="556B82"/>
+                </a:solidFill>
+              </a:rPr>
+              <a:t>  Administrador</a:t>
+            </a:r>
+            <a:endParaRPr lang="en-US" sz="1400" dirty="0"/>
+          </a:p>
+        </p:txBody>
+      </p:sp>
+      <p:sp>
+        <p:nvSpPr>
+          <p:cNvPr id="9" name="Status ZPC_BC_CLIENTES"/>
+          <p:cNvSpPr/>
+          <p:nvPr/>
+        </p:nvSpPr>
+        <p:spPr>
+          <a:xfrm>
+            <a:off x="777240" y="5321808"/>
+            <a:ext cx="1380744" cy="310896"/>
+          </a:xfrm>
+          <a:prstGeom prst="roundRect">
+            <a:avLst>
+              <a:gd name="adj" fmla="val 50000"/>
+            </a:avLst>
+          </a:prstGeom>
+          <a:solidFill>
+            <a:srgbClr val="0070F2"/>
+          </a:solidFill>
+          <a:ln/>
+        </p:spPr>
+        <p:txBody>
+          <a:bodyPr wrap="square" lIns="0" tIns="0" rIns="0" bIns="0" rtlCol="0" anchor="ctr"/>
+          <a:lstStyle/>
+          <a:p>
+            <a:pPr algn="ctr" indent="0" marL="0">
+              <a:buNone/>
+            </a:pPr>
+            <a:r>
+              <a:rPr lang="en-US" sz="1000" b="1" dirty="0">
+                <a:solidFill>
+                  <a:srgbClr val="FFFFFF"/>
+                </a:solidFill>
+                <a:latin typeface="Courier New" pitchFamily="34" charset="0"/>
+                <a:ea typeface="Courier New" pitchFamily="34" charset="-122"/>
+                <a:cs typeface="Courier New" pitchFamily="34" charset="-120"/>
+              </a:rPr>
+              <a:t>Clientes</a:t>
+            </a:r>
+            <a:endParaRPr lang="en-US" sz="1000" dirty="0"/>
+          </a:p>
+        </p:txBody>
+      </p:sp>
+      <p:sp>
+        <p:nvSpPr>
+          <p:cNvPr id="10" name="Status ZPC_BC_ESTOQUE"/>
+          <p:cNvSpPr/>
+          <p:nvPr/>
+        </p:nvSpPr>
+        <p:spPr>
+          <a:xfrm>
+            <a:off x="2249424" y="5321808"/>
+            <a:ext cx="1305763" cy="310896"/>
+          </a:xfrm>
+          <a:prstGeom prst="roundRect">
+            <a:avLst>
+              <a:gd name="adj" fmla="val 50000"/>
+            </a:avLst>
+          </a:prstGeom>
+          <a:solidFill>
+            <a:srgbClr val="0070F2"/>
+          </a:solidFill>
+          <a:ln/>
+        </p:spPr>
+        <p:txBody>
+          <a:bodyPr wrap="square" lIns="0" tIns="0" rIns="0" bIns="0" rtlCol="0" anchor="ctr"/>
+          <a:lstStyle/>
+          <a:p>
+            <a:pPr algn="ctr" indent="0" marL="0">
+              <a:buNone/>
+            </a:pPr>
+            <a:r>
+              <a:rPr lang="en-US" sz="1000" b="1" dirty="0">
+                <a:solidFill>
+                  <a:srgbClr val="FFFFFF"/>
+                </a:solidFill>
+                <a:latin typeface="Courier New" pitchFamily="34" charset="0"/>
+                <a:ea typeface="Courier New" pitchFamily="34" charset="-122"/>
+                <a:cs typeface="Courier New" pitchFamily="34" charset="-120"/>
+              </a:rPr>
+              <a:t>Estoque</a:t>
+            </a:r>
+            <a:endParaRPr lang="en-US" sz="1000" dirty="0"/>
+          </a:p>
+        </p:txBody>
+      </p:sp>
+      <p:sp>
+        <p:nvSpPr>
+          <p:cNvPr id="11" name="Status ZPC_BC_PEDIDOS"/>
+          <p:cNvSpPr/>
+          <p:nvPr/>
+        </p:nvSpPr>
+        <p:spPr>
+          <a:xfrm>
+            <a:off x="3646627" y="5321808"/>
+            <a:ext cx="1305763" cy="310896"/>
+          </a:xfrm>
+          <a:prstGeom prst="roundRect">
+            <a:avLst>
+              <a:gd name="adj" fmla="val 50000"/>
+            </a:avLst>
+          </a:prstGeom>
+          <a:solidFill>
+            <a:srgbClr val="0070F2"/>
+          </a:solidFill>
+          <a:ln/>
+        </p:spPr>
+        <p:txBody>
+          <a:bodyPr wrap="square" lIns="0" tIns="0" rIns="0" bIns="0" rtlCol="0" anchor="ctr"/>
+          <a:lstStyle/>
+          <a:p>
+            <a:pPr algn="ctr" indent="0" marL="0">
+              <a:buNone/>
+            </a:pPr>
+            <a:r>
+              <a:rPr lang="en-US" sz="1000" b="1" dirty="0">
+                <a:solidFill>
+                  <a:srgbClr val="FFFFFF"/>
+                </a:solidFill>
+                <a:latin typeface="Courier New" pitchFamily="34" charset="0"/>
+                <a:ea typeface="Courier New" pitchFamily="34" charset="-122"/>
+                <a:cs typeface="Courier New" pitchFamily="34" charset="-120"/>
+              </a:rPr>
+              <a:t>Pedidos</a:t>
+            </a:r>
+            <a:endParaRPr lang="en-US" sz="1000" dirty="0"/>
+          </a:p>
+        </p:txBody>
+      </p:sp>
+      <p:sp>
+        <p:nvSpPr>
+          <p:cNvPr id="12" name="Status ZPC_BC_REEMBOLSOS"/>
+          <p:cNvSpPr/>
+          <p:nvPr/>
+        </p:nvSpPr>
+        <p:spPr>
+          <a:xfrm>
+            <a:off x="777240" y="5705856"/>
+            <a:ext cx="1530706" cy="310896"/>
+          </a:xfrm>
+          <a:prstGeom prst="roundRect">
+            <a:avLst>
+              <a:gd name="adj" fmla="val 50000"/>
+            </a:avLst>
+          </a:prstGeom>
+          <a:solidFill>
+            <a:srgbClr val="0070F2"/>
+          </a:solidFill>
+          <a:ln/>
+        </p:spPr>
+        <p:txBody>
+          <a:bodyPr wrap="square" lIns="0" tIns="0" rIns="0" bIns="0" rtlCol="0" anchor="ctr"/>
+          <a:lstStyle/>
+          <a:p>
+            <a:pPr algn="ctr" indent="0" marL="0">
+              <a:buNone/>
+            </a:pPr>
+            <a:r>
+              <a:rPr lang="en-US" sz="1000" b="1" dirty="0">
+                <a:solidFill>
+                  <a:srgbClr val="FFFFFF"/>
+                </a:solidFill>
+                <a:latin typeface="Courier New" pitchFamily="34" charset="0"/>
+                <a:ea typeface="Courier New" pitchFamily="34" charset="-122"/>
+                <a:cs typeface="Courier New" pitchFamily="34" charset="-120"/>
+              </a:rPr>
+              <a:t>Reembolsos</a:t>
+            </a:r>
+            <a:endParaRPr lang="en-US" sz="1000" dirty="0"/>
+          </a:p>
+        </p:txBody>
+      </p:sp>
+      <p:sp>
+        <p:nvSpPr>
+          <p:cNvPr id="13" name="Cartão"/>
+          <p:cNvSpPr/>
+          <p:nvPr/>
+        </p:nvSpPr>
+        <p:spPr>
+          <a:xfrm>
+            <a:off x="6233008" y="4754880"/>
+            <a:ext cx="5410048" cy="1417320"/>
+          </a:xfrm>
+          <a:prstGeom prst="roundRect">
+            <a:avLst>
+              <a:gd name="adj" fmla="val 7742"/>
+            </a:avLst>
+          </a:prstGeom>
+          <a:solidFill>
+            <a:srgbClr val="FFFFFF"/>
+          </a:solidFill>
+          <a:ln/>
+          <a:effectLst>
+            <a:outerShdw sx="100000" sy="100000" kx="0" ky="0" algn="bl" rotWithShape="0" blurRad="101600" dist="25400" dir="5400000">
+              <a:srgbClr val="223548">
+                <a:alpha val="16000"/>
+              </a:srgbClr>
+            </a:outerShdw>
+          </a:effectLst>
+        </p:spPr>
+      </p:sp>
+      <p:sp>
+        <p:nvSpPr>
+          <p:cNvPr id="14" name="Text 10"/>
+          <p:cNvSpPr txBox="1"/>
+          <p:nvPr/>
+        </p:nvSpPr>
+        <p:spPr>
+          <a:xfrm>
+            <a:off x="6461608" y="4892040"/>
+            <a:ext cx="4952848" cy="320040"/>
+          </a:xfrm>
+          <a:prstGeom prst="rect">
+            <a:avLst/>
+          </a:prstGeom>
+          <a:noFill/>
+          <a:ln/>
+        </p:spPr>
+        <p:txBody>
+          <a:bodyPr wrap="square" lIns="0" tIns="0" rIns="0" bIns="0" rtlCol="0" anchor="ctr"/>
+          <a:lstStyle/>
+          <a:p>
+            <a:pPr indent="0" marL="0">
+              <a:buNone/>
+            </a:pPr>
+            <a:r>
+              <a:rPr lang="en-US" sz="1400" b="1" dirty="0">
+                <a:solidFill>
+                  <a:srgbClr val="0064D9"/>
+                </a:solidFill>
+                <a:latin typeface="Courier New" pitchFamily="34" charset="0"/>
+                <a:ea typeface="Courier New" pitchFamily="34" charset="-122"/>
+                <a:cs typeface="Courier New" pitchFamily="34" charset="-120"/>
+              </a:rPr>
+              <a:t>Z_PC_COMUM</a:t>
+            </a:r>
+            <a:pPr indent="0" marL="0">
+              <a:buNone/>
+            </a:pPr>
+            <a:r>
+              <a:rPr lang="en-US" sz="1400" dirty="0">
+                <a:solidFill>
+                  <a:srgbClr val="556B82"/>
+                </a:solidFill>
+              </a:rPr>
+              <a:t>  Usuário comum (ZPC_ADMIN 03)</a:t>
+            </a:r>
+            <a:endParaRPr lang="en-US" sz="1400" dirty="0"/>
+          </a:p>
+        </p:txBody>
+      </p:sp>
+      <p:sp>
+        <p:nvSpPr>
+          <p:cNvPr id="15" name="Status ZPC_BC_PEDIDOS"/>
+          <p:cNvSpPr/>
+          <p:nvPr/>
+        </p:nvSpPr>
+        <p:spPr>
+          <a:xfrm>
+            <a:off x="6461608" y="5321808"/>
+            <a:ext cx="1305763" cy="310896"/>
+          </a:xfrm>
+          <a:prstGeom prst="roundRect">
+            <a:avLst>
+              <a:gd name="adj" fmla="val 50000"/>
+            </a:avLst>
+          </a:prstGeom>
+          <a:solidFill>
+            <a:srgbClr val="E1F4FF"/>
+          </a:solidFill>
+          <a:ln/>
+        </p:spPr>
+        <p:txBody>
+          <a:bodyPr wrap="square" lIns="0" tIns="0" rIns="0" bIns="0" rtlCol="0" anchor="ctr"/>
+          <a:lstStyle/>
+          <a:p>
+            <a:pPr algn="ctr" indent="0" marL="0">
+              <a:buNone/>
+            </a:pPr>
+            <a:r>
+              <a:rPr lang="en-US" sz="1000" b="1" dirty="0">
+                <a:solidFill>
+                  <a:srgbClr val="0064D9"/>
+                </a:solidFill>
+                <a:latin typeface="Courier New" pitchFamily="34" charset="0"/>
+                <a:ea typeface="Courier New" pitchFamily="34" charset="-122"/>
+                <a:cs typeface="Courier New" pitchFamily="34" charset="-120"/>
+              </a:rPr>
+              <a:t>Pedidos</a:t>
+            </a:r>
+            <a:endParaRPr lang="en-US" sz="1000" dirty="0"/>
+          </a:p>
+        </p:txBody>
+      </p:sp>
+      <p:sp>
+        <p:nvSpPr>
+          <p:cNvPr id="16" name="Status ZPC_BC_REEMBOLSOS"/>
+          <p:cNvSpPr/>
+          <p:nvPr/>
+        </p:nvSpPr>
+        <p:spPr>
+          <a:xfrm>
+            <a:off x="7858811" y="5321808"/>
+            <a:ext cx="1530706" cy="310896"/>
+          </a:xfrm>
+          <a:prstGeom prst="roundRect">
+            <a:avLst>
+              <a:gd name="adj" fmla="val 50000"/>
+            </a:avLst>
+          </a:prstGeom>
+          <a:solidFill>
+            <a:srgbClr val="E1F4FF"/>
+          </a:solidFill>
+          <a:ln/>
+        </p:spPr>
+        <p:txBody>
+          <a:bodyPr wrap="square" lIns="0" tIns="0" rIns="0" bIns="0" rtlCol="0" anchor="ctr"/>
+          <a:lstStyle/>
+          <a:p>
+            <a:pPr algn="ctr" indent="0" marL="0">
+              <a:buNone/>
+            </a:pPr>
+            <a:r>
+              <a:rPr lang="en-US" sz="1000" b="1" dirty="0">
+                <a:solidFill>
+                  <a:srgbClr val="0064D9"/>
+                </a:solidFill>
+                <a:latin typeface="Courier New" pitchFamily="34" charset="0"/>
+                <a:ea typeface="Courier New" pitchFamily="34" charset="-122"/>
+                <a:cs typeface="Courier New" pitchFamily="34" charset="-120"/>
+              </a:rPr>
+              <a:t>Reembolsos</a:t>
+            </a:r>
+            <a:endParaRPr lang="en-US" sz="1000" dirty="0"/>
+          </a:p>
+        </p:txBody>
+      </p:sp>
+      <p:sp>
+        <p:nvSpPr>
+          <p:cNvPr id="25" name="Slide Number Placeholder 0"/>
+          <p:cNvSpPr>
+            <a:spLocks noGrp="1"/>
+          </p:cNvSpPr>
+          <p:nvPr>
+            <p:ph type="sldNum" sz="quarter" idx="4294967295"/>
+          </p:nvPr>
+        </p:nvSpPr>
+        <p:spPr>
+          <a:xfrm>
+            <a:off x="11183112" y="6419088"/>
+            <a:ext cx="457200" cy="274320"/>
+          </a:xfrm>
+          <a:prstGeom prst="rect">
+            <a:avLst/>
+          </a:prstGeom>
+          <a:extLst>
+            <a:ext uri="{C572A759-6A51-4108-AA02-DFA0A04FC94B}">
+              <ma14:wrappingTextBoxFlag xmlns:ma14="http://schemas.microsoft.com/office/mac/drawingml/2011/main" val="0"/>
+            </a:ext>
+          </a:extLst>
+        </p:spPr>
+        <p:txBody>
+          <a:bodyPr lIns="0" tIns="0" rIns="0" bIns="0" anchor="ctr"/>
+          <a:lstStyle>
+            <a:lvl1pPr>
+              <a:defRPr sz="900">
+                <a:solidFill>
+                  <a:srgbClr val="556B82"/>
+                </a:solidFill>
+              </a:defRPr>
+            </a:lvl1pPr>
+          </a:lstStyle>
+          <a:p>
+            <a:pPr algn="r"/>
+            <a:fld id="{F7021451-1387-4CA6-816F-3879F97B5CBC}" type="slidenum">
+              <a:rPr b="0" lang="en-US"/>
+              <a:t>10</a:t>
+            </a:fld>
+            <a:endParaRPr lang="en-US"/>
+          </a:p>
+        </p:txBody>
+      </p:sp>
+    </p:spTree>
+  </p:cSld>
+  <p:clrMapOvr>
+    <a:masterClrMapping/>
+  </p:clrMapOvr>
+</p:sld>
+</file>
+
+<file path=ppt/slides/slide28.xml><?xml version="1.0" encoding="utf-8"?>
+<p:sld xmlns:a="http://schemas.openxmlformats.org/drawingml/2006/main" xmlns:r="http://schemas.openxmlformats.org/officeDocument/2006/relationships" xmlns:p="http://schemas.openxmlformats.org/presentationml/2006/main">
+  <p:cSld name="Slide 21">
+    <p:spTree>
+      <p:nvGrpSpPr>
+        <p:cNvPr id="1" name=""/>
+        <p:cNvGrpSpPr/>
+        <p:nvPr/>
+      </p:nvGrpSpPr>
+      <p:grpSpPr>
+        <a:xfrm>
+          <a:off x="0" y="0"/>
+          <a:ext cx="0" cy="0"/>
+          <a:chOff x="0" y="0"/>
+          <a:chExt cx="0" cy="0"/>
+        </a:xfrm>
+      </p:grpSpPr>
+      <p:sp>
+        <p:nvSpPr>
+          <p:cNvPr id="2" name="Text 0"/>
+          <p:cNvSpPr/>
+          <p:nvPr>
+            <p:ph idx="100" type="body" hasCustomPrompt="1"/>
+          </p:nvPr>
+        </p:nvSpPr>
+        <p:spPr>
+          <a:xfrm>
+            <a:off x="548640" y="384048"/>
+            <a:ext cx="9144000" cy="274320"/>
+          </a:xfrm>
+          <a:prstGeom prst="rect">
+            <a:avLst/>
+          </a:prstGeom>
+          <a:noFill/>
+          <a:ln/>
+        </p:spPr>
+        <p:txBody>
+          <a:bodyPr wrap="square" lIns="0" tIns="0" rIns="0" bIns="0" rtlCol="0" anchor="ctr"/>
+          <a:lstStyle/>
+          <a:p>
+            <a:pPr algn="l" indent="0" marL="0">
+              <a:buNone/>
+            </a:pPr>
+            <a:r>
+              <a:rPr lang="en-US" sz="1100" b="1" spc="150" kern="0" dirty="0">
+                <a:solidFill>
+                  <a:schemeClr val="accent1"/>
+                </a:solidFill>
+              </a:rPr>
+              <a:t>ON-PREMISE · TESTE E DIAGNÓSTICO</a:t>
+            </a:r>
+            <a:endParaRPr lang="en-US" sz="1100" dirty="0"/>
+          </a:p>
+        </p:txBody>
+      </p:sp>
+      <p:sp>
+        <p:nvSpPr>
+          <p:cNvPr id="3" name="Text 0"/>
+          <p:cNvSpPr/>
+          <p:nvPr>
+            <p:ph idx="101" type="title" hasCustomPrompt="1"/>
+          </p:nvPr>
+        </p:nvSpPr>
+        <p:spPr>
+          <a:xfrm>
+            <a:off x="548640" y="676656"/>
+            <a:ext cx="11094415" cy="658368"/>
+          </a:xfrm>
+          <a:prstGeom prst="rect">
+            <a:avLst/>
+          </a:prstGeom>
+          <a:noFill/>
+          <a:ln/>
+        </p:spPr>
+        <p:txBody>
+          <a:bodyPr wrap="square" lIns="0" tIns="0" rIns="0" bIns="0" rtlCol="0" anchor="ctr"/>
+          <a:lstStyle/>
+          <a:p>
+            <a:pPr algn="l" indent="0" marL="0">
+              <a:buNone/>
+            </a:pPr>
+            <a:r>
+              <a:rPr lang="en-US" sz="3000" b="1" dirty="0">
+                <a:solidFill>
+                  <a:schemeClr val="tx1"/>
+                </a:solidFill>
+              </a:rPr>
+              <a:t>Testar com dois usuários e diagnosticar no SAP GUI</a:t>
+            </a:r>
+            <a:endParaRPr lang="en-US" sz="3000" dirty="0"/>
+          </a:p>
+        </p:txBody>
+      </p:sp>
+      <p:sp>
+        <p:nvSpPr>
+          <p:cNvPr id="5" name="Cartão"/>
+          <p:cNvSpPr/>
+          <p:nvPr/>
+        </p:nvSpPr>
+        <p:spPr>
+          <a:xfrm>
+            <a:off x="548640" y="1645920"/>
+            <a:ext cx="3515258" cy="2103120"/>
+          </a:xfrm>
+          <a:prstGeom prst="roundRect">
+            <a:avLst>
+              <a:gd name="adj" fmla="val 5217"/>
+            </a:avLst>
+          </a:prstGeom>
+          <a:solidFill>
+            <a:srgbClr val="FFFFFF"/>
+          </a:solidFill>
+          <a:ln/>
+          <a:effectLst>
+            <a:outerShdw sx="100000" sy="100000" kx="0" ky="0" algn="bl" rotWithShape="0" blurRad="101600" dist="25400" dir="5400000">
+              <a:srgbClr val="223548">
+                <a:alpha val="16000"/>
+              </a:srgbClr>
+            </a:outerShdw>
+          </a:effectLst>
+        </p:spPr>
+      </p:sp>
+      <p:sp>
+        <p:nvSpPr>
+          <p:cNvPr id="6" name="Ícone payment-approval"/>
+          <p:cNvSpPr/>
+          <p:nvPr/>
+        </p:nvSpPr>
+        <p:spPr>
+          <a:xfrm>
+            <a:off x="777240" y="1874520"/>
+            <a:ext cx="475488" cy="475488"/>
+          </a:xfrm>
+          <a:prstGeom prst="roundRect">
+            <a:avLst>
+              <a:gd name="adj" fmla="val 22000"/>
+            </a:avLst>
+          </a:prstGeom>
+          <a:solidFill>
+            <a:srgbClr val="F5FAE5"/>
+          </a:solidFill>
+          <a:ln/>
+        </p:spPr>
+      </p:sp>
+      <p:pic>
+        <p:nvPicPr>
+          <p:cNvPr id="7" name="Image 0" descr="payment-approval">    </p:cNvPr>
+          <p:cNvPicPr>
+            <a:picLocks noChangeAspect="1"/>
+          </p:cNvPicPr>
+          <p:nvPr/>
+        </p:nvPicPr>
+        <p:blipFill>
+          <a:blip r:embed="rId1"/>
+          <a:stretch>
+            <a:fillRect/>
+          </a:stretch>
+        </p:blipFill>
+        <p:spPr>
+          <a:xfrm>
+            <a:off x="891357" y="1988637"/>
+            <a:ext cx="247254" cy="247254"/>
+          </a:xfrm>
+          <a:prstGeom prst="rect">
+            <a:avLst/>
+          </a:prstGeom>
+        </p:spPr>
+      </p:pic>
+      <p:sp>
+        <p:nvSpPr>
+          <p:cNvPr id="8" name="Text 4"/>
+          <p:cNvSpPr txBox="1"/>
+          <p:nvPr/>
+        </p:nvSpPr>
+        <p:spPr>
+          <a:xfrm>
+            <a:off x="1389888" y="1874520"/>
+            <a:ext cx="2491130" cy="475488"/>
+          </a:xfrm>
+          <a:prstGeom prst="rect">
+            <a:avLst/>
+          </a:prstGeom>
+          <a:noFill/>
+          <a:ln/>
+        </p:spPr>
+        <p:txBody>
+          <a:bodyPr wrap="square" lIns="0" tIns="0" rIns="0" bIns="0" rtlCol="0" anchor="ctr"/>
+          <a:lstStyle/>
+          <a:p>
+            <a:pPr indent="0" marL="0">
+              <a:buNone/>
+            </a:pPr>
+            <a:r>
+              <a:rPr lang="en-US" sz="1500" b="1" dirty="0">
+                <a:solidFill>
+                  <a:srgbClr val="1D2D3E"/>
+                </a:solidFill>
+              </a:rPr>
+              <a:t>App não abre: 403</a:t>
+            </a:r>
+            <a:endParaRPr lang="en-US" sz="1500" dirty="0"/>
+          </a:p>
+        </p:txBody>
+      </p:sp>
+      <p:sp>
+        <p:nvSpPr>
+          <p:cNvPr id="9" name="Text 5"/>
+          <p:cNvSpPr txBox="1"/>
+          <p:nvPr/>
+        </p:nvSpPr>
+        <p:spPr>
+          <a:xfrm>
+            <a:off x="777240" y="2487168"/>
+            <a:ext cx="3058058" cy="1097280"/>
+          </a:xfrm>
+          <a:prstGeom prst="rect">
+            <a:avLst/>
+          </a:prstGeom>
+          <a:noFill/>
+          <a:ln/>
+        </p:spPr>
+        <p:txBody>
+          <a:bodyPr wrap="square" lIns="0" tIns="0" rIns="0" bIns="0" rtlCol="0" anchor="t"/>
+          <a:lstStyle/>
+          <a:p>
+            <a:pPr indent="0" marL="0">
+              <a:buNone/>
+            </a:pPr>
+            <a:r>
+              <a:rPr lang="en-US" sz="1250" dirty="0">
+                <a:solidFill>
+                  <a:srgbClr val="556B82"/>
+                </a:solidFill>
+              </a:rPr>
+              <a:t>Falta S_START na role: SU53 logo após o erro e incluir o serviço no menu da PFCG.</a:t>
+            </a:r>
+            <a:endParaRPr lang="en-US" sz="1250" dirty="0"/>
+          </a:p>
+        </p:txBody>
+      </p:sp>
+      <p:sp>
+        <p:nvSpPr>
+          <p:cNvPr id="10" name="Cartão"/>
+          <p:cNvSpPr/>
+          <p:nvPr/>
+        </p:nvSpPr>
+        <p:spPr>
+          <a:xfrm>
+            <a:off x="4338218" y="1645920"/>
+            <a:ext cx="3515258" cy="2103120"/>
+          </a:xfrm>
+          <a:prstGeom prst="roundRect">
+            <a:avLst>
+              <a:gd name="adj" fmla="val 5217"/>
+            </a:avLst>
+          </a:prstGeom>
+          <a:solidFill>
+            <a:srgbClr val="FFFFFF"/>
+          </a:solidFill>
+          <a:ln/>
+          <a:effectLst>
+            <a:outerShdw sx="100000" sy="100000" kx="0" ky="0" algn="bl" rotWithShape="0" blurRad="101600" dist="25400" dir="5400000">
+              <a:srgbClr val="223548">
+                <a:alpha val="16000"/>
+              </a:srgbClr>
+            </a:outerShdw>
+          </a:effectLst>
+        </p:spPr>
+      </p:sp>
+      <p:sp>
+        <p:nvSpPr>
+          <p:cNvPr id="11" name="Ícone status-negative"/>
+          <p:cNvSpPr/>
+          <p:nvPr/>
+        </p:nvSpPr>
+        <p:spPr>
+          <a:xfrm>
+            <a:off x="4566818" y="1874520"/>
+            <a:ext cx="475488" cy="475488"/>
+          </a:xfrm>
+          <a:prstGeom prst="roundRect">
+            <a:avLst>
+              <a:gd name="adj" fmla="val 22000"/>
+            </a:avLst>
+          </a:prstGeom>
+          <a:solidFill>
+            <a:srgbClr val="FFEAF4"/>
+          </a:solidFill>
+          <a:ln/>
+        </p:spPr>
+      </p:sp>
+      <p:pic>
+        <p:nvPicPr>
+          <p:cNvPr id="12" name="Image 1" descr="status-negative">    </p:cNvPr>
+          <p:cNvPicPr>
+            <a:picLocks noChangeAspect="1"/>
+          </p:cNvPicPr>
+          <p:nvPr/>
+        </p:nvPicPr>
+        <p:blipFill>
+          <a:blip r:embed="rId2"/>
+          <a:stretch>
+            <a:fillRect/>
+          </a:stretch>
+        </p:blipFill>
+        <p:spPr>
+          <a:xfrm>
+            <a:off x="4680936" y="1988637"/>
+            <a:ext cx="247254" cy="247254"/>
+          </a:xfrm>
+          <a:prstGeom prst="rect">
+            <a:avLst/>
+          </a:prstGeom>
+        </p:spPr>
+      </p:pic>
+      <p:sp>
+        <p:nvSpPr>
+          <p:cNvPr id="13" name="Text 8"/>
+          <p:cNvSpPr txBox="1"/>
+          <p:nvPr/>
+        </p:nvSpPr>
+        <p:spPr>
+          <a:xfrm>
+            <a:off x="5179466" y="1874520"/>
+            <a:ext cx="2491130" cy="475488"/>
+          </a:xfrm>
+          <a:prstGeom prst="rect">
+            <a:avLst/>
+          </a:prstGeom>
+          <a:noFill/>
+          <a:ln/>
+        </p:spPr>
+        <p:txBody>
+          <a:bodyPr wrap="square" lIns="0" tIns="0" rIns="0" bIns="0" rtlCol="0" anchor="ctr"/>
+          <a:lstStyle/>
+          <a:p>
+            <a:pPr indent="0" marL="0">
+              <a:buNone/>
+            </a:pPr>
+            <a:r>
+              <a:rPr lang="en-US" sz="1500" b="1" dirty="0">
+                <a:solidFill>
+                  <a:srgbClr val="1D2D3E"/>
+                </a:solidFill>
+              </a:rPr>
+              <a:t>Botões desabilitados</a:t>
+            </a:r>
+            <a:endParaRPr lang="en-US" sz="1500" dirty="0"/>
+          </a:p>
+        </p:txBody>
+      </p:sp>
+      <p:sp>
+        <p:nvSpPr>
+          <p:cNvPr id="14" name="Text 9"/>
+          <p:cNvSpPr txBox="1"/>
+          <p:nvPr/>
+        </p:nvSpPr>
+        <p:spPr>
+          <a:xfrm>
+            <a:off x="4566818" y="2487168"/>
+            <a:ext cx="3058058" cy="1097280"/>
+          </a:xfrm>
+          <a:prstGeom prst="rect">
+            <a:avLst/>
+          </a:prstGeom>
+          <a:noFill/>
+          <a:ln/>
+        </p:spPr>
+        <p:txBody>
+          <a:bodyPr wrap="square" lIns="0" tIns="0" rIns="0" bIns="0" rtlCol="0" anchor="t"/>
+          <a:lstStyle/>
+          <a:p>
+            <a:pPr indent="0" marL="0">
+              <a:buNone/>
+            </a:pPr>
+            <a:r>
+              <a:rPr lang="en-US" sz="1250" dirty="0">
+                <a:solidFill>
+                  <a:srgbClr val="556B82"/>
+                </a:solidFill>
+              </a:rPr>
+              <a:t>AUTHORITY-CHECK negado em ZPC_ADMIN ou ZPC_PEDIDO: STAUTHTRACE pelo usuário.</a:t>
+            </a:r>
+            <a:endParaRPr lang="en-US" sz="1250" dirty="0"/>
+          </a:p>
+        </p:txBody>
+      </p:sp>
+      <p:sp>
+        <p:nvSpPr>
+          <p:cNvPr id="15" name="Cartão"/>
+          <p:cNvSpPr/>
+          <p:nvPr/>
+        </p:nvSpPr>
+        <p:spPr>
+          <a:xfrm>
+            <a:off x="8127797" y="1645920"/>
+            <a:ext cx="3515258" cy="2103120"/>
+          </a:xfrm>
+          <a:prstGeom prst="roundRect">
+            <a:avLst>
+              <a:gd name="adj" fmla="val 5217"/>
+            </a:avLst>
+          </a:prstGeom>
+          <a:solidFill>
+            <a:srgbClr val="FFFFFF"/>
+          </a:solidFill>
+          <a:ln/>
+          <a:effectLst>
+            <a:outerShdw sx="100000" sy="100000" kx="0" ky="0" algn="bl" rotWithShape="0" blurRad="101600" dist="25400" dir="5400000">
+              <a:srgbClr val="223548">
+                <a:alpha val="16000"/>
+              </a:srgbClr>
+            </a:outerShdw>
+          </a:effectLst>
+        </p:spPr>
+      </p:sp>
+      <p:sp>
+        <p:nvSpPr>
+          <p:cNvPr id="16" name="Ícone product"/>
+          <p:cNvSpPr/>
+          <p:nvPr/>
+        </p:nvSpPr>
+        <p:spPr>
+          <a:xfrm>
+            <a:off x="8356397" y="1874520"/>
+            <a:ext cx="475488" cy="475488"/>
+          </a:xfrm>
+          <a:prstGeom prst="roundRect">
+            <a:avLst>
+              <a:gd name="adj" fmla="val 22000"/>
+            </a:avLst>
+          </a:prstGeom>
+          <a:solidFill>
+            <a:srgbClr val="FFF3E0"/>
+          </a:solidFill>
+          <a:ln/>
+        </p:spPr>
+      </p:sp>
+      <p:pic>
+        <p:nvPicPr>
+          <p:cNvPr id="17" name="Image 2" descr="product">    </p:cNvPr>
+          <p:cNvPicPr>
+            <a:picLocks noChangeAspect="1"/>
+          </p:cNvPicPr>
+          <p:nvPr/>
+        </p:nvPicPr>
+        <p:blipFill>
+          <a:blip r:embed="rId3"/>
+          <a:stretch>
+            <a:fillRect/>
+          </a:stretch>
+        </p:blipFill>
+        <p:spPr>
+          <a:xfrm>
+            <a:off x="8470514" y="1988637"/>
+            <a:ext cx="247254" cy="247254"/>
+          </a:xfrm>
+          <a:prstGeom prst="rect">
+            <a:avLst/>
+          </a:prstGeom>
+        </p:spPr>
+      </p:pic>
+      <p:sp>
+        <p:nvSpPr>
+          <p:cNvPr id="18" name="Text 12"/>
+          <p:cNvSpPr txBox="1"/>
+          <p:nvPr/>
+        </p:nvSpPr>
+        <p:spPr>
+          <a:xfrm>
+            <a:off x="8969045" y="1874520"/>
+            <a:ext cx="2491130" cy="475488"/>
+          </a:xfrm>
+          <a:prstGeom prst="rect">
+            <a:avLst/>
+          </a:prstGeom>
+          <a:noFill/>
+          <a:ln/>
+        </p:spPr>
+        <p:txBody>
+          <a:bodyPr wrap="square" lIns="0" tIns="0" rIns="0" bIns="0" rtlCol="0" anchor="ctr"/>
+          <a:lstStyle/>
+          <a:p>
+            <a:pPr indent="0" marL="0">
+              <a:buNone/>
+            </a:pPr>
+            <a:r>
+              <a:rPr lang="en-US" sz="1500" b="1" dirty="0">
+                <a:solidFill>
+                  <a:srgbClr val="1D2D3E"/>
+                </a:solidFill>
+              </a:rPr>
+              <a:t>Ações negadas ao admin</a:t>
+            </a:r>
+            <a:endParaRPr lang="en-US" sz="1500" dirty="0"/>
+          </a:p>
+        </p:txBody>
+      </p:sp>
+      <p:sp>
+        <p:nvSpPr>
+          <p:cNvPr id="19" name="Text 13"/>
+          <p:cNvSpPr txBox="1"/>
+          <p:nvPr/>
+        </p:nvSpPr>
+        <p:spPr>
+          <a:xfrm>
+            <a:off x="8356397" y="2487168"/>
+            <a:ext cx="3058058" cy="1097280"/>
+          </a:xfrm>
+          <a:prstGeom prst="rect">
+            <a:avLst/>
+          </a:prstGeom>
+          <a:noFill/>
+          <a:ln/>
+        </p:spPr>
+        <p:txBody>
+          <a:bodyPr wrap="square" lIns="0" tIns="0" rIns="0" bIns="0" rtlCol="0" anchor="t"/>
+          <a:lstStyle/>
+          <a:p>
+            <a:pPr indent="0" marL="0">
+              <a:buNone/>
+            </a:pPr>
+            <a:r>
+              <a:rPr lang="en-US" sz="1250" dirty="0">
+                <a:solidFill>
+                  <a:srgbClr val="556B82"/>
+                </a:solidFill>
+              </a:rPr>
+              <a:t>Atividade 16 fora das atividades permitidas de ZPC_PEDIDO (SU21).</a:t>
+            </a:r>
+            <a:endParaRPr lang="en-US" sz="1250" dirty="0"/>
+          </a:p>
+        </p:txBody>
+      </p:sp>
+      <p:sp>
+        <p:nvSpPr>
+          <p:cNvPr id="20" name="Cartão"/>
+          <p:cNvSpPr/>
+          <p:nvPr/>
+        </p:nvSpPr>
+        <p:spPr>
+          <a:xfrm>
+            <a:off x="548640" y="4069080"/>
+            <a:ext cx="3515258" cy="2103120"/>
+          </a:xfrm>
+          <a:prstGeom prst="roundRect">
+            <a:avLst>
+              <a:gd name="adj" fmla="val 5217"/>
+            </a:avLst>
+          </a:prstGeom>
+          <a:solidFill>
+            <a:srgbClr val="FFFFFF"/>
+          </a:solidFill>
+          <a:ln/>
+          <a:effectLst>
+            <a:outerShdw sx="100000" sy="100000" kx="0" ky="0" algn="bl" rotWithShape="0" blurRad="101600" dist="25400" dir="5400000">
+              <a:srgbClr val="223548">
+                <a:alpha val="16000"/>
+              </a:srgbClr>
+            </a:outerShdw>
+          </a:effectLst>
+        </p:spPr>
+      </p:sp>
+      <p:sp>
+        <p:nvSpPr>
+          <p:cNvPr id="21" name="Ícone synchronize"/>
+          <p:cNvSpPr/>
+          <p:nvPr/>
+        </p:nvSpPr>
+        <p:spPr>
+          <a:xfrm>
+            <a:off x="777240" y="4297680"/>
+            <a:ext cx="475488" cy="475488"/>
+          </a:xfrm>
+          <a:prstGeom prst="roundRect">
+            <a:avLst>
+              <a:gd name="adj" fmla="val 22000"/>
+            </a:avLst>
+          </a:prstGeom>
+          <a:solidFill>
+            <a:srgbClr val="E1F4FF"/>
+          </a:solidFill>
+          <a:ln/>
+        </p:spPr>
+      </p:sp>
+      <p:pic>
+        <p:nvPicPr>
+          <p:cNvPr id="22" name="Image 3" descr="synchronize">    </p:cNvPr>
+          <p:cNvPicPr>
+            <a:picLocks noChangeAspect="1"/>
+          </p:cNvPicPr>
+          <p:nvPr/>
+        </p:nvPicPr>
+        <p:blipFill>
+          <a:blip r:embed="rId4"/>
+          <a:stretch>
+            <a:fillRect/>
+          </a:stretch>
+        </p:blipFill>
+        <p:spPr>
+          <a:xfrm>
+            <a:off x="891357" y="4411797"/>
+            <a:ext cx="247254" cy="247254"/>
+          </a:xfrm>
+          <a:prstGeom prst="rect">
+            <a:avLst/>
+          </a:prstGeom>
+        </p:spPr>
+      </p:pic>
+      <p:sp>
+        <p:nvSpPr>
+          <p:cNvPr id="23" name="Text 16"/>
+          <p:cNvSpPr txBox="1"/>
+          <p:nvPr/>
+        </p:nvSpPr>
+        <p:spPr>
+          <a:xfrm>
+            <a:off x="1389888" y="4297680"/>
+            <a:ext cx="2491130" cy="475488"/>
+          </a:xfrm>
+          <a:prstGeom prst="rect">
+            <a:avLst/>
+          </a:prstGeom>
+          <a:noFill/>
+          <a:ln/>
+        </p:spPr>
+        <p:txBody>
+          <a:bodyPr wrap="square" lIns="0" tIns="0" rIns="0" bIns="0" rtlCol="0" anchor="ctr"/>
+          <a:lstStyle/>
+          <a:p>
+            <a:pPr indent="0" marL="0">
+              <a:buNone/>
+            </a:pPr>
+            <a:r>
+              <a:rPr lang="en-US" sz="1500" b="1" dirty="0">
+                <a:solidFill>
+                  <a:srgbClr val="1D2D3E"/>
+                </a:solidFill>
+              </a:rPr>
+              <a:t>Todos podem tudo</a:t>
+            </a:r>
+            <a:endParaRPr lang="en-US" sz="1500" dirty="0"/>
+          </a:p>
+        </p:txBody>
+      </p:sp>
+      <p:sp>
+        <p:nvSpPr>
+          <p:cNvPr id="24" name="Text 17"/>
+          <p:cNvSpPr txBox="1"/>
+          <p:nvPr/>
+        </p:nvSpPr>
+        <p:spPr>
+          <a:xfrm>
+            <a:off x="777240" y="4910328"/>
+            <a:ext cx="3058058" cy="1097280"/>
+          </a:xfrm>
+          <a:prstGeom prst="rect">
+            <a:avLst/>
+          </a:prstGeom>
+          <a:noFill/>
+          <a:ln/>
+        </p:spPr>
+        <p:txBody>
+          <a:bodyPr wrap="square" lIns="0" tIns="0" rIns="0" bIns="0" rtlCol="0" anchor="t"/>
+          <a:lstStyle/>
+          <a:p>
+            <a:pPr indent="0" marL="0">
+              <a:buNone/>
+            </a:pPr>
+            <a:r>
+              <a:rPr lang="en-US" sz="1250" dirty="0">
+                <a:solidFill>
+                  <a:srgbClr val="556B82"/>
+                </a:solidFill>
+              </a:rPr>
+              <a:t>c_modo_trial ainda abap_true em ZIF_PC_CONSTANTS: corrija antes de transportar.</a:t>
+            </a:r>
+            <a:endParaRPr lang="en-US" sz="1250" dirty="0"/>
+          </a:p>
+        </p:txBody>
+      </p:sp>
+      <p:sp>
+        <p:nvSpPr>
+          <p:cNvPr id="25" name="Cartão"/>
+          <p:cNvSpPr/>
+          <p:nvPr/>
+        </p:nvSpPr>
+        <p:spPr>
+          <a:xfrm>
+            <a:off x="4338218" y="4069080"/>
+            <a:ext cx="3515258" cy="2103120"/>
+          </a:xfrm>
+          <a:prstGeom prst="roundRect">
+            <a:avLst>
+              <a:gd name="adj" fmla="val 5217"/>
+            </a:avLst>
+          </a:prstGeom>
+          <a:solidFill>
+            <a:srgbClr val="FFFFFF"/>
+          </a:solidFill>
+          <a:ln/>
+          <a:effectLst>
+            <a:outerShdw sx="100000" sy="100000" kx="0" ky="0" algn="bl" rotWithShape="0" blurRad="101600" dist="25400" dir="5400000">
+              <a:srgbClr val="223548">
+                <a:alpha val="16000"/>
+              </a:srgbClr>
+            </a:outerShdw>
+          </a:effectLst>
+        </p:spPr>
+      </p:sp>
+      <p:sp>
+        <p:nvSpPr>
+          <p:cNvPr id="26" name="Ícone customer"/>
+          <p:cNvSpPr/>
+          <p:nvPr/>
+        </p:nvSpPr>
+        <p:spPr>
+          <a:xfrm>
+            <a:off x="4566818" y="4297680"/>
+            <a:ext cx="475488" cy="475488"/>
+          </a:xfrm>
+          <a:prstGeom prst="roundRect">
+            <a:avLst>
+              <a:gd name="adj" fmla="val 22000"/>
+            </a:avLst>
+          </a:prstGeom>
+          <a:solidFill>
+            <a:srgbClr val="E3F7F6"/>
+          </a:solidFill>
+          <a:ln/>
+        </p:spPr>
+      </p:sp>
+      <p:pic>
+        <p:nvPicPr>
+          <p:cNvPr id="27" name="Image 4" descr="customer">    </p:cNvPr>
+          <p:cNvPicPr>
+            <a:picLocks noChangeAspect="1"/>
+          </p:cNvPicPr>
+          <p:nvPr/>
+        </p:nvPicPr>
+        <p:blipFill>
+          <a:blip r:embed="rId5"/>
+          <a:stretch>
+            <a:fillRect/>
+          </a:stretch>
+        </p:blipFill>
+        <p:spPr>
+          <a:xfrm>
+            <a:off x="4680936" y="4411797"/>
+            <a:ext cx="247254" cy="247254"/>
+          </a:xfrm>
+          <a:prstGeom prst="rect">
+            <a:avLst/>
+          </a:prstGeom>
+        </p:spPr>
+      </p:pic>
+      <p:sp>
+        <p:nvSpPr>
+          <p:cNvPr id="28" name="Text 20"/>
+          <p:cNvSpPr txBox="1"/>
+          <p:nvPr/>
+        </p:nvSpPr>
+        <p:spPr>
+          <a:xfrm>
+            <a:off x="5179466" y="4297680"/>
+            <a:ext cx="2491130" cy="475488"/>
+          </a:xfrm>
+          <a:prstGeom prst="rect">
+            <a:avLst/>
+          </a:prstGeom>
+          <a:noFill/>
+          <a:ln/>
+        </p:spPr>
+        <p:txBody>
+          <a:bodyPr wrap="square" lIns="0" tIns="0" rIns="0" bIns="0" rtlCol="0" anchor="ctr"/>
+          <a:lstStyle/>
+          <a:p>
+            <a:pPr indent="0" marL="0">
+              <a:buNone/>
+            </a:pPr>
+            <a:r>
+              <a:rPr lang="en-US" sz="1500" b="1" dirty="0">
+                <a:solidFill>
+                  <a:srgbClr val="1D2D3E"/>
+                </a:solidFill>
+              </a:rPr>
+              <a:t>Role sem efeito</a:t>
+            </a:r>
+            <a:endParaRPr lang="en-US" sz="1500" dirty="0"/>
+          </a:p>
+        </p:txBody>
+      </p:sp>
+      <p:sp>
+        <p:nvSpPr>
+          <p:cNvPr id="29" name="Text 21"/>
+          <p:cNvSpPr txBox="1"/>
+          <p:nvPr/>
+        </p:nvSpPr>
+        <p:spPr>
+          <a:xfrm>
+            <a:off x="4566818" y="4910328"/>
+            <a:ext cx="3058058" cy="1097280"/>
+          </a:xfrm>
+          <a:prstGeom prst="rect">
+            <a:avLst/>
+          </a:prstGeom>
+          <a:noFill/>
+          <a:ln/>
+        </p:spPr>
+        <p:txBody>
+          <a:bodyPr wrap="square" lIns="0" tIns="0" rIns="0" bIns="0" rtlCol="0" anchor="t"/>
+          <a:lstStyle/>
+          <a:p>
+            <a:pPr indent="0" marL="0">
+              <a:buNone/>
+            </a:pPr>
+            <a:r>
+              <a:rPr lang="en-US" sz="1250" dirty="0">
+                <a:solidFill>
+                  <a:srgbClr val="556B82"/>
+                </a:solidFill>
+              </a:rPr>
+              <a:t>Perfil não gerado ou comparação de usuários não executada na PFCG.</a:t>
+            </a:r>
+            <a:endParaRPr lang="en-US" sz="1250" dirty="0"/>
+          </a:p>
+        </p:txBody>
+      </p:sp>
+      <p:sp>
+        <p:nvSpPr>
+          <p:cNvPr id="30" name="Cartão"/>
+          <p:cNvSpPr/>
+          <p:nvPr/>
+        </p:nvSpPr>
+        <p:spPr>
+          <a:xfrm>
+            <a:off x="8127797" y="4069080"/>
+            <a:ext cx="3515258" cy="2103120"/>
+          </a:xfrm>
+          <a:prstGeom prst="roundRect">
+            <a:avLst>
+              <a:gd name="adj" fmla="val 5217"/>
+            </a:avLst>
+          </a:prstGeom>
+          <a:solidFill>
+            <a:srgbClr val="FFFFFF"/>
+          </a:solidFill>
+          <a:ln/>
+          <a:effectLst>
+            <a:outerShdw sx="100000" sy="100000" kx="0" ky="0" algn="bl" rotWithShape="0" blurRad="101600" dist="25400" dir="5400000">
+              <a:srgbClr val="223548">
+                <a:alpha val="16000"/>
+              </a:srgbClr>
+            </a:outerShdw>
+          </a:effectLst>
+        </p:spPr>
+      </p:sp>
+      <p:sp>
+        <p:nvSpPr>
+          <p:cNvPr id="31" name="Ícone money-bills"/>
+          <p:cNvSpPr/>
+          <p:nvPr/>
+        </p:nvSpPr>
+        <p:spPr>
+          <a:xfrm>
+            <a:off x="8356397" y="4297680"/>
+            <a:ext cx="475488" cy="475488"/>
+          </a:xfrm>
+          <a:prstGeom prst="roundRect">
+            <a:avLst>
+              <a:gd name="adj" fmla="val 22000"/>
+            </a:avLst>
+          </a:prstGeom>
+          <a:solidFill>
+            <a:srgbClr val="FDE8F1"/>
+          </a:solidFill>
+          <a:ln/>
+        </p:spPr>
+      </p:sp>
+      <p:pic>
+        <p:nvPicPr>
+          <p:cNvPr id="32" name="Image 5" descr="money-bills">    </p:cNvPr>
+          <p:cNvPicPr>
+            <a:picLocks noChangeAspect="1"/>
+          </p:cNvPicPr>
+          <p:nvPr/>
+        </p:nvPicPr>
+        <p:blipFill>
+          <a:blip r:embed="rId6"/>
+          <a:stretch>
+            <a:fillRect/>
+          </a:stretch>
+        </p:blipFill>
+        <p:spPr>
+          <a:xfrm>
+            <a:off x="8470514" y="4411797"/>
+            <a:ext cx="247254" cy="247254"/>
+          </a:xfrm>
+          <a:prstGeom prst="rect">
+            <a:avLst/>
+          </a:prstGeom>
+        </p:spPr>
+      </p:pic>
+      <p:sp>
+        <p:nvSpPr>
+          <p:cNvPr id="33" name="Text 24"/>
+          <p:cNvSpPr txBox="1"/>
+          <p:nvPr/>
+        </p:nvSpPr>
+        <p:spPr>
+          <a:xfrm>
+            <a:off x="8969045" y="4297680"/>
+            <a:ext cx="2491130" cy="475488"/>
+          </a:xfrm>
+          <a:prstGeom prst="rect">
+            <a:avLst/>
+          </a:prstGeom>
+          <a:noFill/>
+          <a:ln/>
+        </p:spPr>
+        <p:txBody>
+          <a:bodyPr wrap="square" lIns="0" tIns="0" rIns="0" bIns="0" rtlCol="0" anchor="ctr"/>
+          <a:lstStyle/>
+          <a:p>
+            <a:pPr indent="0" marL="0">
+              <a:buNone/>
+            </a:pPr>
+            <a:r>
+              <a:rPr lang="en-US" sz="1500" b="1" dirty="0">
+                <a:solidFill>
+                  <a:srgbClr val="1D2D3E"/>
+                </a:solidFill>
+              </a:rPr>
+              <a:t>Quem tem acesso?</a:t>
+            </a:r>
+            <a:endParaRPr lang="en-US" sz="1500" dirty="0"/>
+          </a:p>
+        </p:txBody>
+      </p:sp>
+      <p:sp>
+        <p:nvSpPr>
+          <p:cNvPr id="34" name="Text 25"/>
+          <p:cNvSpPr txBox="1"/>
+          <p:nvPr/>
+        </p:nvSpPr>
+        <p:spPr>
+          <a:xfrm>
+            <a:off x="8356397" y="4910328"/>
+            <a:ext cx="3058058" cy="1097280"/>
+          </a:xfrm>
+          <a:prstGeom prst="rect">
+            <a:avLst/>
+          </a:prstGeom>
+          <a:noFill/>
+          <a:ln/>
+        </p:spPr>
+        <p:txBody>
+          <a:bodyPr wrap="square" lIns="0" tIns="0" rIns="0" bIns="0" rtlCol="0" anchor="t"/>
+          <a:lstStyle/>
+          <a:p>
+            <a:pPr indent="0" marL="0">
+              <a:buNone/>
+            </a:pPr>
+            <a:r>
+              <a:rPr lang="en-US" sz="1250" dirty="0">
+                <a:solidFill>
+                  <a:srgbClr val="556B82"/>
+                </a:solidFill>
+              </a:rPr>
+              <a:t>SUIM: usuários por valores de autorização; teste com PC_ADMIN e PC_COMUM.</a:t>
+            </a:r>
+            <a:endParaRPr lang="en-US" sz="1250" dirty="0"/>
+          </a:p>
+        </p:txBody>
+      </p:sp>
+      <p:sp>
+        <p:nvSpPr>
+          <p:cNvPr id="25" name="Slide Number Placeholder 0"/>
+          <p:cNvSpPr>
+            <a:spLocks noGrp="1"/>
+          </p:cNvSpPr>
+          <p:nvPr>
+            <p:ph type="sldNum" sz="quarter" idx="4294967295"/>
+          </p:nvPr>
+        </p:nvSpPr>
+        <p:spPr>
+          <a:xfrm>
+            <a:off x="11183112" y="6419088"/>
+            <a:ext cx="457200" cy="274320"/>
+          </a:xfrm>
+          <a:prstGeom prst="rect">
+            <a:avLst/>
+          </a:prstGeom>
+          <a:extLst>
+            <a:ext uri="{C572A759-6A51-4108-AA02-DFA0A04FC94B}">
+              <ma14:wrappingTextBoxFlag xmlns:ma14="http://schemas.microsoft.com/office/mac/drawingml/2011/main" val="0"/>
+            </a:ext>
+          </a:extLst>
+        </p:spPr>
+        <p:txBody>
+          <a:bodyPr lIns="0" tIns="0" rIns="0" bIns="0" anchor="ctr"/>
+          <a:lstStyle>
+            <a:lvl1pPr>
+              <a:defRPr sz="900">
+                <a:solidFill>
+                  <a:srgbClr val="556B82"/>
+                </a:solidFill>
+              </a:defRPr>
+            </a:lvl1pPr>
+          </a:lstStyle>
+          <a:p>
+            <a:pPr algn="r"/>
+            <a:fld id="{F7021451-1387-4CA6-816F-3879F97B5CBC}" type="slidenum">
+              <a:rPr b="0" lang="en-US"/>
+              <a:t>21</a:t>
+            </a:fld>
+            <a:endParaRPr lang="en-US"/>
           </a:p>
         </p:txBody>
       </p:sp>

--- a/docs/apresentacoes/04-servicos-odata.pptx
+++ b/docs/apresentacoes/04-servicos-odata.pptx
@@ -3046,7 +3046,7 @@
     <p:bg>
       <p:bgPr>
         <a:solidFill>
-          <a:srgbClr val="12171C"/>
+          <a:srgbClr val="00144A"/>
         </a:solidFill>
       </p:bgPr>
     </p:bg>
@@ -3195,7 +3195,7 @@
     <p:bg>
       <p:bgPr>
         <a:solidFill>
-          <a:srgbClr val="12171C"/>
+          <a:srgbClr val="00144A"/>
         </a:solidFill>
       </p:bgPr>
     </p:bg>
@@ -3535,7 +3535,7 @@
     <p:bg>
       <p:bgPr>
         <a:solidFill>
-          <a:srgbClr val="12171C"/>
+          <a:srgbClr val="00144A"/>
         </a:solidFill>
       </p:bgPr>
     </p:bg>
@@ -4037,8 +4037,8 @@
         </p:nvSpPr>
         <p:spPr>
           <a:xfrm>
-            <a:off x="731520" y="1325880"/>
-            <a:ext cx="7772400" cy="365760"/>
+            <a:off x="731520" y="1417320"/>
+            <a:ext cx="5486400" cy="411480"/>
           </a:xfrm>
           <a:prstGeom prst="rect">
             <a:avLst/>
@@ -4056,10 +4056,10 @@
             <a:r>
               <a:rPr lang="en-US" sz="1400" b="1" spc="200" kern="0" dirty="0">
                 <a:solidFill>
-                  <a:schemeClr val="accent1"/>
-                </a:solidFill>
-              </a:rPr>
-              <a:t>ETAPA 4 DE 5 · SAP RAP NO BTP OU ON-PREMISE</a:t>
+                  <a:srgbClr val="89D1FF"/>
+                </a:solidFill>
+              </a:rPr>
+              <a:t>ETAPA 04 DE 05</a:t>
             </a:r>
             <a:endParaRPr lang="en-US" sz="1400" dirty="0"/>
           </a:p>
@@ -4075,8 +4075,8 @@
         </p:nvSpPr>
         <p:spPr>
           <a:xfrm>
-            <a:off x="731520" y="1737360"/>
-            <a:ext cx="7680960" cy="1600200"/>
+            <a:off x="731520" y="1965960"/>
+            <a:ext cx="6766560" cy="1737360"/>
           </a:xfrm>
           <a:prstGeom prst="rect">
             <a:avLst/>
@@ -4092,14 +4092,14 @@
               <a:buNone/>
             </a:pPr>
             <a:r>
-              <a:rPr lang="en-US" sz="4800" b="1" dirty="0">
+              <a:rPr lang="en-US" sz="4400" b="1" dirty="0">
                 <a:solidFill>
                   <a:schemeClr val="bg1"/>
                 </a:solidFill>
               </a:rPr>
               <a:t>Serviços OData</a:t>
             </a:r>
-            <a:endParaRPr lang="en-US" sz="4800" dirty="0"/>
+            <a:endParaRPr lang="en-US" sz="4400" dirty="0"/>
           </a:p>
         </p:txBody>
       </p:sp>
@@ -4113,8 +4113,8 @@
         </p:nvSpPr>
         <p:spPr>
           <a:xfrm>
-            <a:off x="731520" y="3383280"/>
-            <a:ext cx="7132320" cy="914400"/>
+            <a:off x="731520" y="3840480"/>
+            <a:ext cx="6400800" cy="1097280"/>
           </a:xfrm>
           <a:prstGeom prst="rect">
             <a:avLst/>
@@ -4132,7 +4132,7 @@
             <a:r>
               <a:rPr lang="en-US" sz="1800" dirty="0">
                 <a:solidFill>
-                  <a:schemeClr val="bg2"/>
+                  <a:srgbClr val="D1EFFF"/>
                 </a:solidFill>
               </a:rPr>
               <a:t>Expor cada BO como serviço OData V4, publicar os bindings e liberar o acesso: IAM Apps no BTP, SU24 e PFCG no On-Premise</a:t>
@@ -4143,71 +4143,72 @@
       </p:sp>
       <p:sp>
         <p:nvSpPr>
-          <p:cNvPr id="5" name="Decoração 1"/>
+          <p:cNvPr id="5" name="Avatar da etapa"/>
           <p:cNvSpPr/>
           <p:nvPr/>
         </p:nvSpPr>
         <p:spPr>
           <a:xfrm>
-            <a:off x="8503920" y="-1463040"/>
-            <a:ext cx="5120640" cy="5120640"/>
-          </a:xfrm>
-          <a:prstGeom prst="ellipse">
+            <a:off x="8183880" y="1417320"/>
+            <a:ext cx="3291840" cy="3291840"/>
+          </a:xfrm>
+          <a:prstGeom prst="roundRect">
+            <a:avLst>
+              <a:gd name="adj" fmla="val 22222"/>
+            </a:avLst>
+          </a:prstGeom>
+          <a:solidFill>
+            <a:srgbClr val="1B3A7A"/>
+          </a:solidFill>
+          <a:ln/>
+        </p:spPr>
+      </p:sp>
+      <p:sp>
+        <p:nvSpPr>
+          <p:cNvPr id="6" name="Avatar interno"/>
+          <p:cNvSpPr/>
+          <p:nvPr/>
+        </p:nvSpPr>
+        <p:spPr>
+          <a:xfrm>
+            <a:off x="8732520" y="1965960"/>
+            <a:ext cx="2194560" cy="2194560"/>
+          </a:xfrm>
+          <a:prstGeom prst="roundRect">
+            <a:avLst>
+              <a:gd name="adj" fmla="val 22917"/>
+            </a:avLst>
+          </a:prstGeom>
+          <a:solidFill>
+            <a:schemeClr val="accent1"/>
+          </a:solidFill>
+          <a:ln/>
+        </p:spPr>
+      </p:sp>
+      <p:pic>
+        <p:nvPicPr>
+          <p:cNvPr id="7" name="Image 0" descr="Serviços OData">    </p:cNvPr>
+          <p:cNvPicPr>
+            <a:picLocks noChangeAspect="1"/>
+          </p:cNvPicPr>
+          <p:nvPr/>
+        </p:nvPicPr>
+        <p:blipFill>
+          <a:blip r:embed="rId100"/>
+          <a:stretch>
+            <a:fillRect/>
+          </a:stretch>
+        </p:blipFill>
+        <p:spPr>
+          <a:xfrm>
+            <a:off x="9281160" y="2514600"/>
+            <a:ext cx="1097280" cy="1097280"/>
+          </a:xfrm>
+          <a:prstGeom prst="rect">
             <a:avLst/>
           </a:prstGeom>
-          <a:solidFill>
-            <a:srgbClr val="0070F2">
-              <a:alpha val="28000"/>
-            </a:srgbClr>
-          </a:solidFill>
-          <a:ln/>
-        </p:spPr>
-      </p:sp>
-      <p:sp>
-        <p:nvSpPr>
-          <p:cNvPr id="6" name="Decoração 2"/>
-          <p:cNvSpPr/>
-          <p:nvPr/>
-        </p:nvSpPr>
-        <p:spPr>
-          <a:xfrm>
-            <a:off x="9784080" y="1828800"/>
-            <a:ext cx="2834640" cy="2834640"/>
-          </a:xfrm>
-          <a:prstGeom prst="ellipse">
-            <a:avLst/>
-          </a:prstGeom>
-          <a:solidFill>
-            <a:srgbClr val="4DB1FF">
-              <a:alpha val="18000"/>
-            </a:srgbClr>
-          </a:solidFill>
-          <a:ln/>
-        </p:spPr>
-      </p:sp>
-      <p:sp>
-        <p:nvSpPr>
-          <p:cNvPr id="7" name="Shape 5"/>
-          <p:cNvSpPr/>
-          <p:nvPr/>
-        </p:nvSpPr>
-        <p:spPr>
-          <a:xfrm>
-            <a:off x="923544" y="5266944"/>
-            <a:ext cx="10131552" cy="0"/>
-          </a:xfrm>
-          <a:prstGeom prst="line">
-            <a:avLst/>
-          </a:prstGeom>
-          <a:noFill/>
-          <a:ln w="25400">
-            <a:solidFill>
-              <a:srgbClr val="3A4654"/>
-            </a:solidFill>
-            <a:prstDash val="solid"/>
-          </a:ln>
-        </p:spPr>
-      </p:sp>
+        </p:spPr>
+      </p:pic>
       <p:sp>
         <p:nvSpPr>
           <p:cNvPr id="8" name="Etapa 1"/>
@@ -4216,385 +4217,172 @@
         </p:nvSpPr>
         <p:spPr>
           <a:xfrm>
-            <a:off x="731520" y="5074920"/>
-            <a:ext cx="384048" cy="384048"/>
-          </a:xfrm>
-          <a:prstGeom prst="ellipse">
+            <a:off x="8183880" y="5074920"/>
+            <a:ext cx="570586" cy="109728"/>
+          </a:xfrm>
+          <a:prstGeom prst="roundRect">
+            <a:avLst>
+              <a:gd name="adj" fmla="val 50000"/>
+            </a:avLst>
+          </a:prstGeom>
+          <a:solidFill>
+            <a:srgbClr val="1B3A7A"/>
+          </a:solidFill>
+          <a:ln/>
+        </p:spPr>
+      </p:sp>
+      <p:sp>
+        <p:nvSpPr>
+          <p:cNvPr id="9" name="Etapa 2"/>
+          <p:cNvSpPr/>
+          <p:nvPr/>
+        </p:nvSpPr>
+        <p:spPr>
+          <a:xfrm>
+            <a:off x="8864194" y="5074920"/>
+            <a:ext cx="570586" cy="109728"/>
+          </a:xfrm>
+          <a:prstGeom prst="roundRect">
+            <a:avLst>
+              <a:gd name="adj" fmla="val 50000"/>
+            </a:avLst>
+          </a:prstGeom>
+          <a:solidFill>
+            <a:srgbClr val="1B3A7A"/>
+          </a:solidFill>
+          <a:ln/>
+        </p:spPr>
+      </p:sp>
+      <p:sp>
+        <p:nvSpPr>
+          <p:cNvPr id="10" name="Etapa 3"/>
+          <p:cNvSpPr/>
+          <p:nvPr/>
+        </p:nvSpPr>
+        <p:spPr>
+          <a:xfrm>
+            <a:off x="9544508" y="5074920"/>
+            <a:ext cx="570586" cy="109728"/>
+          </a:xfrm>
+          <a:prstGeom prst="roundRect">
+            <a:avLst>
+              <a:gd name="adj" fmla="val 50000"/>
+            </a:avLst>
+          </a:prstGeom>
+          <a:solidFill>
+            <a:srgbClr val="1B3A7A"/>
+          </a:solidFill>
+          <a:ln/>
+        </p:spPr>
+      </p:sp>
+      <p:sp>
+        <p:nvSpPr>
+          <p:cNvPr id="11" name="Etapa 4"/>
+          <p:cNvSpPr/>
+          <p:nvPr/>
+        </p:nvSpPr>
+        <p:spPr>
+          <a:xfrm>
+            <a:off x="10224822" y="5074920"/>
+            <a:ext cx="570586" cy="109728"/>
+          </a:xfrm>
+          <a:prstGeom prst="roundRect">
+            <a:avLst>
+              <a:gd name="adj" fmla="val 50000"/>
+            </a:avLst>
+          </a:prstGeom>
+          <a:solidFill>
+            <a:srgbClr val="89D1FF"/>
+          </a:solidFill>
+          <a:ln/>
+        </p:spPr>
+      </p:sp>
+      <p:sp>
+        <p:nvSpPr>
+          <p:cNvPr id="12" name="Etapa 5"/>
+          <p:cNvSpPr/>
+          <p:nvPr/>
+        </p:nvSpPr>
+        <p:spPr>
+          <a:xfrm>
+            <a:off x="10905136" y="5074920"/>
+            <a:ext cx="570586" cy="109728"/>
+          </a:xfrm>
+          <a:prstGeom prst="roundRect">
+            <a:avLst>
+              <a:gd name="adj" fmla="val 50000"/>
+            </a:avLst>
+          </a:prstGeom>
+          <a:solidFill>
+            <a:srgbClr val="1B3A7A"/>
+          </a:solidFill>
+          <a:ln/>
+        </p:spPr>
+      </p:sp>
+      <p:sp>
+        <p:nvSpPr>
+          <p:cNvPr id="14" name="Text 11"/>
+          <p:cNvSpPr txBox="1"/>
+          <p:nvPr/>
+        </p:nvSpPr>
+        <p:spPr>
+          <a:xfrm>
+            <a:off x="8183880" y="5303520"/>
+            <a:ext cx="3291840" cy="274320"/>
+          </a:xfrm>
+          <a:prstGeom prst="rect">
             <a:avLst/>
           </a:prstGeom>
-          <a:solidFill>
-            <a:srgbClr val="1F4F86"/>
-          </a:solidFill>
-          <a:ln w="19050">
-            <a:solidFill>
-              <a:srgbClr val="1F4F86"/>
-            </a:solidFill>
-          </a:ln>
+          <a:noFill/>
+          <a:ln/>
         </p:spPr>
         <p:txBody>
           <a:bodyPr wrap="square" lIns="0" tIns="0" rIns="0" bIns="0" rtlCol="0" anchor="ctr"/>
           <a:lstStyle/>
           <a:p>
-            <a:pPr algn="ctr" indent="0" marL="0">
-              <a:buNone/>
-            </a:pPr>
-            <a:r>
-              <a:rPr lang="en-US" sz="1300" b="1" dirty="0">
-                <a:solidFill>
-                  <a:srgbClr val="FFFFFF"/>
-                </a:solidFill>
-              </a:rPr>
-              <a:t>1</a:t>
-            </a:r>
-            <a:endParaRPr lang="en-US" sz="1300" dirty="0"/>
+            <a:pPr indent="0" marL="0">
+              <a:buNone/>
+            </a:pPr>
+            <a:r>
+              <a:rPr lang="en-US" sz="1200" dirty="0">
+                <a:solidFill>
+                  <a:srgbClr val="89D1FF"/>
+                </a:solidFill>
+              </a:rPr>
+              <a:t>Etapa 4 de 5</a:t>
+            </a:r>
+            <a:endParaRPr lang="en-US" sz="1200" dirty="0"/>
           </a:p>
         </p:txBody>
       </p:sp>
       <p:sp>
         <p:nvSpPr>
-          <p:cNvPr id="9" name="Text 7"/>
+          <p:cNvPr id="40" name="Rodapé"/>
           <p:cNvSpPr txBox="1"/>
           <p:nvPr/>
         </p:nvSpPr>
         <p:spPr>
           <a:xfrm>
-            <a:off x="192024" y="5550408"/>
-            <a:ext cx="1463040" cy="274320"/>
+            <a:off x="731520" y="5989320"/>
+            <a:ext cx="7315200" cy="320040"/>
           </a:xfrm>
           <a:prstGeom prst="rect">
             <a:avLst/>
           </a:prstGeom>
           <a:noFill/>
-          <a:ln/>
         </p:spPr>
         <p:txBody>
-          <a:bodyPr wrap="square" lIns="0" tIns="0" rIns="0" bIns="0" rtlCol="0" anchor="ctr"/>
+          <a:bodyPr wrap="square" lIns="0" tIns="0" rIns="0" bIns="0" rtlCol="0" anchor="t"/>
           <a:lstStyle/>
           <a:p>
-            <a:pPr algn="ctr" indent="0" marL="0">
-              <a:buNone/>
-            </a:pPr>
-            <a:r>
-              <a:rPr lang="en-US" sz="1100" dirty="0">
-                <a:solidFill>
-                  <a:srgbClr val="A9B4BE"/>
-                </a:solidFill>
-              </a:rPr>
-              <a:t>Modelagem de dados</a:t>
-            </a:r>
-            <a:endParaRPr lang="en-US" sz="1100" dirty="0"/>
-          </a:p>
-        </p:txBody>
-      </p:sp>
-      <p:sp>
-        <p:nvSpPr>
-          <p:cNvPr id="10" name="Etapa 2"/>
-          <p:cNvSpPr/>
-          <p:nvPr/>
-        </p:nvSpPr>
-        <p:spPr>
-          <a:xfrm>
-            <a:off x="3264408" y="5074920"/>
-            <a:ext cx="384048" cy="384048"/>
-          </a:xfrm>
-          <a:prstGeom prst="ellipse">
-            <a:avLst/>
-          </a:prstGeom>
-          <a:solidFill>
-            <a:srgbClr val="1F4F86"/>
-          </a:solidFill>
-          <a:ln w="19050">
-            <a:solidFill>
-              <a:srgbClr val="1F4F86"/>
-            </a:solidFill>
-          </a:ln>
-        </p:spPr>
-        <p:txBody>
-          <a:bodyPr wrap="square" lIns="0" tIns="0" rIns="0" bIns="0" rtlCol="0" anchor="ctr"/>
-          <a:lstStyle/>
-          <a:p>
-            <a:pPr algn="ctr" indent="0" marL="0">
-              <a:buNone/>
-            </a:pPr>
-            <a:r>
-              <a:rPr lang="en-US" sz="1300" b="1" dirty="0">
-                <a:solidFill>
-                  <a:srgbClr val="FFFFFF"/>
-                </a:solidFill>
-              </a:rPr>
-              <a:t>2</a:t>
-            </a:r>
-            <a:endParaRPr lang="en-US" sz="1300" dirty="0"/>
-          </a:p>
-        </p:txBody>
-      </p:sp>
-      <p:sp>
-        <p:nvSpPr>
-          <p:cNvPr id="11" name="Text 9"/>
-          <p:cNvSpPr txBox="1"/>
-          <p:nvPr/>
-        </p:nvSpPr>
-        <p:spPr>
-          <a:xfrm>
-            <a:off x="2724912" y="5550408"/>
-            <a:ext cx="1463040" cy="274320"/>
-          </a:xfrm>
-          <a:prstGeom prst="rect">
-            <a:avLst/>
-          </a:prstGeom>
-          <a:noFill/>
-          <a:ln/>
-        </p:spPr>
-        <p:txBody>
-          <a:bodyPr wrap="square" lIns="0" tIns="0" rIns="0" bIns="0" rtlCol="0" anchor="ctr"/>
-          <a:lstStyle/>
-          <a:p>
-            <a:pPr algn="ctr" indent="0" marL="0">
-              <a:buNone/>
-            </a:pPr>
-            <a:r>
-              <a:rPr lang="en-US" sz="1100" dirty="0">
-                <a:solidFill>
-                  <a:srgbClr val="A9B4BE"/>
-                </a:solidFill>
-              </a:rPr>
-              <a:t>Core Data Services</a:t>
-            </a:r>
-            <a:endParaRPr lang="en-US" sz="1100" dirty="0"/>
-          </a:p>
-        </p:txBody>
-      </p:sp>
-      <p:sp>
-        <p:nvSpPr>
-          <p:cNvPr id="12" name="Etapa 3"/>
-          <p:cNvSpPr/>
-          <p:nvPr/>
-        </p:nvSpPr>
-        <p:spPr>
-          <a:xfrm>
-            <a:off x="5797296" y="5074920"/>
-            <a:ext cx="384048" cy="384048"/>
-          </a:xfrm>
-          <a:prstGeom prst="ellipse">
-            <a:avLst/>
-          </a:prstGeom>
-          <a:solidFill>
-            <a:srgbClr val="1F4F86"/>
-          </a:solidFill>
-          <a:ln w="19050">
-            <a:solidFill>
-              <a:srgbClr val="1F4F86"/>
-            </a:solidFill>
-          </a:ln>
-        </p:spPr>
-        <p:txBody>
-          <a:bodyPr wrap="square" lIns="0" tIns="0" rIns="0" bIns="0" rtlCol="0" anchor="ctr"/>
-          <a:lstStyle/>
-          <a:p>
-            <a:pPr algn="ctr" indent="0" marL="0">
-              <a:buNone/>
-            </a:pPr>
-            <a:r>
-              <a:rPr lang="en-US" sz="1300" b="1" dirty="0">
-                <a:solidFill>
-                  <a:srgbClr val="FFFFFF"/>
-                </a:solidFill>
-              </a:rPr>
-              <a:t>3</a:t>
-            </a:r>
-            <a:endParaRPr lang="en-US" sz="1300" dirty="0"/>
-          </a:p>
-        </p:txBody>
-      </p:sp>
-      <p:sp>
-        <p:nvSpPr>
-          <p:cNvPr id="13" name="Text 11"/>
-          <p:cNvSpPr txBox="1"/>
-          <p:nvPr/>
-        </p:nvSpPr>
-        <p:spPr>
-          <a:xfrm>
-            <a:off x="5257800" y="5550408"/>
-            <a:ext cx="1463040" cy="274320"/>
-          </a:xfrm>
-          <a:prstGeom prst="rect">
-            <a:avLst/>
-          </a:prstGeom>
-          <a:noFill/>
-          <a:ln/>
-        </p:spPr>
-        <p:txBody>
-          <a:bodyPr wrap="square" lIns="0" tIns="0" rIns="0" bIns="0" rtlCol="0" anchor="ctr"/>
-          <a:lstStyle/>
-          <a:p>
-            <a:pPr algn="ctr" indent="0" marL="0">
-              <a:buNone/>
-            </a:pPr>
-            <a:r>
-              <a:rPr lang="en-US" sz="1100" dirty="0">
-                <a:solidFill>
-                  <a:srgbClr val="A9B4BE"/>
-                </a:solidFill>
-              </a:rPr>
-              <a:t>Comportamento RAP</a:t>
-            </a:r>
-            <a:endParaRPr lang="en-US" sz="1100" dirty="0"/>
-          </a:p>
-        </p:txBody>
-      </p:sp>
-      <p:sp>
-        <p:nvSpPr>
-          <p:cNvPr id="14" name="Etapa 4"/>
-          <p:cNvSpPr/>
-          <p:nvPr/>
-        </p:nvSpPr>
-        <p:spPr>
-          <a:xfrm>
-            <a:off x="8330184" y="5074920"/>
-            <a:ext cx="384048" cy="384048"/>
-          </a:xfrm>
-          <a:prstGeom prst="ellipse">
-            <a:avLst/>
-          </a:prstGeom>
-          <a:solidFill>
-            <a:srgbClr val="0070F2"/>
-          </a:solidFill>
-          <a:ln w="19050">
-            <a:solidFill>
-              <a:srgbClr val="0070F2"/>
-            </a:solidFill>
-          </a:ln>
-        </p:spPr>
-        <p:txBody>
-          <a:bodyPr wrap="square" lIns="0" tIns="0" rIns="0" bIns="0" rtlCol="0" anchor="ctr"/>
-          <a:lstStyle/>
-          <a:p>
-            <a:pPr algn="ctr" indent="0" marL="0">
-              <a:buNone/>
-            </a:pPr>
-            <a:r>
-              <a:rPr lang="en-US" sz="1300" b="1" dirty="0">
-                <a:solidFill>
-                  <a:srgbClr val="FFFFFF"/>
-                </a:solidFill>
-              </a:rPr>
-              <a:t>4</a:t>
-            </a:r>
-            <a:endParaRPr lang="en-US" sz="1300" dirty="0"/>
-          </a:p>
-        </p:txBody>
-      </p:sp>
-      <p:sp>
-        <p:nvSpPr>
-          <p:cNvPr id="15" name="Text 13"/>
-          <p:cNvSpPr txBox="1"/>
-          <p:nvPr/>
-        </p:nvSpPr>
-        <p:spPr>
-          <a:xfrm>
-            <a:off x="7790688" y="5550408"/>
-            <a:ext cx="1463040" cy="274320"/>
-          </a:xfrm>
-          <a:prstGeom prst="rect">
-            <a:avLst/>
-          </a:prstGeom>
-          <a:noFill/>
-          <a:ln/>
-        </p:spPr>
-        <p:txBody>
-          <a:bodyPr wrap="square" lIns="0" tIns="0" rIns="0" bIns="0" rtlCol="0" anchor="ctr"/>
-          <a:lstStyle/>
-          <a:p>
-            <a:pPr algn="ctr" indent="0" marL="0">
-              <a:buNone/>
-            </a:pPr>
-            <a:r>
-              <a:rPr lang="en-US" sz="1100" b="1" dirty="0">
-                <a:solidFill>
-                  <a:srgbClr val="FFFFFF"/>
-                </a:solidFill>
-              </a:rPr>
-              <a:t>Serviços OData</a:t>
-            </a:r>
-            <a:endParaRPr lang="en-US" sz="1100" dirty="0"/>
-          </a:p>
-        </p:txBody>
-      </p:sp>
-      <p:sp>
-        <p:nvSpPr>
-          <p:cNvPr id="16" name="Etapa 5"/>
-          <p:cNvSpPr/>
-          <p:nvPr/>
-        </p:nvSpPr>
-        <p:spPr>
-          <a:xfrm>
-            <a:off x="10863072" y="5074920"/>
-            <a:ext cx="384048" cy="384048"/>
-          </a:xfrm>
-          <a:prstGeom prst="ellipse">
-            <a:avLst/>
-          </a:prstGeom>
-          <a:solidFill>
-            <a:srgbClr val="1D232A"/>
-          </a:solidFill>
-          <a:ln w="19050">
-            <a:solidFill>
-              <a:srgbClr val="3A4654"/>
-            </a:solidFill>
-          </a:ln>
-        </p:spPr>
-        <p:txBody>
-          <a:bodyPr wrap="square" lIns="0" tIns="0" rIns="0" bIns="0" rtlCol="0" anchor="ctr"/>
-          <a:lstStyle/>
-          <a:p>
-            <a:pPr algn="ctr" indent="0" marL="0">
-              <a:buNone/>
-            </a:pPr>
-            <a:r>
-              <a:rPr lang="en-US" sz="1300" b="1" dirty="0">
-                <a:solidFill>
-                  <a:srgbClr val="A9B4BE"/>
-                </a:solidFill>
-              </a:rPr>
-              <a:t>5</a:t>
-            </a:r>
-            <a:endParaRPr lang="en-US" sz="1300" dirty="0"/>
-          </a:p>
-        </p:txBody>
-      </p:sp>
-      <p:sp>
-        <p:nvSpPr>
-          <p:cNvPr id="17" name="Text 15"/>
-          <p:cNvSpPr txBox="1"/>
-          <p:nvPr/>
-        </p:nvSpPr>
-        <p:spPr>
-          <a:xfrm>
-            <a:off x="10323576" y="5550408"/>
-            <a:ext cx="1463040" cy="274320"/>
-          </a:xfrm>
-          <a:prstGeom prst="rect">
-            <a:avLst/>
-          </a:prstGeom>
-          <a:noFill/>
-          <a:ln/>
-        </p:spPr>
-        <p:txBody>
-          <a:bodyPr wrap="square" lIns="0" tIns="0" rIns="0" bIns="0" rtlCol="0" anchor="ctr"/>
-          <a:lstStyle/>
-          <a:p>
-            <a:pPr algn="ctr" indent="0" marL="0">
-              <a:buNone/>
-            </a:pPr>
-            <a:r>
-              <a:rPr lang="en-US" sz="1100" dirty="0">
-                <a:solidFill>
-                  <a:srgbClr val="A9B4BE"/>
-                </a:solidFill>
-              </a:rPr>
-              <a:t>Apps Fiori</a:t>
-            </a:r>
-            <a:endParaRPr lang="en-US" sz="1100" dirty="0"/>
+            <a:r>
+              <a:rPr lang="pt-BR" sz="1200" dirty="0">
+                <a:solidFill>
+                  <a:srgbClr val="89D1FF"/>
+                </a:solidFill>
+              </a:rPr>
+              <a:t>Pedidos de Compras · SAP RAP no BTP e On-Premise · Design System SAP Horizon</a:t>
+            </a:r>
           </a:p>
         </p:txBody>
       </p:sp>
@@ -8955,7 +8743,7 @@
             <a:r>
               <a:rPr lang="en-US" sz="1400" b="1" spc="200" kern="0" dirty="0">
                 <a:solidFill>
-                  <a:schemeClr val="accent1"/>
+                  <a:srgbClr val="89D1FF"/>
                 </a:solidFill>
               </a:rPr>
               <a:t>ETAPA 4 · CLIENTES</a:t>
@@ -9042,50 +8830,6 @@
       </p:sp>
       <p:sp>
         <p:nvSpPr>
-          <p:cNvPr id="5" name="Decoração 1"/>
-          <p:cNvSpPr/>
-          <p:nvPr/>
-        </p:nvSpPr>
-        <p:spPr>
-          <a:xfrm>
-            <a:off x="8503920" y="-1463040"/>
-            <a:ext cx="5120640" cy="5120640"/>
-          </a:xfrm>
-          <a:prstGeom prst="ellipse">
-            <a:avLst/>
-          </a:prstGeom>
-          <a:solidFill>
-            <a:srgbClr val="0070F2">
-              <a:alpha val="28000"/>
-            </a:srgbClr>
-          </a:solidFill>
-          <a:ln/>
-        </p:spPr>
-      </p:sp>
-      <p:sp>
-        <p:nvSpPr>
-          <p:cNvPr id="6" name="Decoração 2"/>
-          <p:cNvSpPr/>
-          <p:nvPr/>
-        </p:nvSpPr>
-        <p:spPr>
-          <a:xfrm>
-            <a:off x="9784080" y="1828800"/>
-            <a:ext cx="2834640" cy="2834640"/>
-          </a:xfrm>
-          <a:prstGeom prst="ellipse">
-            <a:avLst/>
-          </a:prstGeom>
-          <a:solidFill>
-            <a:srgbClr val="4DB1FF">
-              <a:alpha val="18000"/>
-            </a:srgbClr>
-          </a:solidFill>
-          <a:ln/>
-        </p:spPr>
-      </p:sp>
-      <p:sp>
-        <p:nvSpPr>
           <p:cNvPr id="7" name="Ícone customer"/>
           <p:cNvSpPr/>
           <p:nvPr/>
@@ -9101,7 +8845,7 @@
             </a:avLst>
           </a:prstGeom>
           <a:solidFill>
-            <a:srgbClr val="1D232A"/>
+            <a:srgbClr val="1B3A7A"/>
           </a:solidFill>
           <a:ln/>
         </p:spPr>
@@ -9147,7 +8891,7 @@
             </a:avLst>
           </a:prstGeom>
           <a:solidFill>
-            <a:srgbClr val="1D232A"/>
+            <a:srgbClr val="1B3A7A"/>
           </a:solidFill>
           <a:ln/>
         </p:spPr>
@@ -9179,7 +8923,7 @@
             <a:r>
               <a:rPr lang="en-US" sz="1100" b="1" spc="150" kern="0" dirty="0">
                 <a:solidFill>
-                  <a:srgbClr val="4DB1FF"/>
+                  <a:srgbClr val="89D1FF"/>
                 </a:solidFill>
               </a:rPr>
               <a:t>OBJETOS NESTA SEÇÃO</a:t>
@@ -9229,7 +8973,7 @@
             <a:r>
               <a:rPr lang="en-US" sz="1100" dirty="0">
                 <a:solidFill>
-                  <a:srgbClr val="A9B4BE"/>
+                  <a:srgbClr val="D1EFFF"/>
                 </a:solidFill>
               </a:rPr>
               <a:t>  service definition</a:t>
@@ -9279,7 +9023,7 @@
             <a:r>
               <a:rPr lang="en-US" sz="1100" dirty="0">
                 <a:solidFill>
-                  <a:srgbClr val="A9B4BE"/>
+                  <a:srgbClr val="D1EFFF"/>
                 </a:solidFill>
               </a:rPr>
               <a:t>  service binding</a:t>
@@ -9329,7 +9073,7 @@
             <a:r>
               <a:rPr lang="en-US" sz="1100" dirty="0">
                 <a:solidFill>
-                  <a:srgbClr val="A9B4BE"/>
+                  <a:srgbClr val="D1EFFF"/>
                 </a:solidFill>
               </a:rPr>
               <a:t>  projeção</a:t>
@@ -9379,7 +9123,7 @@
             <a:r>
               <a:rPr lang="en-US" sz="1100" dirty="0">
                 <a:solidFill>
-                  <a:srgbClr val="A9B4BE"/>
+                  <a:srgbClr val="D1EFFF"/>
                 </a:solidFill>
               </a:rPr>
               <a:t>  IAM App</a:t>
@@ -11999,7 +11743,7 @@
             <a:r>
               <a:rPr lang="en-US" sz="1400" b="1" spc="200" kern="0" dirty="0">
                 <a:solidFill>
-                  <a:schemeClr val="accent1"/>
+                  <a:srgbClr val="89D1FF"/>
                 </a:solidFill>
               </a:rPr>
               <a:t>ETAPA 4 · ESTOQUE</a:t>
@@ -12086,50 +11830,6 @@
       </p:sp>
       <p:sp>
         <p:nvSpPr>
-          <p:cNvPr id="5" name="Decoração 1"/>
-          <p:cNvSpPr/>
-          <p:nvPr/>
-        </p:nvSpPr>
-        <p:spPr>
-          <a:xfrm>
-            <a:off x="8503920" y="-1463040"/>
-            <a:ext cx="5120640" cy="5120640"/>
-          </a:xfrm>
-          <a:prstGeom prst="ellipse">
-            <a:avLst/>
-          </a:prstGeom>
-          <a:solidFill>
-            <a:srgbClr val="0070F2">
-              <a:alpha val="28000"/>
-            </a:srgbClr>
-          </a:solidFill>
-          <a:ln/>
-        </p:spPr>
-      </p:sp>
-      <p:sp>
-        <p:nvSpPr>
-          <p:cNvPr id="6" name="Decoração 2"/>
-          <p:cNvSpPr/>
-          <p:nvPr/>
-        </p:nvSpPr>
-        <p:spPr>
-          <a:xfrm>
-            <a:off x="9784080" y="1828800"/>
-            <a:ext cx="2834640" cy="2834640"/>
-          </a:xfrm>
-          <a:prstGeom prst="ellipse">
-            <a:avLst/>
-          </a:prstGeom>
-          <a:solidFill>
-            <a:srgbClr val="4DB1FF">
-              <a:alpha val="18000"/>
-            </a:srgbClr>
-          </a:solidFill>
-          <a:ln/>
-        </p:spPr>
-      </p:sp>
-      <p:sp>
-        <p:nvSpPr>
           <p:cNvPr id="7" name="Ícone product"/>
           <p:cNvSpPr/>
           <p:nvPr/>
@@ -12145,7 +11845,7 @@
             </a:avLst>
           </a:prstGeom>
           <a:solidFill>
-            <a:srgbClr val="1D232A"/>
+            <a:srgbClr val="1B3A7A"/>
           </a:solidFill>
           <a:ln/>
         </p:spPr>
@@ -12191,7 +11891,7 @@
             </a:avLst>
           </a:prstGeom>
           <a:solidFill>
-            <a:srgbClr val="1D232A"/>
+            <a:srgbClr val="1B3A7A"/>
           </a:solidFill>
           <a:ln/>
         </p:spPr>
@@ -12223,7 +11923,7 @@
             <a:r>
               <a:rPr lang="en-US" sz="1100" b="1" spc="150" kern="0" dirty="0">
                 <a:solidFill>
-                  <a:srgbClr val="4DB1FF"/>
+                  <a:srgbClr val="89D1FF"/>
                 </a:solidFill>
               </a:rPr>
               <a:t>OBJETOS NESTA SEÇÃO</a:t>
@@ -12273,7 +11973,7 @@
             <a:r>
               <a:rPr lang="en-US" sz="1100" dirty="0">
                 <a:solidFill>
-                  <a:srgbClr val="A9B4BE"/>
+                  <a:srgbClr val="D1EFFF"/>
                 </a:solidFill>
               </a:rPr>
               <a:t>  service definition</a:t>
@@ -12323,7 +12023,7 @@
             <a:r>
               <a:rPr lang="en-US" sz="1100" dirty="0">
                 <a:solidFill>
-                  <a:srgbClr val="A9B4BE"/>
+                  <a:srgbClr val="D1EFFF"/>
                 </a:solidFill>
               </a:rPr>
               <a:t>  service binding</a:t>
@@ -12373,7 +12073,7 @@
             <a:r>
               <a:rPr lang="en-US" sz="1100" dirty="0">
                 <a:solidFill>
-                  <a:srgbClr val="A9B4BE"/>
+                  <a:srgbClr val="D1EFFF"/>
                 </a:solidFill>
               </a:rPr>
               <a:t>  projeção</a:t>
@@ -12423,7 +12123,7 @@
             <a:r>
               <a:rPr lang="en-US" sz="1100" dirty="0">
                 <a:solidFill>
-                  <a:srgbClr val="A9B4BE"/>
+                  <a:srgbClr val="D1EFFF"/>
                 </a:solidFill>
               </a:rPr>
               <a:t>  IAM App</a:t>
@@ -15043,7 +14743,7 @@
             <a:r>
               <a:rPr lang="en-US" sz="1400" b="1" spc="200" kern="0" dirty="0">
                 <a:solidFill>
-                  <a:schemeClr val="accent1"/>
+                  <a:srgbClr val="89D1FF"/>
                 </a:solidFill>
               </a:rPr>
               <a:t>ETAPA 4 · PEDIDOS</a:t>
@@ -15130,50 +14830,6 @@
       </p:sp>
       <p:sp>
         <p:nvSpPr>
-          <p:cNvPr id="5" name="Decoração 1"/>
-          <p:cNvSpPr/>
-          <p:nvPr/>
-        </p:nvSpPr>
-        <p:spPr>
-          <a:xfrm>
-            <a:off x="8503920" y="-1463040"/>
-            <a:ext cx="5120640" cy="5120640"/>
-          </a:xfrm>
-          <a:prstGeom prst="ellipse">
-            <a:avLst/>
-          </a:prstGeom>
-          <a:solidFill>
-            <a:srgbClr val="0070F2">
-              <a:alpha val="28000"/>
-            </a:srgbClr>
-          </a:solidFill>
-          <a:ln/>
-        </p:spPr>
-      </p:sp>
-      <p:sp>
-        <p:nvSpPr>
-          <p:cNvPr id="6" name="Decoração 2"/>
-          <p:cNvSpPr/>
-          <p:nvPr/>
-        </p:nvSpPr>
-        <p:spPr>
-          <a:xfrm>
-            <a:off x="9784080" y="1828800"/>
-            <a:ext cx="2834640" cy="2834640"/>
-          </a:xfrm>
-          <a:prstGeom prst="ellipse">
-            <a:avLst/>
-          </a:prstGeom>
-          <a:solidFill>
-            <a:srgbClr val="4DB1FF">
-              <a:alpha val="18000"/>
-            </a:srgbClr>
-          </a:solidFill>
-          <a:ln/>
-        </p:spPr>
-      </p:sp>
-      <p:sp>
-        <p:nvSpPr>
           <p:cNvPr id="7" name="Ícone sales-order"/>
           <p:cNvSpPr/>
           <p:nvPr/>
@@ -15189,7 +14845,7 @@
             </a:avLst>
           </a:prstGeom>
           <a:solidFill>
-            <a:srgbClr val="1D232A"/>
+            <a:srgbClr val="1B3A7A"/>
           </a:solidFill>
           <a:ln/>
         </p:spPr>
@@ -15235,7 +14891,7 @@
             </a:avLst>
           </a:prstGeom>
           <a:solidFill>
-            <a:srgbClr val="1D232A"/>
+            <a:srgbClr val="1B3A7A"/>
           </a:solidFill>
           <a:ln/>
         </p:spPr>
@@ -15267,7 +14923,7 @@
             <a:r>
               <a:rPr lang="en-US" sz="1100" b="1" spc="150" kern="0" dirty="0">
                 <a:solidFill>
-                  <a:srgbClr val="4DB1FF"/>
+                  <a:srgbClr val="89D1FF"/>
                 </a:solidFill>
               </a:rPr>
               <a:t>OBJETOS NESTA SEÇÃO</a:t>
@@ -15317,7 +14973,7 @@
             <a:r>
               <a:rPr lang="en-US" sz="1100" dirty="0">
                 <a:solidFill>
-                  <a:srgbClr val="A9B4BE"/>
+                  <a:srgbClr val="D1EFFF"/>
                 </a:solidFill>
               </a:rPr>
               <a:t>  service definition</a:t>
@@ -15367,7 +15023,7 @@
             <a:r>
               <a:rPr lang="en-US" sz="1100" dirty="0">
                 <a:solidFill>
-                  <a:srgbClr val="A9B4BE"/>
+                  <a:srgbClr val="D1EFFF"/>
                 </a:solidFill>
               </a:rPr>
               <a:t>  service binding</a:t>
@@ -15417,7 +15073,7 @@
             <a:r>
               <a:rPr lang="en-US" sz="1100" dirty="0">
                 <a:solidFill>
-                  <a:srgbClr val="A9B4BE"/>
+                  <a:srgbClr val="D1EFFF"/>
                 </a:solidFill>
               </a:rPr>
               <a:t>  projeção</a:t>
@@ -15467,7 +15123,7 @@
             <a:r>
               <a:rPr lang="en-US" sz="1100" dirty="0">
                 <a:solidFill>
-                  <a:srgbClr val="A9B4BE"/>
+                  <a:srgbClr val="D1EFFF"/>
                 </a:solidFill>
               </a:rPr>
               <a:t>  IAM App</a:t>
@@ -19342,7 +18998,7 @@
             <a:r>
               <a:rPr lang="en-US" sz="1400" b="1" spc="200" kern="0" dirty="0">
                 <a:solidFill>
-                  <a:schemeClr val="accent1"/>
+                  <a:srgbClr val="89D1FF"/>
                 </a:solidFill>
               </a:rPr>
               <a:t>ETAPA 4 · REEMBOLSOS</a:t>
@@ -19429,50 +19085,6 @@
       </p:sp>
       <p:sp>
         <p:nvSpPr>
-          <p:cNvPr id="5" name="Decoração 1"/>
-          <p:cNvSpPr/>
-          <p:nvPr/>
-        </p:nvSpPr>
-        <p:spPr>
-          <a:xfrm>
-            <a:off x="8503920" y="-1463040"/>
-            <a:ext cx="5120640" cy="5120640"/>
-          </a:xfrm>
-          <a:prstGeom prst="ellipse">
-            <a:avLst/>
-          </a:prstGeom>
-          <a:solidFill>
-            <a:srgbClr val="0070F2">
-              <a:alpha val="28000"/>
-            </a:srgbClr>
-          </a:solidFill>
-          <a:ln/>
-        </p:spPr>
-      </p:sp>
-      <p:sp>
-        <p:nvSpPr>
-          <p:cNvPr id="6" name="Decoração 2"/>
-          <p:cNvSpPr/>
-          <p:nvPr/>
-        </p:nvSpPr>
-        <p:spPr>
-          <a:xfrm>
-            <a:off x="9784080" y="1828800"/>
-            <a:ext cx="2834640" cy="2834640"/>
-          </a:xfrm>
-          <a:prstGeom prst="ellipse">
-            <a:avLst/>
-          </a:prstGeom>
-          <a:solidFill>
-            <a:srgbClr val="4DB1FF">
-              <a:alpha val="18000"/>
-            </a:srgbClr>
-          </a:solidFill>
-          <a:ln/>
-        </p:spPr>
-      </p:sp>
-      <p:sp>
-        <p:nvSpPr>
           <p:cNvPr id="7" name="Ícone money-bills"/>
           <p:cNvSpPr/>
           <p:nvPr/>
@@ -19488,7 +19100,7 @@
             </a:avLst>
           </a:prstGeom>
           <a:solidFill>
-            <a:srgbClr val="1D232A"/>
+            <a:srgbClr val="1B3A7A"/>
           </a:solidFill>
           <a:ln/>
         </p:spPr>
@@ -19534,7 +19146,7 @@
             </a:avLst>
           </a:prstGeom>
           <a:solidFill>
-            <a:srgbClr val="1D232A"/>
+            <a:srgbClr val="1B3A7A"/>
           </a:solidFill>
           <a:ln/>
         </p:spPr>
@@ -19566,7 +19178,7 @@
             <a:r>
               <a:rPr lang="en-US" sz="1100" b="1" spc="150" kern="0" dirty="0">
                 <a:solidFill>
-                  <a:srgbClr val="4DB1FF"/>
+                  <a:srgbClr val="89D1FF"/>
                 </a:solidFill>
               </a:rPr>
               <a:t>OBJETOS NESTA SEÇÃO</a:t>
@@ -19616,7 +19228,7 @@
             <a:r>
               <a:rPr lang="en-US" sz="1100" dirty="0">
                 <a:solidFill>
-                  <a:srgbClr val="A9B4BE"/>
+                  <a:srgbClr val="D1EFFF"/>
                 </a:solidFill>
               </a:rPr>
               <a:t>  service definition</a:t>
@@ -19666,7 +19278,7 @@
             <a:r>
               <a:rPr lang="en-US" sz="1100" dirty="0">
                 <a:solidFill>
-                  <a:srgbClr val="A9B4BE"/>
+                  <a:srgbClr val="D1EFFF"/>
                 </a:solidFill>
               </a:rPr>
               <a:t>  service binding</a:t>
@@ -19716,7 +19328,7 @@
             <a:r>
               <a:rPr lang="en-US" sz="1100" dirty="0">
                 <a:solidFill>
-                  <a:srgbClr val="A9B4BE"/>
+                  <a:srgbClr val="D1EFFF"/>
                 </a:solidFill>
               </a:rPr>
               <a:t>  projeção</a:t>
@@ -19766,7 +19378,7 @@
             <a:r>
               <a:rPr lang="en-US" sz="1100" dirty="0">
                 <a:solidFill>
-                  <a:srgbClr val="A9B4BE"/>
+                  <a:srgbClr val="D1EFFF"/>
                 </a:solidFill>
               </a:rPr>
               <a:t>  IAM App</a:t>
@@ -19816,7 +19428,7 @@
             <a:r>
               <a:rPr lang="en-US" sz="1100" dirty="0">
                 <a:solidFill>
-                  <a:srgbClr val="A9B4BE"/>
+                  <a:srgbClr val="D1EFFF"/>
                 </a:solidFill>
               </a:rPr>
               <a:t>  SCO2 · SUSH · SIA6</a:t>
@@ -26020,8 +25632,8 @@
         </p:nvSpPr>
         <p:spPr>
           <a:xfrm>
-            <a:off x="731520" y="1325880"/>
-            <a:ext cx="6949440" cy="365760"/>
+            <a:off x="731520" y="548640"/>
+            <a:ext cx="7315200" cy="365760"/>
           </a:xfrm>
           <a:prstGeom prst="rect">
             <a:avLst/>
@@ -26039,10 +25651,10 @@
             <a:r>
               <a:rPr lang="en-US" sz="1400" b="1" spc="200" kern="0" dirty="0">
                 <a:solidFill>
-                  <a:schemeClr val="accent1"/>
-                </a:solidFill>
-              </a:rPr>
-              <a:t>ETAPA 4 CONCLUÍDA</a:t>
+                  <a:srgbClr val="89D1FF"/>
+                </a:solidFill>
+              </a:rPr>
+              <a:t>RESUMO DA ETAPA</a:t>
             </a:r>
             <a:endParaRPr lang="en-US" sz="1400" dirty="0"/>
           </a:p>
@@ -26058,8 +25670,90 @@
         </p:nvSpPr>
         <p:spPr>
           <a:xfrm>
-            <a:off x="731520" y="1737360"/>
-            <a:ext cx="6949440" cy="1600200"/>
+            <a:off x="731520" y="960120"/>
+            <a:ext cx="10698480" cy="822960"/>
+          </a:xfrm>
+          <a:prstGeom prst="rect">
+            <a:avLst/>
+          </a:prstGeom>
+          <a:noFill/>
+          <a:ln/>
+        </p:spPr>
+        <p:txBody>
+          <a:bodyPr wrap="square" lIns="0" tIns="0" rIns="0" bIns="0" rtlCol="0" anchor="ctr"/>
+          <a:lstStyle/>
+          <a:p>
+            <a:pPr algn="l" indent="0" marL="0">
+              <a:buNone/>
+            </a:pPr>
+            <a:r>
+              <a:rPr lang="en-US" sz="3600" b="1" dirty="0">
+                <a:solidFill>
+                  <a:schemeClr val="bg1"/>
+                </a:solidFill>
+              </a:rPr>
+              <a:t>O que construímos na etapa 4</a:t>
+            </a:r>
+            <a:endParaRPr lang="en-US" sz="3600" dirty="0"/>
+          </a:p>
+        </p:txBody>
+      </p:sp>
+      <p:sp>
+        <p:nvSpPr>
+          <p:cNvPr id="4" name="Marcador"/>
+          <p:cNvSpPr/>
+          <p:nvPr/>
+        </p:nvSpPr>
+        <p:spPr>
+          <a:xfrm>
+            <a:off x="731520" y="2103120"/>
+            <a:ext cx="457200" cy="457200"/>
+          </a:xfrm>
+          <a:prstGeom prst="roundRect">
+            <a:avLst>
+              <a:gd name="adj" fmla="val 22000"/>
+            </a:avLst>
+          </a:prstGeom>
+          <a:solidFill>
+            <a:schemeClr val="accent1"/>
+          </a:solidFill>
+          <a:ln/>
+        </p:spPr>
+      </p:sp>
+      <p:pic>
+        <p:nvPicPr>
+          <p:cNvPr id="5" name="Image 0" descr="concluído">    </p:cNvPr>
+          <p:cNvPicPr>
+            <a:picLocks noChangeAspect="1"/>
+          </p:cNvPicPr>
+          <p:nvPr/>
+        </p:nvPicPr>
+        <p:blipFill>
+          <a:blip r:embed="rId100"/>
+          <a:stretch>
+            <a:fillRect/>
+          </a:stretch>
+        </p:blipFill>
+        <p:spPr>
+          <a:xfrm>
+            <a:off x="832104" y="2203704"/>
+            <a:ext cx="256032" cy="256032"/>
+          </a:xfrm>
+          <a:prstGeom prst="rect">
+            <a:avLst/>
+          </a:prstGeom>
+        </p:spPr>
+      </p:pic>
+      <p:sp>
+        <p:nvSpPr>
+          <p:cNvPr id="6" name="Text 3"/>
+          <p:cNvSpPr txBox="1"/>
+          <p:nvPr/>
+        </p:nvSpPr>
+        <p:spPr>
+          <a:xfrm>
+            <a:off x="1371600" y="2029968"/>
+            <a:ext cx="4526280" cy="777240"/>
           </a:xfrm>
           <a:prstGeom prst="rect">
             <a:avLst/>
@@ -26071,33 +25765,77 @@
           <a:bodyPr wrap="square" lIns="0" tIns="0" rIns="0" bIns="0" rtlCol="0" anchor="t"/>
           <a:lstStyle/>
           <a:p>
-            <a:pPr algn="l" indent="0" marL="0">
-              <a:buNone/>
-            </a:pPr>
-            <a:r>
-              <a:rPr lang="en-US" sz="4400" b="1" dirty="0">
-                <a:solidFill>
-                  <a:schemeClr val="bg1"/>
-                </a:solidFill>
-              </a:rPr>
-              <a:t>Serviços publicados</a:t>
-            </a:r>
-            <a:endParaRPr lang="en-US" sz="4400" dirty="0"/>
+            <a:pPr indent="0" marL="0">
+              <a:buNone/>
+            </a:pPr>
+            <a:r>
+              <a:rPr lang="en-US" sz="1500" dirty="0">
+                <a:solidFill>
+                  <a:srgbClr val="FFFFFF"/>
+                </a:solidFill>
+              </a:rPr>
+              <a:t>Cinco service definitions e bindings OData V4 – UI</a:t>
+            </a:r>
+            <a:endParaRPr lang="en-US" sz="1500" dirty="0"/>
           </a:p>
         </p:txBody>
       </p:sp>
       <p:sp>
         <p:nvSpPr>
-          <p:cNvPr id="4" name="Text 0"/>
+          <p:cNvPr id="7" name="Marcador"/>
           <p:cNvSpPr/>
-          <p:nvPr>
-            <p:ph idx="102" type="body" hasCustomPrompt="1"/>
-          </p:nvPr>
-        </p:nvSpPr>
-        <p:spPr>
-          <a:xfrm>
-            <a:off x="731520" y="3383280"/>
-            <a:ext cx="6949440" cy="914400"/>
+          <p:nvPr/>
+        </p:nvSpPr>
+        <p:spPr>
+          <a:xfrm>
+            <a:off x="6263640" y="2103120"/>
+            <a:ext cx="457200" cy="457200"/>
+          </a:xfrm>
+          <a:prstGeom prst="roundRect">
+            <a:avLst>
+              <a:gd name="adj" fmla="val 22000"/>
+            </a:avLst>
+          </a:prstGeom>
+          <a:solidFill>
+            <a:schemeClr val="accent1"/>
+          </a:solidFill>
+          <a:ln/>
+        </p:spPr>
+      </p:sp>
+      <p:pic>
+        <p:nvPicPr>
+          <p:cNvPr id="8" name="Image 1" descr="concluído">    </p:cNvPr>
+          <p:cNvPicPr>
+            <a:picLocks noChangeAspect="1"/>
+          </p:cNvPicPr>
+          <p:nvPr/>
+        </p:nvPicPr>
+        <p:blipFill>
+          <a:blip r:embed="rId101"/>
+          <a:stretch>
+            <a:fillRect/>
+          </a:stretch>
+        </p:blipFill>
+        <p:spPr>
+          <a:xfrm>
+            <a:off x="6364224" y="2203704"/>
+            <a:ext cx="256032" cy="256032"/>
+          </a:xfrm>
+          <a:prstGeom prst="rect">
+            <a:avLst/>
+          </a:prstGeom>
+        </p:spPr>
+      </p:pic>
+      <p:sp>
+        <p:nvSpPr>
+          <p:cNvPr id="9" name="Text 5"/>
+          <p:cNvSpPr txBox="1"/>
+          <p:nvPr/>
+        </p:nvSpPr>
+        <p:spPr>
+          <a:xfrm>
+            <a:off x="6903720" y="2029968"/>
+            <a:ext cx="4526280" cy="777240"/>
           </a:xfrm>
           <a:prstGeom prst="rect">
             <a:avLst/>
@@ -26109,569 +25847,470 @@
           <a:bodyPr wrap="square" lIns="0" tIns="0" rIns="0" bIns="0" rtlCol="0" anchor="t"/>
           <a:lstStyle/>
           <a:p>
-            <a:pPr algn="l" indent="0" marL="0">
-              <a:buNone/>
-            </a:pPr>
-            <a:r>
-              <a:rPr lang="en-US" sz="1800" dirty="0">
-                <a:solidFill>
-                  <a:schemeClr val="bg2"/>
-                </a:solidFill>
-              </a:rPr>
-              <a:t>Cinco serviços OData V4, BDEFs de projeção, objetos de autorização, IAM Apps (BTP) ou roles PFCG (On-Premise) e dados de demonstração.</a:t>
-            </a:r>
-            <a:endParaRPr lang="en-US" sz="1800" dirty="0"/>
+            <a:pPr indent="0" marL="0">
+              <a:buNone/>
+            </a:pPr>
+            <a:r>
+              <a:rPr lang="en-US" sz="1500" dirty="0">
+                <a:solidFill>
+                  <a:srgbClr val="FFFFFF"/>
+                </a:solidFill>
+              </a:rPr>
+              <a:t>BDEFs de projeção expondo só o que cada app usa</a:t>
+            </a:r>
+            <a:endParaRPr lang="en-US" sz="1500" dirty="0"/>
           </a:p>
         </p:txBody>
       </p:sp>
       <p:sp>
         <p:nvSpPr>
-          <p:cNvPr id="5" name="Decoração 1"/>
+          <p:cNvPr id="10" name="Marcador"/>
           <p:cNvSpPr/>
           <p:nvPr/>
         </p:nvSpPr>
         <p:spPr>
           <a:xfrm>
-            <a:off x="8503920" y="-1463040"/>
-            <a:ext cx="5120640" cy="5120640"/>
-          </a:xfrm>
-          <a:prstGeom prst="ellipse">
+            <a:off x="731520" y="3063240"/>
+            <a:ext cx="457200" cy="457200"/>
+          </a:xfrm>
+          <a:prstGeom prst="roundRect">
+            <a:avLst>
+              <a:gd name="adj" fmla="val 22000"/>
+            </a:avLst>
+          </a:prstGeom>
+          <a:solidFill>
+            <a:schemeClr val="accent1"/>
+          </a:solidFill>
+          <a:ln/>
+        </p:spPr>
+      </p:sp>
+      <p:pic>
+        <p:nvPicPr>
+          <p:cNvPr id="11" name="Image 2" descr="concluído">    </p:cNvPr>
+          <p:cNvPicPr>
+            <a:picLocks noChangeAspect="1"/>
+          </p:cNvPicPr>
+          <p:nvPr/>
+        </p:nvPicPr>
+        <p:blipFill>
+          <a:blip r:embed="rId102"/>
+          <a:stretch>
+            <a:fillRect/>
+          </a:stretch>
+        </p:blipFill>
+        <p:spPr>
+          <a:xfrm>
+            <a:off x="832104" y="3163824"/>
+            <a:ext cx="256032" cy="256032"/>
+          </a:xfrm>
+          <a:prstGeom prst="rect">
             <a:avLst/>
           </a:prstGeom>
+        </p:spPr>
+      </p:pic>
+      <p:sp>
+        <p:nvSpPr>
+          <p:cNvPr id="12" name="Text 7"/>
+          <p:cNvSpPr txBox="1"/>
+          <p:nvPr/>
+        </p:nvSpPr>
+        <p:spPr>
+          <a:xfrm>
+            <a:off x="1371600" y="2990088"/>
+            <a:ext cx="4526280" cy="777240"/>
+          </a:xfrm>
+          <a:prstGeom prst="rect">
+            <a:avLst/>
+          </a:prstGeom>
+          <a:noFill/>
+          <a:ln/>
+        </p:spPr>
+        <p:txBody>
+          <a:bodyPr wrap="square" lIns="0" tIns="0" rIns="0" bIns="0" rtlCol="0" anchor="t"/>
+          <a:lstStyle/>
+          <a:p>
+            <a:pPr indent="0" marL="0">
+              <a:buNone/>
+            </a:pPr>
+            <a:r>
+              <a:rPr lang="en-US" sz="1500" dirty="0">
+                <a:solidFill>
+                  <a:srgbClr val="FFFFFF"/>
+                </a:solidFill>
+              </a:rPr>
+              <a:t>Objetos ZPC_ADMIN e ZPC_PEDIDO, com a atividade 16</a:t>
+            </a:r>
+            <a:endParaRPr lang="en-US" sz="1500" dirty="0"/>
+          </a:p>
+        </p:txBody>
+      </p:sp>
+      <p:sp>
+        <p:nvSpPr>
+          <p:cNvPr id="13" name="Marcador"/>
+          <p:cNvSpPr/>
+          <p:nvPr/>
+        </p:nvSpPr>
+        <p:spPr>
+          <a:xfrm>
+            <a:off x="6263640" y="3063240"/>
+            <a:ext cx="457200" cy="457200"/>
+          </a:xfrm>
+          <a:prstGeom prst="roundRect">
+            <a:avLst>
+              <a:gd name="adj" fmla="val 22000"/>
+            </a:avLst>
+          </a:prstGeom>
           <a:solidFill>
-            <a:srgbClr val="0070F2">
-              <a:alpha val="28000"/>
-            </a:srgbClr>
+            <a:schemeClr val="accent1"/>
           </a:solidFill>
           <a:ln/>
         </p:spPr>
       </p:sp>
-      <p:sp>
-        <p:nvSpPr>
-          <p:cNvPr id="6" name="Decoração 2"/>
+      <p:pic>
+        <p:nvPicPr>
+          <p:cNvPr id="14" name="Image 3" descr="concluído">    </p:cNvPr>
+          <p:cNvPicPr>
+            <a:picLocks noChangeAspect="1"/>
+          </p:cNvPicPr>
+          <p:nvPr/>
+        </p:nvPicPr>
+        <p:blipFill>
+          <a:blip r:embed="rId103"/>
+          <a:stretch>
+            <a:fillRect/>
+          </a:stretch>
+        </p:blipFill>
+        <p:spPr>
+          <a:xfrm>
+            <a:off x="6364224" y="3163824"/>
+            <a:ext cx="256032" cy="256032"/>
+          </a:xfrm>
+          <a:prstGeom prst="rect">
+            <a:avLst/>
+          </a:prstGeom>
+        </p:spPr>
+      </p:pic>
+      <p:sp>
+        <p:nvSpPr>
+          <p:cNvPr id="15" name="Text 9"/>
+          <p:cNvSpPr txBox="1"/>
+          <p:nvPr/>
+        </p:nvSpPr>
+        <p:spPr>
+          <a:xfrm>
+            <a:off x="6903720" y="2990088"/>
+            <a:ext cx="4526280" cy="777240"/>
+          </a:xfrm>
+          <a:prstGeom prst="rect">
+            <a:avLst/>
+          </a:prstGeom>
+          <a:noFill/>
+          <a:ln/>
+        </p:spPr>
+        <p:txBody>
+          <a:bodyPr wrap="square" lIns="0" tIns="0" rIns="0" bIns="0" rtlCol="0" anchor="t"/>
+          <a:lstStyle/>
+          <a:p>
+            <a:pPr indent="0" marL="0">
+              <a:buNone/>
+            </a:pPr>
+            <a:r>
+              <a:rPr lang="en-US" sz="1500" dirty="0">
+                <a:solidFill>
+                  <a:srgbClr val="FFFFFF"/>
+                </a:solidFill>
+              </a:rPr>
+              <a:t>SAP BTP: IAM Apps, Business Catalogs e Business Roles</a:t>
+            </a:r>
+            <a:endParaRPr lang="en-US" sz="1500" dirty="0"/>
+          </a:p>
+        </p:txBody>
+      </p:sp>
+      <p:sp>
+        <p:nvSpPr>
+          <p:cNvPr id="16" name="Marcador"/>
           <p:cNvSpPr/>
           <p:nvPr/>
         </p:nvSpPr>
         <p:spPr>
           <a:xfrm>
-            <a:off x="9784080" y="1828800"/>
-            <a:ext cx="2834640" cy="2834640"/>
-          </a:xfrm>
-          <a:prstGeom prst="ellipse">
+            <a:off x="731520" y="4023360"/>
+            <a:ext cx="457200" cy="457200"/>
+          </a:xfrm>
+          <a:prstGeom prst="roundRect">
+            <a:avLst>
+              <a:gd name="adj" fmla="val 22000"/>
+            </a:avLst>
+          </a:prstGeom>
+          <a:solidFill>
+            <a:schemeClr val="accent1"/>
+          </a:solidFill>
+          <a:ln/>
+        </p:spPr>
+      </p:sp>
+      <p:pic>
+        <p:nvPicPr>
+          <p:cNvPr id="17" name="Image 4" descr="concluído">    </p:cNvPr>
+          <p:cNvPicPr>
+            <a:picLocks noChangeAspect="1"/>
+          </p:cNvPicPr>
+          <p:nvPr/>
+        </p:nvPicPr>
+        <p:blipFill>
+          <a:blip r:embed="rId104"/>
+          <a:stretch>
+            <a:fillRect/>
+          </a:stretch>
+        </p:blipFill>
+        <p:spPr>
+          <a:xfrm>
+            <a:off x="832104" y="4123944"/>
+            <a:ext cx="256032" cy="256032"/>
+          </a:xfrm>
+          <a:prstGeom prst="rect">
             <a:avLst/>
           </a:prstGeom>
+        </p:spPr>
+      </p:pic>
+      <p:sp>
+        <p:nvSpPr>
+          <p:cNvPr id="18" name="Text 11"/>
+          <p:cNvSpPr txBox="1"/>
+          <p:nvPr/>
+        </p:nvSpPr>
+        <p:spPr>
+          <a:xfrm>
+            <a:off x="1371600" y="3950208"/>
+            <a:ext cx="4526280" cy="777240"/>
+          </a:xfrm>
+          <a:prstGeom prst="rect">
+            <a:avLst/>
+          </a:prstGeom>
+          <a:noFill/>
+          <a:ln/>
+        </p:spPr>
+        <p:txBody>
+          <a:bodyPr wrap="square" lIns="0" tIns="0" rIns="0" bIns="0" rtlCol="0" anchor="t"/>
+          <a:lstStyle/>
+          <a:p>
+            <a:pPr indent="0" marL="0">
+              <a:buNone/>
+            </a:pPr>
+            <a:r>
+              <a:rPr lang="en-US" sz="1500" dirty="0">
+                <a:solidFill>
+                  <a:srgbClr val="FFFFFF"/>
+                </a:solidFill>
+              </a:rPr>
+              <a:t>On-Premise: SU21, SU24, roles PFCG e S_START no SAP GUI</a:t>
+            </a:r>
+            <a:endParaRPr lang="en-US" sz="1500" dirty="0"/>
+          </a:p>
+        </p:txBody>
+      </p:sp>
+      <p:sp>
+        <p:nvSpPr>
+          <p:cNvPr id="19" name="Marcador"/>
+          <p:cNvSpPr/>
+          <p:nvPr/>
+        </p:nvSpPr>
+        <p:spPr>
+          <a:xfrm>
+            <a:off x="6263640" y="4023360"/>
+            <a:ext cx="457200" cy="457200"/>
+          </a:xfrm>
+          <a:prstGeom prst="roundRect">
+            <a:avLst>
+              <a:gd name="adj" fmla="val 22000"/>
+            </a:avLst>
+          </a:prstGeom>
           <a:solidFill>
-            <a:srgbClr val="4DB1FF">
-              <a:alpha val="18000"/>
-            </a:srgbClr>
+            <a:schemeClr val="accent1"/>
           </a:solidFill>
           <a:ln/>
         </p:spPr>
       </p:sp>
-      <p:sp>
-        <p:nvSpPr>
-          <p:cNvPr id="7" name="Shape 5"/>
+      <p:pic>
+        <p:nvPicPr>
+          <p:cNvPr id="20" name="Image 5" descr="concluído">    </p:cNvPr>
+          <p:cNvPicPr>
+            <a:picLocks noChangeAspect="1"/>
+          </p:cNvPicPr>
+          <p:nvPr/>
+        </p:nvPicPr>
+        <p:blipFill>
+          <a:blip r:embed="rId105"/>
+          <a:stretch>
+            <a:fillRect/>
+          </a:stretch>
+        </p:blipFill>
+        <p:spPr>
+          <a:xfrm>
+            <a:off x="6364224" y="4123944"/>
+            <a:ext cx="256032" cy="256032"/>
+          </a:xfrm>
+          <a:prstGeom prst="rect">
+            <a:avLst/>
+          </a:prstGeom>
+        </p:spPr>
+      </p:pic>
+      <p:sp>
+        <p:nvSpPr>
+          <p:cNvPr id="21" name="Text 13"/>
+          <p:cNvSpPr txBox="1"/>
+          <p:nvPr/>
+        </p:nvSpPr>
+        <p:spPr>
+          <a:xfrm>
+            <a:off x="6903720" y="3950208"/>
+            <a:ext cx="4526280" cy="777240"/>
+          </a:xfrm>
+          <a:prstGeom prst="rect">
+            <a:avLst/>
+          </a:prstGeom>
+          <a:noFill/>
+          <a:ln/>
+        </p:spPr>
+        <p:txBody>
+          <a:bodyPr wrap="square" lIns="0" tIns="0" rIns="0" bIns="0" rtlCol="0" anchor="t"/>
+          <a:lstStyle/>
+          <a:p>
+            <a:pPr indent="0" marL="0">
+              <a:buNone/>
+            </a:pPr>
+            <a:r>
+              <a:rPr lang="en-US" sz="1500" dirty="0">
+                <a:solidFill>
+                  <a:srgbClr val="FFFFFF"/>
+                </a:solidFill>
+              </a:rPr>
+              <a:t>Dados de demonstração e cenários testados no preview</a:t>
+            </a:r>
+            <a:endParaRPr lang="en-US" sz="1500" dirty="0"/>
+          </a:p>
+        </p:txBody>
+      </p:sp>
+      <p:sp>
+        <p:nvSpPr>
+          <p:cNvPr id="22" name="Próxima etapa"/>
           <p:cNvSpPr/>
           <p:nvPr/>
         </p:nvSpPr>
         <p:spPr>
           <a:xfrm>
-            <a:off x="923544" y="5266944"/>
-            <a:ext cx="10131552" cy="0"/>
-          </a:xfrm>
-          <a:prstGeom prst="line">
+            <a:off x="731520" y="5394960"/>
+            <a:ext cx="10725912" cy="777240"/>
+          </a:xfrm>
+          <a:prstGeom prst="roundRect">
+            <a:avLst>
+              <a:gd name="adj" fmla="val 16471"/>
+            </a:avLst>
+          </a:prstGeom>
+          <a:solidFill>
+            <a:srgbClr val="1B3A7A"/>
+          </a:solidFill>
+          <a:ln/>
+        </p:spPr>
+      </p:sp>
+      <p:pic>
+        <p:nvPicPr>
+          <p:cNvPr id="23" name="Image 6" descr="próxima etapa">    </p:cNvPr>
+          <p:cNvPicPr>
+            <a:picLocks noChangeAspect="1"/>
+          </p:cNvPicPr>
+          <p:nvPr/>
+        </p:nvPicPr>
+        <p:blipFill>
+          <a:blip r:embed="rId106"/>
+          <a:stretch>
+            <a:fillRect/>
+          </a:stretch>
+        </p:blipFill>
+        <p:spPr>
+          <a:xfrm>
+            <a:off x="960120" y="5559552"/>
+            <a:ext cx="438912" cy="438912"/>
+          </a:xfrm>
+          <a:prstGeom prst="rect">
             <a:avLst/>
           </a:prstGeom>
+        </p:spPr>
+      </p:pic>
+      <p:sp>
+        <p:nvSpPr>
+          <p:cNvPr id="24" name="Text 15"/>
+          <p:cNvSpPr txBox="1"/>
+          <p:nvPr/>
+        </p:nvSpPr>
+        <p:spPr>
+          <a:xfrm>
+            <a:off x="1600200" y="5440680"/>
+            <a:ext cx="9692640" cy="685800"/>
+          </a:xfrm>
+          <a:prstGeom prst="rect">
+            <a:avLst/>
+          </a:prstGeom>
           <a:noFill/>
-          <a:ln w="25400">
-            <a:solidFill>
-              <a:srgbClr val="3A4654"/>
-            </a:solidFill>
-            <a:prstDash val="solid"/>
-          </a:ln>
-        </p:spPr>
-      </p:sp>
-      <p:sp>
-        <p:nvSpPr>
-          <p:cNvPr id="8" name="Etapa 1"/>
-          <p:cNvSpPr/>
-          <p:nvPr/>
-        </p:nvSpPr>
-        <p:spPr>
-          <a:xfrm>
-            <a:off x="731520" y="5074920"/>
-            <a:ext cx="384048" cy="384048"/>
-          </a:xfrm>
-          <a:prstGeom prst="ellipse">
-            <a:avLst/>
-          </a:prstGeom>
-          <a:solidFill>
-            <a:srgbClr val="1F4F86"/>
-          </a:solidFill>
-          <a:ln w="19050">
-            <a:solidFill>
-              <a:srgbClr val="1F4F86"/>
-            </a:solidFill>
-          </a:ln>
+          <a:ln/>
         </p:spPr>
         <p:txBody>
           <a:bodyPr wrap="square" lIns="0" tIns="0" rIns="0" bIns="0" rtlCol="0" anchor="ctr"/>
           <a:lstStyle/>
           <a:p>
-            <a:pPr algn="ctr" indent="0" marL="0">
-              <a:buNone/>
-            </a:pPr>
-            <a:r>
-              <a:rPr lang="en-US" sz="1300" b="1" dirty="0">
+            <a:pPr indent="0" marL="0">
+              <a:buNone/>
+            </a:pPr>
+            <a:r>
+              <a:rPr lang="en-US" sz="1600" b="1" dirty="0">
+                <a:solidFill>
+                  <a:srgbClr val="89D1FF"/>
+                </a:solidFill>
+              </a:rPr>
+              <a:t>Próxima etapa ·  </a:t>
+            </a:r>
+            <a:pPr indent="0" marL="0">
+              <a:buNone/>
+            </a:pPr>
+            <a:r>
+              <a:rPr lang="en-US" sz="1600" dirty="0">
                 <a:solidFill>
                   <a:srgbClr val="FFFFFF"/>
                 </a:solidFill>
               </a:rPr>
-              <a:t>1</a:t>
-            </a:r>
-            <a:endParaRPr lang="en-US" sz="1300" dirty="0"/>
+              <a:t>Apps Fiori: gerar, navegar e implantar.</a:t>
+            </a:r>
+            <a:endParaRPr lang="en-US" sz="1600" dirty="0"/>
           </a:p>
         </p:txBody>
       </p:sp>
       <p:sp>
         <p:nvSpPr>
-          <p:cNvPr id="9" name="Text 7"/>
+          <p:cNvPr id="40" name="Rodapé"/>
           <p:cNvSpPr txBox="1"/>
           <p:nvPr/>
         </p:nvSpPr>
         <p:spPr>
           <a:xfrm>
-            <a:off x="192024" y="5550408"/>
-            <a:ext cx="1463040" cy="274320"/>
+            <a:off x="731520" y="6419088"/>
+            <a:ext cx="9144000" cy="320040"/>
           </a:xfrm>
           <a:prstGeom prst="rect">
             <a:avLst/>
           </a:prstGeom>
           <a:noFill/>
-          <a:ln/>
-        </p:spPr>
-        <p:txBody>
-          <a:bodyPr wrap="square" lIns="0" tIns="0" rIns="0" bIns="0" rtlCol="0" anchor="ctr"/>
-          <a:lstStyle/>
-          <a:p>
-            <a:pPr algn="ctr" indent="0" marL="0">
-              <a:buNone/>
-            </a:pPr>
-            <a:r>
-              <a:rPr lang="en-US" sz="1100" dirty="0">
-                <a:solidFill>
-                  <a:srgbClr val="A9B4BE"/>
-                </a:solidFill>
-              </a:rPr>
-              <a:t>Modelagem de dados</a:t>
-            </a:r>
-            <a:endParaRPr lang="en-US" sz="1100" dirty="0"/>
-          </a:p>
-        </p:txBody>
-      </p:sp>
-      <p:sp>
-        <p:nvSpPr>
-          <p:cNvPr id="10" name="Etapa 2"/>
-          <p:cNvSpPr/>
-          <p:nvPr/>
-        </p:nvSpPr>
-        <p:spPr>
-          <a:xfrm>
-            <a:off x="3264408" y="5074920"/>
-            <a:ext cx="384048" cy="384048"/>
-          </a:xfrm>
-          <a:prstGeom prst="ellipse">
-            <a:avLst/>
-          </a:prstGeom>
-          <a:solidFill>
-            <a:srgbClr val="1F4F86"/>
-          </a:solidFill>
-          <a:ln w="19050">
-            <a:solidFill>
-              <a:srgbClr val="1F4F86"/>
-            </a:solidFill>
-          </a:ln>
-        </p:spPr>
-        <p:txBody>
-          <a:bodyPr wrap="square" lIns="0" tIns="0" rIns="0" bIns="0" rtlCol="0" anchor="ctr"/>
-          <a:lstStyle/>
-          <a:p>
-            <a:pPr algn="ctr" indent="0" marL="0">
-              <a:buNone/>
-            </a:pPr>
-            <a:r>
-              <a:rPr lang="en-US" sz="1300" b="1" dirty="0">
-                <a:solidFill>
-                  <a:srgbClr val="FFFFFF"/>
-                </a:solidFill>
-              </a:rPr>
-              <a:t>2</a:t>
-            </a:r>
-            <a:endParaRPr lang="en-US" sz="1300" dirty="0"/>
-          </a:p>
-        </p:txBody>
-      </p:sp>
-      <p:sp>
-        <p:nvSpPr>
-          <p:cNvPr id="11" name="Text 9"/>
-          <p:cNvSpPr txBox="1"/>
-          <p:nvPr/>
-        </p:nvSpPr>
-        <p:spPr>
-          <a:xfrm>
-            <a:off x="2724912" y="5550408"/>
-            <a:ext cx="1463040" cy="274320"/>
-          </a:xfrm>
-          <a:prstGeom prst="rect">
-            <a:avLst/>
-          </a:prstGeom>
-          <a:noFill/>
-          <a:ln/>
-        </p:spPr>
-        <p:txBody>
-          <a:bodyPr wrap="square" lIns="0" tIns="0" rIns="0" bIns="0" rtlCol="0" anchor="ctr"/>
-          <a:lstStyle/>
-          <a:p>
-            <a:pPr algn="ctr" indent="0" marL="0">
-              <a:buNone/>
-            </a:pPr>
-            <a:r>
-              <a:rPr lang="en-US" sz="1100" dirty="0">
-                <a:solidFill>
-                  <a:srgbClr val="A9B4BE"/>
-                </a:solidFill>
-              </a:rPr>
-              <a:t>Core Data Services</a:t>
-            </a:r>
-            <a:endParaRPr lang="en-US" sz="1100" dirty="0"/>
-          </a:p>
-        </p:txBody>
-      </p:sp>
-      <p:sp>
-        <p:nvSpPr>
-          <p:cNvPr id="12" name="Etapa 3"/>
-          <p:cNvSpPr/>
-          <p:nvPr/>
-        </p:nvSpPr>
-        <p:spPr>
-          <a:xfrm>
-            <a:off x="5797296" y="5074920"/>
-            <a:ext cx="384048" cy="384048"/>
-          </a:xfrm>
-          <a:prstGeom prst="ellipse">
-            <a:avLst/>
-          </a:prstGeom>
-          <a:solidFill>
-            <a:srgbClr val="1F4F86"/>
-          </a:solidFill>
-          <a:ln w="19050">
-            <a:solidFill>
-              <a:srgbClr val="1F4F86"/>
-            </a:solidFill>
-          </a:ln>
-        </p:spPr>
-        <p:txBody>
-          <a:bodyPr wrap="square" lIns="0" tIns="0" rIns="0" bIns="0" rtlCol="0" anchor="ctr"/>
-          <a:lstStyle/>
-          <a:p>
-            <a:pPr algn="ctr" indent="0" marL="0">
-              <a:buNone/>
-            </a:pPr>
-            <a:r>
-              <a:rPr lang="en-US" sz="1300" b="1" dirty="0">
-                <a:solidFill>
-                  <a:srgbClr val="FFFFFF"/>
-                </a:solidFill>
-              </a:rPr>
-              <a:t>3</a:t>
-            </a:r>
-            <a:endParaRPr lang="en-US" sz="1300" dirty="0"/>
-          </a:p>
-        </p:txBody>
-      </p:sp>
-      <p:sp>
-        <p:nvSpPr>
-          <p:cNvPr id="13" name="Text 11"/>
-          <p:cNvSpPr txBox="1"/>
-          <p:nvPr/>
-        </p:nvSpPr>
-        <p:spPr>
-          <a:xfrm>
-            <a:off x="5257800" y="5550408"/>
-            <a:ext cx="1463040" cy="274320"/>
-          </a:xfrm>
-          <a:prstGeom prst="rect">
-            <a:avLst/>
-          </a:prstGeom>
-          <a:noFill/>
-          <a:ln/>
-        </p:spPr>
-        <p:txBody>
-          <a:bodyPr wrap="square" lIns="0" tIns="0" rIns="0" bIns="0" rtlCol="0" anchor="ctr"/>
-          <a:lstStyle/>
-          <a:p>
-            <a:pPr algn="ctr" indent="0" marL="0">
-              <a:buNone/>
-            </a:pPr>
-            <a:r>
-              <a:rPr lang="en-US" sz="1100" dirty="0">
-                <a:solidFill>
-                  <a:srgbClr val="A9B4BE"/>
-                </a:solidFill>
-              </a:rPr>
-              <a:t>Comportamento RAP</a:t>
-            </a:r>
-            <a:endParaRPr lang="en-US" sz="1100" dirty="0"/>
-          </a:p>
-        </p:txBody>
-      </p:sp>
-      <p:sp>
-        <p:nvSpPr>
-          <p:cNvPr id="14" name="Etapa 4"/>
-          <p:cNvSpPr/>
-          <p:nvPr/>
-        </p:nvSpPr>
-        <p:spPr>
-          <a:xfrm>
-            <a:off x="8330184" y="5074920"/>
-            <a:ext cx="384048" cy="384048"/>
-          </a:xfrm>
-          <a:prstGeom prst="ellipse">
-            <a:avLst/>
-          </a:prstGeom>
-          <a:solidFill>
-            <a:srgbClr val="1F4F86"/>
-          </a:solidFill>
-          <a:ln w="19050">
-            <a:solidFill>
-              <a:srgbClr val="1F4F86"/>
-            </a:solidFill>
-          </a:ln>
-        </p:spPr>
-        <p:txBody>
-          <a:bodyPr wrap="square" lIns="0" tIns="0" rIns="0" bIns="0" rtlCol="0" anchor="ctr"/>
-          <a:lstStyle/>
-          <a:p>
-            <a:pPr algn="ctr" indent="0" marL="0">
-              <a:buNone/>
-            </a:pPr>
-            <a:r>
-              <a:rPr lang="en-US" sz="1300" b="1" dirty="0">
-                <a:solidFill>
-                  <a:srgbClr val="FFFFFF"/>
-                </a:solidFill>
-              </a:rPr>
-              <a:t>4</a:t>
-            </a:r>
-            <a:endParaRPr lang="en-US" sz="1300" dirty="0"/>
-          </a:p>
-        </p:txBody>
-      </p:sp>
-      <p:sp>
-        <p:nvSpPr>
-          <p:cNvPr id="15" name="Text 13"/>
-          <p:cNvSpPr txBox="1"/>
-          <p:nvPr/>
-        </p:nvSpPr>
-        <p:spPr>
-          <a:xfrm>
-            <a:off x="7790688" y="5550408"/>
-            <a:ext cx="1463040" cy="274320"/>
-          </a:xfrm>
-          <a:prstGeom prst="rect">
-            <a:avLst/>
-          </a:prstGeom>
-          <a:noFill/>
-          <a:ln/>
-        </p:spPr>
-        <p:txBody>
-          <a:bodyPr wrap="square" lIns="0" tIns="0" rIns="0" bIns="0" rtlCol="0" anchor="ctr"/>
-          <a:lstStyle/>
-          <a:p>
-            <a:pPr algn="ctr" indent="0" marL="0">
-              <a:buNone/>
-            </a:pPr>
-            <a:r>
-              <a:rPr lang="en-US" sz="1100" dirty="0">
-                <a:solidFill>
-                  <a:srgbClr val="A9B4BE"/>
-                </a:solidFill>
-              </a:rPr>
-              <a:t>Serviços OData</a:t>
-            </a:r>
-            <a:endParaRPr lang="en-US" sz="1100" dirty="0"/>
-          </a:p>
-        </p:txBody>
-      </p:sp>
-      <p:sp>
-        <p:nvSpPr>
-          <p:cNvPr id="16" name="Etapa 5"/>
-          <p:cNvSpPr/>
-          <p:nvPr/>
-        </p:nvSpPr>
-        <p:spPr>
-          <a:xfrm>
-            <a:off x="10863072" y="5074920"/>
-            <a:ext cx="384048" cy="384048"/>
-          </a:xfrm>
-          <a:prstGeom prst="ellipse">
-            <a:avLst/>
-          </a:prstGeom>
-          <a:solidFill>
-            <a:srgbClr val="1D232A"/>
-          </a:solidFill>
-          <a:ln w="19050">
-            <a:solidFill>
-              <a:srgbClr val="3A4654"/>
-            </a:solidFill>
-          </a:ln>
-        </p:spPr>
-        <p:txBody>
-          <a:bodyPr wrap="square" lIns="0" tIns="0" rIns="0" bIns="0" rtlCol="0" anchor="ctr"/>
-          <a:lstStyle/>
-          <a:p>
-            <a:pPr algn="ctr" indent="0" marL="0">
-              <a:buNone/>
-            </a:pPr>
-            <a:r>
-              <a:rPr lang="en-US" sz="1300" b="1" dirty="0">
-                <a:solidFill>
-                  <a:srgbClr val="A9B4BE"/>
-                </a:solidFill>
-              </a:rPr>
-              <a:t>5</a:t>
-            </a:r>
-            <a:endParaRPr lang="en-US" sz="1300" dirty="0"/>
-          </a:p>
-        </p:txBody>
-      </p:sp>
-      <p:sp>
-        <p:nvSpPr>
-          <p:cNvPr id="17" name="Text 15"/>
-          <p:cNvSpPr txBox="1"/>
-          <p:nvPr/>
-        </p:nvSpPr>
-        <p:spPr>
-          <a:xfrm>
-            <a:off x="10323576" y="5550408"/>
-            <a:ext cx="1463040" cy="274320"/>
-          </a:xfrm>
-          <a:prstGeom prst="rect">
-            <a:avLst/>
-          </a:prstGeom>
-          <a:noFill/>
-          <a:ln/>
-        </p:spPr>
-        <p:txBody>
-          <a:bodyPr wrap="square" lIns="0" tIns="0" rIns="0" bIns="0" rtlCol="0" anchor="ctr"/>
-          <a:lstStyle/>
-          <a:p>
-            <a:pPr algn="ctr" indent="0" marL="0">
-              <a:buNone/>
-            </a:pPr>
-            <a:r>
-              <a:rPr lang="en-US" sz="1100" dirty="0">
-                <a:solidFill>
-                  <a:srgbClr val="A9B4BE"/>
-                </a:solidFill>
-              </a:rPr>
-              <a:t>Apps Fiori</a:t>
-            </a:r>
-            <a:endParaRPr lang="en-US" sz="1100" dirty="0"/>
-          </a:p>
-        </p:txBody>
-      </p:sp>
-      <p:sp>
-        <p:nvSpPr>
-          <p:cNvPr id="18" name="Próxima etapa"/>
-          <p:cNvSpPr/>
-          <p:nvPr/>
-        </p:nvSpPr>
-        <p:spPr>
-          <a:xfrm>
-            <a:off x="8183880" y="1783080"/>
-            <a:ext cx="3429000" cy="1600200"/>
-          </a:xfrm>
-          <a:prstGeom prst="roundRect">
-            <a:avLst>
-              <a:gd name="adj" fmla="val 6857"/>
-            </a:avLst>
-          </a:prstGeom>
-          <a:solidFill>
-            <a:srgbClr val="1D232A"/>
-          </a:solidFill>
-          <a:ln/>
-        </p:spPr>
-      </p:sp>
-      <p:sp>
-        <p:nvSpPr>
-          <p:cNvPr id="19" name="Text 17"/>
-          <p:cNvSpPr txBox="1"/>
-          <p:nvPr/>
-        </p:nvSpPr>
-        <p:spPr>
-          <a:xfrm>
-            <a:off x="8412480" y="1965960"/>
-            <a:ext cx="3017520" cy="274320"/>
-          </a:xfrm>
-          <a:prstGeom prst="rect">
-            <a:avLst/>
-          </a:prstGeom>
-          <a:noFill/>
-          <a:ln/>
-        </p:spPr>
-        <p:txBody>
-          <a:bodyPr wrap="square" lIns="0" tIns="0" rIns="0" bIns="0" rtlCol="0" anchor="ctr"/>
-          <a:lstStyle/>
-          <a:p>
-            <a:pPr indent="0" marL="0">
-              <a:buNone/>
-            </a:pPr>
-            <a:r>
-              <a:rPr lang="en-US" sz="1100" b="1" spc="150" kern="0" dirty="0">
-                <a:solidFill>
-                  <a:srgbClr val="4DB1FF"/>
-                </a:solidFill>
-              </a:rPr>
-              <a:t>PRÓXIMA ETAPA</a:t>
-            </a:r>
-            <a:endParaRPr lang="en-US" sz="1100" dirty="0"/>
-          </a:p>
-        </p:txBody>
-      </p:sp>
-      <p:sp>
-        <p:nvSpPr>
-          <p:cNvPr id="20" name="Text 18"/>
-          <p:cNvSpPr txBox="1"/>
-          <p:nvPr/>
-        </p:nvSpPr>
-        <p:spPr>
-          <a:xfrm>
-            <a:off x="8412480" y="2286000"/>
-            <a:ext cx="3017520" cy="960120"/>
-          </a:xfrm>
-          <a:prstGeom prst="rect">
-            <a:avLst/>
-          </a:prstGeom>
-          <a:noFill/>
-          <a:ln/>
         </p:spPr>
         <p:txBody>
           <a:bodyPr wrap="square" lIns="0" tIns="0" rIns="0" bIns="0" rtlCol="0" anchor="t"/>
           <a:lstStyle/>
           <a:p>
-            <a:pPr indent="0" marL="0">
-              <a:buNone/>
-            </a:pPr>
-            <a:r>
-              <a:rPr lang="en-US" sz="1800" b="1" dirty="0">
-                <a:solidFill>
-                  <a:srgbClr val="FFFFFF"/>
-                </a:solidFill>
-              </a:rPr>
-              <a:t>Apps Fiori: gerar, navegar e implantar</a:t>
-            </a:r>
-            <a:endParaRPr lang="en-US" sz="1800" dirty="0"/>
+            <a:r>
+              <a:rPr lang="pt-BR" sz="1000" dirty="0">
+                <a:solidFill>
+                  <a:srgbClr val="89D1FF"/>
+                </a:solidFill>
+              </a:rPr>
+              <a:t>Pedidos de Compras · SAP RAP no BTP e On-Premise  ·  Etapa 4 de 5 — Serviços OData</a:t>
+            </a:r>
           </a:p>
         </p:txBody>
       </p:sp>
@@ -26729,7 +26368,7 @@
             <a:r>
               <a:rPr lang="en-US" sz="1400" b="1" spc="200" kern="0" dirty="0">
                 <a:solidFill>
-                  <a:schemeClr val="accent1"/>
+                  <a:srgbClr val="89D1FF"/>
                 </a:solidFill>
               </a:rPr>
               <a:t>ETAPA 4 · ON-PREMISE</a:t>
@@ -26816,50 +26455,6 @@
       </p:sp>
       <p:sp>
         <p:nvSpPr>
-          <p:cNvPr id="5" name="Decoração 1"/>
-          <p:cNvSpPr/>
-          <p:nvPr/>
-        </p:nvSpPr>
-        <p:spPr>
-          <a:xfrm>
-            <a:off x="8503920" y="-1463040"/>
-            <a:ext cx="5120640" cy="5120640"/>
-          </a:xfrm>
-          <a:prstGeom prst="ellipse">
-            <a:avLst/>
-          </a:prstGeom>
-          <a:solidFill>
-            <a:srgbClr val="0070F2">
-              <a:alpha val="28000"/>
-            </a:srgbClr>
-          </a:solidFill>
-          <a:ln/>
-        </p:spPr>
-      </p:sp>
-      <p:sp>
-        <p:nvSpPr>
-          <p:cNvPr id="6" name="Decoração 2"/>
-          <p:cNvSpPr/>
-          <p:nvPr/>
-        </p:nvSpPr>
-        <p:spPr>
-          <a:xfrm>
-            <a:off x="9784080" y="1828800"/>
-            <a:ext cx="2834640" cy="2834640"/>
-          </a:xfrm>
-          <a:prstGeom prst="ellipse">
-            <a:avLst/>
-          </a:prstGeom>
-          <a:solidFill>
-            <a:srgbClr val="4DB1FF">
-              <a:alpha val="18000"/>
-            </a:srgbClr>
-          </a:solidFill>
-          <a:ln/>
-        </p:spPr>
-      </p:sp>
-      <p:sp>
-        <p:nvSpPr>
           <p:cNvPr id="7" name="Ícone settings"/>
           <p:cNvSpPr/>
           <p:nvPr/>
@@ -26875,7 +26470,7 @@
             </a:avLst>
           </a:prstGeom>
           <a:solidFill>
-            <a:srgbClr val="1D232A"/>
+            <a:srgbClr val="1B3A7A"/>
           </a:solidFill>
           <a:ln/>
         </p:spPr>
@@ -26921,7 +26516,7 @@
             </a:avLst>
           </a:prstGeom>
           <a:solidFill>
-            <a:srgbClr val="1D232A"/>
+            <a:srgbClr val="1B3A7A"/>
           </a:solidFill>
           <a:ln/>
         </p:spPr>
@@ -26953,7 +26548,7 @@
             <a:r>
               <a:rPr lang="en-US" sz="1100" b="1" spc="150" kern="0" dirty="0">
                 <a:solidFill>
-                  <a:srgbClr val="4DB1FF"/>
+                  <a:srgbClr val="89D1FF"/>
                 </a:solidFill>
               </a:rPr>
               <a:t>OBJETOS NESTA SEÇÃO</a:t>
@@ -27003,7 +26598,7 @@
             <a:r>
               <a:rPr lang="en-US" sz="1100" dirty="0">
                 <a:solidFill>
-                  <a:srgbClr val="A9B4BE"/>
+                  <a:srgbClr val="D1EFFF"/>
                 </a:solidFill>
               </a:rPr>
               <a:t>  classe de objetos</a:t>
@@ -27053,7 +26648,7 @@
             <a:r>
               <a:rPr lang="en-US" sz="1100" dirty="0">
                 <a:solidFill>
-                  <a:srgbClr val="A9B4BE"/>
+                  <a:srgbClr val="D1EFFF"/>
                 </a:solidFill>
               </a:rPr>
               <a:t>  objetos</a:t>
@@ -27103,7 +26698,7 @@
             <a:r>
               <a:rPr lang="en-US" sz="1100" dirty="0">
                 <a:solidFill>
-                  <a:srgbClr val="A9B4BE"/>
+                  <a:srgbClr val="D1EFFF"/>
                 </a:solidFill>
               </a:rPr>
               <a:t>  grupos de serviços</a:t>
@@ -27153,7 +26748,7 @@
             <a:r>
               <a:rPr lang="en-US" sz="1100" dirty="0">
                 <a:solidFill>
-                  <a:srgbClr val="A9B4BE"/>
+                  <a:srgbClr val="D1EFFF"/>
                 </a:solidFill>
               </a:rPr>
               <a:t>  valores propostos (G4BA)</a:t>
@@ -27203,7 +26798,7 @@
             <a:r>
               <a:rPr lang="en-US" sz="1100" dirty="0">
                 <a:solidFill>
-                  <a:srgbClr val="A9B4BE"/>
+                  <a:srgbClr val="D1EFFF"/>
                 </a:solidFill>
               </a:rPr>
               <a:t>  roles PFCG</a:t>
@@ -27253,7 +26848,7 @@
             <a:r>
               <a:rPr lang="en-US" sz="1100" dirty="0">
                 <a:solidFill>
-                  <a:srgbClr val="A9B4BE"/>
+                  <a:srgbClr val="D1EFFF"/>
                 </a:solidFill>
               </a:rPr>
               <a:t>  acesso ao serviço OData V4</a:t>
@@ -27303,7 +26898,7 @@
             <a:r>
               <a:rPr lang="en-US" sz="1100" dirty="0">
                 <a:solidFill>
-                  <a:srgbClr val="A9B4BE"/>
+                  <a:srgbClr val="D1EFFF"/>
                 </a:solidFill>
               </a:rPr>
               <a:t>  diagnóstico</a:t>
@@ -41571,7 +41166,7 @@
             <a:r>
               <a:rPr lang="en-US" sz="1400" b="1" spc="200" kern="0" dirty="0">
                 <a:solidFill>
-                  <a:schemeClr val="accent1"/>
+                  <a:srgbClr val="89D1FF"/>
                 </a:solidFill>
               </a:rPr>
               <a:t>ETAPA 4 · COMMON</a:t>
@@ -41658,50 +41253,6 @@
       </p:sp>
       <p:sp>
         <p:nvSpPr>
-          <p:cNvPr id="5" name="Decoração 1"/>
-          <p:cNvSpPr/>
-          <p:nvPr/>
-        </p:nvSpPr>
-        <p:spPr>
-          <a:xfrm>
-            <a:off x="8503920" y="-1463040"/>
-            <a:ext cx="5120640" cy="5120640"/>
-          </a:xfrm>
-          <a:prstGeom prst="ellipse">
-            <a:avLst/>
-          </a:prstGeom>
-          <a:solidFill>
-            <a:srgbClr val="0070F2">
-              <a:alpha val="28000"/>
-            </a:srgbClr>
-          </a:solidFill>
-          <a:ln/>
-        </p:spPr>
-      </p:sp>
-      <p:sp>
-        <p:nvSpPr>
-          <p:cNvPr id="6" name="Decoração 2"/>
-          <p:cNvSpPr/>
-          <p:nvPr/>
-        </p:nvSpPr>
-        <p:spPr>
-          <a:xfrm>
-            <a:off x="9784080" y="1828800"/>
-            <a:ext cx="2834640" cy="2834640"/>
-          </a:xfrm>
-          <a:prstGeom prst="ellipse">
-            <a:avLst/>
-          </a:prstGeom>
-          <a:solidFill>
-            <a:srgbClr val="4DB1FF">
-              <a:alpha val="18000"/>
-            </a:srgbClr>
-          </a:solidFill>
-          <a:ln/>
-        </p:spPr>
-      </p:sp>
-      <p:sp>
-        <p:nvSpPr>
           <p:cNvPr id="7" name="Ícone settings"/>
           <p:cNvSpPr/>
           <p:nvPr/>
@@ -41717,7 +41268,7 @@
             </a:avLst>
           </a:prstGeom>
           <a:solidFill>
-            <a:srgbClr val="1D232A"/>
+            <a:srgbClr val="1B3A7A"/>
           </a:solidFill>
           <a:ln/>
         </p:spPr>
@@ -41763,7 +41314,7 @@
             </a:avLst>
           </a:prstGeom>
           <a:solidFill>
-            <a:srgbClr val="1D232A"/>
+            <a:srgbClr val="1B3A7A"/>
           </a:solidFill>
           <a:ln/>
         </p:spPr>
@@ -41795,7 +41346,7 @@
             <a:r>
               <a:rPr lang="en-US" sz="1100" b="1" spc="150" kern="0" dirty="0">
                 <a:solidFill>
-                  <a:srgbClr val="4DB1FF"/>
+                  <a:srgbClr val="89D1FF"/>
                 </a:solidFill>
               </a:rPr>
               <a:t>OBJETOS NESTA SEÇÃO</a:t>
@@ -41845,7 +41396,7 @@
             <a:r>
               <a:rPr lang="en-US" sz="1100" dirty="0">
                 <a:solidFill>
-                  <a:srgbClr val="A9B4BE"/>
+                  <a:srgbClr val="D1EFFF"/>
                 </a:solidFill>
               </a:rPr>
               <a:t>  authorization object</a:t>
@@ -41895,7 +41446,7 @@
             <a:r>
               <a:rPr lang="en-US" sz="1100" dirty="0">
                 <a:solidFill>
-                  <a:srgbClr val="A9B4BE"/>
+                  <a:srgbClr val="D1EFFF"/>
                 </a:solidFill>
               </a:rPr>
               <a:t>  authorization object</a:t>
@@ -41945,7 +41496,7 @@
             <a:r>
               <a:rPr lang="en-US" sz="1100" dirty="0">
                 <a:solidFill>
-                  <a:srgbClr val="A9B4BE"/>
+                  <a:srgbClr val="D1EFFF"/>
                 </a:solidFill>
               </a:rPr>
               <a:t>  IAM Apps</a:t>
@@ -41995,7 +41546,7 @@
             <a:r>
               <a:rPr lang="en-US" sz="1100" dirty="0">
                 <a:solidFill>
-                  <a:srgbClr val="A9B4BE"/>
+                  <a:srgbClr val="D1EFFF"/>
                 </a:solidFill>
               </a:rPr>
               <a:t>  Business Catalogs</a:t>
@@ -42045,7 +41596,7 @@
             <a:r>
               <a:rPr lang="en-US" sz="1100" dirty="0">
                 <a:solidFill>
-                  <a:srgbClr val="A9B4BE"/>
+                  <a:srgbClr val="D1EFFF"/>
                 </a:solidFill>
               </a:rPr>
               <a:t>  Business Roles</a:t>
@@ -42095,7 +41646,7 @@
             <a:r>
               <a:rPr lang="en-US" sz="1100" dirty="0">
                 <a:solidFill>
-                  <a:srgbClr val="A9B4BE"/>
+                  <a:srgbClr val="D1EFFF"/>
                 </a:solidFill>
               </a:rPr>
               <a:t>  service definition</a:t>
@@ -42145,7 +41696,7 @@
             <a:r>
               <a:rPr lang="en-US" sz="1100" dirty="0">
                 <a:solidFill>
-                  <a:srgbClr val="A9B4BE"/>
+                  <a:srgbClr val="D1EFFF"/>
                 </a:solidFill>
               </a:rPr>
               <a:t>  service binding</a:t>
@@ -45479,7 +45030,7 @@
         <a:srgbClr val="FFFFFF"/>
       </a:lt1>
       <a:dk2>
-        <a:srgbClr val="12171C"/>
+        <a:srgbClr val="00144A"/>
       </a:dk2>
       <a:lt2>
         <a:srgbClr val="F5F6F7"/>

--- a/docs/apresentacoes/04-servicos-odata.pptx
+++ b/docs/apresentacoes/04-servicos-odata.pptx
@@ -34086,7 +34086,7 @@
                             <a:srgbClr val="1D2D3E"/>
                           </a:solidFill>
                         </a:rPr>
-                        <a:t>Pacote</a:t>
+                        <a:t>Pacote (prefixo opcional)</a:t>
                       </a:r>
                       <a:endParaRPr lang="en-US" sz="1150" dirty="0"/>
                     </a:p>
